--- a/docs/materials/FCC_Business_Case_Sep26.pptx
+++ b/docs/materials/FCC_Business_Case_Sep26.pptx
@@ -27,6 +27,12 @@
     <p:sldId id="275" r:id="rId25"/>
     <p:sldId id="276" r:id="rId26"/>
     <p:sldId id="277" r:id="rId27"/>
+    <p:sldId id="278" r:id="rId28"/>
+    <p:sldId id="279" r:id="rId29"/>
+    <p:sldId id="280" r:id="rId30"/>
+    <p:sldId id="281" r:id="rId31"/>
+    <p:sldId id="282" r:id="rId32"/>
+    <p:sldId id="283" r:id="rId33"/>
   </p:sldIdLst>
   <p:sldSz cx="12192000" cy="6858000"/>
   <p:notesSz cx="6858000" cy="9144000"/>
@@ -13139,7 +13145,7 @@
           <a:lstStyle/>
           <a:p>
             <a:r>
-              <a:t>Going forward</a:t>
+              <a:t>What it does for the team</a:t>
             </a:r>
           </a:p>
         </p:txBody>
@@ -13160,7 +13166,7 @@
           <a:lstStyle/>
           <a:p>
             <a:r>
-              <a:t>Ninety days to make it the team's way of working, then the platform for feedback, AM management and the business.</a:t>
+              <a:t>The screens that give an experienced account manager eleven hours back are the same ones a new account manager is onboarded on.</a:t>
             </a:r>
           </a:p>
         </p:txBody>
@@ -13199,7 +13205,7 @@
           <a:lstStyle/>
           <a:p>
             <a:r>
-              <a:t>Ninety days to the team’s operating system</a:t>
+              <a:t>Three mechanisms, not twenty modules</a:t>
             </a:r>
           </a:p>
         </p:txBody>
@@ -13211,7 +13217,7 @@
             <a:spLocks noGrp="1"/>
           </p:cNvSpPr>
           <p:nvPr>
-            <p:ph type="body" idx="11"/>
+            <p:ph type="body" idx="13"/>
           </p:nvPr>
         </p:nvSpPr>
         <p:spPr/>
@@ -13220,7 +13226,7 @@
           <a:lstStyle/>
           <a:p>
             <a:r>
-              <a:t>Onboarding is an invite and an hour; the plan measures before and after.</a:t>
+              <a:t>Every module does one of three things, and each one takes a judgement out of the account manager’s head.</a:t>
             </a:r>
           </a:p>
         </p:txBody>
@@ -13241,7 +13247,8 @@
           <a:lstStyle/>
           <a:p>
             <a:r>
-              <a:t>1</a:t>
+              <a:rPr sz="1880"/>
+              <a:t>The bar is on the screen</a:t>
             </a:r>
           </a:p>
         </p:txBody>
@@ -13262,8 +13269,8 @@
           <a:lstStyle/>
           <a:p>
             <a:r>
-              <a:rPr sz="1689"/>
-              <a:t>Everyone in, baseline measured</a:t>
+              <a:rPr sz="1410"/>
+              <a:t>What good looks like used to be learned from whoever had been here longest. The content-quality scorecard runs 46 rules across the eight free-text fields, each quoting that attribute’s own Google specification and marked as a requirement or a best practice. The bar is a number with its source attached, so the same feed reads the same whoever opens it.</a:t>
             </a:r>
           </a:p>
         </p:txBody>
@@ -13284,27 +13291,8 @@
           <a:lstStyle/>
           <a:p>
             <a:r>
-              <a:t>Days 0–30</a:t>
-            </a:r>
-          </a:p>
-          <a:p>
-            <a:r>
-              <a:t>Access invites, scoped per AM</a:t>
-            </a:r>
-          </a:p>
-          <a:p>
-            <a:r>
-              <a:t>One-hour walkthrough each</a:t>
-            </a:r>
-          </a:p>
-          <a:p>
-            <a:r>
-              <a:t>Gmail push and plans wired</a:t>
-            </a:r>
-          </a:p>
-          <a:p>
-            <a:r>
-              <a:t>One-week diary — the before figure</a:t>
+              <a:rPr sz="1880"/>
+              <a:t>The next move is offered</a:t>
             </a:r>
           </a:p>
         </p:txBody>
@@ -13325,7 +13313,8 @@
           <a:lstStyle/>
           <a:p>
             <a:r>
-              <a:t>2</a:t>
+              <a:rPr sz="1410"/>
+              <a:t>Knowing what to do next used to be experience. Every brand ranks up to five next moves from nine deterministic rules — critical guard alerts first, then overdue tasks, the weakest feed audit, keyword saturation — and each one opens the module already filtered to what it just counted. The Playbook adds the plays peer accounts run that this one carries nothing of.</a:t>
             </a:r>
           </a:p>
         </p:txBody>
@@ -13346,8 +13335,7 @@
           <a:lstStyle/>
           <a:p>
             <a:r>
-              <a:rPr sz="1580"/>
-              <a:t>The FCC is where the work happens</a:t>
+              <a:t>The format is provided</a:t>
             </a:r>
           </a:p>
         </p:txBody>
@@ -13368,27 +13356,8 @@
           <a:lstStyle/>
           <a:p>
             <a:r>
-              <a:t>Days 30–60</a:t>
-            </a:r>
-          </a:p>
-          <a:p>
-            <a:r>
-              <a:t>Every brief from Workflow</a:t>
-            </a:r>
-          </a:p>
-          <a:p>
-            <a:r>
-              <a:t>Every quote and deck generated</a:t>
-            </a:r>
-          </a:p>
-          <a:p>
-            <a:r>
-              <a:t>Monday call off Leadership</a:t>
-            </a:r>
-          </a:p>
-          <a:p>
-            <a:r>
-              <a:t>Go or skip with the balance in view</a:t>
+              <a:rPr sz="1500"/>
+              <a:t>A brief used to be as good as the person writing it. The Briefing Studio scores the six things ASPL would otherwise come back and ask — market, cohort, success measure, definition of done, assets, due date — and embeds the tracking tokens itself. Quotes export the finance workbook; decks build on the approved template.</a:t>
             </a:r>
           </a:p>
         </p:txBody>
@@ -13400,7 +13369,7 @@
             <a:spLocks noGrp="1"/>
           </p:cNvSpPr>
           <p:nvPr>
-            <p:ph type="body" idx="7"/>
+            <p:ph type="body" idx="14"/>
           </p:nvPr>
         </p:nvSpPr>
         <p:spPr/>
@@ -13409,92 +13378,7 @@
           <a:lstStyle/>
           <a:p>
             <a:r>
-              <a:t>3</a:t>
-            </a:r>
-          </a:p>
-        </p:txBody>
-      </p:sp>
-      <p:sp>
-        <p:nvSpPr>
-          <p:cNvPr id="11" name="Text Placeholder 10"/>
-          <p:cNvSpPr>
-            <a:spLocks noGrp="1"/>
-          </p:cNvSpPr>
-          <p:nvPr>
-            <p:ph type="body" idx="8"/>
-          </p:nvPr>
-        </p:nvSpPr>
-        <p:spPr/>
-        <p:txBody>
-          <a:bodyPr wrap="square"/>
-          <a:lstStyle/>
-          <a:p>
-            <a:r>
-              <a:rPr sz="1580"/>
-              <a:t>Measure, report, decide the next team</a:t>
-            </a:r>
-          </a:p>
-        </p:txBody>
-      </p:sp>
-      <p:sp>
-        <p:nvSpPr>
-          <p:cNvPr id="12" name="Text Placeholder 11"/>
-          <p:cNvSpPr>
-            <a:spLocks noGrp="1"/>
-          </p:cNvSpPr>
-          <p:nvPr>
-            <p:ph type="body" idx="9"/>
-          </p:nvPr>
-        </p:nvSpPr>
-        <p:spPr/>
-        <p:txBody>
-          <a:bodyPr wrap="square"/>
-          <a:lstStyle/>
-          <a:p>
-            <a:r>
-              <a:t>Days 60–90</a:t>
-            </a:r>
-          </a:p>
-          <a:p>
-            <a:r>
-              <a:t>Re-run the diary — the after figure</a:t>
-            </a:r>
-          </a:p>
-          <a:p>
-            <a:r>
-              <a:t>Report alerts, turnaround, overrun</a:t>
-            </a:r>
-          </a:p>
-          <a:p>
-            <a:r>
-              <a:t>Agree the budget line</a:t>
-            </a:r>
-          </a:p>
-          <a:p>
-            <a:r>
-              <a:t>Pick the next team to offer it to</a:t>
-            </a:r>
-          </a:p>
-        </p:txBody>
-      </p:sp>
-      <p:sp>
-        <p:nvSpPr>
-          <p:cNvPr id="13" name="Text Placeholder 12"/>
-          <p:cNvSpPr>
-            <a:spLocks noGrp="1"/>
-          </p:cNvSpPr>
-          <p:nvPr>
-            <p:ph type="body" idx="14"/>
-          </p:nvPr>
-        </p:nvSpPr>
-        <p:spPr/>
-        <p:txBody>
-          <a:bodyPr wrap="square"/>
-          <a:lstStyle/>
-          <a:p>
-            <a:r>
-              <a:rPr sz="1070"/>
-              <a:t>Nothing in the first 30 days needs a developer. The access model, the mobile view and the sync jobs exist; the rollout is invitations, a walkthrough and a diary.</a:t>
+              <a:t>The account manager supplies the judgement. The system supplies the standard, the next move and the format.</a:t>
             </a:r>
           </a:p>
         </p:txBody>
@@ -13533,7 +13417,7 @@
           <a:lstStyle/>
           <a:p>
             <a:r>
-              <a:t>What the FCC becomes next</a:t>
+              <a:t>The questions a new AM used to have to ask</a:t>
             </a:r>
           </a:p>
         </p:txBody>
@@ -13545,7 +13429,7 @@
             <a:spLocks noGrp="1"/>
           </p:cNvSpPr>
           <p:nvPr>
-            <p:ph type="body" idx="13"/>
+            <p:ph type="body" idx="11"/>
           </p:nvPr>
         </p:nvSpPr>
         <p:spPr/>
@@ -13554,7 +13438,7 @@
           <a:lstStyle/>
           <a:p>
             <a:r>
-              <a:t>It already reads every system the team runs; next it acts on what it reads.</a:t>
+              <a:t>Eight things every account manager needs in the first week, and where the answer lives now.</a:t>
             </a:r>
           </a:p>
         </p:txBody>
@@ -13566,7 +13450,7 @@
             <a:spLocks noGrp="1"/>
           </p:cNvSpPr>
           <p:nvPr>
-            <p:ph type="body" idx="1"/>
+            <p:ph type="body" idx="14"/>
           </p:nvPr>
         </p:nvSpPr>
         <p:spPr/>
@@ -13575,139 +13459,419 @@
           <a:lstStyle/>
           <a:p>
             <a:r>
-              <a:rPr sz="1880"/>
-              <a:t>Feedback — client voice</a:t>
-            </a:r>
-          </a:p>
-        </p:txBody>
-      </p:sp>
-      <p:sp>
-        <p:nvSpPr>
-          <p:cNvPr id="5" name="Text Placeholder 4"/>
-          <p:cNvSpPr>
-            <a:spLocks noGrp="1"/>
-          </p:cNvSpPr>
-          <p:nvPr>
-            <p:ph type="body" idx="2"/>
-          </p:nvPr>
-        </p:nvSpPr>
-        <p:spPr/>
-        <p:txBody>
-          <a:bodyPr wrap="square"/>
-          <a:lstStyle/>
-          <a:p>
-            <a:r>
-              <a:t>Sentiment from every client email and call feeding the retention radar; a monthly one-page account report emailed automatically; read-only scorecard links a client can open; a pulse question after each review — churn risk as a number weeks before it is a conversation.</a:t>
-            </a:r>
-          </a:p>
-        </p:txBody>
-      </p:sp>
-      <p:sp>
-        <p:nvSpPr>
-          <p:cNvPr id="6" name="Text Placeholder 5"/>
-          <p:cNvSpPr>
-            <a:spLocks noGrp="1"/>
-          </p:cNvSpPr>
-          <p:nvPr>
-            <p:ph type="body" idx="3"/>
-          </p:nvPr>
-        </p:nvSpPr>
-        <p:spPr/>
-        <p:txBody>
-          <a:bodyPr wrap="square"/>
-          <a:lstStyle/>
-          <a:p>
-            <a:r>
-              <a:t>AM management</a:t>
-            </a:r>
-          </a:p>
-        </p:txBody>
-      </p:sp>
-      <p:sp>
-        <p:nvSpPr>
-          <p:cNvPr id="7" name="Text Placeholder 6"/>
-          <p:cNvSpPr>
-            <a:spLocks noGrp="1"/>
-          </p:cNvSpPr>
-          <p:nvPr>
-            <p:ph type="body" idx="4"/>
-          </p:nvPr>
-        </p:nvSpPr>
-        <p:spPr/>
-        <p:txBody>
-          <a:bodyPr wrap="square"/>
-          <a:lstStyle/>
-          <a:p>
-            <a:r>
-              <a:t>Workload balanced across the team from the live task book; turnaround and SLA per AM; urgent hours against optimisation hours, tagged and reported; the Playbook as the coaching tool for what each account is missing; a new AM onboarded from the dossier in a day.</a:t>
-            </a:r>
-          </a:p>
-        </p:txBody>
-      </p:sp>
-      <p:sp>
-        <p:nvSpPr>
-          <p:cNvPr id="8" name="Text Placeholder 7"/>
-          <p:cNvSpPr>
-            <a:spLocks noGrp="1"/>
-          </p:cNvSpPr>
-          <p:nvPr>
-            <p:ph type="body" idx="5"/>
-          </p:nvPr>
-        </p:nvSpPr>
-        <p:spPr/>
-        <p:txBody>
-          <a:bodyPr wrap="square"/>
-          <a:lstStyle/>
-          <a:p>
-            <a:r>
-              <a:t>Business engine</a:t>
-            </a:r>
-          </a:p>
-        </p:txBody>
-      </p:sp>
-      <p:sp>
-        <p:nvSpPr>
-          <p:cNvPr id="9" name="Text Placeholder 8"/>
-          <p:cNvSpPr>
-            <a:spLocks noGrp="1"/>
-          </p:cNvSpPr>
-          <p:nvPr>
-            <p:ph type="body" idx="6"/>
-          </p:nvPr>
-        </p:nvSpPr>
-        <p:spPr/>
-        <p:txBody>
-          <a:bodyPr wrap="square"/>
-          <a:lstStyle/>
-          <a:p>
-            <a:r>
-              <a:rPr sz="1500"/>
-              <a:t>Revenue forecast from retainer burn, the quote pipeline and new-product volumes; profitability per account; Tachyon drafting the brief and the client email from the finding; fixes pushed into FeedHero and Merchant Center from the screen; feed changes joined to Ads performance; the whole thing packaged for other teams in the network.</a:t>
-            </a:r>
-          </a:p>
-        </p:txBody>
-      </p:sp>
-      <p:sp>
-        <p:nvSpPr>
-          <p:cNvPr id="10" name="Text Placeholder 9"/>
-          <p:cNvSpPr>
-            <a:spLocks noGrp="1"/>
-          </p:cNvSpPr>
-          <p:nvPr>
-            <p:ph type="body" idx="14"/>
-          </p:nvPr>
-        </p:nvSpPr>
-        <p:spPr/>
-        <p:txBody>
-          <a:bodyPr wrap="square"/>
-          <a:lstStyle/>
-          <a:p>
-            <a:r>
-              <a:t>The dashboard starts making the first move.</a:t>
-            </a:r>
-          </a:p>
-        </p:txBody>
-      </p:sp>
+              <a:t>Not one of these answers depends on catching somebody at their desk.</a:t>
+            </a:r>
+          </a:p>
+        </p:txBody>
+      </p:sp>
+      <p:graphicFrame>
+        <p:nvGraphicFramePr>
+          <p:cNvPr id="5" name="Table 4"/>
+          <p:cNvGraphicFramePr>
+            <a:graphicFrameLocks noGrp="1"/>
+          </p:cNvGraphicFramePr>
+          <p:nvPr/>
+        </p:nvGraphicFramePr>
+        <p:xfrm>
+          <a:off x="612648" y="1847088"/>
+          <a:ext cx="10972799" cy="3794760"/>
+        </p:xfrm>
+        <a:graphic>
+          <a:graphicData uri="http://schemas.openxmlformats.org/drawingml/2006/table">
+            <a:tbl>
+              <a:tblPr firstRow="1" bandRow="1">
+                <a:tableStyleId>{5C22544A-7EE6-4342-B048-85BDC9FD1C3A}</a:tableStyleId>
+              </a:tblPr>
+              <a:tblGrid>
+                <a:gridCol w="2194560"/>
+                <a:gridCol w="2548521"/>
+                <a:gridCol w="6229718"/>
+              </a:tblGrid>
+              <a:tr h="384048">
+                <a:tc>
+                  <a:txBody>
+                    <a:bodyPr/>
+                    <a:lstStyle/>
+                    <a:p>
+                      <a:r>
+                        <a:rPr sz="1300" b="1">
+                          <a:solidFill>
+                            <a:srgbClr val="FFFFFF"/>
+                          </a:solidFill>
+                        </a:rPr>
+                        <a:t>What they need to know</a:t>
+                      </a:r>
+                    </a:p>
+                  </a:txBody>
+                  <a:tcPr/>
+                </a:tc>
+                <a:tc>
+                  <a:txBody>
+                    <a:bodyPr/>
+                    <a:lstStyle/>
+                    <a:p>
+                      <a:r>
+                        <a:rPr sz="1300" b="1">
+                          <a:solidFill>
+                            <a:srgbClr val="FFFFFF"/>
+                          </a:solidFill>
+                        </a:rPr>
+                        <a:t>Before</a:t>
+                      </a:r>
+                    </a:p>
+                  </a:txBody>
+                  <a:tcPr/>
+                </a:tc>
+                <a:tc>
+                  <a:txBody>
+                    <a:bodyPr/>
+                    <a:lstStyle/>
+                    <a:p>
+                      <a:r>
+                        <a:rPr sz="1300" b="1">
+                          <a:solidFill>
+                            <a:srgbClr val="FFFFFF"/>
+                          </a:solidFill>
+                        </a:rPr>
+                        <a:t>With the FCC</a:t>
+                      </a:r>
+                    </a:p>
+                  </a:txBody>
+                  <a:tcPr/>
+                </a:tc>
+              </a:tr>
+              <a:tr h="426339">
+                <a:tc>
+                  <a:txBody>
+                    <a:bodyPr/>
+                    <a:lstStyle/>
+                    <a:p>
+                      <a:r>
+                        <a:rPr sz="1100"/>
+                        <a:t>Which account needs me today?</a:t>
+                      </a:r>
+                    </a:p>
+                  </a:txBody>
+                  <a:tcPr/>
+                </a:tc>
+                <a:tc>
+                  <a:txBody>
+                    <a:bodyPr/>
+                    <a:lstStyle/>
+                    <a:p>
+                      <a:r>
+                        <a:rPr sz="1100"/>
+                        <a:t>Ask the senior AM</a:t>
+                      </a:r>
+                    </a:p>
+                  </a:txBody>
+                  <a:tcPr/>
+                </a:tc>
+                <a:tc>
+                  <a:txBody>
+                    <a:bodyPr/>
+                    <a:lstStyle/>
+                    <a:p>
+                      <a:r>
+                        <a:rPr sz="1100"/>
+                        <a:t>A health score per brand with every deduction named, and up to five ranked next moves</a:t>
+                      </a:r>
+                    </a:p>
+                  </a:txBody>
+                  <a:tcPr/>
+                </a:tc>
+              </a:tr>
+              <a:tr h="426339">
+                <a:tc>
+                  <a:txBody>
+                    <a:bodyPr/>
+                    <a:lstStyle/>
+                    <a:p>
+                      <a:r>
+                        <a:rPr sz="1100"/>
+                        <a:t>Is this feed any good?</a:t>
+                      </a:r>
+                    </a:p>
+                  </a:txBody>
+                  <a:tcPr/>
+                </a:tc>
+                <a:tc>
+                  <a:txBody>
+                    <a:bodyPr/>
+                    <a:lstStyle/>
+                    <a:p>
+                      <a:r>
+                        <a:rPr sz="1100"/>
+                        <a:t>Learn the bar from a colleague</a:t>
+                      </a:r>
+                    </a:p>
+                  </a:txBody>
+                  <a:tcPr/>
+                </a:tc>
+                <a:tc>
+                  <a:txBody>
+                    <a:bodyPr/>
+                    <a:lstStyle/>
+                    <a:p>
+                      <a:r>
+                        <a:rPr sz="1100"/>
+                        <a:t>Feed score and content quality — 46 rules, each citing Google’s own specification</a:t>
+                      </a:r>
+                    </a:p>
+                  </a:txBody>
+                  <a:tcPr/>
+                </a:tc>
+              </a:tr>
+              <a:tr h="426339">
+                <a:tc>
+                  <a:txBody>
+                    <a:bodyPr/>
+                    <a:lstStyle/>
+                    <a:p>
+                      <a:r>
+                        <a:rPr sz="1100"/>
+                        <a:t>What goes into a brief?</a:t>
+                      </a:r>
+                    </a:p>
+                  </a:txBody>
+                  <a:tcPr/>
+                </a:tc>
+                <a:tc>
+                  <a:txBody>
+                    <a:bodyPr/>
+                    <a:lstStyle/>
+                    <a:p>
+                      <a:r>
+                        <a:rPr sz="1100"/>
+                        <a:t>Find an old one and copy it</a:t>
+                      </a:r>
+                    </a:p>
+                  </a:txBody>
+                  <a:tcPr/>
+                </a:tc>
+                <a:tc>
+                  <a:txBody>
+                    <a:bodyPr/>
+                    <a:lstStyle/>
+                    <a:p>
+                      <a:r>
+                        <a:rPr sz="1100"/>
+                        <a:t>Briefing Studio: six checks, the definition of done, the tokens and due date filled in</a:t>
+                      </a:r>
+                    </a:p>
+                  </a:txBody>
+                  <a:tcPr/>
+                </a:tc>
+              </a:tr>
+              <a:tr h="426339">
+                <a:tc>
+                  <a:txBody>
+                    <a:bodyPr/>
+                    <a:lstStyle/>
+                    <a:p>
+                      <a:r>
+                        <a:rPr sz="1100"/>
+                        <a:t>Have we the hours for this?</a:t>
+                      </a:r>
+                    </a:p>
+                  </a:txBody>
+                  <a:tcPr/>
+                </a:tc>
+                <a:tc>
+                  <a:txBody>
+                    <a:bodyPr/>
+                    <a:lstStyle/>
+                    <a:p>
+                      <a:r>
+                        <a:rPr sz="1100"/>
+                        <a:t>Log into the Task Manager per client</a:t>
+                      </a:r>
+                    </a:p>
+                  </a:txBody>
+                  <a:tcPr/>
+                </a:tc>
+                <a:tc>
+                  <a:txBody>
+                    <a:bodyPr/>
+                    <a:lstStyle/>
+                    <a:p>
+                      <a:r>
+                        <a:rPr sz="1100"/>
+                        <a:t>A balance dot on the task, the ticket and the brand, with the team’s decision beside it</a:t>
+                      </a:r>
+                    </a:p>
+                  </a:txBody>
+                  <a:tcPr/>
+                </a:tc>
+              </a:tr>
+              <a:tr h="426339">
+                <a:tc>
+                  <a:txBody>
+                    <a:bodyPr/>
+                    <a:lstStyle/>
+                    <a:p>
+                      <a:r>
+                        <a:rPr sz="1100"/>
+                        <a:t>What should we be doing here?</a:t>
+                      </a:r>
+                    </a:p>
+                  </a:txBody>
+                  <a:tcPr/>
+                </a:tc>
+                <a:tc>
+                  <a:txBody>
+                    <a:bodyPr/>
+                    <a:lstStyle/>
+                    <a:p>
+                      <a:r>
+                        <a:rPr sz="1100"/>
+                        <a:t>Read the plan and infer</a:t>
+                      </a:r>
+                    </a:p>
+                  </a:txBody>
+                  <a:tcPr/>
+                </a:tc>
+                <a:tc>
+                  <a:txBody>
+                    <a:bodyPr/>
+                    <a:lstStyle/>
+                    <a:p>
+                      <a:r>
+                        <a:rPr sz="1100"/>
+                        <a:t>Playbook: what is landing, what is stalling, what peers run and this account does not</a:t>
+                      </a:r>
+                    </a:p>
+                  </a:txBody>
+                  <a:tcPr/>
+                </a:tc>
+              </a:tr>
+              <a:tr h="426339">
+                <a:tc>
+                  <a:txBody>
+                    <a:bodyPr/>
+                    <a:lstStyle/>
+                    <a:p>
+                      <a:r>
+                        <a:rPr sz="1100"/>
+                        <a:t>What have we already promised?</a:t>
+                      </a:r>
+                    </a:p>
+                  </a:txBody>
+                  <a:tcPr/>
+                </a:tc>
+                <a:tc>
+                  <a:txBody>
+                    <a:bodyPr/>
+                    <a:lstStyle/>
+                    <a:p>
+                      <a:r>
+                        <a:rPr sz="1100"/>
+                        <a:t>Search the inbox</a:t>
+                      </a:r>
+                    </a:p>
+                  </a:txBody>
+                  <a:tcPr/>
+                </a:tc>
+                <a:tc>
+                  <a:txBody>
+                    <a:bodyPr/>
+                    <a:lstStyle/>
+                    <a:p>
+                      <a:r>
+                        <a:rPr sz="1100"/>
+                        <a:t>The brief ledger with each stage and whose court it sits in; call actions filed as tasks</a:t>
+                      </a:r>
+                    </a:p>
+                  </a:txBody>
+                  <a:tcPr/>
+                </a:tc>
+              </a:tr>
+              <a:tr h="426339">
+                <a:tc>
+                  <a:txBody>
+                    <a:bodyPr/>
+                    <a:lstStyle/>
+                    <a:p>
+                      <a:r>
+                        <a:rPr sz="1100"/>
+                        <a:t>How do I price it?</a:t>
+                      </a:r>
+                    </a:p>
+                  </a:txBody>
+                  <a:tcPr/>
+                </a:tc>
+                <a:tc>
+                  <a:txBody>
+                    <a:bodyPr/>
+                    <a:lstStyle/>
+                    <a:p>
+                      <a:r>
+                        <a:rPr sz="1100"/>
+                        <a:t>Ask, or guess</a:t>
+                      </a:r>
+                    </a:p>
+                  </a:txBody>
+                  <a:tcPr/>
+                </a:tc>
+                <a:tc>
+                  <a:txBody>
+                    <a:bodyPr/>
+                    <a:lstStyle/>
+                    <a:p>
+                      <a:r>
+                        <a:rPr sz="1100"/>
+                        <a:t>AI Quote on the shared rate card, one-off and monthly kept apart</a:t>
+                      </a:r>
+                    </a:p>
+                  </a:txBody>
+                  <a:tcPr/>
+                </a:tc>
+              </a:tr>
+              <a:tr h="426339">
+                <a:tc>
+                  <a:txBody>
+                    <a:bodyPr/>
+                    <a:lstStyle/>
+                    <a:p>
+                      <a:r>
+                        <a:rPr sz="1100"/>
+                        <a:t>How do I build the review deck?</a:t>
+                      </a:r>
+                    </a:p>
+                  </a:txBody>
+                  <a:tcPr/>
+                </a:tc>
+                <a:tc>
+                  <a:txBody>
+                    <a:bodyPr/>
+                    <a:lstStyle/>
+                    <a:p>
+                      <a:r>
+                        <a:rPr sz="1100"/>
+                        <a:t>Two days and a blank template</a:t>
+                      </a:r>
+                    </a:p>
+                  </a:txBody>
+                  <a:tcPr/>
+                </a:tc>
+                <a:tc>
+                  <a:txBody>
+                    <a:bodyPr/>
+                    <a:lstStyle/>
+                    <a:p>
+                      <a:r>
+                        <a:rPr sz="1100"/>
+                        <a:t>Deck Generator on the core template, from the live plan</a:t>
+                      </a:r>
+                    </a:p>
+                  </a:txBody>
+                  <a:tcPr/>
+                </a:tc>
+              </a:tr>
+            </a:tbl>
+          </a:graphicData>
+        </a:graphic>
+      </p:graphicFrame>
     </p:spTree>
   </p:cSld>
   <p:clrMapOvr>
@@ -13742,7 +13906,7 @@
           <a:lstStyle/>
           <a:p>
             <a:r>
-              <a:t>Four questions, one decision</a:t>
+              <a:t>Five questions, one decision</a:t>
             </a:r>
           </a:p>
         </p:txBody>
@@ -13763,7 +13927,7 @@
           <a:lstStyle/>
           <a:p>
             <a:r>
-              <a:t>The struggle, the solution, the value in hours and pounds, and where it goes next.</a:t>
+              <a:t>The struggle, the solution, the value in hours and pounds, what it does for the team, and where it goes next.</a:t>
             </a:r>
           </a:p>
         </p:txBody>
@@ -13792,6 +13956,11 @@
               <a:t>02  The solution — 20 modules on the tools the team already uses · built in six weeks · £0 infrastructure</a:t>
             </a:r>
           </a:p>
+          <a:p>
+            <a:r>
+              <a:t>03  The benefit — Hours wasted without it, hours saved with it · the risks it removes · what it cost</a:t>
+            </a:r>
+          </a:p>
         </p:txBody>
       </p:sp>
       <p:sp>
@@ -13810,12 +13979,12 @@
           <a:lstStyle/>
           <a:p>
             <a:r>
-              <a:t>03  The benefit — Hours wasted without it, hours saved with it · the risks it removes · what it cost</a:t>
-            </a:r>
-          </a:p>
-          <a:p>
-            <a:r>
-              <a:t>04  Going forward — A 90-day rollout · the vision for feedback, AM management and the business</a:t>
+              <a:t>04  What it does for the team — Why the process gets faster · a new AM productive in a fortnight · what a team lead gets</a:t>
+            </a:r>
+          </a:p>
+          <a:p>
+            <a:r>
+              <a:t>05  Going forward — A 90-day rollout · the vision for feedback, AM management and the business</a:t>
             </a:r>
           </a:p>
         </p:txBody>
@@ -13840,7 +14009,49 @@
       <p:grpSpPr/>
       <p:sp>
         <p:nvSpPr>
-          <p:cNvPr id="2" name="Text Placeholder 1"/>
+          <p:cNvPr id="2" name="Title 1"/>
+          <p:cNvSpPr>
+            <a:spLocks noGrp="1"/>
+          </p:cNvSpPr>
+          <p:nvPr>
+            <p:ph type="title"/>
+          </p:nvPr>
+        </p:nvSpPr>
+        <p:spPr/>
+        <p:txBody>
+          <a:bodyPr wrap="square"/>
+          <a:lstStyle/>
+          <a:p>
+            <a:r>
+              <a:t>From invite to owning the account</a:t>
+            </a:r>
+          </a:p>
+        </p:txBody>
+      </p:sp>
+      <p:sp>
+        <p:nvSpPr>
+          <p:cNvPr id="3" name="Text Placeholder 2"/>
+          <p:cNvSpPr>
+            <a:spLocks noGrp="1"/>
+          </p:cNvSpPr>
+          <p:nvPr>
+            <p:ph type="body" idx="11"/>
+          </p:nvPr>
+        </p:nvSpPr>
+        <p:spPr/>
+        <p:txBody>
+          <a:bodyPr wrap="square"/>
+          <a:lstStyle/>
+          <a:p>
+            <a:r>
+              <a:t>A new account manager is useful before they have met every client, because the account is readable.</a:t>
+            </a:r>
+          </a:p>
+        </p:txBody>
+      </p:sp>
+      <p:sp>
+        <p:nvSpPr>
+          <p:cNvPr id="4" name="Text Placeholder 3"/>
           <p:cNvSpPr>
             <a:spLocks noGrp="1"/>
           </p:cNvSpPr>
@@ -13854,20 +14065,19 @@
           <a:lstStyle/>
           <a:p>
             <a:r>
-              <a:rPr sz="2620"/>
-              <a:t>Every module that has landed in six weeks does the same thing: it puts the information in front of the account manager at the moment of the decision, so the team's time goes into client work instead of finding out what is going on. The vision is the same idea, one step further — the dashboard starts making the first move.</a:t>
-            </a:r>
-          </a:p>
-        </p:txBody>
-      </p:sp>
-      <p:sp>
-        <p:nvSpPr>
-          <p:cNvPr id="3" name="Text Placeholder 2"/>
-          <p:cNvSpPr>
-            <a:spLocks noGrp="1"/>
-          </p:cNvSpPr>
-          <p:nvPr>
-            <p:ph type="body" idx="11"/>
+              <a:t>1</a:t>
+            </a:r>
+          </a:p>
+        </p:txBody>
+      </p:sp>
+      <p:sp>
+        <p:nvSpPr>
+          <p:cNvPr id="5" name="Text Placeholder 4"/>
+          <p:cNvSpPr>
+            <a:spLocks noGrp="1"/>
+          </p:cNvSpPr>
+          <p:nvPr>
+            <p:ph type="body" idx="2"/>
           </p:nvPr>
         </p:nvSpPr>
         <p:spPr/>
@@ -13876,7 +14086,237 @@
           <a:lstStyle/>
           <a:p>
             <a:r>
-              <a:t>The through-line</a:t>
+              <a:rPr sz="1689"/>
+              <a:t>The whole book, without asking</a:t>
+            </a:r>
+          </a:p>
+        </p:txBody>
+      </p:sp>
+      <p:sp>
+        <p:nvSpPr>
+          <p:cNvPr id="6" name="Text Placeholder 5"/>
+          <p:cNvSpPr>
+            <a:spLocks noGrp="1"/>
+          </p:cNvSpPr>
+          <p:nvPr>
+            <p:ph type="body" idx="3"/>
+          </p:nvPr>
+        </p:nvSpPr>
+        <p:spPr/>
+        <p:txBody>
+          <a:bodyPr wrap="square"/>
+          <a:lstStyle/>
+          <a:p>
+            <a:r>
+              <a:t>Day one</a:t>
+            </a:r>
+          </a:p>
+          <a:p>
+            <a:r>
+              <a:t>One invite, scoped to their clients</a:t>
+            </a:r>
+          </a:p>
+          <a:p>
+            <a:r>
+              <a:t>The dossier: plan, feeds, hours</a:t>
+            </a:r>
+          </a:p>
+          <a:p>
+            <a:r>
+              <a:t>Feed Chat answers in plain English</a:t>
+            </a:r>
+          </a:p>
+          <a:p>
+            <a:r>
+              <a:t>Nothing to install; reads on a phone</a:t>
+            </a:r>
+          </a:p>
+        </p:txBody>
+      </p:sp>
+      <p:sp>
+        <p:nvSpPr>
+          <p:cNvPr id="7" name="Text Placeholder 6"/>
+          <p:cNvSpPr>
+            <a:spLocks noGrp="1"/>
+          </p:cNvSpPr>
+          <p:nvPr>
+            <p:ph type="body" idx="4"/>
+          </p:nvPr>
+        </p:nvSpPr>
+        <p:spPr/>
+        <p:txBody>
+          <a:bodyPr wrap="square"/>
+          <a:lstStyle/>
+          <a:p>
+            <a:r>
+              <a:t>2</a:t>
+            </a:r>
+          </a:p>
+        </p:txBody>
+      </p:sp>
+      <p:sp>
+        <p:nvSpPr>
+          <p:cNvPr id="8" name="Text Placeholder 7"/>
+          <p:cNvSpPr>
+            <a:spLocks noGrp="1"/>
+          </p:cNvSpPr>
+          <p:nvPr>
+            <p:ph type="body" idx="5"/>
+          </p:nvPr>
+        </p:nvSpPr>
+        <p:spPr/>
+        <p:txBody>
+          <a:bodyPr wrap="square"/>
+          <a:lstStyle/>
+          <a:p>
+            <a:r>
+              <a:t>Real work, with the rails on</a:t>
+            </a:r>
+          </a:p>
+        </p:txBody>
+      </p:sp>
+      <p:sp>
+        <p:nvSpPr>
+          <p:cNvPr id="9" name="Text Placeholder 8"/>
+          <p:cNvSpPr>
+            <a:spLocks noGrp="1"/>
+          </p:cNvSpPr>
+          <p:nvPr>
+            <p:ph type="body" idx="6"/>
+          </p:nvPr>
+        </p:nvSpPr>
+        <p:spPr/>
+        <p:txBody>
+          <a:bodyPr wrap="square"/>
+          <a:lstStyle/>
+          <a:p>
+            <a:r>
+              <a:t>Week one</a:t>
+            </a:r>
+          </a:p>
+          <a:p>
+            <a:r>
+              <a:t>First brief scored before it sends</a:t>
+            </a:r>
+          </a:p>
+          <a:p>
+            <a:r>
+              <a:t>A guard alert, email already drafted</a:t>
+            </a:r>
+          </a:p>
+          <a:p>
+            <a:r>
+              <a:t>Go or skip, with the balance in view</a:t>
+            </a:r>
+          </a:p>
+          <a:p>
+            <a:r>
+              <a:t>Every action logged and reviewable</a:t>
+            </a:r>
+          </a:p>
+        </p:txBody>
+      </p:sp>
+      <p:sp>
+        <p:nvSpPr>
+          <p:cNvPr id="10" name="Text Placeholder 9"/>
+          <p:cNvSpPr>
+            <a:spLocks noGrp="1"/>
+          </p:cNvSpPr>
+          <p:nvPr>
+            <p:ph type="body" idx="7"/>
+          </p:nvPr>
+        </p:nvSpPr>
+        <p:spPr/>
+        <p:txBody>
+          <a:bodyPr wrap="square"/>
+          <a:lstStyle/>
+          <a:p>
+            <a:r>
+              <a:t>3</a:t>
+            </a:r>
+          </a:p>
+        </p:txBody>
+      </p:sp>
+      <p:sp>
+        <p:nvSpPr>
+          <p:cNvPr id="11" name="Text Placeholder 10"/>
+          <p:cNvSpPr>
+            <a:spLocks noGrp="1"/>
+          </p:cNvSpPr>
+          <p:nvPr>
+            <p:ph type="body" idx="8"/>
+          </p:nvPr>
+        </p:nvSpPr>
+        <p:spPr/>
+        <p:txBody>
+          <a:bodyPr wrap="square"/>
+          <a:lstStyle/>
+          <a:p>
+            <a:r>
+              <a:rPr sz="1580"/>
+              <a:t>Running the account, not shadowing it</a:t>
+            </a:r>
+          </a:p>
+        </p:txBody>
+      </p:sp>
+      <p:sp>
+        <p:nvSpPr>
+          <p:cNvPr id="12" name="Text Placeholder 11"/>
+          <p:cNvSpPr>
+            <a:spLocks noGrp="1"/>
+          </p:cNvSpPr>
+          <p:nvPr>
+            <p:ph type="body" idx="9"/>
+          </p:nvPr>
+        </p:nvSpPr>
+        <p:spPr/>
+        <p:txBody>
+          <a:bodyPr wrap="square"/>
+          <a:lstStyle/>
+          <a:p>
+            <a:r>
+              <a:t>Week two</a:t>
+            </a:r>
+          </a:p>
+          <a:p>
+            <a:r>
+              <a:t>Monday call prepared from Leadership</a:t>
+            </a:r>
+          </a:p>
+          <a:p>
+            <a:r>
+              <a:t>A scorecard exported to the client</a:t>
+            </a:r>
+          </a:p>
+          <a:p>
+            <a:r>
+              <a:t>A quote on the shared rate card</a:t>
+            </a:r>
+          </a:p>
+          <a:p>
+            <a:r>
+              <a:t>Keyword moments scheduled</a:t>
+            </a:r>
+          </a:p>
+        </p:txBody>
+      </p:sp>
+      <p:sp>
+        <p:nvSpPr>
+          <p:cNvPr id="13" name="Text Placeholder 12"/>
+          <p:cNvSpPr>
+            <a:spLocks noGrp="1"/>
+          </p:cNvSpPr>
+          <p:nvPr>
+            <p:ph type="body" idx="14"/>
+          </p:nvPr>
+        </p:nvSpPr>
+        <p:spPr/>
+        <p:txBody>
+          <a:bodyPr wrap="square"/>
+          <a:lstStyle/>
+          <a:p>
+            <a:r>
+              <a:t>The mechanical half of the apprenticeship — where things live and what good looks like — is on the screen from day one.</a:t>
             </a:r>
           </a:p>
         </p:txBody>
@@ -13901,7 +14341,49 @@
       <p:grpSpPr/>
       <p:sp>
         <p:nvSpPr>
-          <p:cNvPr id="2" name="Text Placeholder 1"/>
+          <p:cNvPr id="2" name="Title 1"/>
+          <p:cNvSpPr>
+            <a:spLocks noGrp="1"/>
+          </p:cNvSpPr>
+          <p:nvPr>
+            <p:ph type="title"/>
+          </p:nvPr>
+        </p:nvSpPr>
+        <p:spPr/>
+        <p:txBody>
+          <a:bodyPr wrap="square"/>
+          <a:lstStyle/>
+          <a:p>
+            <a:r>
+              <a:t>What it gives whoever runs the team</a:t>
+            </a:r>
+          </a:p>
+        </p:txBody>
+      </p:sp>
+      <p:sp>
+        <p:nvSpPr>
+          <p:cNvPr id="3" name="Text Placeholder 2"/>
+          <p:cNvSpPr>
+            <a:spLocks noGrp="1"/>
+          </p:cNvSpPr>
+          <p:nvPr>
+            <p:ph type="body" idx="13"/>
+          </p:nvPr>
+        </p:nvSpPr>
+        <p:spPr/>
+        <p:txBody>
+          <a:bodyPr wrap="square"/>
+          <a:lstStyle/>
+          <a:p>
+            <a:r>
+              <a:t>The data that helps an account manager act is the data a team lead needs to coach, balance and hand over.</a:t>
+            </a:r>
+          </a:p>
+        </p:txBody>
+      </p:sp>
+      <p:sp>
+        <p:nvSpPr>
+          <p:cNvPr id="4" name="Text Placeholder 3"/>
           <p:cNvSpPr>
             <a:spLocks noGrp="1"/>
           </p:cNvSpPr>
@@ -13915,20 +14397,20 @@
           <a:lstStyle/>
           <a:p>
             <a:r>
-              <a:rPr sz="2620"/>
-              <a:t>Reimburse the two-month Claude Code subscription that built the FCC, and approve the 90-day rollout to the London account-management team with one subscription per builder and Ray as product owner. The return is 2,530 hours a year at a team of five, and the three risks in chapter three stop being invisible.</a:t>
-            </a:r>
-          </a:p>
-        </p:txBody>
-      </p:sp>
-      <p:sp>
-        <p:nvSpPr>
-          <p:cNvPr id="3" name="Text Placeholder 2"/>
-          <p:cNvSpPr>
-            <a:spLocks noGrp="1"/>
-          </p:cNvSpPr>
-          <p:nvPr>
-            <p:ph type="body" idx="11"/>
+              <a:rPr sz="1880"/>
+              <a:t>Coaching on one screen</a:t>
+            </a:r>
+          </a:p>
+        </p:txBody>
+      </p:sp>
+      <p:sp>
+        <p:nvSpPr>
+          <p:cNvPr id="5" name="Text Placeholder 4"/>
+          <p:cNvSpPr>
+            <a:spLocks noGrp="1"/>
+          </p:cNvSpPr>
+          <p:nvPr>
+            <p:ph type="body" idx="2"/>
           </p:nvPr>
         </p:nvSpPr>
         <p:spPr/>
@@ -13937,7 +14419,115 @@
           <a:lstStyle/>
           <a:p>
             <a:r>
-              <a:t>The ask</a:t>
+              <a:rPr sz="1500"/>
+              <a:t>View-as opens the FCC exactly as a named account manager sees it — their clients, their modules, their alerts — so a one-to-one is a conversation about one screen rather than a described one. The Playbook turns “how is this account doing” into a list of plays that are landing, stalling or absent.</a:t>
+            </a:r>
+          </a:p>
+        </p:txBody>
+      </p:sp>
+      <p:sp>
+        <p:nvSpPr>
+          <p:cNvPr id="6" name="Text Placeholder 5"/>
+          <p:cNvSpPr>
+            <a:spLocks noGrp="1"/>
+          </p:cNvSpPr>
+          <p:nvPr>
+            <p:ph type="body" idx="3"/>
+          </p:nvPr>
+        </p:nvSpPr>
+        <p:spPr/>
+        <p:txBody>
+          <a:bodyPr wrap="square"/>
+          <a:lstStyle/>
+          <a:p>
+            <a:r>
+              <a:rPr sz="1760"/>
+              <a:t>One standard, everywhere</a:t>
+            </a:r>
+          </a:p>
+        </p:txBody>
+      </p:sp>
+      <p:sp>
+        <p:nvSpPr>
+          <p:cNvPr id="7" name="Text Placeholder 6"/>
+          <p:cNvSpPr>
+            <a:spLocks noGrp="1"/>
+          </p:cNvSpPr>
+          <p:nvPr>
+            <p:ph type="body" idx="4"/>
+          </p:nvPr>
+        </p:nvSpPr>
+        <p:spPr/>
+        <p:txBody>
+          <a:bodyPr wrap="square"/>
+          <a:lstStyle/>
+          <a:p>
+            <a:r>
+              <a:t>Every brief is scored against the same six checks, every feed against the same rules, every quote built on the same rate card. The distance between the most experienced account manager and the newest narrows because the floor rises, not because anybody is being watched.</a:t>
+            </a:r>
+          </a:p>
+        </p:txBody>
+      </p:sp>
+      <p:sp>
+        <p:nvSpPr>
+          <p:cNvPr id="8" name="Text Placeholder 7"/>
+          <p:cNvSpPr>
+            <a:spLocks noGrp="1"/>
+          </p:cNvSpPr>
+          <p:nvPr>
+            <p:ph type="body" idx="5"/>
+          </p:nvPr>
+        </p:nvSpPr>
+        <p:spPr/>
+        <p:txBody>
+          <a:bodyPr wrap="square"/>
+          <a:lstStyle/>
+          <a:p>
+            <a:r>
+              <a:rPr sz="1760"/>
+              <a:t>Handover in an afternoon</a:t>
+            </a:r>
+          </a:p>
+        </p:txBody>
+      </p:sp>
+      <p:sp>
+        <p:nvSpPr>
+          <p:cNvPr id="9" name="Text Placeholder 8"/>
+          <p:cNvSpPr>
+            <a:spLocks noGrp="1"/>
+          </p:cNvSpPr>
+          <p:nvPr>
+            <p:ph type="body" idx="6"/>
+          </p:nvPr>
+        </p:nvSpPr>
+        <p:spPr/>
+        <p:txBody>
+          <a:bodyPr wrap="square"/>
+          <a:lstStyle/>
+          <a:p>
+            <a:r>
+              <a:t>The dossier is the live handover document — plan, briefs in flight, feed scores, hours, calendar moments, per brand and current. An account moves between managers without a handover pack, and holiday cover stops being a gap in the client’s week.</a:t>
+            </a:r>
+          </a:p>
+        </p:txBody>
+      </p:sp>
+      <p:sp>
+        <p:nvSpPr>
+          <p:cNvPr id="10" name="Text Placeholder 9"/>
+          <p:cNvSpPr>
+            <a:spLocks noGrp="1"/>
+          </p:cNvSpPr>
+          <p:nvPr>
+            <p:ph type="body" idx="14"/>
+          </p:nvPr>
+        </p:nvSpPr>
+        <p:spPr/>
+        <p:txBody>
+          <a:bodyPr wrap="square"/>
+          <a:lstStyle/>
+          <a:p>
+            <a:r>
+              <a:t>The floor rises. The ceiling is still the account manager.</a:t>
             </a:r>
           </a:p>
         </p:txBody>
@@ -13951,6 +14541,814 @@
 </file>
 
 <file path=ppt/slides/slide22.xml><?xml version="1.0" encoding="utf-8"?>
+<p:sld xmlns:a="http://schemas.openxmlformats.org/drawingml/2006/main" xmlns:p="http://schemas.openxmlformats.org/presentationml/2006/main" xmlns:r="http://schemas.openxmlformats.org/officeDocument/2006/relationships">
+  <p:cSld>
+    <p:spTree>
+      <p:nvGrpSpPr>
+        <p:cNvPr id="1" name=""/>
+        <p:cNvGrpSpPr/>
+        <p:nvPr/>
+      </p:nvGrpSpPr>
+      <p:grpSpPr/>
+      <p:sp>
+        <p:nvSpPr>
+          <p:cNvPr id="2" name="Text Placeholder 1"/>
+          <p:cNvSpPr>
+            <a:spLocks noGrp="1"/>
+          </p:cNvSpPr>
+          <p:nvPr>
+            <p:ph type="body" idx="1"/>
+          </p:nvPr>
+        </p:nvSpPr>
+        <p:spPr/>
+        <p:txBody>
+          <a:bodyPr wrap="square"/>
+          <a:lstStyle/>
+          <a:p>
+            <a:r>
+              <a:rPr sz="2620"/>
+              <a:t>It shortens the mechanical half of the apprenticeship — where the data lives, what good looks like, what a brief must contain — and not the relational half: reading a client, holding a hard call, knowing when to push. So every figure states its source and every alert opens to its evidence.</a:t>
+            </a:r>
+          </a:p>
+        </p:txBody>
+      </p:sp>
+      <p:sp>
+        <p:nvSpPr>
+          <p:cNvPr id="3" name="Text Placeholder 2"/>
+          <p:cNvSpPr>
+            <a:spLocks noGrp="1"/>
+          </p:cNvSpPr>
+          <p:nvPr>
+            <p:ph type="body" idx="11"/>
+          </p:nvPr>
+        </p:nvSpPr>
+        <p:spPr/>
+        <p:txBody>
+          <a:bodyPr wrap="square"/>
+          <a:lstStyle/>
+          <a:p>
+            <a:r>
+              <a:t>What it does not do</a:t>
+            </a:r>
+          </a:p>
+        </p:txBody>
+      </p:sp>
+    </p:spTree>
+  </p:cSld>
+  <p:clrMapOvr>
+    <a:masterClrMapping/>
+  </p:clrMapOvr>
+</p:sld>
+</file>
+
+<file path=ppt/slides/slide23.xml><?xml version="1.0" encoding="utf-8"?>
+<p:sld xmlns:a="http://schemas.openxmlformats.org/drawingml/2006/main" xmlns:p="http://schemas.openxmlformats.org/presentationml/2006/main" xmlns:r="http://schemas.openxmlformats.org/officeDocument/2006/relationships">
+  <p:cSld>
+    <p:spTree>
+      <p:nvGrpSpPr>
+        <p:cNvPr id="1" name=""/>
+        <p:cNvGrpSpPr/>
+        <p:nvPr/>
+      </p:nvGrpSpPr>
+      <p:grpSpPr/>
+      <p:sp>
+        <p:nvSpPr>
+          <p:cNvPr id="2" name="Text Placeholder 1"/>
+          <p:cNvSpPr>
+            <a:spLocks noGrp="1"/>
+          </p:cNvSpPr>
+          <p:nvPr>
+            <p:ph type="body" idx="11"/>
+          </p:nvPr>
+        </p:nvSpPr>
+        <p:spPr/>
+        <p:txBody>
+          <a:bodyPr wrap="square"/>
+          <a:lstStyle/>
+          <a:p>
+            <a:r>
+              <a:t>Chapter five</a:t>
+            </a:r>
+          </a:p>
+        </p:txBody>
+      </p:sp>
+      <p:sp>
+        <p:nvSpPr>
+          <p:cNvPr id="3" name="Title 2"/>
+          <p:cNvSpPr>
+            <a:spLocks noGrp="1"/>
+          </p:cNvSpPr>
+          <p:nvPr>
+            <p:ph type="title"/>
+          </p:nvPr>
+        </p:nvSpPr>
+        <p:spPr/>
+        <p:txBody>
+          <a:bodyPr wrap="square"/>
+          <a:lstStyle/>
+          <a:p>
+            <a:r>
+              <a:t>Going forward</a:t>
+            </a:r>
+          </a:p>
+        </p:txBody>
+      </p:sp>
+      <p:sp>
+        <p:nvSpPr>
+          <p:cNvPr id="4" name="Text Placeholder 3"/>
+          <p:cNvSpPr>
+            <a:spLocks noGrp="1"/>
+          </p:cNvSpPr>
+          <p:nvPr>
+            <p:ph type="body" idx="1"/>
+          </p:nvPr>
+        </p:nvSpPr>
+        <p:spPr/>
+        <p:txBody>
+          <a:bodyPr wrap="square"/>
+          <a:lstStyle/>
+          <a:p>
+            <a:r>
+              <a:t>Ninety days to make it the team's way of working, then the platform for feedback, AM management and the business.</a:t>
+            </a:r>
+          </a:p>
+        </p:txBody>
+      </p:sp>
+    </p:spTree>
+  </p:cSld>
+  <p:clrMapOvr>
+    <a:masterClrMapping/>
+  </p:clrMapOvr>
+</p:sld>
+</file>
+
+<file path=ppt/slides/slide24.xml><?xml version="1.0" encoding="utf-8"?>
+<p:sld xmlns:a="http://schemas.openxmlformats.org/drawingml/2006/main" xmlns:p="http://schemas.openxmlformats.org/presentationml/2006/main" xmlns:r="http://schemas.openxmlformats.org/officeDocument/2006/relationships">
+  <p:cSld>
+    <p:spTree>
+      <p:nvGrpSpPr>
+        <p:cNvPr id="1" name=""/>
+        <p:cNvGrpSpPr/>
+        <p:nvPr/>
+      </p:nvGrpSpPr>
+      <p:grpSpPr/>
+      <p:sp>
+        <p:nvSpPr>
+          <p:cNvPr id="2" name="Title 1"/>
+          <p:cNvSpPr>
+            <a:spLocks noGrp="1"/>
+          </p:cNvSpPr>
+          <p:nvPr>
+            <p:ph type="title"/>
+          </p:nvPr>
+        </p:nvSpPr>
+        <p:spPr/>
+        <p:txBody>
+          <a:bodyPr wrap="square"/>
+          <a:lstStyle/>
+          <a:p>
+            <a:r>
+              <a:t>Ninety days to the team’s operating system</a:t>
+            </a:r>
+          </a:p>
+        </p:txBody>
+      </p:sp>
+      <p:sp>
+        <p:nvSpPr>
+          <p:cNvPr id="3" name="Text Placeholder 2"/>
+          <p:cNvSpPr>
+            <a:spLocks noGrp="1"/>
+          </p:cNvSpPr>
+          <p:nvPr>
+            <p:ph type="body" idx="11"/>
+          </p:nvPr>
+        </p:nvSpPr>
+        <p:spPr/>
+        <p:txBody>
+          <a:bodyPr wrap="square"/>
+          <a:lstStyle/>
+          <a:p>
+            <a:r>
+              <a:t>Onboarding is an invite and an hour; the plan measures before and after.</a:t>
+            </a:r>
+          </a:p>
+        </p:txBody>
+      </p:sp>
+      <p:sp>
+        <p:nvSpPr>
+          <p:cNvPr id="4" name="Text Placeholder 3"/>
+          <p:cNvSpPr>
+            <a:spLocks noGrp="1"/>
+          </p:cNvSpPr>
+          <p:nvPr>
+            <p:ph type="body" idx="1"/>
+          </p:nvPr>
+        </p:nvSpPr>
+        <p:spPr/>
+        <p:txBody>
+          <a:bodyPr wrap="square"/>
+          <a:lstStyle/>
+          <a:p>
+            <a:r>
+              <a:t>1</a:t>
+            </a:r>
+          </a:p>
+        </p:txBody>
+      </p:sp>
+      <p:sp>
+        <p:nvSpPr>
+          <p:cNvPr id="5" name="Text Placeholder 4"/>
+          <p:cNvSpPr>
+            <a:spLocks noGrp="1"/>
+          </p:cNvSpPr>
+          <p:nvPr>
+            <p:ph type="body" idx="2"/>
+          </p:nvPr>
+        </p:nvSpPr>
+        <p:spPr/>
+        <p:txBody>
+          <a:bodyPr wrap="square"/>
+          <a:lstStyle/>
+          <a:p>
+            <a:r>
+              <a:rPr sz="1689"/>
+              <a:t>Everyone in, baseline measured</a:t>
+            </a:r>
+          </a:p>
+        </p:txBody>
+      </p:sp>
+      <p:sp>
+        <p:nvSpPr>
+          <p:cNvPr id="6" name="Text Placeholder 5"/>
+          <p:cNvSpPr>
+            <a:spLocks noGrp="1"/>
+          </p:cNvSpPr>
+          <p:nvPr>
+            <p:ph type="body" idx="3"/>
+          </p:nvPr>
+        </p:nvSpPr>
+        <p:spPr/>
+        <p:txBody>
+          <a:bodyPr wrap="square"/>
+          <a:lstStyle/>
+          <a:p>
+            <a:r>
+              <a:t>Days 0–30</a:t>
+            </a:r>
+          </a:p>
+          <a:p>
+            <a:r>
+              <a:t>Access invites, scoped per AM</a:t>
+            </a:r>
+          </a:p>
+          <a:p>
+            <a:r>
+              <a:t>One-hour walkthrough each</a:t>
+            </a:r>
+          </a:p>
+          <a:p>
+            <a:r>
+              <a:t>Gmail push and plans wired</a:t>
+            </a:r>
+          </a:p>
+          <a:p>
+            <a:r>
+              <a:t>One-week diary — the before figure</a:t>
+            </a:r>
+          </a:p>
+        </p:txBody>
+      </p:sp>
+      <p:sp>
+        <p:nvSpPr>
+          <p:cNvPr id="7" name="Text Placeholder 6"/>
+          <p:cNvSpPr>
+            <a:spLocks noGrp="1"/>
+          </p:cNvSpPr>
+          <p:nvPr>
+            <p:ph type="body" idx="4"/>
+          </p:nvPr>
+        </p:nvSpPr>
+        <p:spPr/>
+        <p:txBody>
+          <a:bodyPr wrap="square"/>
+          <a:lstStyle/>
+          <a:p>
+            <a:r>
+              <a:t>2</a:t>
+            </a:r>
+          </a:p>
+        </p:txBody>
+      </p:sp>
+      <p:sp>
+        <p:nvSpPr>
+          <p:cNvPr id="8" name="Text Placeholder 7"/>
+          <p:cNvSpPr>
+            <a:spLocks noGrp="1"/>
+          </p:cNvSpPr>
+          <p:nvPr>
+            <p:ph type="body" idx="5"/>
+          </p:nvPr>
+        </p:nvSpPr>
+        <p:spPr/>
+        <p:txBody>
+          <a:bodyPr wrap="square"/>
+          <a:lstStyle/>
+          <a:p>
+            <a:r>
+              <a:rPr sz="1580"/>
+              <a:t>The FCC is where the work happens</a:t>
+            </a:r>
+          </a:p>
+        </p:txBody>
+      </p:sp>
+      <p:sp>
+        <p:nvSpPr>
+          <p:cNvPr id="9" name="Text Placeholder 8"/>
+          <p:cNvSpPr>
+            <a:spLocks noGrp="1"/>
+          </p:cNvSpPr>
+          <p:nvPr>
+            <p:ph type="body" idx="6"/>
+          </p:nvPr>
+        </p:nvSpPr>
+        <p:spPr/>
+        <p:txBody>
+          <a:bodyPr wrap="square"/>
+          <a:lstStyle/>
+          <a:p>
+            <a:r>
+              <a:t>Days 30–60</a:t>
+            </a:r>
+          </a:p>
+          <a:p>
+            <a:r>
+              <a:t>Every brief from Workflow</a:t>
+            </a:r>
+          </a:p>
+          <a:p>
+            <a:r>
+              <a:t>Every quote and deck generated</a:t>
+            </a:r>
+          </a:p>
+          <a:p>
+            <a:r>
+              <a:t>Monday call off Leadership</a:t>
+            </a:r>
+          </a:p>
+          <a:p>
+            <a:r>
+              <a:t>Go or skip with the balance in view</a:t>
+            </a:r>
+          </a:p>
+        </p:txBody>
+      </p:sp>
+      <p:sp>
+        <p:nvSpPr>
+          <p:cNvPr id="10" name="Text Placeholder 9"/>
+          <p:cNvSpPr>
+            <a:spLocks noGrp="1"/>
+          </p:cNvSpPr>
+          <p:nvPr>
+            <p:ph type="body" idx="7"/>
+          </p:nvPr>
+        </p:nvSpPr>
+        <p:spPr/>
+        <p:txBody>
+          <a:bodyPr wrap="square"/>
+          <a:lstStyle/>
+          <a:p>
+            <a:r>
+              <a:t>3</a:t>
+            </a:r>
+          </a:p>
+        </p:txBody>
+      </p:sp>
+      <p:sp>
+        <p:nvSpPr>
+          <p:cNvPr id="11" name="Text Placeholder 10"/>
+          <p:cNvSpPr>
+            <a:spLocks noGrp="1"/>
+          </p:cNvSpPr>
+          <p:nvPr>
+            <p:ph type="body" idx="8"/>
+          </p:nvPr>
+        </p:nvSpPr>
+        <p:spPr/>
+        <p:txBody>
+          <a:bodyPr wrap="square"/>
+          <a:lstStyle/>
+          <a:p>
+            <a:r>
+              <a:rPr sz="1580"/>
+              <a:t>Measure, report, decide the next team</a:t>
+            </a:r>
+          </a:p>
+        </p:txBody>
+      </p:sp>
+      <p:sp>
+        <p:nvSpPr>
+          <p:cNvPr id="12" name="Text Placeholder 11"/>
+          <p:cNvSpPr>
+            <a:spLocks noGrp="1"/>
+          </p:cNvSpPr>
+          <p:nvPr>
+            <p:ph type="body" idx="9"/>
+          </p:nvPr>
+        </p:nvSpPr>
+        <p:spPr/>
+        <p:txBody>
+          <a:bodyPr wrap="square"/>
+          <a:lstStyle/>
+          <a:p>
+            <a:r>
+              <a:t>Days 60–90</a:t>
+            </a:r>
+          </a:p>
+          <a:p>
+            <a:r>
+              <a:t>Re-run the diary — the after figure</a:t>
+            </a:r>
+          </a:p>
+          <a:p>
+            <a:r>
+              <a:t>Report alerts, turnaround, overrun</a:t>
+            </a:r>
+          </a:p>
+          <a:p>
+            <a:r>
+              <a:t>Agree the budget line</a:t>
+            </a:r>
+          </a:p>
+          <a:p>
+            <a:r>
+              <a:t>Pick the next team to offer it to</a:t>
+            </a:r>
+          </a:p>
+        </p:txBody>
+      </p:sp>
+      <p:sp>
+        <p:nvSpPr>
+          <p:cNvPr id="13" name="Text Placeholder 12"/>
+          <p:cNvSpPr>
+            <a:spLocks noGrp="1"/>
+          </p:cNvSpPr>
+          <p:nvPr>
+            <p:ph type="body" idx="14"/>
+          </p:nvPr>
+        </p:nvSpPr>
+        <p:spPr/>
+        <p:txBody>
+          <a:bodyPr wrap="square"/>
+          <a:lstStyle/>
+          <a:p>
+            <a:r>
+              <a:rPr sz="1070"/>
+              <a:t>Nothing in the first 30 days needs a developer. The access model, the mobile view and the sync jobs exist; the rollout is invitations, a walkthrough and a diary.</a:t>
+            </a:r>
+          </a:p>
+        </p:txBody>
+      </p:sp>
+    </p:spTree>
+  </p:cSld>
+  <p:clrMapOvr>
+    <a:masterClrMapping/>
+  </p:clrMapOvr>
+</p:sld>
+</file>
+
+<file path=ppt/slides/slide25.xml><?xml version="1.0" encoding="utf-8"?>
+<p:sld xmlns:a="http://schemas.openxmlformats.org/drawingml/2006/main" xmlns:p="http://schemas.openxmlformats.org/presentationml/2006/main" xmlns:r="http://schemas.openxmlformats.org/officeDocument/2006/relationships">
+  <p:cSld>
+    <p:spTree>
+      <p:nvGrpSpPr>
+        <p:cNvPr id="1" name=""/>
+        <p:cNvGrpSpPr/>
+        <p:nvPr/>
+      </p:nvGrpSpPr>
+      <p:grpSpPr/>
+      <p:sp>
+        <p:nvSpPr>
+          <p:cNvPr id="2" name="Title 1"/>
+          <p:cNvSpPr>
+            <a:spLocks noGrp="1"/>
+          </p:cNvSpPr>
+          <p:nvPr>
+            <p:ph type="title"/>
+          </p:nvPr>
+        </p:nvSpPr>
+        <p:spPr/>
+        <p:txBody>
+          <a:bodyPr wrap="square"/>
+          <a:lstStyle/>
+          <a:p>
+            <a:r>
+              <a:t>What the FCC becomes next</a:t>
+            </a:r>
+          </a:p>
+        </p:txBody>
+      </p:sp>
+      <p:sp>
+        <p:nvSpPr>
+          <p:cNvPr id="3" name="Text Placeholder 2"/>
+          <p:cNvSpPr>
+            <a:spLocks noGrp="1"/>
+          </p:cNvSpPr>
+          <p:nvPr>
+            <p:ph type="body" idx="13"/>
+          </p:nvPr>
+        </p:nvSpPr>
+        <p:spPr/>
+        <p:txBody>
+          <a:bodyPr wrap="square"/>
+          <a:lstStyle/>
+          <a:p>
+            <a:r>
+              <a:t>It already reads every system the team runs; next it acts on what it reads.</a:t>
+            </a:r>
+          </a:p>
+        </p:txBody>
+      </p:sp>
+      <p:sp>
+        <p:nvSpPr>
+          <p:cNvPr id="4" name="Text Placeholder 3"/>
+          <p:cNvSpPr>
+            <a:spLocks noGrp="1"/>
+          </p:cNvSpPr>
+          <p:nvPr>
+            <p:ph type="body" idx="1"/>
+          </p:nvPr>
+        </p:nvSpPr>
+        <p:spPr/>
+        <p:txBody>
+          <a:bodyPr wrap="square"/>
+          <a:lstStyle/>
+          <a:p>
+            <a:r>
+              <a:rPr sz="1880"/>
+              <a:t>Feedback — client voice</a:t>
+            </a:r>
+          </a:p>
+        </p:txBody>
+      </p:sp>
+      <p:sp>
+        <p:nvSpPr>
+          <p:cNvPr id="5" name="Text Placeholder 4"/>
+          <p:cNvSpPr>
+            <a:spLocks noGrp="1"/>
+          </p:cNvSpPr>
+          <p:nvPr>
+            <p:ph type="body" idx="2"/>
+          </p:nvPr>
+        </p:nvSpPr>
+        <p:spPr/>
+        <p:txBody>
+          <a:bodyPr wrap="square"/>
+          <a:lstStyle/>
+          <a:p>
+            <a:r>
+              <a:t>Sentiment from every client email and call feeding the retention radar; a monthly one-page account report emailed automatically; read-only scorecard links a client can open; a pulse question after each review — churn risk as a number weeks before it is a conversation.</a:t>
+            </a:r>
+          </a:p>
+        </p:txBody>
+      </p:sp>
+      <p:sp>
+        <p:nvSpPr>
+          <p:cNvPr id="6" name="Text Placeholder 5"/>
+          <p:cNvSpPr>
+            <a:spLocks noGrp="1"/>
+          </p:cNvSpPr>
+          <p:nvPr>
+            <p:ph type="body" idx="3"/>
+          </p:nvPr>
+        </p:nvSpPr>
+        <p:spPr/>
+        <p:txBody>
+          <a:bodyPr wrap="square"/>
+          <a:lstStyle/>
+          <a:p>
+            <a:r>
+              <a:t>AM management</a:t>
+            </a:r>
+          </a:p>
+        </p:txBody>
+      </p:sp>
+      <p:sp>
+        <p:nvSpPr>
+          <p:cNvPr id="7" name="Text Placeholder 6"/>
+          <p:cNvSpPr>
+            <a:spLocks noGrp="1"/>
+          </p:cNvSpPr>
+          <p:nvPr>
+            <p:ph type="body" idx="4"/>
+          </p:nvPr>
+        </p:nvSpPr>
+        <p:spPr/>
+        <p:txBody>
+          <a:bodyPr wrap="square"/>
+          <a:lstStyle/>
+          <a:p>
+            <a:r>
+              <a:rPr sz="1500"/>
+              <a:t>Workload balanced across the team from the live task book; turnaround and SLA per AM; urgent hours against optimisation hours, tagged and reported; the Playbook as the coaching tool for what each account is missing; onboarding measured rather than asserted — time to first brief, per new starter.</a:t>
+            </a:r>
+          </a:p>
+        </p:txBody>
+      </p:sp>
+      <p:sp>
+        <p:nvSpPr>
+          <p:cNvPr id="8" name="Text Placeholder 7"/>
+          <p:cNvSpPr>
+            <a:spLocks noGrp="1"/>
+          </p:cNvSpPr>
+          <p:nvPr>
+            <p:ph type="body" idx="5"/>
+          </p:nvPr>
+        </p:nvSpPr>
+        <p:spPr/>
+        <p:txBody>
+          <a:bodyPr wrap="square"/>
+          <a:lstStyle/>
+          <a:p>
+            <a:r>
+              <a:t>Business engine</a:t>
+            </a:r>
+          </a:p>
+        </p:txBody>
+      </p:sp>
+      <p:sp>
+        <p:nvSpPr>
+          <p:cNvPr id="9" name="Text Placeholder 8"/>
+          <p:cNvSpPr>
+            <a:spLocks noGrp="1"/>
+          </p:cNvSpPr>
+          <p:nvPr>
+            <p:ph type="body" idx="6"/>
+          </p:nvPr>
+        </p:nvSpPr>
+        <p:spPr/>
+        <p:txBody>
+          <a:bodyPr wrap="square"/>
+          <a:lstStyle/>
+          <a:p>
+            <a:r>
+              <a:rPr sz="1500"/>
+              <a:t>Revenue forecast from retainer burn, the quote pipeline and new-product volumes; profitability per account; Tachyon drafting the brief and the client email from the finding; fixes pushed into FeedHero and Merchant Center from the screen; feed changes joined to Ads performance; the whole thing packaged for other teams in the network.</a:t>
+            </a:r>
+          </a:p>
+        </p:txBody>
+      </p:sp>
+      <p:sp>
+        <p:nvSpPr>
+          <p:cNvPr id="10" name="Text Placeholder 9"/>
+          <p:cNvSpPr>
+            <a:spLocks noGrp="1"/>
+          </p:cNvSpPr>
+          <p:nvPr>
+            <p:ph type="body" idx="14"/>
+          </p:nvPr>
+        </p:nvSpPr>
+        <p:spPr/>
+        <p:txBody>
+          <a:bodyPr wrap="square"/>
+          <a:lstStyle/>
+          <a:p>
+            <a:r>
+              <a:t>The dashboard starts making the first move.</a:t>
+            </a:r>
+          </a:p>
+        </p:txBody>
+      </p:sp>
+    </p:spTree>
+  </p:cSld>
+  <p:clrMapOvr>
+    <a:masterClrMapping/>
+  </p:clrMapOvr>
+</p:sld>
+</file>
+
+<file path=ppt/slides/slide26.xml><?xml version="1.0" encoding="utf-8"?>
+<p:sld xmlns:a="http://schemas.openxmlformats.org/drawingml/2006/main" xmlns:p="http://schemas.openxmlformats.org/presentationml/2006/main" xmlns:r="http://schemas.openxmlformats.org/officeDocument/2006/relationships">
+  <p:cSld>
+    <p:spTree>
+      <p:nvGrpSpPr>
+        <p:cNvPr id="1" name=""/>
+        <p:cNvGrpSpPr/>
+        <p:nvPr/>
+      </p:nvGrpSpPr>
+      <p:grpSpPr/>
+      <p:sp>
+        <p:nvSpPr>
+          <p:cNvPr id="2" name="Text Placeholder 1"/>
+          <p:cNvSpPr>
+            <a:spLocks noGrp="1"/>
+          </p:cNvSpPr>
+          <p:nvPr>
+            <p:ph type="body" idx="1"/>
+          </p:nvPr>
+        </p:nvSpPr>
+        <p:spPr/>
+        <p:txBody>
+          <a:bodyPr wrap="square"/>
+          <a:lstStyle/>
+          <a:p>
+            <a:r>
+              <a:rPr sz="2620"/>
+              <a:t>Every module that has landed in six weeks does the same thing: it puts the information in front of the account manager at the moment of the decision, so the team's time goes into client work instead of finding out what is going on. The vision is the same idea, one step further — the dashboard starts making the first move.</a:t>
+            </a:r>
+          </a:p>
+        </p:txBody>
+      </p:sp>
+      <p:sp>
+        <p:nvSpPr>
+          <p:cNvPr id="3" name="Text Placeholder 2"/>
+          <p:cNvSpPr>
+            <a:spLocks noGrp="1"/>
+          </p:cNvSpPr>
+          <p:nvPr>
+            <p:ph type="body" idx="11"/>
+          </p:nvPr>
+        </p:nvSpPr>
+        <p:spPr/>
+        <p:txBody>
+          <a:bodyPr wrap="square"/>
+          <a:lstStyle/>
+          <a:p>
+            <a:r>
+              <a:t>The through-line</a:t>
+            </a:r>
+          </a:p>
+        </p:txBody>
+      </p:sp>
+    </p:spTree>
+  </p:cSld>
+  <p:clrMapOvr>
+    <a:masterClrMapping/>
+  </p:clrMapOvr>
+</p:sld>
+</file>
+
+<file path=ppt/slides/slide27.xml><?xml version="1.0" encoding="utf-8"?>
+<p:sld xmlns:a="http://schemas.openxmlformats.org/drawingml/2006/main" xmlns:p="http://schemas.openxmlformats.org/presentationml/2006/main" xmlns:r="http://schemas.openxmlformats.org/officeDocument/2006/relationships">
+  <p:cSld>
+    <p:spTree>
+      <p:nvGrpSpPr>
+        <p:cNvPr id="1" name=""/>
+        <p:cNvGrpSpPr/>
+        <p:nvPr/>
+      </p:nvGrpSpPr>
+      <p:grpSpPr/>
+      <p:sp>
+        <p:nvSpPr>
+          <p:cNvPr id="2" name="Text Placeholder 1"/>
+          <p:cNvSpPr>
+            <a:spLocks noGrp="1"/>
+          </p:cNvSpPr>
+          <p:nvPr>
+            <p:ph type="body" idx="1"/>
+          </p:nvPr>
+        </p:nvSpPr>
+        <p:spPr/>
+        <p:txBody>
+          <a:bodyPr wrap="square"/>
+          <a:lstStyle/>
+          <a:p>
+            <a:r>
+              <a:rPr sz="2620"/>
+              <a:t>Reimburse the two-month Claude Code subscription that built the FCC, and approve the 90-day rollout to the London account-management team with one subscription per builder and Ray as product owner. The return is 2,530 hours a year at a team of five, and the three risks in chapter three stop being invisible.</a:t>
+            </a:r>
+          </a:p>
+        </p:txBody>
+      </p:sp>
+      <p:sp>
+        <p:nvSpPr>
+          <p:cNvPr id="3" name="Text Placeholder 2"/>
+          <p:cNvSpPr>
+            <a:spLocks noGrp="1"/>
+          </p:cNvSpPr>
+          <p:nvPr>
+            <p:ph type="body" idx="11"/>
+          </p:nvPr>
+        </p:nvSpPr>
+        <p:spPr/>
+        <p:txBody>
+          <a:bodyPr wrap="square"/>
+          <a:lstStyle/>
+          <a:p>
+            <a:r>
+              <a:t>The ask</a:t>
+            </a:r>
+          </a:p>
+        </p:txBody>
+      </p:sp>
+    </p:spTree>
+  </p:cSld>
+  <p:clrMapOvr>
+    <a:masterClrMapping/>
+  </p:clrMapOvr>
+</p:sld>
+</file>
+
+<file path=ppt/slides/slide28.xml><?xml version="1.0" encoding="utf-8"?>
 <p:sld xmlns:a="http://schemas.openxmlformats.org/drawingml/2006/main" xmlns:p="http://schemas.openxmlformats.org/presentationml/2006/main" xmlns:r="http://schemas.openxmlformats.org/officeDocument/2006/relationships">
   <p:cSld>
     <p:spTree>

--- a/docs/materials/FCC_Business_Case_Sep26.pptx
+++ b/docs/materials/FCC_Business_Case_Sep26.pptx
@@ -33,6 +33,10 @@
     <p:sldId id="281" r:id="rId31"/>
     <p:sldId id="282" r:id="rId32"/>
     <p:sldId id="283" r:id="rId33"/>
+    <p:sldId id="284" r:id="rId34"/>
+    <p:sldId id="285" r:id="rId35"/>
+    <p:sldId id="286" r:id="rId36"/>
+    <p:sldId id="287" r:id="rId37"/>
   </p:sldIdLst>
   <p:sldSz cx="12192000" cy="6858000"/>
   <p:notesSz cx="6858000" cy="9144000"/>
@@ -11118,6 +11122,768 @@
 </file>
 
 <file path=ppt/slides/slide10.xml><?xml version="1.0" encoding="utf-8"?>
+<p:sld xmlns:a="http://schemas.openxmlformats.org/drawingml/2006/main" xmlns:p="http://schemas.openxmlformats.org/presentationml/2006/main" xmlns:r="http://schemas.openxmlformats.org/officeDocument/2006/relationships">
+  <p:cSld>
+    <p:spTree>
+      <p:nvGrpSpPr>
+        <p:cNvPr id="1" name=""/>
+        <p:cNvGrpSpPr/>
+        <p:nvPr/>
+      </p:nvGrpSpPr>
+      <p:grpSpPr/>
+      <p:sp>
+        <p:nvSpPr>
+          <p:cNvPr id="2" name="Title 1"/>
+          <p:cNvSpPr>
+            <a:spLocks noGrp="1"/>
+          </p:cNvSpPr>
+          <p:nvPr>
+            <p:ph type="title"/>
+          </p:nvPr>
+        </p:nvSpPr>
+        <p:spPr/>
+        <p:txBody>
+          <a:bodyPr wrap="square"/>
+          <a:lstStyle/>
+          <a:p>
+            <a:r>
+              <a:t>Three things nobody could see</a:t>
+            </a:r>
+          </a:p>
+        </p:txBody>
+      </p:sp>
+      <p:sp>
+        <p:nvSpPr>
+          <p:cNvPr id="3" name="Text Placeholder 2"/>
+          <p:cNvSpPr>
+            <a:spLocks noGrp="1"/>
+          </p:cNvSpPr>
+          <p:nvPr>
+            <p:ph type="body" idx="13"/>
+          </p:nvPr>
+        </p:nvSpPr>
+        <p:spPr/>
+        <p:txBody>
+          <a:bodyPr wrap="square"/>
+          <a:lstStyle/>
+          <a:p>
+            <a:r>
+              <a:t>Not hypotheticals — each was read off the team’s own systems in the first weeks of the FCC being live.</a:t>
+            </a:r>
+          </a:p>
+        </p:txBody>
+      </p:sp>
+      <p:sp>
+        <p:nvSpPr>
+          <p:cNvPr id="4" name="Text Placeholder 3"/>
+          <p:cNvSpPr>
+            <a:spLocks noGrp="1"/>
+          </p:cNvSpPr>
+          <p:nvPr>
+            <p:ph type="body" idx="1"/>
+          </p:nvPr>
+        </p:nvSpPr>
+        <p:spPr/>
+        <p:txBody>
+          <a:bodyPr wrap="square"/>
+          <a:lstStyle/>
+          <a:p>
+            <a:r>
+              <a:t>378 hours in the red</a:t>
+            </a:r>
+          </a:p>
+        </p:txBody>
+      </p:sp>
+      <p:sp>
+        <p:nvSpPr>
+          <p:cNvPr id="5" name="Text Placeholder 4"/>
+          <p:cNvSpPr>
+            <a:spLocks noGrp="1"/>
+          </p:cNvSpPr>
+          <p:nvPr>
+            <p:ph type="body" idx="2"/>
+          </p:nvPr>
+        </p:nvSpPr>
+        <p:spPr/>
+        <p:txBody>
+          <a:bodyPr wrap="square"/>
+          <a:lstStyle/>
+          <a:p>
+            <a:r>
+              <a:t>Across 24 markets, carried forward month after month; ten of the 19 retainer markets are in the red. The AM saying yes to the next task could not see it — the Task Manager showed it one client login at a time.</a:t>
+            </a:r>
+          </a:p>
+          <a:p>
+            <a:r>
+              <a:t>Task Manager, 22 Sep 2026</a:t>
+            </a:r>
+          </a:p>
+        </p:txBody>
+      </p:sp>
+      <p:sp>
+        <p:nvSpPr>
+          <p:cNvPr id="6" name="Text Placeholder 5"/>
+          <p:cNvSpPr>
+            <a:spLocks noGrp="1"/>
+          </p:cNvSpPr>
+          <p:nvPr>
+            <p:ph type="body" idx="3"/>
+          </p:nvPr>
+        </p:nvSpPr>
+        <p:spPr/>
+        <p:txBody>
+          <a:bodyPr wrap="square"/>
+          <a:lstStyle/>
+          <a:p>
+            <a:r>
+              <a:t>60% of weeks skipped</a:t>
+            </a:r>
+          </a:p>
+        </p:txBody>
+      </p:sp>
+      <p:sp>
+        <p:nvSpPr>
+          <p:cNvPr id="7" name="Text Placeholder 6"/>
+          <p:cNvSpPr>
+            <a:spLocks noGrp="1"/>
+          </p:cNvSpPr>
+          <p:nvPr>
+            <p:ph type="body" idx="4"/>
+          </p:nvPr>
+        </p:nvSpPr>
+        <p:spPr/>
+        <p:txBody>
+          <a:bodyPr wrap="square"/>
+          <a:lstStyle/>
+          <a:p>
+            <a:r>
+              <a:t>In twelve months, 838 of 1,398 scheduled weeks of title, keyword and product-type work were skipped — 2,750 hours of optimisation that never landed. 67 tasks sit on a skip streak of two months or more; the longest is 14.</a:t>
+            </a:r>
+          </a:p>
+          <a:p>
+            <a:r>
+              <a:t>Content team schedule, 15 Sep 2026</a:t>
+            </a:r>
+          </a:p>
+        </p:txBody>
+      </p:sp>
+      <p:sp>
+        <p:nvSpPr>
+          <p:cNvPr id="8" name="Text Placeholder 7"/>
+          <p:cNvSpPr>
+            <a:spLocks noGrp="1"/>
+          </p:cNvSpPr>
+          <p:nvPr>
+            <p:ph type="body" idx="5"/>
+          </p:nvPr>
+        </p:nvSpPr>
+        <p:spPr/>
+        <p:txBody>
+          <a:bodyPr wrap="square"/>
+          <a:lstStyle/>
+          <a:p>
+            <a:r>
+              <a:t>Briefed, but invisible</a:t>
+            </a:r>
+          </a:p>
+        </p:txBody>
+      </p:sp>
+      <p:sp>
+        <p:nvSpPr>
+          <p:cNvPr id="9" name="Text Placeholder 8"/>
+          <p:cNvSpPr>
+            <a:spLocks noGrp="1"/>
+          </p:cNvSpPr>
+          <p:nvPr>
+            <p:ph type="body" idx="6"/>
+          </p:nvPr>
+        </p:nvSpPr>
+        <p:spPr/>
+        <p:txBody>
+          <a:bodyPr wrap="square"/>
+          <a:lstStyle/>
+          <a:p>
+            <a:r>
+              <a:t>Two Reiss keyword themes were briefed by a colleague and picked up by ASPL, yet the board read “not briefed” — the save had failed silently and the only record sat on one laptop. The work had started; the team could not see it.</a:t>
+            </a:r>
+          </a:p>
+          <a:p>
+            <a:r>
+              <a:t>Workflow, 16 Sep 2026</a:t>
+            </a:r>
+          </a:p>
+        </p:txBody>
+      </p:sp>
+      <p:sp>
+        <p:nvSpPr>
+          <p:cNvPr id="10" name="Text Placeholder 9"/>
+          <p:cNvSpPr>
+            <a:spLocks noGrp="1"/>
+          </p:cNvSpPr>
+          <p:nvPr>
+            <p:ph type="body" idx="14"/>
+          </p:nvPr>
+        </p:nvSpPr>
+        <p:spPr/>
+        <p:txBody>
+          <a:bodyPr wrap="square"/>
+          <a:lstStyle/>
+          <a:p>
+            <a:r>
+              <a:t>The cost was never a dramatic failure.</a:t>
+            </a:r>
+          </a:p>
+        </p:txBody>
+      </p:sp>
+    </p:spTree>
+  </p:cSld>
+  <p:clrMapOvr>
+    <a:masterClrMapping/>
+  </p:clrMapOvr>
+</p:sld>
+</file>
+
+<file path=ppt/slides/slide11.xml><?xml version="1.0" encoding="utf-8"?>
+<p:sld xmlns:a="http://schemas.openxmlformats.org/drawingml/2006/main" xmlns:p="http://schemas.openxmlformats.org/presentationml/2006/main" xmlns:r="http://schemas.openxmlformats.org/officeDocument/2006/relationships">
+  <p:cSld>
+    <p:spTree>
+      <p:nvGrpSpPr>
+        <p:cNvPr id="1" name=""/>
+        <p:cNvGrpSpPr/>
+        <p:nvPr/>
+      </p:nvGrpSpPr>
+      <p:grpSpPr/>
+      <p:sp>
+        <p:nvSpPr>
+          <p:cNvPr id="2" name="Text Placeholder 1"/>
+          <p:cNvSpPr>
+            <a:spLocks noGrp="1"/>
+          </p:cNvSpPr>
+          <p:nvPr>
+            <p:ph type="body" idx="11"/>
+          </p:nvPr>
+        </p:nvSpPr>
+        <p:spPr/>
+        <p:txBody>
+          <a:bodyPr wrap="square"/>
+          <a:lstStyle/>
+          <a:p>
+            <a:r>
+              <a:t>Chapter two</a:t>
+            </a:r>
+          </a:p>
+        </p:txBody>
+      </p:sp>
+      <p:sp>
+        <p:nvSpPr>
+          <p:cNvPr id="3" name="Title 2"/>
+          <p:cNvSpPr>
+            <a:spLocks noGrp="1"/>
+          </p:cNvSpPr>
+          <p:nvPr>
+            <p:ph type="title"/>
+          </p:nvPr>
+        </p:nvSpPr>
+        <p:spPr/>
+        <p:txBody>
+          <a:bodyPr wrap="square"/>
+          <a:lstStyle/>
+          <a:p>
+            <a:r>
+              <a:t>The solution</a:t>
+            </a:r>
+          </a:p>
+        </p:txBody>
+      </p:sp>
+      <p:sp>
+        <p:nvSpPr>
+          <p:cNvPr id="4" name="Text Placeholder 3"/>
+          <p:cNvSpPr>
+            <a:spLocks noGrp="1"/>
+          </p:cNvSpPr>
+          <p:nvPr>
+            <p:ph type="body" idx="1"/>
+          </p:nvPr>
+        </p:nvSpPr>
+        <p:spPr/>
+        <p:txBody>
+          <a:bodyPr wrap="square"/>
+          <a:lstStyle/>
+          <a:p>
+            <a:r>
+              <a:t>One command center on top of the tools the team already uses — nothing new to log into, nothing re-keyed.</a:t>
+            </a:r>
+          </a:p>
+        </p:txBody>
+      </p:sp>
+    </p:spTree>
+  </p:cSld>
+  <p:clrMapOvr>
+    <a:masterClrMapping/>
+  </p:clrMapOvr>
+</p:sld>
+</file>
+
+<file path=ppt/slides/slide12.xml><?xml version="1.0" encoding="utf-8"?>
+<p:sld xmlns:a="http://schemas.openxmlformats.org/drawingml/2006/main" xmlns:p="http://schemas.openxmlformats.org/presentationml/2006/main" xmlns:r="http://schemas.openxmlformats.org/officeDocument/2006/relationships">
+  <p:cSld>
+    <p:spTree>
+      <p:nvGrpSpPr>
+        <p:cNvPr id="1" name=""/>
+        <p:cNvGrpSpPr/>
+        <p:nvPr/>
+      </p:nvGrpSpPr>
+      <p:grpSpPr/>
+      <p:sp>
+        <p:nvSpPr>
+          <p:cNvPr id="2" name="Title 1"/>
+          <p:cNvSpPr>
+            <a:spLocks noGrp="1"/>
+          </p:cNvSpPr>
+          <p:nvPr>
+            <p:ph type="title"/>
+          </p:nvPr>
+        </p:nvSpPr>
+        <p:spPr/>
+        <p:txBody>
+          <a:bodyPr wrap="square"/>
+          <a:lstStyle/>
+          <a:p>
+            <a:r>
+              <a:t>Twenty modules, six weeks, £0 infrastructure</a:t>
+            </a:r>
+          </a:p>
+        </p:txBody>
+      </p:sp>
+      <p:sp>
+        <p:nvSpPr>
+          <p:cNvPr id="3" name="Text Placeholder 2"/>
+          <p:cNvSpPr>
+            <a:spLocks noGrp="1"/>
+          </p:cNvSpPr>
+          <p:nvPr>
+            <p:ph type="body" idx="11"/>
+          </p:nvPr>
+        </p:nvSpPr>
+        <p:spPr/>
+        <p:txBody>
+          <a:bodyPr wrap="square"/>
+          <a:lstStyle/>
+          <a:p>
+            <a:r>
+              <a:t>Built 11 Aug – 22 Sep 2026 with Claude Code: 275 merged builds, 1,452 tripwires, SSO on every screen.</a:t>
+            </a:r>
+          </a:p>
+        </p:txBody>
+      </p:sp>
+      <p:sp>
+        <p:nvSpPr>
+          <p:cNvPr id="4" name="Text Placeholder 3"/>
+          <p:cNvSpPr>
+            <a:spLocks noGrp="1"/>
+          </p:cNvSpPr>
+          <p:nvPr>
+            <p:ph type="body" idx="1"/>
+          </p:nvPr>
+        </p:nvSpPr>
+        <p:spPr/>
+        <p:txBody>
+          <a:bodyPr wrap="square"/>
+          <a:lstStyle/>
+          <a:p>
+            <a:r>
+              <a:t>6 wks</a:t>
+            </a:r>
+          </a:p>
+        </p:txBody>
+      </p:sp>
+      <p:sp>
+        <p:nvSpPr>
+          <p:cNvPr id="5" name="Text Placeholder 4"/>
+          <p:cNvSpPr>
+            <a:spLocks noGrp="1"/>
+          </p:cNvSpPr>
+          <p:nvPr>
+            <p:ph type="body" idx="2"/>
+          </p:nvPr>
+        </p:nvSpPr>
+        <p:spPr/>
+        <p:txBody>
+          <a:bodyPr wrap="square"/>
+          <a:lstStyle/>
+          <a:p>
+            <a:r>
+              <a:t>From first commit to 20 live modules</a:t>
+            </a:r>
+          </a:p>
+        </p:txBody>
+      </p:sp>
+      <p:sp>
+        <p:nvSpPr>
+          <p:cNvPr id="6" name="Text Placeholder 5"/>
+          <p:cNvSpPr>
+            <a:spLocks noGrp="1"/>
+          </p:cNvSpPr>
+          <p:nvPr>
+            <p:ph type="body" idx="3"/>
+          </p:nvPr>
+        </p:nvSpPr>
+        <p:spPr/>
+        <p:txBody>
+          <a:bodyPr wrap="square"/>
+          <a:lstStyle/>
+          <a:p>
+            <a:r>
+              <a:t>275</a:t>
+            </a:r>
+          </a:p>
+        </p:txBody>
+      </p:sp>
+      <p:sp>
+        <p:nvSpPr>
+          <p:cNvPr id="7" name="Text Placeholder 6"/>
+          <p:cNvSpPr>
+            <a:spLocks noGrp="1"/>
+          </p:cNvSpPr>
+          <p:nvPr>
+            <p:ph type="body" idx="4"/>
+          </p:nvPr>
+        </p:nvSpPr>
+        <p:spPr/>
+        <p:txBody>
+          <a:bodyPr wrap="square"/>
+          <a:lstStyle/>
+          <a:p>
+            <a:r>
+              <a:t>Merged builds, each gated by automated checks</a:t>
+            </a:r>
+          </a:p>
+        </p:txBody>
+      </p:sp>
+      <p:sp>
+        <p:nvSpPr>
+          <p:cNvPr id="8" name="Text Placeholder 7"/>
+          <p:cNvSpPr>
+            <a:spLocks noGrp="1"/>
+          </p:cNvSpPr>
+          <p:nvPr>
+            <p:ph type="body" idx="5"/>
+          </p:nvPr>
+        </p:nvSpPr>
+        <p:spPr/>
+        <p:txBody>
+          <a:bodyPr wrap="square"/>
+          <a:lstStyle/>
+          <a:p>
+            <a:r>
+              <a:t>£0</a:t>
+            </a:r>
+          </a:p>
+        </p:txBody>
+      </p:sp>
+      <p:sp>
+        <p:nvSpPr>
+          <p:cNvPr id="9" name="Text Placeholder 8"/>
+          <p:cNvSpPr>
+            <a:spLocks noGrp="1"/>
+          </p:cNvSpPr>
+          <p:nvPr>
+            <p:ph type="body" idx="6"/>
+          </p:nvPr>
+        </p:nvSpPr>
+        <p:spPr/>
+        <p:txBody>
+          <a:bodyPr wrap="square"/>
+          <a:lstStyle/>
+          <a:p>
+            <a:r>
+              <a:t>Infrastructure — Cloudflare free tier + Access SSO</a:t>
+            </a:r>
+          </a:p>
+        </p:txBody>
+      </p:sp>
+      <p:sp>
+        <p:nvSpPr>
+          <p:cNvPr id="10" name="Text Placeholder 9"/>
+          <p:cNvSpPr>
+            <a:spLocks noGrp="1"/>
+          </p:cNvSpPr>
+          <p:nvPr>
+            <p:ph type="body" idx="14"/>
+          </p:nvPr>
+        </p:nvSpPr>
+        <p:spPr/>
+        <p:txBody>
+          <a:bodyPr wrap="square"/>
+          <a:lstStyle/>
+          <a:p>
+            <a:r>
+              <a:t>No licences, no vendor, no implementation partner — one AM, Claude Code and six weeks.</a:t>
+            </a:r>
+          </a:p>
+        </p:txBody>
+      </p:sp>
+    </p:spTree>
+  </p:cSld>
+  <p:clrMapOvr>
+    <a:masterClrMapping/>
+  </p:clrMapOvr>
+</p:sld>
+</file>
+
+<file path=ppt/slides/slide13.xml><?xml version="1.0" encoding="utf-8"?>
+<p:sld xmlns:a="http://schemas.openxmlformats.org/drawingml/2006/main" xmlns:p="http://schemas.openxmlformats.org/presentationml/2006/main" xmlns:r="http://schemas.openxmlformats.org/officeDocument/2006/relationships">
+  <p:cSld>
+    <p:spTree>
+      <p:nvGrpSpPr>
+        <p:cNvPr id="1" name=""/>
+        <p:cNvGrpSpPr/>
+        <p:nvPr/>
+      </p:nvGrpSpPr>
+      <p:grpSpPr/>
+      <p:sp>
+        <p:nvSpPr>
+          <p:cNvPr id="2" name="Title 1"/>
+          <p:cNvSpPr>
+            <a:spLocks noGrp="1"/>
+          </p:cNvSpPr>
+          <p:nvPr>
+            <p:ph type="title"/>
+          </p:nvPr>
+        </p:nvSpPr>
+        <p:spPr/>
+        <p:txBody>
+          <a:bodyPr wrap="square"/>
+          <a:lstStyle/>
+          <a:p>
+            <a:r>
+              <a:t>Monitor, run, sell, lead</a:t>
+            </a:r>
+          </a:p>
+        </p:txBody>
+      </p:sp>
+      <p:sp>
+        <p:nvSpPr>
+          <p:cNvPr id="3" name="Text Placeholder 2"/>
+          <p:cNvSpPr>
+            <a:spLocks noGrp="1"/>
+          </p:cNvSpPr>
+          <p:nvPr>
+            <p:ph type="body" idx="13"/>
+          </p:nvPr>
+        </p:nvSpPr>
+        <p:spPr/>
+        <p:txBody>
+          <a:bodyPr wrap="square"/>
+          <a:lstStyle/>
+          <a:p>
+            <a:r>
+              <a:t>Twenty modules, four jobs — each one reading the systems the team already runs.</a:t>
+            </a:r>
+          </a:p>
+        </p:txBody>
+      </p:sp>
+      <p:sp>
+        <p:nvSpPr>
+          <p:cNvPr id="4" name="Text Placeholder 3"/>
+          <p:cNvSpPr>
+            <a:spLocks noGrp="1"/>
+          </p:cNvSpPr>
+          <p:nvPr>
+            <p:ph type="body" idx="1"/>
+          </p:nvPr>
+        </p:nvSpPr>
+        <p:spPr/>
+        <p:txBody>
+          <a:bodyPr wrap="square"/>
+          <a:lstStyle/>
+          <a:p>
+            <a:r>
+              <a:t>Monitor — the feeds watch themselves</a:t>
+            </a:r>
+          </a:p>
+        </p:txBody>
+      </p:sp>
+      <p:sp>
+        <p:nvSpPr>
+          <p:cNvPr id="5" name="Text Placeholder 4"/>
+          <p:cNvSpPr>
+            <a:spLocks noGrp="1"/>
+          </p:cNvSpPr>
+          <p:nvPr>
+            <p:ph type="body" idx="2"/>
+          </p:nvPr>
+        </p:nvSpPr>
+        <p:spPr/>
+        <p:txBody>
+          <a:bodyPr wrap="square"/>
+          <a:lstStyle/>
+          <a:p>
+            <a:r>
+              <a:rPr sz="1320"/>
+              <a:t>Label Guard, Product Type Guard, Golden Record, Product Volume, Overlays and Feed Lab scan all 62 feeds four times a day, alert on drop-offs against a known-good baseline, and draft the client email to confirm a change before anyone acts.</a:t>
+            </a:r>
+          </a:p>
+        </p:txBody>
+      </p:sp>
+      <p:sp>
+        <p:nvSpPr>
+          <p:cNvPr id="6" name="Text Placeholder 5"/>
+          <p:cNvSpPr>
+            <a:spLocks noGrp="1"/>
+          </p:cNvSpPr>
+          <p:nvPr>
+            <p:ph type="body" idx="3"/>
+          </p:nvPr>
+        </p:nvSpPr>
+        <p:spPr/>
+        <p:txBody>
+          <a:bodyPr wrap="square"/>
+          <a:lstStyle/>
+          <a:p>
+            <a:r>
+              <a:t>Run — the work moves in one place</a:t>
+            </a:r>
+          </a:p>
+        </p:txBody>
+      </p:sp>
+      <p:sp>
+        <p:nvSpPr>
+          <p:cNvPr id="7" name="Text Placeholder 6"/>
+          <p:cNvSpPr>
+            <a:spLocks noGrp="1"/>
+          </p:cNvSpPr>
+          <p:nvPr>
+            <p:ph type="body" idx="4"/>
+          </p:nvPr>
+        </p:nvSpPr>
+        <p:spPr/>
+        <p:txBody>
+          <a:bodyPr wrap="square"/>
+          <a:lstStyle/>
+          <a:p>
+            <a:r>
+              <a:t>Workflow takes every task from the plans, the inbox and call notes into one Intake, briefs ASPL with a coded ticket, moves stages from email replies automatically, and shows the retainer balance beside every decision.</a:t>
+            </a:r>
+          </a:p>
+        </p:txBody>
+      </p:sp>
+      <p:sp>
+        <p:nvSpPr>
+          <p:cNvPr id="8" name="Text Placeholder 7"/>
+          <p:cNvSpPr>
+            <a:spLocks noGrp="1"/>
+          </p:cNvSpPr>
+          <p:nvPr>
+            <p:ph type="body" idx="5"/>
+          </p:nvPr>
+        </p:nvSpPr>
+        <p:spPr/>
+        <p:txBody>
+          <a:bodyPr wrap="square"/>
+          <a:lstStyle/>
+          <a:p>
+            <a:r>
+              <a:t>Sell — quotes and decks, live</a:t>
+            </a:r>
+          </a:p>
+        </p:txBody>
+      </p:sp>
+      <p:sp>
+        <p:nvSpPr>
+          <p:cNvPr id="9" name="Text Placeholder 8"/>
+          <p:cNvSpPr>
+            <a:spLocks noGrp="1"/>
+          </p:cNvSpPr>
+          <p:nvPr>
+            <p:ph type="body" idx="6"/>
+          </p:nvPr>
+        </p:nvSpPr>
+        <p:spPr/>
+        <p:txBody>
+          <a:bodyPr wrap="square"/>
+          <a:lstStyle/>
+          <a:p>
+            <a:r>
+              <a:rPr sz="1320"/>
+              <a:t>AI Quote prices work per SKU and exports the finance team's own workbook; the Deck Generator builds strategy reviews on the core template; the Keyword Calendar turns a client's marketing plan into briefs and a one-page client PDF.</a:t>
+            </a:r>
+          </a:p>
+        </p:txBody>
+      </p:sp>
+      <p:sp>
+        <p:nvSpPr>
+          <p:cNvPr id="10" name="Text Placeholder 9"/>
+          <p:cNvSpPr>
+            <a:spLocks noGrp="1"/>
+          </p:cNvSpPr>
+          <p:nvPr>
+            <p:ph type="body" idx="7"/>
+          </p:nvPr>
+        </p:nvSpPr>
+        <p:spPr/>
+        <p:txBody>
+          <a:bodyPr wrap="square"/>
+          <a:lstStyle/>
+          <a:p>
+            <a:r>
+              <a:t>Lead — the book at a glance</a:t>
+            </a:r>
+          </a:p>
+        </p:txBody>
+      </p:sp>
+      <p:sp>
+        <p:nvSpPr>
+          <p:cNvPr id="11" name="Text Placeholder 10"/>
+          <p:cNvSpPr>
+            <a:spLocks noGrp="1"/>
+          </p:cNvSpPr>
+          <p:nvPr>
+            <p:ph type="body" idx="8"/>
+          </p:nvPr>
+        </p:nvSpPr>
+        <p:spPr/>
+        <p:txBody>
+          <a:bodyPr wrap="square"/>
+          <a:lstStyle/>
+          <a:p>
+            <a:r>
+              <a:rPr sz="1320"/>
+              <a:t>Leadership reads book health, retainer burn-down and a retention radar per account; the Task Manager module makes the hours database searchable; the Playbook tells each AM what is landing, stalling or missing on every account.</a:t>
+            </a:r>
+          </a:p>
+        </p:txBody>
+      </p:sp>
+      <p:sp>
+        <p:nvSpPr>
+          <p:cNvPr id="12" name="Text Placeholder 11"/>
+          <p:cNvSpPr>
+            <a:spLocks noGrp="1"/>
+          </p:cNvSpPr>
+          <p:nvPr>
+            <p:ph type="body" idx="14"/>
+          </p:nvPr>
+        </p:nvSpPr>
+        <p:spPr/>
+        <p:txBody>
+          <a:bodyPr wrap="square"/>
+          <a:lstStyle/>
+          <a:p>
+            <a:r>
+              <a:t>Every module reads the systems the team already runs, and writes back to them.</a:t>
+            </a:r>
+          </a:p>
+        </p:txBody>
+      </p:sp>
+    </p:spTree>
+  </p:cSld>
+  <p:clrMapOvr>
+    <a:masterClrMapping/>
+  </p:clrMapOvr>
+</p:sld>
+</file>
+
+<file path=ppt/slides/slide14.xml><?xml version="1.0" encoding="utf-8"?>
 <p:sld xmlns:a="http://schemas.openxmlformats.org/drawingml/2006/main" xmlns:p="http://schemas.openxmlformats.org/presentationml/2006/main" xmlns:r="http://schemas.openxmlformats.org/officeDocument/2006/relationships">
   <p:cSld>
     <p:spTree>
@@ -11606,7 +12372,7 @@
 </p:sld>
 </file>
 
-<file path=ppt/slides/slide11.xml><?xml version="1.0" encoding="utf-8"?>
+<file path=ppt/slides/slide15.xml><?xml version="1.0" encoding="utf-8"?>
 <p:sld xmlns:a="http://schemas.openxmlformats.org/drawingml/2006/main" xmlns:p="http://schemas.openxmlformats.org/presentationml/2006/main" xmlns:r="http://schemas.openxmlformats.org/officeDocument/2006/relationships">
   <p:cSld>
     <p:spTree>
@@ -11771,7 +12537,7 @@
 </p:sld>
 </file>
 
-<file path=ppt/slides/slide12.xml><?xml version="1.0" encoding="utf-8"?>
+<file path=ppt/slides/slide16.xml><?xml version="1.0" encoding="utf-8"?>
 <p:sld xmlns:a="http://schemas.openxmlformats.org/drawingml/2006/main" xmlns:p="http://schemas.openxmlformats.org/presentationml/2006/main" xmlns:r="http://schemas.openxmlformats.org/officeDocument/2006/relationships">
   <p:cSld>
     <p:spTree>
@@ -11852,7 +12618,7 @@
 </p:sld>
 </file>
 
-<file path=ppt/slides/slide13.xml><?xml version="1.0" encoding="utf-8"?>
+<file path=ppt/slides/slide17.xml><?xml version="1.0" encoding="utf-8"?>
 <p:sld xmlns:a="http://schemas.openxmlformats.org/drawingml/2006/main" xmlns:p="http://schemas.openxmlformats.org/presentationml/2006/main" xmlns:r="http://schemas.openxmlformats.org/officeDocument/2006/relationships">
   <p:cSld>
     <p:spTree>
@@ -12518,667 +13284,6 @@
 </p:sld>
 </file>
 
-<file path=ppt/slides/slide14.xml><?xml version="1.0" encoding="utf-8"?>
-<p:sld xmlns:a="http://schemas.openxmlformats.org/drawingml/2006/main" xmlns:p="http://schemas.openxmlformats.org/presentationml/2006/main" xmlns:r="http://schemas.openxmlformats.org/officeDocument/2006/relationships">
-  <p:cSld>
-    <p:spTree>
-      <p:nvGrpSpPr>
-        <p:cNvPr id="1" name=""/>
-        <p:cNvGrpSpPr/>
-        <p:nvPr/>
-      </p:nvGrpSpPr>
-      <p:grpSpPr/>
-      <p:sp>
-        <p:nvSpPr>
-          <p:cNvPr id="2" name="Title 1"/>
-          <p:cNvSpPr>
-            <a:spLocks noGrp="1"/>
-          </p:cNvSpPr>
-          <p:nvPr>
-            <p:ph type="title"/>
-          </p:nvPr>
-        </p:nvSpPr>
-        <p:spPr/>
-        <p:txBody>
-          <a:bodyPr wrap="square"/>
-          <a:lstStyle/>
-          <a:p>
-            <a:r>
-              <a:t>A year without the FCC, and a year with it</a:t>
-            </a:r>
-          </a:p>
-        </p:txBody>
-      </p:sp>
-      <p:sp>
-        <p:nvSpPr>
-          <p:cNvPr id="3" name="Text Placeholder 2"/>
-          <p:cNvSpPr>
-            <a:spLocks noGrp="1"/>
-          </p:cNvSpPr>
-          <p:nvPr>
-            <p:ph type="body" idx="11"/>
-          </p:nvPr>
-        </p:nvSpPr>
-        <p:spPr/>
-        <p:txBody>
-          <a:bodyPr wrap="square"/>
-          <a:lstStyle/>
-          <a:p>
-            <a:r>
-              <a:t>Five London AMs, 46 working weeks; the per-AM hours above, multiplied out.</a:t>
-            </a:r>
-          </a:p>
-        </p:txBody>
-      </p:sp>
-      <p:sp>
-        <p:nvSpPr>
-          <p:cNvPr id="4" name="Text Placeholder 3"/>
-          <p:cNvSpPr>
-            <a:spLocks noGrp="1"/>
-          </p:cNvSpPr>
-          <p:nvPr>
-            <p:ph type="body" idx="1"/>
-          </p:nvPr>
-        </p:nvSpPr>
-        <p:spPr/>
-        <p:txBody>
-          <a:bodyPr wrap="square"/>
-          <a:lstStyle/>
-          <a:p>
-            <a:r>
-              <a:t>3,450 h</a:t>
-            </a:r>
-          </a:p>
-        </p:txBody>
-      </p:sp>
-      <p:sp>
-        <p:nvSpPr>
-          <p:cNvPr id="5" name="Text Placeholder 4"/>
-          <p:cNvSpPr>
-            <a:spLocks noGrp="1"/>
-          </p:cNvSpPr>
-          <p:nvPr>
-            <p:ph type="body" idx="2"/>
-          </p:nvPr>
-        </p:nvSpPr>
-        <p:spPr/>
-        <p:txBody>
-          <a:bodyPr wrap="square"/>
-          <a:lstStyle/>
-          <a:p>
-            <a:r>
-              <a:t>Wasted a year on fetching and re-keying without the FCC</a:t>
-            </a:r>
-          </a:p>
-        </p:txBody>
-      </p:sp>
-      <p:sp>
-        <p:nvSpPr>
-          <p:cNvPr id="6" name="Text Placeholder 5"/>
-          <p:cNvSpPr>
-            <a:spLocks noGrp="1"/>
-          </p:cNvSpPr>
-          <p:nvPr>
-            <p:ph type="body" idx="3"/>
-          </p:nvPr>
-        </p:nvSpPr>
-        <p:spPr/>
-        <p:txBody>
-          <a:bodyPr wrap="square"/>
-          <a:lstStyle/>
-          <a:p>
-            <a:r>
-              <a:t>2,530 h</a:t>
-            </a:r>
-          </a:p>
-        </p:txBody>
-      </p:sp>
-      <p:sp>
-        <p:nvSpPr>
-          <p:cNvPr id="7" name="Text Placeholder 6"/>
-          <p:cNvSpPr>
-            <a:spLocks noGrp="1"/>
-          </p:cNvSpPr>
-          <p:nvPr>
-            <p:ph type="body" idx="4"/>
-          </p:nvPr>
-        </p:nvSpPr>
-        <p:spPr/>
-        <p:txBody>
-          <a:bodyPr wrap="square"/>
-          <a:lstStyle/>
-          <a:p>
-            <a:r>
-              <a:t>Saved a year with it — 316 AM-days back for client work</a:t>
-            </a:r>
-          </a:p>
-        </p:txBody>
-      </p:sp>
-      <p:sp>
-        <p:nvSpPr>
-          <p:cNvPr id="8" name="Text Placeholder 7"/>
-          <p:cNvSpPr>
-            <a:spLocks noGrp="1"/>
-          </p:cNvSpPr>
-          <p:nvPr>
-            <p:ph type="body" idx="5"/>
-          </p:nvPr>
-        </p:nvSpPr>
-        <p:spPr/>
-        <p:txBody>
-          <a:bodyPr wrap="square"/>
-          <a:lstStyle/>
-          <a:p>
-            <a:r>
-              <a:t>£185k</a:t>
-            </a:r>
-          </a:p>
-        </p:txBody>
-      </p:sp>
-      <p:sp>
-        <p:nvSpPr>
-          <p:cNvPr id="9" name="Text Placeholder 8"/>
-          <p:cNvSpPr>
-            <a:spLocks noGrp="1"/>
-          </p:cNvSpPr>
-          <p:nvPr>
-            <p:ph type="body" idx="6"/>
-          </p:nvPr>
-        </p:nvSpPr>
-        <p:spPr/>
-        <p:txBody>
-          <a:bodyPr wrap="square"/>
-          <a:lstStyle/>
-          <a:p>
-            <a:r>
-              <a:t>Billable capacity released at the £73.125 ratecard hour</a:t>
-            </a:r>
-          </a:p>
-        </p:txBody>
-      </p:sp>
-      <p:sp>
-        <p:nvSpPr>
-          <p:cNvPr id="10" name="Text Placeholder 9"/>
-          <p:cNvSpPr>
-            <a:spLocks noGrp="1"/>
-          </p:cNvSpPr>
-          <p:nvPr>
-            <p:ph type="body" idx="14"/>
-          </p:nvPr>
-        </p:nvSpPr>
-        <p:spPr/>
-        <p:txBody>
-          <a:bodyPr wrap="square"/>
-          <a:lstStyle/>
-          <a:p>
-            <a:r>
-              <a:t>At half the estimate the case still returns 1,265 hours and £92k a year.</a:t>
-            </a:r>
-          </a:p>
-        </p:txBody>
-      </p:sp>
-    </p:spTree>
-  </p:cSld>
-  <p:clrMapOvr>
-    <a:masterClrMapping/>
-  </p:clrMapOvr>
-</p:sld>
-</file>
-
-<file path=ppt/slides/slide15.xml><?xml version="1.0" encoding="utf-8"?>
-<p:sld xmlns:a="http://schemas.openxmlformats.org/drawingml/2006/main" xmlns:p="http://schemas.openxmlformats.org/presentationml/2006/main" xmlns:r="http://schemas.openxmlformats.org/officeDocument/2006/relationships">
-  <p:cSld>
-    <p:spTree>
-      <p:nvGrpSpPr>
-        <p:cNvPr id="1" name=""/>
-        <p:cNvGrpSpPr/>
-        <p:nvPr/>
-      </p:nvGrpSpPr>
-      <p:grpSpPr/>
-      <p:sp>
-        <p:nvSpPr>
-          <p:cNvPr id="2" name="Title 1"/>
-          <p:cNvSpPr>
-            <a:spLocks noGrp="1"/>
-          </p:cNvSpPr>
-          <p:nvPr>
-            <p:ph type="title"/>
-          </p:nvPr>
-        </p:nvSpPr>
-        <p:spPr/>
-        <p:txBody>
-          <a:bodyPr wrap="square"/>
-          <a:lstStyle/>
-          <a:p>
-            <a:r>
-              <a:t>What the hours model cannot count</a:t>
-            </a:r>
-          </a:p>
-        </p:txBody>
-      </p:sp>
-      <p:sp>
-        <p:nvSpPr>
-          <p:cNvPr id="3" name="Text Placeholder 2"/>
-          <p:cNvSpPr>
-            <a:spLocks noGrp="1"/>
-          </p:cNvSpPr>
-          <p:nvPr>
-            <p:ph type="body" idx="13"/>
-          </p:nvPr>
-        </p:nvSpPr>
-        <p:spPr/>
-        <p:txBody>
-          <a:bodyPr wrap="square"/>
-          <a:lstStyle/>
-          <a:p>
-            <a:r>
-              <a:t>The saved hours are the smaller half of the case; the larger half is what stops happening.</a:t>
-            </a:r>
-          </a:p>
-        </p:txBody>
-      </p:sp>
-      <p:sp>
-        <p:nvSpPr>
-          <p:cNvPr id="4" name="Text Placeholder 3"/>
-          <p:cNvSpPr>
-            <a:spLocks noGrp="1"/>
-          </p:cNvSpPr>
-          <p:nvPr>
-            <p:ph type="body" idx="1"/>
-          </p:nvPr>
-        </p:nvSpPr>
-        <p:spPr/>
-        <p:txBody>
-          <a:bodyPr wrap="square"/>
-          <a:lstStyle/>
-          <a:p>
-            <a:r>
-              <a:rPr sz="1880"/>
-              <a:t>A break caught in hours</a:t>
-            </a:r>
-          </a:p>
-        </p:txBody>
-      </p:sp>
-      <p:sp>
-        <p:nvSpPr>
-          <p:cNvPr id="5" name="Text Placeholder 4"/>
-          <p:cNvSpPr>
-            <a:spLocks noGrp="1"/>
-          </p:cNvSpPr>
-          <p:nvPr>
-            <p:ph type="body" idx="2"/>
-          </p:nvPr>
-        </p:nvSpPr>
-        <p:spPr/>
-        <p:txBody>
-          <a:bodyPr wrap="square"/>
-          <a:lstStyle/>
-          <a:p>
-            <a:r>
-              <a:t>A custom label or product type that vanishes breaks the Performance Max listing groups built on it. The guards read every feed four times a day against a known-good baseline and draft the client email first.</a:t>
-            </a:r>
-          </a:p>
-        </p:txBody>
-      </p:sp>
-      <p:sp>
-        <p:nvSpPr>
-          <p:cNvPr id="6" name="Text Placeholder 5"/>
-          <p:cNvSpPr>
-            <a:spLocks noGrp="1"/>
-          </p:cNvSpPr>
-          <p:nvPr>
-            <p:ph type="body" idx="3"/>
-          </p:nvPr>
-        </p:nvSpPr>
-        <p:spPr/>
-        <p:txBody>
-          <a:bodyPr wrap="square"/>
-          <a:lstStyle/>
-          <a:p>
-            <a:r>
-              <a:t>Overrun as a decision</a:t>
-            </a:r>
-          </a:p>
-        </p:txBody>
-      </p:sp>
-      <p:sp>
-        <p:nvSpPr>
-          <p:cNvPr id="7" name="Text Placeholder 6"/>
-          <p:cNvSpPr>
-            <a:spLocks noGrp="1"/>
-          </p:cNvSpPr>
-          <p:nvPr>
-            <p:ph type="body" idx="4"/>
-          </p:nvPr>
-        </p:nvSpPr>
-        <p:spPr/>
-        <p:txBody>
-          <a:bodyPr wrap="square"/>
-          <a:lstStyle/>
-          <a:p>
-            <a:r>
-              <a:t>The 378 hours of negative balance now sit on every task and brand, with the team’s own call — carry the account, or hold new work — recorded beside the number. Overrun stops happening by accident.</a:t>
-            </a:r>
-          </a:p>
-        </p:txBody>
-      </p:sp>
-      <p:sp>
-        <p:nvSpPr>
-          <p:cNvPr id="8" name="Text Placeholder 7"/>
-          <p:cNvSpPr>
-            <a:spLocks noGrp="1"/>
-          </p:cNvSpPr>
-          <p:nvPr>
-            <p:ph type="body" idx="5"/>
-          </p:nvPr>
-        </p:nvSpPr>
-        <p:spPr/>
-        <p:txBody>
-          <a:bodyPr wrap="square"/>
-          <a:lstStyle/>
-          <a:p>
-            <a:r>
-              <a:t>Skips seen in time</a:t>
-            </a:r>
-          </a:p>
-        </p:txBody>
-      </p:sp>
-      <p:sp>
-        <p:nvSpPr>
-          <p:cNvPr id="9" name="Text Placeholder 8"/>
-          <p:cNvSpPr>
-            <a:spLocks noGrp="1"/>
-          </p:cNvSpPr>
-          <p:nvPr>
-            <p:ph type="body" idx="6"/>
-          </p:nvPr>
-        </p:nvSpPr>
-        <p:spPr/>
-        <p:txBody>
-          <a:bodyPr wrap="square"/>
-          <a:lstStyle/>
-          <a:p>
-            <a:r>
-              <a:t>2,750 skipped hours went unseen because nobody counted streaks. The Schedule module counts them per task and brand, so a three-month skip becomes a client conversation rather than a churn signal found too late.</a:t>
-            </a:r>
-          </a:p>
-        </p:txBody>
-      </p:sp>
-      <p:sp>
-        <p:nvSpPr>
-          <p:cNvPr id="10" name="Text Placeholder 9"/>
-          <p:cNvSpPr>
-            <a:spLocks noGrp="1"/>
-          </p:cNvSpPr>
-          <p:nvPr>
-            <p:ph type="body" idx="14"/>
-          </p:nvPr>
-        </p:nvSpPr>
-        <p:spPr/>
-        <p:txBody>
-          <a:bodyPr wrap="square"/>
-          <a:lstStyle/>
-          <a:p>
-            <a:r>
-              <a:t>The larger half of the case is what stops happening.</a:t>
-            </a:r>
-          </a:p>
-        </p:txBody>
-      </p:sp>
-    </p:spTree>
-  </p:cSld>
-  <p:clrMapOvr>
-    <a:masterClrMapping/>
-  </p:clrMapOvr>
-</p:sld>
-</file>
-
-<file path=ppt/slides/slide16.xml><?xml version="1.0" encoding="utf-8"?>
-<p:sld xmlns:a="http://schemas.openxmlformats.org/drawingml/2006/main" xmlns:p="http://schemas.openxmlformats.org/presentationml/2006/main" xmlns:r="http://schemas.openxmlformats.org/officeDocument/2006/relationships">
-  <p:cSld>
-    <p:spTree>
-      <p:nvGrpSpPr>
-        <p:cNvPr id="1" name=""/>
-        <p:cNvGrpSpPr/>
-        <p:nvPr/>
-      </p:nvGrpSpPr>
-      <p:grpSpPr/>
-      <p:sp>
-        <p:nvSpPr>
-          <p:cNvPr id="2" name="Title 1"/>
-          <p:cNvSpPr>
-            <a:spLocks noGrp="1"/>
-          </p:cNvSpPr>
-          <p:nvPr>
-            <p:ph type="title"/>
-          </p:nvPr>
-        </p:nvSpPr>
-        <p:spPr/>
-        <p:txBody>
-          <a:bodyPr wrap="square"/>
-          <a:lstStyle/>
-          <a:p>
-            <a:r>
-              <a:t>What it cost, and what it returns</a:t>
-            </a:r>
-          </a:p>
-        </p:txBody>
-      </p:sp>
-      <p:sp>
-        <p:nvSpPr>
-          <p:cNvPr id="3" name="Text Placeholder 2"/>
-          <p:cNvSpPr>
-            <a:spLocks noGrp="1"/>
-          </p:cNvSpPr>
-          <p:nvPr>
-            <p:ph type="body" idx="13"/>
-          </p:nvPr>
-        </p:nvSpPr>
-        <p:spPr/>
-        <p:txBody>
-          <a:bodyPr wrap="square"/>
-          <a:lstStyle/>
-          <a:p>
-            <a:r>
-              <a:t>One subscription and no infrastructure, against a year of reclaimed hours.</a:t>
-            </a:r>
-          </a:p>
-        </p:txBody>
-      </p:sp>
-      <p:sp>
-        <p:nvSpPr>
-          <p:cNvPr id="4" name="Text Placeholder 3"/>
-          <p:cNvSpPr>
-            <a:spLocks noGrp="1"/>
-          </p:cNvSpPr>
-          <p:nvPr>
-            <p:ph type="body" idx="1"/>
-          </p:nvPr>
-        </p:nvSpPr>
-        <p:spPr/>
-        <p:txBody>
-          <a:bodyPr wrap="square"/>
-          <a:lstStyle/>
-          <a:p>
-            <a:r>
-              <a:t>What it cost to build</a:t>
-            </a:r>
-          </a:p>
-        </p:txBody>
-      </p:sp>
-      <p:sp>
-        <p:nvSpPr>
-          <p:cNvPr id="5" name="Text Placeholder 4"/>
-          <p:cNvSpPr>
-            <a:spLocks noGrp="1"/>
-          </p:cNvSpPr>
-          <p:nvPr>
-            <p:ph type="body" idx="2"/>
-          </p:nvPr>
-        </p:nvSpPr>
-        <p:spPr/>
-        <p:txBody>
-          <a:bodyPr wrap="square"/>
-          <a:lstStyle/>
-          <a:p>
-            <a:r>
-              <a:t>Two months of one Claude Code subscription and £0 of infrastructure — Cloudflare Workers, KV and Access on the free tier, GitHub for the code. No licences, no vendor, no implementation partner.</a:t>
-            </a:r>
-          </a:p>
-        </p:txBody>
-      </p:sp>
-      <p:sp>
-        <p:nvSpPr>
-          <p:cNvPr id="6" name="Text Placeholder 5"/>
-          <p:cNvSpPr>
-            <a:spLocks noGrp="1"/>
-          </p:cNvSpPr>
-          <p:nvPr>
-            <p:ph type="body" idx="3"/>
-          </p:nvPr>
-        </p:nvSpPr>
-        <p:spPr/>
-        <p:txBody>
-          <a:bodyPr wrap="square"/>
-          <a:lstStyle/>
-          <a:p>
-            <a:r>
-              <a:t>What it returns</a:t>
-            </a:r>
-          </a:p>
-        </p:txBody>
-      </p:sp>
-      <p:sp>
-        <p:nvSpPr>
-          <p:cNvPr id="7" name="Text Placeholder 6"/>
-          <p:cNvSpPr>
-            <a:spLocks noGrp="1"/>
-          </p:cNvSpPr>
-          <p:nvPr>
-            <p:ph type="body" idx="4"/>
-          </p:nvPr>
-        </p:nvSpPr>
-        <p:spPr/>
-        <p:txBody>
-          <a:bodyPr wrap="square"/>
-          <a:lstStyle/>
-          <a:p>
-            <a:r>
-              <a:t>At the forecast above, the whole build cost less than one month of one AM’s reclaimed hours. The reimbursement is the subscription; the rollout costs each AM an hour of onboarding.</a:t>
-            </a:r>
-          </a:p>
-        </p:txBody>
-      </p:sp>
-      <p:sp>
-        <p:nvSpPr>
-          <p:cNvPr id="8" name="Text Placeholder 7"/>
-          <p:cNvSpPr>
-            <a:spLocks noGrp="1"/>
-          </p:cNvSpPr>
-          <p:nvPr>
-            <p:ph type="body" idx="14"/>
-          </p:nvPr>
-        </p:nvSpPr>
-        <p:spPr/>
-        <p:txBody>
-          <a:bodyPr wrap="square"/>
-          <a:lstStyle/>
-          <a:p>
-            <a:r>
-              <a:t>The build cost less than one month of one AM’s reclaimed hours.</a:t>
-            </a:r>
-          </a:p>
-        </p:txBody>
-      </p:sp>
-    </p:spTree>
-  </p:cSld>
-  <p:clrMapOvr>
-    <a:masterClrMapping/>
-  </p:clrMapOvr>
-</p:sld>
-</file>
-
-<file path=ppt/slides/slide17.xml><?xml version="1.0" encoding="utf-8"?>
-<p:sld xmlns:a="http://schemas.openxmlformats.org/drawingml/2006/main" xmlns:p="http://schemas.openxmlformats.org/presentationml/2006/main" xmlns:r="http://schemas.openxmlformats.org/officeDocument/2006/relationships">
-  <p:cSld>
-    <p:spTree>
-      <p:nvGrpSpPr>
-        <p:cNvPr id="1" name=""/>
-        <p:cNvGrpSpPr/>
-        <p:nvPr/>
-      </p:nvGrpSpPr>
-      <p:grpSpPr/>
-      <p:sp>
-        <p:nvSpPr>
-          <p:cNvPr id="2" name="Text Placeholder 1"/>
-          <p:cNvSpPr>
-            <a:spLocks noGrp="1"/>
-          </p:cNvSpPr>
-          <p:nvPr>
-            <p:ph type="body" idx="11"/>
-          </p:nvPr>
-        </p:nvSpPr>
-        <p:spPr/>
-        <p:txBody>
-          <a:bodyPr wrap="square"/>
-          <a:lstStyle/>
-          <a:p>
-            <a:r>
-              <a:t>Chapter four</a:t>
-            </a:r>
-          </a:p>
-        </p:txBody>
-      </p:sp>
-      <p:sp>
-        <p:nvSpPr>
-          <p:cNvPr id="3" name="Title 2"/>
-          <p:cNvSpPr>
-            <a:spLocks noGrp="1"/>
-          </p:cNvSpPr>
-          <p:nvPr>
-            <p:ph type="title"/>
-          </p:nvPr>
-        </p:nvSpPr>
-        <p:spPr/>
-        <p:txBody>
-          <a:bodyPr wrap="square"/>
-          <a:lstStyle/>
-          <a:p>
-            <a:r>
-              <a:t>What it does for the team</a:t>
-            </a:r>
-          </a:p>
-        </p:txBody>
-      </p:sp>
-      <p:sp>
-        <p:nvSpPr>
-          <p:cNvPr id="4" name="Text Placeholder 3"/>
-          <p:cNvSpPr>
-            <a:spLocks noGrp="1"/>
-          </p:cNvSpPr>
-          <p:nvPr>
-            <p:ph type="body" idx="1"/>
-          </p:nvPr>
-        </p:nvSpPr>
-        <p:spPr/>
-        <p:txBody>
-          <a:bodyPr wrap="square"/>
-          <a:lstStyle/>
-          <a:p>
-            <a:r>
-              <a:t>The screens that give an experienced account manager eleven hours back are the same ones a new account manager is onboarded on.</a:t>
-            </a:r>
-          </a:p>
-        </p:txBody>
-      </p:sp>
-    </p:spTree>
-  </p:cSld>
-  <p:clrMapOvr>
-    <a:masterClrMapping/>
-  </p:clrMapOvr>
-</p:sld>
-</file>
-
 <file path=ppt/slides/slide18.xml><?xml version="1.0" encoding="utf-8"?>
 <p:sld xmlns:a="http://schemas.openxmlformats.org/drawingml/2006/main" xmlns:p="http://schemas.openxmlformats.org/presentationml/2006/main" xmlns:r="http://schemas.openxmlformats.org/officeDocument/2006/relationships">
   <p:cSld>
@@ -13205,7 +13310,7 @@
           <a:lstStyle/>
           <a:p>
             <a:r>
-              <a:t>Three mechanisms, not twenty modules</a:t>
+              <a:t>A year without the FCC, and a year with it</a:t>
             </a:r>
           </a:p>
         </p:txBody>
@@ -13217,16 +13322,16 @@
             <a:spLocks noGrp="1"/>
           </p:cNvSpPr>
           <p:nvPr>
-            <p:ph type="body" idx="13"/>
-          </p:nvPr>
-        </p:nvSpPr>
-        <p:spPr/>
-        <p:txBody>
-          <a:bodyPr wrap="square"/>
-          <a:lstStyle/>
-          <a:p>
-            <a:r>
-              <a:t>Every module does one of three things, and each one takes a judgement out of the account manager’s head.</a:t>
+            <p:ph type="body" idx="11"/>
+          </p:nvPr>
+        </p:nvSpPr>
+        <p:spPr/>
+        <p:txBody>
+          <a:bodyPr wrap="square"/>
+          <a:lstStyle/>
+          <a:p>
+            <a:r>
+              <a:t>Five London AMs, 46 working weeks; the per-AM hours above, multiplied out.</a:t>
             </a:r>
           </a:p>
         </p:txBody>
@@ -13247,8 +13352,7 @@
           <a:lstStyle/>
           <a:p>
             <a:r>
-              <a:rPr sz="1880"/>
-              <a:t>The bar is on the screen</a:t>
+              <a:t>3,450 h</a:t>
             </a:r>
           </a:p>
         </p:txBody>
@@ -13269,8 +13373,7 @@
           <a:lstStyle/>
           <a:p>
             <a:r>
-              <a:rPr sz="1410"/>
-              <a:t>What good looks like used to be learned from whoever had been here longest. The content-quality scorecard runs 46 rules across the eight free-text fields, each quoting that attribute’s own Google specification and marked as a requirement or a best practice. The bar is a number with its source attached, so the same feed reads the same whoever opens it.</a:t>
+              <a:t>Wasted a year on fetching and re-keying without the FCC</a:t>
             </a:r>
           </a:p>
         </p:txBody>
@@ -13291,8 +13394,7 @@
           <a:lstStyle/>
           <a:p>
             <a:r>
-              <a:rPr sz="1880"/>
-              <a:t>The next move is offered</a:t>
+              <a:t>2,530 h</a:t>
             </a:r>
           </a:p>
         </p:txBody>
@@ -13313,8 +13415,7 @@
           <a:lstStyle/>
           <a:p>
             <a:r>
-              <a:rPr sz="1410"/>
-              <a:t>Knowing what to do next used to be experience. Every brand ranks up to five next moves from nine deterministic rules — critical guard alerts first, then overdue tasks, the weakest feed audit, keyword saturation — and each one opens the module already filtered to what it just counted. The Playbook adds the plays peer accounts run that this one carries nothing of.</a:t>
+              <a:t>Saved a year with it — 316 AM-days back for client work</a:t>
             </a:r>
           </a:p>
         </p:txBody>
@@ -13335,7 +13436,7 @@
           <a:lstStyle/>
           <a:p>
             <a:r>
-              <a:t>The format is provided</a:t>
+              <a:t>£185k</a:t>
             </a:r>
           </a:p>
         </p:txBody>
@@ -13356,8 +13457,7 @@
           <a:lstStyle/>
           <a:p>
             <a:r>
-              <a:rPr sz="1500"/>
-              <a:t>A brief used to be as good as the person writing it. The Briefing Studio scores the six things ASPL would otherwise come back and ask — market, cohort, success measure, definition of done, assets, due date — and embeds the tracking tokens itself. Quotes export the finance workbook; decks build on the approved template.</a:t>
+              <a:t>Billable capacity released at the £73.125 ratecard hour</a:t>
             </a:r>
           </a:p>
         </p:txBody>
@@ -13378,7 +13478,7 @@
           <a:lstStyle/>
           <a:p>
             <a:r>
-              <a:t>The account manager supplies the judgement. The system supplies the standard, the next move and the format.</a:t>
+              <a:t>At half the estimate the case still returns 1,265 hours and £92k a year.</a:t>
             </a:r>
           </a:p>
         </p:txBody>
@@ -13392,6 +13492,789 @@
 </file>
 
 <file path=ppt/slides/slide19.xml><?xml version="1.0" encoding="utf-8"?>
+<p:sld xmlns:a="http://schemas.openxmlformats.org/drawingml/2006/main" xmlns:p="http://schemas.openxmlformats.org/presentationml/2006/main" xmlns:r="http://schemas.openxmlformats.org/officeDocument/2006/relationships">
+  <p:cSld>
+    <p:spTree>
+      <p:nvGrpSpPr>
+        <p:cNvPr id="1" name=""/>
+        <p:cNvGrpSpPr/>
+        <p:nvPr/>
+      </p:nvGrpSpPr>
+      <p:grpSpPr/>
+      <p:sp>
+        <p:nvSpPr>
+          <p:cNvPr id="2" name="Title 1"/>
+          <p:cNvSpPr>
+            <a:spLocks noGrp="1"/>
+          </p:cNvSpPr>
+          <p:nvPr>
+            <p:ph type="title"/>
+          </p:nvPr>
+        </p:nvSpPr>
+        <p:spPr/>
+        <p:txBody>
+          <a:bodyPr wrap="square"/>
+          <a:lstStyle/>
+          <a:p>
+            <a:r>
+              <a:t>What the hours model cannot count</a:t>
+            </a:r>
+          </a:p>
+        </p:txBody>
+      </p:sp>
+      <p:sp>
+        <p:nvSpPr>
+          <p:cNvPr id="3" name="Text Placeholder 2"/>
+          <p:cNvSpPr>
+            <a:spLocks noGrp="1"/>
+          </p:cNvSpPr>
+          <p:nvPr>
+            <p:ph type="body" idx="13"/>
+          </p:nvPr>
+        </p:nvSpPr>
+        <p:spPr/>
+        <p:txBody>
+          <a:bodyPr wrap="square"/>
+          <a:lstStyle/>
+          <a:p>
+            <a:r>
+              <a:t>The saved hours are the smaller half of the case; the larger half is what stops happening.</a:t>
+            </a:r>
+          </a:p>
+        </p:txBody>
+      </p:sp>
+      <p:sp>
+        <p:nvSpPr>
+          <p:cNvPr id="4" name="Text Placeholder 3"/>
+          <p:cNvSpPr>
+            <a:spLocks noGrp="1"/>
+          </p:cNvSpPr>
+          <p:nvPr>
+            <p:ph type="body" idx="1"/>
+          </p:nvPr>
+        </p:nvSpPr>
+        <p:spPr/>
+        <p:txBody>
+          <a:bodyPr wrap="square"/>
+          <a:lstStyle/>
+          <a:p>
+            <a:r>
+              <a:rPr sz="1880"/>
+              <a:t>A break caught in hours</a:t>
+            </a:r>
+          </a:p>
+        </p:txBody>
+      </p:sp>
+      <p:sp>
+        <p:nvSpPr>
+          <p:cNvPr id="5" name="Text Placeholder 4"/>
+          <p:cNvSpPr>
+            <a:spLocks noGrp="1"/>
+          </p:cNvSpPr>
+          <p:nvPr>
+            <p:ph type="body" idx="2"/>
+          </p:nvPr>
+        </p:nvSpPr>
+        <p:spPr/>
+        <p:txBody>
+          <a:bodyPr wrap="square"/>
+          <a:lstStyle/>
+          <a:p>
+            <a:r>
+              <a:t>A custom label or product type that vanishes breaks the Performance Max listing groups built on it. The guards read every feed four times a day against a known-good baseline and draft the client email first.</a:t>
+            </a:r>
+          </a:p>
+        </p:txBody>
+      </p:sp>
+      <p:sp>
+        <p:nvSpPr>
+          <p:cNvPr id="6" name="Text Placeholder 5"/>
+          <p:cNvSpPr>
+            <a:spLocks noGrp="1"/>
+          </p:cNvSpPr>
+          <p:nvPr>
+            <p:ph type="body" idx="3"/>
+          </p:nvPr>
+        </p:nvSpPr>
+        <p:spPr/>
+        <p:txBody>
+          <a:bodyPr wrap="square"/>
+          <a:lstStyle/>
+          <a:p>
+            <a:r>
+              <a:t>Overrun as a decision</a:t>
+            </a:r>
+          </a:p>
+        </p:txBody>
+      </p:sp>
+      <p:sp>
+        <p:nvSpPr>
+          <p:cNvPr id="7" name="Text Placeholder 6"/>
+          <p:cNvSpPr>
+            <a:spLocks noGrp="1"/>
+          </p:cNvSpPr>
+          <p:nvPr>
+            <p:ph type="body" idx="4"/>
+          </p:nvPr>
+        </p:nvSpPr>
+        <p:spPr/>
+        <p:txBody>
+          <a:bodyPr wrap="square"/>
+          <a:lstStyle/>
+          <a:p>
+            <a:r>
+              <a:t>The 378 hours of negative balance now sit on every task and brand, with the team’s own call — carry the account, or hold new work — recorded beside the number. Overrun stops happening by accident.</a:t>
+            </a:r>
+          </a:p>
+        </p:txBody>
+      </p:sp>
+      <p:sp>
+        <p:nvSpPr>
+          <p:cNvPr id="8" name="Text Placeholder 7"/>
+          <p:cNvSpPr>
+            <a:spLocks noGrp="1"/>
+          </p:cNvSpPr>
+          <p:nvPr>
+            <p:ph type="body" idx="5"/>
+          </p:nvPr>
+        </p:nvSpPr>
+        <p:spPr/>
+        <p:txBody>
+          <a:bodyPr wrap="square"/>
+          <a:lstStyle/>
+          <a:p>
+            <a:r>
+              <a:t>Skips seen in time</a:t>
+            </a:r>
+          </a:p>
+        </p:txBody>
+      </p:sp>
+      <p:sp>
+        <p:nvSpPr>
+          <p:cNvPr id="9" name="Text Placeholder 8"/>
+          <p:cNvSpPr>
+            <a:spLocks noGrp="1"/>
+          </p:cNvSpPr>
+          <p:nvPr>
+            <p:ph type="body" idx="6"/>
+          </p:nvPr>
+        </p:nvSpPr>
+        <p:spPr/>
+        <p:txBody>
+          <a:bodyPr wrap="square"/>
+          <a:lstStyle/>
+          <a:p>
+            <a:r>
+              <a:t>2,750 skipped hours went unseen because nobody counted streaks. The Schedule module counts them per task and brand, so a three-month skip becomes a client conversation rather than a churn signal found too late.</a:t>
+            </a:r>
+          </a:p>
+        </p:txBody>
+      </p:sp>
+      <p:sp>
+        <p:nvSpPr>
+          <p:cNvPr id="10" name="Text Placeholder 9"/>
+          <p:cNvSpPr>
+            <a:spLocks noGrp="1"/>
+          </p:cNvSpPr>
+          <p:nvPr>
+            <p:ph type="body" idx="14"/>
+          </p:nvPr>
+        </p:nvSpPr>
+        <p:spPr/>
+        <p:txBody>
+          <a:bodyPr wrap="square"/>
+          <a:lstStyle/>
+          <a:p>
+            <a:r>
+              <a:t>The larger half of the case is what stops happening.</a:t>
+            </a:r>
+          </a:p>
+        </p:txBody>
+      </p:sp>
+    </p:spTree>
+  </p:cSld>
+  <p:clrMapOvr>
+    <a:masterClrMapping/>
+  </p:clrMapOvr>
+</p:sld>
+</file>
+
+<file path=ppt/slides/slide2.xml><?xml version="1.0" encoding="utf-8"?>
+<p:sld xmlns:a="http://schemas.openxmlformats.org/drawingml/2006/main" xmlns:p="http://schemas.openxmlformats.org/presentationml/2006/main" xmlns:r="http://schemas.openxmlformats.org/officeDocument/2006/relationships">
+  <p:cSld>
+    <p:spTree>
+      <p:nvGrpSpPr>
+        <p:cNvPr id="1" name=""/>
+        <p:cNvGrpSpPr/>
+        <p:nvPr/>
+      </p:nvGrpSpPr>
+      <p:grpSpPr/>
+      <p:sp>
+        <p:nvSpPr>
+          <p:cNvPr id="2" name="Title 1"/>
+          <p:cNvSpPr>
+            <a:spLocks noGrp="1"/>
+          </p:cNvSpPr>
+          <p:nvPr>
+            <p:ph type="title"/>
+          </p:nvPr>
+        </p:nvSpPr>
+        <p:spPr/>
+        <p:txBody>
+          <a:bodyPr wrap="square"/>
+          <a:lstStyle/>
+          <a:p>
+            <a:r>
+              <a:t>Five questions, one decision</a:t>
+            </a:r>
+          </a:p>
+        </p:txBody>
+      </p:sp>
+      <p:sp>
+        <p:nvSpPr>
+          <p:cNvPr id="3" name="Text Placeholder 2"/>
+          <p:cNvSpPr>
+            <a:spLocks noGrp="1"/>
+          </p:cNvSpPr>
+          <p:nvPr>
+            <p:ph type="body" idx="11"/>
+          </p:nvPr>
+        </p:nvSpPr>
+        <p:spPr/>
+        <p:txBody>
+          <a:bodyPr wrap="square"/>
+          <a:lstStyle/>
+          <a:p>
+            <a:r>
+              <a:t>The struggle, the solution, the value in hours and pounds, what it does for the team, and where it goes next.</a:t>
+            </a:r>
+          </a:p>
+        </p:txBody>
+      </p:sp>
+      <p:sp>
+        <p:nvSpPr>
+          <p:cNvPr id="4" name="Text Placeholder 3"/>
+          <p:cNvSpPr>
+            <a:spLocks noGrp="1"/>
+          </p:cNvSpPr>
+          <p:nvPr>
+            <p:ph type="body" idx="1"/>
+          </p:nvPr>
+        </p:nvSpPr>
+        <p:spPr/>
+        <p:txBody>
+          <a:bodyPr wrap="square"/>
+          <a:lstStyle/>
+          <a:p>
+            <a:r>
+              <a:t>01  The struggle before — 52 markets · 62 feeds · 13 project plans · one inbox — and no single view</a:t>
+            </a:r>
+          </a:p>
+          <a:p>
+            <a:r>
+              <a:t>02  The solution — 20 modules on the tools the team already uses · built in six weeks · £0 infrastructure</a:t>
+            </a:r>
+          </a:p>
+          <a:p>
+            <a:r>
+              <a:t>03  The benefit — Hours wasted without it, hours saved with it · the risks it removes · what it cost</a:t>
+            </a:r>
+          </a:p>
+        </p:txBody>
+      </p:sp>
+      <p:sp>
+        <p:nvSpPr>
+          <p:cNvPr id="5" name="Text Placeholder 4"/>
+          <p:cNvSpPr>
+            <a:spLocks noGrp="1"/>
+          </p:cNvSpPr>
+          <p:nvPr>
+            <p:ph type="body" idx="2"/>
+          </p:nvPr>
+        </p:nvSpPr>
+        <p:spPr/>
+        <p:txBody>
+          <a:bodyPr wrap="square"/>
+          <a:lstStyle/>
+          <a:p>
+            <a:r>
+              <a:t>04  What it does for the team — Why the process gets faster · a new AM productive in a fortnight · what a team lead gets</a:t>
+            </a:r>
+          </a:p>
+          <a:p>
+            <a:r>
+              <a:t>05  Going forward — A 90-day rollout · the vision for feedback, AM management and the business</a:t>
+            </a:r>
+          </a:p>
+        </p:txBody>
+      </p:sp>
+    </p:spTree>
+  </p:cSld>
+  <p:clrMapOvr>
+    <a:masterClrMapping/>
+  </p:clrMapOvr>
+</p:sld>
+</file>
+
+<file path=ppt/slides/slide20.xml><?xml version="1.0" encoding="utf-8"?>
+<p:sld xmlns:a="http://schemas.openxmlformats.org/drawingml/2006/main" xmlns:p="http://schemas.openxmlformats.org/presentationml/2006/main" xmlns:r="http://schemas.openxmlformats.org/officeDocument/2006/relationships">
+  <p:cSld>
+    <p:spTree>
+      <p:nvGrpSpPr>
+        <p:cNvPr id="1" name=""/>
+        <p:cNvGrpSpPr/>
+        <p:nvPr/>
+      </p:nvGrpSpPr>
+      <p:grpSpPr/>
+      <p:sp>
+        <p:nvSpPr>
+          <p:cNvPr id="2" name="Title 1"/>
+          <p:cNvSpPr>
+            <a:spLocks noGrp="1"/>
+          </p:cNvSpPr>
+          <p:nvPr>
+            <p:ph type="title"/>
+          </p:nvPr>
+        </p:nvSpPr>
+        <p:spPr/>
+        <p:txBody>
+          <a:bodyPr wrap="square"/>
+          <a:lstStyle/>
+          <a:p>
+            <a:r>
+              <a:t>What it cost, and what it returns</a:t>
+            </a:r>
+          </a:p>
+        </p:txBody>
+      </p:sp>
+      <p:sp>
+        <p:nvSpPr>
+          <p:cNvPr id="3" name="Text Placeholder 2"/>
+          <p:cNvSpPr>
+            <a:spLocks noGrp="1"/>
+          </p:cNvSpPr>
+          <p:nvPr>
+            <p:ph type="body" idx="13"/>
+          </p:nvPr>
+        </p:nvSpPr>
+        <p:spPr/>
+        <p:txBody>
+          <a:bodyPr wrap="square"/>
+          <a:lstStyle/>
+          <a:p>
+            <a:r>
+              <a:t>One subscription and no infrastructure, against a year of reclaimed hours.</a:t>
+            </a:r>
+          </a:p>
+        </p:txBody>
+      </p:sp>
+      <p:sp>
+        <p:nvSpPr>
+          <p:cNvPr id="4" name="Text Placeholder 3"/>
+          <p:cNvSpPr>
+            <a:spLocks noGrp="1"/>
+          </p:cNvSpPr>
+          <p:nvPr>
+            <p:ph type="body" idx="1"/>
+          </p:nvPr>
+        </p:nvSpPr>
+        <p:spPr/>
+        <p:txBody>
+          <a:bodyPr wrap="square"/>
+          <a:lstStyle/>
+          <a:p>
+            <a:r>
+              <a:t>What it cost to build</a:t>
+            </a:r>
+          </a:p>
+        </p:txBody>
+      </p:sp>
+      <p:sp>
+        <p:nvSpPr>
+          <p:cNvPr id="5" name="Text Placeholder 4"/>
+          <p:cNvSpPr>
+            <a:spLocks noGrp="1"/>
+          </p:cNvSpPr>
+          <p:nvPr>
+            <p:ph type="body" idx="2"/>
+          </p:nvPr>
+        </p:nvSpPr>
+        <p:spPr/>
+        <p:txBody>
+          <a:bodyPr wrap="square"/>
+          <a:lstStyle/>
+          <a:p>
+            <a:r>
+              <a:t>Two months of one Claude Code subscription and £0 of infrastructure — Cloudflare Workers, KV and Access on the free tier, GitHub for the code. No licences, no vendor, no implementation partner.</a:t>
+            </a:r>
+          </a:p>
+        </p:txBody>
+      </p:sp>
+      <p:sp>
+        <p:nvSpPr>
+          <p:cNvPr id="6" name="Text Placeholder 5"/>
+          <p:cNvSpPr>
+            <a:spLocks noGrp="1"/>
+          </p:cNvSpPr>
+          <p:nvPr>
+            <p:ph type="body" idx="3"/>
+          </p:nvPr>
+        </p:nvSpPr>
+        <p:spPr/>
+        <p:txBody>
+          <a:bodyPr wrap="square"/>
+          <a:lstStyle/>
+          <a:p>
+            <a:r>
+              <a:t>What it returns</a:t>
+            </a:r>
+          </a:p>
+        </p:txBody>
+      </p:sp>
+      <p:sp>
+        <p:nvSpPr>
+          <p:cNvPr id="7" name="Text Placeholder 6"/>
+          <p:cNvSpPr>
+            <a:spLocks noGrp="1"/>
+          </p:cNvSpPr>
+          <p:nvPr>
+            <p:ph type="body" idx="4"/>
+          </p:nvPr>
+        </p:nvSpPr>
+        <p:spPr/>
+        <p:txBody>
+          <a:bodyPr wrap="square"/>
+          <a:lstStyle/>
+          <a:p>
+            <a:r>
+              <a:t>At the forecast above, the whole build cost less than one month of one AM’s reclaimed hours. The reimbursement is the subscription; the rollout costs each AM an hour of onboarding.</a:t>
+            </a:r>
+          </a:p>
+        </p:txBody>
+      </p:sp>
+      <p:sp>
+        <p:nvSpPr>
+          <p:cNvPr id="8" name="Text Placeholder 7"/>
+          <p:cNvSpPr>
+            <a:spLocks noGrp="1"/>
+          </p:cNvSpPr>
+          <p:nvPr>
+            <p:ph type="body" idx="14"/>
+          </p:nvPr>
+        </p:nvSpPr>
+        <p:spPr/>
+        <p:txBody>
+          <a:bodyPr wrap="square"/>
+          <a:lstStyle/>
+          <a:p>
+            <a:r>
+              <a:t>The build cost less than one month of one AM’s reclaimed hours.</a:t>
+            </a:r>
+          </a:p>
+        </p:txBody>
+      </p:sp>
+    </p:spTree>
+  </p:cSld>
+  <p:clrMapOvr>
+    <a:masterClrMapping/>
+  </p:clrMapOvr>
+</p:sld>
+</file>
+
+<file path=ppt/slides/slide21.xml><?xml version="1.0" encoding="utf-8"?>
+<p:sld xmlns:a="http://schemas.openxmlformats.org/drawingml/2006/main" xmlns:p="http://schemas.openxmlformats.org/presentationml/2006/main" xmlns:r="http://schemas.openxmlformats.org/officeDocument/2006/relationships">
+  <p:cSld>
+    <p:spTree>
+      <p:nvGrpSpPr>
+        <p:cNvPr id="1" name=""/>
+        <p:cNvGrpSpPr/>
+        <p:nvPr/>
+      </p:nvGrpSpPr>
+      <p:grpSpPr/>
+      <p:sp>
+        <p:nvSpPr>
+          <p:cNvPr id="2" name="Text Placeholder 1"/>
+          <p:cNvSpPr>
+            <a:spLocks noGrp="1"/>
+          </p:cNvSpPr>
+          <p:nvPr>
+            <p:ph type="body" idx="11"/>
+          </p:nvPr>
+        </p:nvSpPr>
+        <p:spPr/>
+        <p:txBody>
+          <a:bodyPr wrap="square"/>
+          <a:lstStyle/>
+          <a:p>
+            <a:r>
+              <a:t>Chapter four</a:t>
+            </a:r>
+          </a:p>
+        </p:txBody>
+      </p:sp>
+      <p:sp>
+        <p:nvSpPr>
+          <p:cNvPr id="3" name="Title 2"/>
+          <p:cNvSpPr>
+            <a:spLocks noGrp="1"/>
+          </p:cNvSpPr>
+          <p:nvPr>
+            <p:ph type="title"/>
+          </p:nvPr>
+        </p:nvSpPr>
+        <p:spPr/>
+        <p:txBody>
+          <a:bodyPr wrap="square"/>
+          <a:lstStyle/>
+          <a:p>
+            <a:r>
+              <a:t>What it does for the team</a:t>
+            </a:r>
+          </a:p>
+        </p:txBody>
+      </p:sp>
+      <p:sp>
+        <p:nvSpPr>
+          <p:cNvPr id="4" name="Text Placeholder 3"/>
+          <p:cNvSpPr>
+            <a:spLocks noGrp="1"/>
+          </p:cNvSpPr>
+          <p:nvPr>
+            <p:ph type="body" idx="1"/>
+          </p:nvPr>
+        </p:nvSpPr>
+        <p:spPr/>
+        <p:txBody>
+          <a:bodyPr wrap="square"/>
+          <a:lstStyle/>
+          <a:p>
+            <a:r>
+              <a:t>The screens that give an experienced account manager eleven hours back are the same ones a new account manager is onboarded on.</a:t>
+            </a:r>
+          </a:p>
+        </p:txBody>
+      </p:sp>
+    </p:spTree>
+  </p:cSld>
+  <p:clrMapOvr>
+    <a:masterClrMapping/>
+  </p:clrMapOvr>
+</p:sld>
+</file>
+
+<file path=ppt/slides/slide22.xml><?xml version="1.0" encoding="utf-8"?>
+<p:sld xmlns:a="http://schemas.openxmlformats.org/drawingml/2006/main" xmlns:p="http://schemas.openxmlformats.org/presentationml/2006/main" xmlns:r="http://schemas.openxmlformats.org/officeDocument/2006/relationships">
+  <p:cSld>
+    <p:spTree>
+      <p:nvGrpSpPr>
+        <p:cNvPr id="1" name=""/>
+        <p:cNvGrpSpPr/>
+        <p:nvPr/>
+      </p:nvGrpSpPr>
+      <p:grpSpPr/>
+      <p:sp>
+        <p:nvSpPr>
+          <p:cNvPr id="2" name="Title 1"/>
+          <p:cNvSpPr>
+            <a:spLocks noGrp="1"/>
+          </p:cNvSpPr>
+          <p:nvPr>
+            <p:ph type="title"/>
+          </p:nvPr>
+        </p:nvSpPr>
+        <p:spPr/>
+        <p:txBody>
+          <a:bodyPr wrap="square"/>
+          <a:lstStyle/>
+          <a:p>
+            <a:r>
+              <a:t>Three mechanisms, not twenty modules</a:t>
+            </a:r>
+          </a:p>
+        </p:txBody>
+      </p:sp>
+      <p:sp>
+        <p:nvSpPr>
+          <p:cNvPr id="3" name="Text Placeholder 2"/>
+          <p:cNvSpPr>
+            <a:spLocks noGrp="1"/>
+          </p:cNvSpPr>
+          <p:nvPr>
+            <p:ph type="body" idx="13"/>
+          </p:nvPr>
+        </p:nvSpPr>
+        <p:spPr/>
+        <p:txBody>
+          <a:bodyPr wrap="square"/>
+          <a:lstStyle/>
+          <a:p>
+            <a:r>
+              <a:t>Every module does one of three things, and each one takes a judgement out of the account manager’s head.</a:t>
+            </a:r>
+          </a:p>
+        </p:txBody>
+      </p:sp>
+      <p:sp>
+        <p:nvSpPr>
+          <p:cNvPr id="4" name="Text Placeholder 3"/>
+          <p:cNvSpPr>
+            <a:spLocks noGrp="1"/>
+          </p:cNvSpPr>
+          <p:nvPr>
+            <p:ph type="body" idx="1"/>
+          </p:nvPr>
+        </p:nvSpPr>
+        <p:spPr/>
+        <p:txBody>
+          <a:bodyPr wrap="square"/>
+          <a:lstStyle/>
+          <a:p>
+            <a:r>
+              <a:rPr sz="1880"/>
+              <a:t>The bar is on the screen</a:t>
+            </a:r>
+          </a:p>
+        </p:txBody>
+      </p:sp>
+      <p:sp>
+        <p:nvSpPr>
+          <p:cNvPr id="5" name="Text Placeholder 4"/>
+          <p:cNvSpPr>
+            <a:spLocks noGrp="1"/>
+          </p:cNvSpPr>
+          <p:nvPr>
+            <p:ph type="body" idx="2"/>
+          </p:nvPr>
+        </p:nvSpPr>
+        <p:spPr/>
+        <p:txBody>
+          <a:bodyPr wrap="square"/>
+          <a:lstStyle/>
+          <a:p>
+            <a:r>
+              <a:rPr sz="1410"/>
+              <a:t>What good looks like used to be learned from whoever had been here longest. The content-quality scorecard runs 46 rules across the eight free-text fields, each quoting that attribute’s own Google specification and marked as a requirement or a best practice. The bar is a number with its source attached, so the same feed reads the same whoever opens it.</a:t>
+            </a:r>
+          </a:p>
+        </p:txBody>
+      </p:sp>
+      <p:sp>
+        <p:nvSpPr>
+          <p:cNvPr id="6" name="Text Placeholder 5"/>
+          <p:cNvSpPr>
+            <a:spLocks noGrp="1"/>
+          </p:cNvSpPr>
+          <p:nvPr>
+            <p:ph type="body" idx="3"/>
+          </p:nvPr>
+        </p:nvSpPr>
+        <p:spPr/>
+        <p:txBody>
+          <a:bodyPr wrap="square"/>
+          <a:lstStyle/>
+          <a:p>
+            <a:r>
+              <a:rPr sz="1880"/>
+              <a:t>The next move is offered</a:t>
+            </a:r>
+          </a:p>
+        </p:txBody>
+      </p:sp>
+      <p:sp>
+        <p:nvSpPr>
+          <p:cNvPr id="7" name="Text Placeholder 6"/>
+          <p:cNvSpPr>
+            <a:spLocks noGrp="1"/>
+          </p:cNvSpPr>
+          <p:nvPr>
+            <p:ph type="body" idx="4"/>
+          </p:nvPr>
+        </p:nvSpPr>
+        <p:spPr/>
+        <p:txBody>
+          <a:bodyPr wrap="square"/>
+          <a:lstStyle/>
+          <a:p>
+            <a:r>
+              <a:rPr sz="1410"/>
+              <a:t>Knowing what to do next used to be experience. Every brand ranks up to five next moves from nine deterministic rules — critical guard alerts first, then overdue tasks, the weakest feed audit, keyword saturation — and each one opens the module already filtered to what it just counted. The Playbook adds the plays peer accounts run that this one carries nothing of.</a:t>
+            </a:r>
+          </a:p>
+        </p:txBody>
+      </p:sp>
+      <p:sp>
+        <p:nvSpPr>
+          <p:cNvPr id="8" name="Text Placeholder 7"/>
+          <p:cNvSpPr>
+            <a:spLocks noGrp="1"/>
+          </p:cNvSpPr>
+          <p:nvPr>
+            <p:ph type="body" idx="5"/>
+          </p:nvPr>
+        </p:nvSpPr>
+        <p:spPr/>
+        <p:txBody>
+          <a:bodyPr wrap="square"/>
+          <a:lstStyle/>
+          <a:p>
+            <a:r>
+              <a:t>The format is provided</a:t>
+            </a:r>
+          </a:p>
+        </p:txBody>
+      </p:sp>
+      <p:sp>
+        <p:nvSpPr>
+          <p:cNvPr id="9" name="Text Placeholder 8"/>
+          <p:cNvSpPr>
+            <a:spLocks noGrp="1"/>
+          </p:cNvSpPr>
+          <p:nvPr>
+            <p:ph type="body" idx="6"/>
+          </p:nvPr>
+        </p:nvSpPr>
+        <p:spPr/>
+        <p:txBody>
+          <a:bodyPr wrap="square"/>
+          <a:lstStyle/>
+          <a:p>
+            <a:r>
+              <a:rPr sz="1500"/>
+              <a:t>A brief used to be as good as the person writing it. The Briefing Studio scores the six things ASPL would otherwise come back and ask — market, cohort, success measure, definition of done, assets, due date — and embeds the tracking tokens itself. Quotes export the finance workbook; decks build on the approved template.</a:t>
+            </a:r>
+          </a:p>
+        </p:txBody>
+      </p:sp>
+      <p:sp>
+        <p:nvSpPr>
+          <p:cNvPr id="10" name="Text Placeholder 9"/>
+          <p:cNvSpPr>
+            <a:spLocks noGrp="1"/>
+          </p:cNvSpPr>
+          <p:nvPr>
+            <p:ph type="body" idx="14"/>
+          </p:nvPr>
+        </p:nvSpPr>
+        <p:spPr/>
+        <p:txBody>
+          <a:bodyPr wrap="square"/>
+          <a:lstStyle/>
+          <a:p>
+            <a:r>
+              <a:t>The account manager supplies the judgement. The system supplies the standard, the next move and the format.</a:t>
+            </a:r>
+          </a:p>
+        </p:txBody>
+      </p:sp>
+    </p:spTree>
+  </p:cSld>
+  <p:clrMapOvr>
+    <a:masterClrMapping/>
+  </p:clrMapOvr>
+</p:sld>
+</file>
+
+<file path=ppt/slides/slide23.xml><?xml version="1.0" encoding="utf-8"?>
 <p:sld xmlns:a="http://schemas.openxmlformats.org/drawingml/2006/main" xmlns:p="http://schemas.openxmlformats.org/presentationml/2006/main" xmlns:r="http://schemas.openxmlformats.org/officeDocument/2006/relationships">
   <p:cSld>
     <p:spTree>
@@ -13880,808 +14763,6 @@
 </p:sld>
 </file>
 
-<file path=ppt/slides/slide2.xml><?xml version="1.0" encoding="utf-8"?>
-<p:sld xmlns:a="http://schemas.openxmlformats.org/drawingml/2006/main" xmlns:p="http://schemas.openxmlformats.org/presentationml/2006/main" xmlns:r="http://schemas.openxmlformats.org/officeDocument/2006/relationships">
-  <p:cSld>
-    <p:spTree>
-      <p:nvGrpSpPr>
-        <p:cNvPr id="1" name=""/>
-        <p:cNvGrpSpPr/>
-        <p:nvPr/>
-      </p:nvGrpSpPr>
-      <p:grpSpPr/>
-      <p:sp>
-        <p:nvSpPr>
-          <p:cNvPr id="2" name="Title 1"/>
-          <p:cNvSpPr>
-            <a:spLocks noGrp="1"/>
-          </p:cNvSpPr>
-          <p:nvPr>
-            <p:ph type="title"/>
-          </p:nvPr>
-        </p:nvSpPr>
-        <p:spPr/>
-        <p:txBody>
-          <a:bodyPr wrap="square"/>
-          <a:lstStyle/>
-          <a:p>
-            <a:r>
-              <a:t>Five questions, one decision</a:t>
-            </a:r>
-          </a:p>
-        </p:txBody>
-      </p:sp>
-      <p:sp>
-        <p:nvSpPr>
-          <p:cNvPr id="3" name="Text Placeholder 2"/>
-          <p:cNvSpPr>
-            <a:spLocks noGrp="1"/>
-          </p:cNvSpPr>
-          <p:nvPr>
-            <p:ph type="body" idx="11"/>
-          </p:nvPr>
-        </p:nvSpPr>
-        <p:spPr/>
-        <p:txBody>
-          <a:bodyPr wrap="square"/>
-          <a:lstStyle/>
-          <a:p>
-            <a:r>
-              <a:t>The struggle, the solution, the value in hours and pounds, what it does for the team, and where it goes next.</a:t>
-            </a:r>
-          </a:p>
-        </p:txBody>
-      </p:sp>
-      <p:sp>
-        <p:nvSpPr>
-          <p:cNvPr id="4" name="Text Placeholder 3"/>
-          <p:cNvSpPr>
-            <a:spLocks noGrp="1"/>
-          </p:cNvSpPr>
-          <p:nvPr>
-            <p:ph type="body" idx="1"/>
-          </p:nvPr>
-        </p:nvSpPr>
-        <p:spPr/>
-        <p:txBody>
-          <a:bodyPr wrap="square"/>
-          <a:lstStyle/>
-          <a:p>
-            <a:r>
-              <a:t>01  The struggle before — 52 markets · 62 feeds · 13 project plans · one inbox — and no single view</a:t>
-            </a:r>
-          </a:p>
-          <a:p>
-            <a:r>
-              <a:t>02  The solution — 20 modules on the tools the team already uses · built in six weeks · £0 infrastructure</a:t>
-            </a:r>
-          </a:p>
-          <a:p>
-            <a:r>
-              <a:t>03  The benefit — Hours wasted without it, hours saved with it · the risks it removes · what it cost</a:t>
-            </a:r>
-          </a:p>
-        </p:txBody>
-      </p:sp>
-      <p:sp>
-        <p:nvSpPr>
-          <p:cNvPr id="5" name="Text Placeholder 4"/>
-          <p:cNvSpPr>
-            <a:spLocks noGrp="1"/>
-          </p:cNvSpPr>
-          <p:nvPr>
-            <p:ph type="body" idx="2"/>
-          </p:nvPr>
-        </p:nvSpPr>
-        <p:spPr/>
-        <p:txBody>
-          <a:bodyPr wrap="square"/>
-          <a:lstStyle/>
-          <a:p>
-            <a:r>
-              <a:t>04  What it does for the team — Why the process gets faster · a new AM productive in a fortnight · what a team lead gets</a:t>
-            </a:r>
-          </a:p>
-          <a:p>
-            <a:r>
-              <a:t>05  Going forward — A 90-day rollout · the vision for feedback, AM management and the business</a:t>
-            </a:r>
-          </a:p>
-        </p:txBody>
-      </p:sp>
-    </p:spTree>
-  </p:cSld>
-  <p:clrMapOvr>
-    <a:masterClrMapping/>
-  </p:clrMapOvr>
-</p:sld>
-</file>
-
-<file path=ppt/slides/slide20.xml><?xml version="1.0" encoding="utf-8"?>
-<p:sld xmlns:a="http://schemas.openxmlformats.org/drawingml/2006/main" xmlns:p="http://schemas.openxmlformats.org/presentationml/2006/main" xmlns:r="http://schemas.openxmlformats.org/officeDocument/2006/relationships">
-  <p:cSld>
-    <p:spTree>
-      <p:nvGrpSpPr>
-        <p:cNvPr id="1" name=""/>
-        <p:cNvGrpSpPr/>
-        <p:nvPr/>
-      </p:nvGrpSpPr>
-      <p:grpSpPr/>
-      <p:sp>
-        <p:nvSpPr>
-          <p:cNvPr id="2" name="Title 1"/>
-          <p:cNvSpPr>
-            <a:spLocks noGrp="1"/>
-          </p:cNvSpPr>
-          <p:nvPr>
-            <p:ph type="title"/>
-          </p:nvPr>
-        </p:nvSpPr>
-        <p:spPr/>
-        <p:txBody>
-          <a:bodyPr wrap="square"/>
-          <a:lstStyle/>
-          <a:p>
-            <a:r>
-              <a:t>From invite to owning the account</a:t>
-            </a:r>
-          </a:p>
-        </p:txBody>
-      </p:sp>
-      <p:sp>
-        <p:nvSpPr>
-          <p:cNvPr id="3" name="Text Placeholder 2"/>
-          <p:cNvSpPr>
-            <a:spLocks noGrp="1"/>
-          </p:cNvSpPr>
-          <p:nvPr>
-            <p:ph type="body" idx="11"/>
-          </p:nvPr>
-        </p:nvSpPr>
-        <p:spPr/>
-        <p:txBody>
-          <a:bodyPr wrap="square"/>
-          <a:lstStyle/>
-          <a:p>
-            <a:r>
-              <a:t>A new account manager is useful before they have met every client, because the account is readable.</a:t>
-            </a:r>
-          </a:p>
-        </p:txBody>
-      </p:sp>
-      <p:sp>
-        <p:nvSpPr>
-          <p:cNvPr id="4" name="Text Placeholder 3"/>
-          <p:cNvSpPr>
-            <a:spLocks noGrp="1"/>
-          </p:cNvSpPr>
-          <p:nvPr>
-            <p:ph type="body" idx="1"/>
-          </p:nvPr>
-        </p:nvSpPr>
-        <p:spPr/>
-        <p:txBody>
-          <a:bodyPr wrap="square"/>
-          <a:lstStyle/>
-          <a:p>
-            <a:r>
-              <a:t>1</a:t>
-            </a:r>
-          </a:p>
-        </p:txBody>
-      </p:sp>
-      <p:sp>
-        <p:nvSpPr>
-          <p:cNvPr id="5" name="Text Placeholder 4"/>
-          <p:cNvSpPr>
-            <a:spLocks noGrp="1"/>
-          </p:cNvSpPr>
-          <p:nvPr>
-            <p:ph type="body" idx="2"/>
-          </p:nvPr>
-        </p:nvSpPr>
-        <p:spPr/>
-        <p:txBody>
-          <a:bodyPr wrap="square"/>
-          <a:lstStyle/>
-          <a:p>
-            <a:r>
-              <a:rPr sz="1689"/>
-              <a:t>The whole book, without asking</a:t>
-            </a:r>
-          </a:p>
-        </p:txBody>
-      </p:sp>
-      <p:sp>
-        <p:nvSpPr>
-          <p:cNvPr id="6" name="Text Placeholder 5"/>
-          <p:cNvSpPr>
-            <a:spLocks noGrp="1"/>
-          </p:cNvSpPr>
-          <p:nvPr>
-            <p:ph type="body" idx="3"/>
-          </p:nvPr>
-        </p:nvSpPr>
-        <p:spPr/>
-        <p:txBody>
-          <a:bodyPr wrap="square"/>
-          <a:lstStyle/>
-          <a:p>
-            <a:r>
-              <a:t>Day one</a:t>
-            </a:r>
-          </a:p>
-          <a:p>
-            <a:r>
-              <a:t>One invite, scoped to their clients</a:t>
-            </a:r>
-          </a:p>
-          <a:p>
-            <a:r>
-              <a:t>The dossier: plan, feeds, hours</a:t>
-            </a:r>
-          </a:p>
-          <a:p>
-            <a:r>
-              <a:t>Feed Chat answers in plain English</a:t>
-            </a:r>
-          </a:p>
-          <a:p>
-            <a:r>
-              <a:t>Nothing to install; reads on a phone</a:t>
-            </a:r>
-          </a:p>
-        </p:txBody>
-      </p:sp>
-      <p:sp>
-        <p:nvSpPr>
-          <p:cNvPr id="7" name="Text Placeholder 6"/>
-          <p:cNvSpPr>
-            <a:spLocks noGrp="1"/>
-          </p:cNvSpPr>
-          <p:nvPr>
-            <p:ph type="body" idx="4"/>
-          </p:nvPr>
-        </p:nvSpPr>
-        <p:spPr/>
-        <p:txBody>
-          <a:bodyPr wrap="square"/>
-          <a:lstStyle/>
-          <a:p>
-            <a:r>
-              <a:t>2</a:t>
-            </a:r>
-          </a:p>
-        </p:txBody>
-      </p:sp>
-      <p:sp>
-        <p:nvSpPr>
-          <p:cNvPr id="8" name="Text Placeholder 7"/>
-          <p:cNvSpPr>
-            <a:spLocks noGrp="1"/>
-          </p:cNvSpPr>
-          <p:nvPr>
-            <p:ph type="body" idx="5"/>
-          </p:nvPr>
-        </p:nvSpPr>
-        <p:spPr/>
-        <p:txBody>
-          <a:bodyPr wrap="square"/>
-          <a:lstStyle/>
-          <a:p>
-            <a:r>
-              <a:t>Real work, with the rails on</a:t>
-            </a:r>
-          </a:p>
-        </p:txBody>
-      </p:sp>
-      <p:sp>
-        <p:nvSpPr>
-          <p:cNvPr id="9" name="Text Placeholder 8"/>
-          <p:cNvSpPr>
-            <a:spLocks noGrp="1"/>
-          </p:cNvSpPr>
-          <p:nvPr>
-            <p:ph type="body" idx="6"/>
-          </p:nvPr>
-        </p:nvSpPr>
-        <p:spPr/>
-        <p:txBody>
-          <a:bodyPr wrap="square"/>
-          <a:lstStyle/>
-          <a:p>
-            <a:r>
-              <a:t>Week one</a:t>
-            </a:r>
-          </a:p>
-          <a:p>
-            <a:r>
-              <a:t>First brief scored before it sends</a:t>
-            </a:r>
-          </a:p>
-          <a:p>
-            <a:r>
-              <a:t>A guard alert, email already drafted</a:t>
-            </a:r>
-          </a:p>
-          <a:p>
-            <a:r>
-              <a:t>Go or skip, with the balance in view</a:t>
-            </a:r>
-          </a:p>
-          <a:p>
-            <a:r>
-              <a:t>Every action logged and reviewable</a:t>
-            </a:r>
-          </a:p>
-        </p:txBody>
-      </p:sp>
-      <p:sp>
-        <p:nvSpPr>
-          <p:cNvPr id="10" name="Text Placeholder 9"/>
-          <p:cNvSpPr>
-            <a:spLocks noGrp="1"/>
-          </p:cNvSpPr>
-          <p:nvPr>
-            <p:ph type="body" idx="7"/>
-          </p:nvPr>
-        </p:nvSpPr>
-        <p:spPr/>
-        <p:txBody>
-          <a:bodyPr wrap="square"/>
-          <a:lstStyle/>
-          <a:p>
-            <a:r>
-              <a:t>3</a:t>
-            </a:r>
-          </a:p>
-        </p:txBody>
-      </p:sp>
-      <p:sp>
-        <p:nvSpPr>
-          <p:cNvPr id="11" name="Text Placeholder 10"/>
-          <p:cNvSpPr>
-            <a:spLocks noGrp="1"/>
-          </p:cNvSpPr>
-          <p:nvPr>
-            <p:ph type="body" idx="8"/>
-          </p:nvPr>
-        </p:nvSpPr>
-        <p:spPr/>
-        <p:txBody>
-          <a:bodyPr wrap="square"/>
-          <a:lstStyle/>
-          <a:p>
-            <a:r>
-              <a:rPr sz="1580"/>
-              <a:t>Running the account, not shadowing it</a:t>
-            </a:r>
-          </a:p>
-        </p:txBody>
-      </p:sp>
-      <p:sp>
-        <p:nvSpPr>
-          <p:cNvPr id="12" name="Text Placeholder 11"/>
-          <p:cNvSpPr>
-            <a:spLocks noGrp="1"/>
-          </p:cNvSpPr>
-          <p:nvPr>
-            <p:ph type="body" idx="9"/>
-          </p:nvPr>
-        </p:nvSpPr>
-        <p:spPr/>
-        <p:txBody>
-          <a:bodyPr wrap="square"/>
-          <a:lstStyle/>
-          <a:p>
-            <a:r>
-              <a:t>Week two</a:t>
-            </a:r>
-          </a:p>
-          <a:p>
-            <a:r>
-              <a:t>Monday call prepared from Leadership</a:t>
-            </a:r>
-          </a:p>
-          <a:p>
-            <a:r>
-              <a:t>A scorecard exported to the client</a:t>
-            </a:r>
-          </a:p>
-          <a:p>
-            <a:r>
-              <a:t>A quote on the shared rate card</a:t>
-            </a:r>
-          </a:p>
-          <a:p>
-            <a:r>
-              <a:t>Keyword moments scheduled</a:t>
-            </a:r>
-          </a:p>
-        </p:txBody>
-      </p:sp>
-      <p:sp>
-        <p:nvSpPr>
-          <p:cNvPr id="13" name="Text Placeholder 12"/>
-          <p:cNvSpPr>
-            <a:spLocks noGrp="1"/>
-          </p:cNvSpPr>
-          <p:nvPr>
-            <p:ph type="body" idx="14"/>
-          </p:nvPr>
-        </p:nvSpPr>
-        <p:spPr/>
-        <p:txBody>
-          <a:bodyPr wrap="square"/>
-          <a:lstStyle/>
-          <a:p>
-            <a:r>
-              <a:t>The mechanical half of the apprenticeship — where things live and what good looks like — is on the screen from day one.</a:t>
-            </a:r>
-          </a:p>
-        </p:txBody>
-      </p:sp>
-    </p:spTree>
-  </p:cSld>
-  <p:clrMapOvr>
-    <a:masterClrMapping/>
-  </p:clrMapOvr>
-</p:sld>
-</file>
-
-<file path=ppt/slides/slide21.xml><?xml version="1.0" encoding="utf-8"?>
-<p:sld xmlns:a="http://schemas.openxmlformats.org/drawingml/2006/main" xmlns:p="http://schemas.openxmlformats.org/presentationml/2006/main" xmlns:r="http://schemas.openxmlformats.org/officeDocument/2006/relationships">
-  <p:cSld>
-    <p:spTree>
-      <p:nvGrpSpPr>
-        <p:cNvPr id="1" name=""/>
-        <p:cNvGrpSpPr/>
-        <p:nvPr/>
-      </p:nvGrpSpPr>
-      <p:grpSpPr/>
-      <p:sp>
-        <p:nvSpPr>
-          <p:cNvPr id="2" name="Title 1"/>
-          <p:cNvSpPr>
-            <a:spLocks noGrp="1"/>
-          </p:cNvSpPr>
-          <p:nvPr>
-            <p:ph type="title"/>
-          </p:nvPr>
-        </p:nvSpPr>
-        <p:spPr/>
-        <p:txBody>
-          <a:bodyPr wrap="square"/>
-          <a:lstStyle/>
-          <a:p>
-            <a:r>
-              <a:t>What it gives whoever runs the team</a:t>
-            </a:r>
-          </a:p>
-        </p:txBody>
-      </p:sp>
-      <p:sp>
-        <p:nvSpPr>
-          <p:cNvPr id="3" name="Text Placeholder 2"/>
-          <p:cNvSpPr>
-            <a:spLocks noGrp="1"/>
-          </p:cNvSpPr>
-          <p:nvPr>
-            <p:ph type="body" idx="13"/>
-          </p:nvPr>
-        </p:nvSpPr>
-        <p:spPr/>
-        <p:txBody>
-          <a:bodyPr wrap="square"/>
-          <a:lstStyle/>
-          <a:p>
-            <a:r>
-              <a:t>The data that helps an account manager act is the data a team lead needs to coach, balance and hand over.</a:t>
-            </a:r>
-          </a:p>
-        </p:txBody>
-      </p:sp>
-      <p:sp>
-        <p:nvSpPr>
-          <p:cNvPr id="4" name="Text Placeholder 3"/>
-          <p:cNvSpPr>
-            <a:spLocks noGrp="1"/>
-          </p:cNvSpPr>
-          <p:nvPr>
-            <p:ph type="body" idx="1"/>
-          </p:nvPr>
-        </p:nvSpPr>
-        <p:spPr/>
-        <p:txBody>
-          <a:bodyPr wrap="square"/>
-          <a:lstStyle/>
-          <a:p>
-            <a:r>
-              <a:rPr sz="1880"/>
-              <a:t>Coaching on one screen</a:t>
-            </a:r>
-          </a:p>
-        </p:txBody>
-      </p:sp>
-      <p:sp>
-        <p:nvSpPr>
-          <p:cNvPr id="5" name="Text Placeholder 4"/>
-          <p:cNvSpPr>
-            <a:spLocks noGrp="1"/>
-          </p:cNvSpPr>
-          <p:nvPr>
-            <p:ph type="body" idx="2"/>
-          </p:nvPr>
-        </p:nvSpPr>
-        <p:spPr/>
-        <p:txBody>
-          <a:bodyPr wrap="square"/>
-          <a:lstStyle/>
-          <a:p>
-            <a:r>
-              <a:rPr sz="1500"/>
-              <a:t>View-as opens the FCC exactly as a named account manager sees it — their clients, their modules, their alerts — so a one-to-one is a conversation about one screen rather than a described one. The Playbook turns “how is this account doing” into a list of plays that are landing, stalling or absent.</a:t>
-            </a:r>
-          </a:p>
-        </p:txBody>
-      </p:sp>
-      <p:sp>
-        <p:nvSpPr>
-          <p:cNvPr id="6" name="Text Placeholder 5"/>
-          <p:cNvSpPr>
-            <a:spLocks noGrp="1"/>
-          </p:cNvSpPr>
-          <p:nvPr>
-            <p:ph type="body" idx="3"/>
-          </p:nvPr>
-        </p:nvSpPr>
-        <p:spPr/>
-        <p:txBody>
-          <a:bodyPr wrap="square"/>
-          <a:lstStyle/>
-          <a:p>
-            <a:r>
-              <a:rPr sz="1760"/>
-              <a:t>One standard, everywhere</a:t>
-            </a:r>
-          </a:p>
-        </p:txBody>
-      </p:sp>
-      <p:sp>
-        <p:nvSpPr>
-          <p:cNvPr id="7" name="Text Placeholder 6"/>
-          <p:cNvSpPr>
-            <a:spLocks noGrp="1"/>
-          </p:cNvSpPr>
-          <p:nvPr>
-            <p:ph type="body" idx="4"/>
-          </p:nvPr>
-        </p:nvSpPr>
-        <p:spPr/>
-        <p:txBody>
-          <a:bodyPr wrap="square"/>
-          <a:lstStyle/>
-          <a:p>
-            <a:r>
-              <a:t>Every brief is scored against the same six checks, every feed against the same rules, every quote built on the same rate card. The distance between the most experienced account manager and the newest narrows because the floor rises, not because anybody is being watched.</a:t>
-            </a:r>
-          </a:p>
-        </p:txBody>
-      </p:sp>
-      <p:sp>
-        <p:nvSpPr>
-          <p:cNvPr id="8" name="Text Placeholder 7"/>
-          <p:cNvSpPr>
-            <a:spLocks noGrp="1"/>
-          </p:cNvSpPr>
-          <p:nvPr>
-            <p:ph type="body" idx="5"/>
-          </p:nvPr>
-        </p:nvSpPr>
-        <p:spPr/>
-        <p:txBody>
-          <a:bodyPr wrap="square"/>
-          <a:lstStyle/>
-          <a:p>
-            <a:r>
-              <a:rPr sz="1760"/>
-              <a:t>Handover in an afternoon</a:t>
-            </a:r>
-          </a:p>
-        </p:txBody>
-      </p:sp>
-      <p:sp>
-        <p:nvSpPr>
-          <p:cNvPr id="9" name="Text Placeholder 8"/>
-          <p:cNvSpPr>
-            <a:spLocks noGrp="1"/>
-          </p:cNvSpPr>
-          <p:nvPr>
-            <p:ph type="body" idx="6"/>
-          </p:nvPr>
-        </p:nvSpPr>
-        <p:spPr/>
-        <p:txBody>
-          <a:bodyPr wrap="square"/>
-          <a:lstStyle/>
-          <a:p>
-            <a:r>
-              <a:t>The dossier is the live handover document — plan, briefs in flight, feed scores, hours, calendar moments, per brand and current. An account moves between managers without a handover pack, and holiday cover stops being a gap in the client’s week.</a:t>
-            </a:r>
-          </a:p>
-        </p:txBody>
-      </p:sp>
-      <p:sp>
-        <p:nvSpPr>
-          <p:cNvPr id="10" name="Text Placeholder 9"/>
-          <p:cNvSpPr>
-            <a:spLocks noGrp="1"/>
-          </p:cNvSpPr>
-          <p:nvPr>
-            <p:ph type="body" idx="14"/>
-          </p:nvPr>
-        </p:nvSpPr>
-        <p:spPr/>
-        <p:txBody>
-          <a:bodyPr wrap="square"/>
-          <a:lstStyle/>
-          <a:p>
-            <a:r>
-              <a:t>The floor rises. The ceiling is still the account manager.</a:t>
-            </a:r>
-          </a:p>
-        </p:txBody>
-      </p:sp>
-    </p:spTree>
-  </p:cSld>
-  <p:clrMapOvr>
-    <a:masterClrMapping/>
-  </p:clrMapOvr>
-</p:sld>
-</file>
-
-<file path=ppt/slides/slide22.xml><?xml version="1.0" encoding="utf-8"?>
-<p:sld xmlns:a="http://schemas.openxmlformats.org/drawingml/2006/main" xmlns:p="http://schemas.openxmlformats.org/presentationml/2006/main" xmlns:r="http://schemas.openxmlformats.org/officeDocument/2006/relationships">
-  <p:cSld>
-    <p:spTree>
-      <p:nvGrpSpPr>
-        <p:cNvPr id="1" name=""/>
-        <p:cNvGrpSpPr/>
-        <p:nvPr/>
-      </p:nvGrpSpPr>
-      <p:grpSpPr/>
-      <p:sp>
-        <p:nvSpPr>
-          <p:cNvPr id="2" name="Text Placeholder 1"/>
-          <p:cNvSpPr>
-            <a:spLocks noGrp="1"/>
-          </p:cNvSpPr>
-          <p:nvPr>
-            <p:ph type="body" idx="1"/>
-          </p:nvPr>
-        </p:nvSpPr>
-        <p:spPr/>
-        <p:txBody>
-          <a:bodyPr wrap="square"/>
-          <a:lstStyle/>
-          <a:p>
-            <a:r>
-              <a:rPr sz="2620"/>
-              <a:t>It shortens the mechanical half of the apprenticeship — where the data lives, what good looks like, what a brief must contain — and not the relational half: reading a client, holding a hard call, knowing when to push. So every figure states its source and every alert opens to its evidence.</a:t>
-            </a:r>
-          </a:p>
-        </p:txBody>
-      </p:sp>
-      <p:sp>
-        <p:nvSpPr>
-          <p:cNvPr id="3" name="Text Placeholder 2"/>
-          <p:cNvSpPr>
-            <a:spLocks noGrp="1"/>
-          </p:cNvSpPr>
-          <p:nvPr>
-            <p:ph type="body" idx="11"/>
-          </p:nvPr>
-        </p:nvSpPr>
-        <p:spPr/>
-        <p:txBody>
-          <a:bodyPr wrap="square"/>
-          <a:lstStyle/>
-          <a:p>
-            <a:r>
-              <a:t>What it does not do</a:t>
-            </a:r>
-          </a:p>
-        </p:txBody>
-      </p:sp>
-    </p:spTree>
-  </p:cSld>
-  <p:clrMapOvr>
-    <a:masterClrMapping/>
-  </p:clrMapOvr>
-</p:sld>
-</file>
-
-<file path=ppt/slides/slide23.xml><?xml version="1.0" encoding="utf-8"?>
-<p:sld xmlns:a="http://schemas.openxmlformats.org/drawingml/2006/main" xmlns:p="http://schemas.openxmlformats.org/presentationml/2006/main" xmlns:r="http://schemas.openxmlformats.org/officeDocument/2006/relationships">
-  <p:cSld>
-    <p:spTree>
-      <p:nvGrpSpPr>
-        <p:cNvPr id="1" name=""/>
-        <p:cNvGrpSpPr/>
-        <p:nvPr/>
-      </p:nvGrpSpPr>
-      <p:grpSpPr/>
-      <p:sp>
-        <p:nvSpPr>
-          <p:cNvPr id="2" name="Text Placeholder 1"/>
-          <p:cNvSpPr>
-            <a:spLocks noGrp="1"/>
-          </p:cNvSpPr>
-          <p:nvPr>
-            <p:ph type="body" idx="11"/>
-          </p:nvPr>
-        </p:nvSpPr>
-        <p:spPr/>
-        <p:txBody>
-          <a:bodyPr wrap="square"/>
-          <a:lstStyle/>
-          <a:p>
-            <a:r>
-              <a:t>Chapter five</a:t>
-            </a:r>
-          </a:p>
-        </p:txBody>
-      </p:sp>
-      <p:sp>
-        <p:nvSpPr>
-          <p:cNvPr id="3" name="Title 2"/>
-          <p:cNvSpPr>
-            <a:spLocks noGrp="1"/>
-          </p:cNvSpPr>
-          <p:nvPr>
-            <p:ph type="title"/>
-          </p:nvPr>
-        </p:nvSpPr>
-        <p:spPr/>
-        <p:txBody>
-          <a:bodyPr wrap="square"/>
-          <a:lstStyle/>
-          <a:p>
-            <a:r>
-              <a:t>Going forward</a:t>
-            </a:r>
-          </a:p>
-        </p:txBody>
-      </p:sp>
-      <p:sp>
-        <p:nvSpPr>
-          <p:cNvPr id="4" name="Text Placeholder 3"/>
-          <p:cNvSpPr>
-            <a:spLocks noGrp="1"/>
-          </p:cNvSpPr>
-          <p:nvPr>
-            <p:ph type="body" idx="1"/>
-          </p:nvPr>
-        </p:nvSpPr>
-        <p:spPr/>
-        <p:txBody>
-          <a:bodyPr wrap="square"/>
-          <a:lstStyle/>
-          <a:p>
-            <a:r>
-              <a:t>Ninety days to make it the team's way of working, then the platform for feedback, AM management and the business.</a:t>
-            </a:r>
-          </a:p>
-        </p:txBody>
-      </p:sp>
-    </p:spTree>
-  </p:cSld>
-  <p:clrMapOvr>
-    <a:masterClrMapping/>
-  </p:clrMapOvr>
-</p:sld>
-</file>
-
 <file path=ppt/slides/slide24.xml><?xml version="1.0" encoding="utf-8"?>
 <p:sld xmlns:a="http://schemas.openxmlformats.org/drawingml/2006/main" xmlns:p="http://schemas.openxmlformats.org/presentationml/2006/main" xmlns:r="http://schemas.openxmlformats.org/officeDocument/2006/relationships">
   <p:cSld>
@@ -14708,7 +14789,7 @@
           <a:lstStyle/>
           <a:p>
             <a:r>
-              <a:t>Ninety days to the team’s operating system</a:t>
+              <a:t>From invite to owning the account</a:t>
             </a:r>
           </a:p>
         </p:txBody>
@@ -14729,7 +14810,7 @@
           <a:lstStyle/>
           <a:p>
             <a:r>
-              <a:t>Onboarding is an invite and an hour; the plan measures before and after.</a:t>
+              <a:t>A new account manager is useful before they have met every client, because the account is readable.</a:t>
             </a:r>
           </a:p>
         </p:txBody>
@@ -14772,7 +14853,7 @@
           <a:p>
             <a:r>
               <a:rPr sz="1689"/>
-              <a:t>Everyone in, baseline measured</a:t>
+              <a:t>The whole book, without asking</a:t>
             </a:r>
           </a:p>
         </p:txBody>
@@ -14793,27 +14874,27 @@
           <a:lstStyle/>
           <a:p>
             <a:r>
-              <a:t>Days 0–30</a:t>
-            </a:r>
-          </a:p>
-          <a:p>
-            <a:r>
-              <a:t>Access invites, scoped per AM</a:t>
-            </a:r>
-          </a:p>
-          <a:p>
-            <a:r>
-              <a:t>One-hour walkthrough each</a:t>
-            </a:r>
-          </a:p>
-          <a:p>
-            <a:r>
-              <a:t>Gmail push and plans wired</a:t>
-            </a:r>
-          </a:p>
-          <a:p>
-            <a:r>
-              <a:t>One-week diary — the before figure</a:t>
+              <a:t>Day one</a:t>
+            </a:r>
+          </a:p>
+          <a:p>
+            <a:r>
+              <a:t>One invite, scoped to their clients</a:t>
+            </a:r>
+          </a:p>
+          <a:p>
+            <a:r>
+              <a:t>The dossier: plan, feeds, hours</a:t>
+            </a:r>
+          </a:p>
+          <a:p>
+            <a:r>
+              <a:t>Feed Chat answers in plain English</a:t>
+            </a:r>
+          </a:p>
+          <a:p>
+            <a:r>
+              <a:t>Nothing to install; reads on a phone</a:t>
             </a:r>
           </a:p>
         </p:txBody>
@@ -14855,92 +14936,91 @@
           <a:lstStyle/>
           <a:p>
             <a:r>
+              <a:t>Real work, with the rails on</a:t>
+            </a:r>
+          </a:p>
+        </p:txBody>
+      </p:sp>
+      <p:sp>
+        <p:nvSpPr>
+          <p:cNvPr id="9" name="Text Placeholder 8"/>
+          <p:cNvSpPr>
+            <a:spLocks noGrp="1"/>
+          </p:cNvSpPr>
+          <p:nvPr>
+            <p:ph type="body" idx="6"/>
+          </p:nvPr>
+        </p:nvSpPr>
+        <p:spPr/>
+        <p:txBody>
+          <a:bodyPr wrap="square"/>
+          <a:lstStyle/>
+          <a:p>
+            <a:r>
+              <a:t>Week one</a:t>
+            </a:r>
+          </a:p>
+          <a:p>
+            <a:r>
+              <a:t>First brief scored before it sends</a:t>
+            </a:r>
+          </a:p>
+          <a:p>
+            <a:r>
+              <a:t>A guard alert, email already drafted</a:t>
+            </a:r>
+          </a:p>
+          <a:p>
+            <a:r>
+              <a:t>Go or skip, with the balance in view</a:t>
+            </a:r>
+          </a:p>
+          <a:p>
+            <a:r>
+              <a:t>Every action logged and reviewable</a:t>
+            </a:r>
+          </a:p>
+        </p:txBody>
+      </p:sp>
+      <p:sp>
+        <p:nvSpPr>
+          <p:cNvPr id="10" name="Text Placeholder 9"/>
+          <p:cNvSpPr>
+            <a:spLocks noGrp="1"/>
+          </p:cNvSpPr>
+          <p:nvPr>
+            <p:ph type="body" idx="7"/>
+          </p:nvPr>
+        </p:nvSpPr>
+        <p:spPr/>
+        <p:txBody>
+          <a:bodyPr wrap="square"/>
+          <a:lstStyle/>
+          <a:p>
+            <a:r>
+              <a:t>3</a:t>
+            </a:r>
+          </a:p>
+        </p:txBody>
+      </p:sp>
+      <p:sp>
+        <p:nvSpPr>
+          <p:cNvPr id="11" name="Text Placeholder 10"/>
+          <p:cNvSpPr>
+            <a:spLocks noGrp="1"/>
+          </p:cNvSpPr>
+          <p:nvPr>
+            <p:ph type="body" idx="8"/>
+          </p:nvPr>
+        </p:nvSpPr>
+        <p:spPr/>
+        <p:txBody>
+          <a:bodyPr wrap="square"/>
+          <a:lstStyle/>
+          <a:p>
+            <a:r>
               <a:rPr sz="1580"/>
-              <a:t>The FCC is where the work happens</a:t>
-            </a:r>
-          </a:p>
-        </p:txBody>
-      </p:sp>
-      <p:sp>
-        <p:nvSpPr>
-          <p:cNvPr id="9" name="Text Placeholder 8"/>
-          <p:cNvSpPr>
-            <a:spLocks noGrp="1"/>
-          </p:cNvSpPr>
-          <p:nvPr>
-            <p:ph type="body" idx="6"/>
-          </p:nvPr>
-        </p:nvSpPr>
-        <p:spPr/>
-        <p:txBody>
-          <a:bodyPr wrap="square"/>
-          <a:lstStyle/>
-          <a:p>
-            <a:r>
-              <a:t>Days 30–60</a:t>
-            </a:r>
-          </a:p>
-          <a:p>
-            <a:r>
-              <a:t>Every brief from Workflow</a:t>
-            </a:r>
-          </a:p>
-          <a:p>
-            <a:r>
-              <a:t>Every quote and deck generated</a:t>
-            </a:r>
-          </a:p>
-          <a:p>
-            <a:r>
-              <a:t>Monday call off Leadership</a:t>
-            </a:r>
-          </a:p>
-          <a:p>
-            <a:r>
-              <a:t>Go or skip with the balance in view</a:t>
-            </a:r>
-          </a:p>
-        </p:txBody>
-      </p:sp>
-      <p:sp>
-        <p:nvSpPr>
-          <p:cNvPr id="10" name="Text Placeholder 9"/>
-          <p:cNvSpPr>
-            <a:spLocks noGrp="1"/>
-          </p:cNvSpPr>
-          <p:nvPr>
-            <p:ph type="body" idx="7"/>
-          </p:nvPr>
-        </p:nvSpPr>
-        <p:spPr/>
-        <p:txBody>
-          <a:bodyPr wrap="square"/>
-          <a:lstStyle/>
-          <a:p>
-            <a:r>
-              <a:t>3</a:t>
-            </a:r>
-          </a:p>
-        </p:txBody>
-      </p:sp>
-      <p:sp>
-        <p:nvSpPr>
-          <p:cNvPr id="11" name="Text Placeholder 10"/>
-          <p:cNvSpPr>
-            <a:spLocks noGrp="1"/>
-          </p:cNvSpPr>
-          <p:nvPr>
-            <p:ph type="body" idx="8"/>
-          </p:nvPr>
-        </p:nvSpPr>
-        <p:spPr/>
-        <p:txBody>
-          <a:bodyPr wrap="square"/>
-          <a:lstStyle/>
-          <a:p>
-            <a:r>
-              <a:rPr sz="1580"/>
-              <a:t>Measure, report, decide the next team</a:t>
+              <a:t>Running the account, not shadowing it</a:t>
             </a:r>
           </a:p>
         </p:txBody>
@@ -14961,27 +15041,27 @@
           <a:lstStyle/>
           <a:p>
             <a:r>
-              <a:t>Days 60–90</a:t>
-            </a:r>
-          </a:p>
-          <a:p>
-            <a:r>
-              <a:t>Re-run the diary — the after figure</a:t>
-            </a:r>
-          </a:p>
-          <a:p>
-            <a:r>
-              <a:t>Report alerts, turnaround, overrun</a:t>
-            </a:r>
-          </a:p>
-          <a:p>
-            <a:r>
-              <a:t>Agree the budget line</a:t>
-            </a:r>
-          </a:p>
-          <a:p>
-            <a:r>
-              <a:t>Pick the next team to offer it to</a:t>
+              <a:t>Week two</a:t>
+            </a:r>
+          </a:p>
+          <a:p>
+            <a:r>
+              <a:t>Monday call prepared from Leadership</a:t>
+            </a:r>
+          </a:p>
+          <a:p>
+            <a:r>
+              <a:t>A scorecard exported to the client</a:t>
+            </a:r>
+          </a:p>
+          <a:p>
+            <a:r>
+              <a:t>A quote on the shared rate card</a:t>
+            </a:r>
+          </a:p>
+          <a:p>
+            <a:r>
+              <a:t>Keyword moments scheduled</a:t>
             </a:r>
           </a:p>
         </p:txBody>
@@ -15002,8 +15082,7 @@
           <a:lstStyle/>
           <a:p>
             <a:r>
-              <a:rPr sz="1070"/>
-              <a:t>Nothing in the first 30 days needs a developer. The access model, the mobile view and the sync jobs exist; the rollout is invitations, a walkthrough and a diary.</a:t>
+              <a:t>The mechanical half of the apprenticeship — where things live and what good looks like — is on the screen from day one.</a:t>
             </a:r>
           </a:p>
         </p:txBody>
@@ -15042,7 +15121,7 @@
           <a:lstStyle/>
           <a:p>
             <a:r>
-              <a:t>What the FCC becomes next</a:t>
+              <a:t>What it gives whoever runs the team</a:t>
             </a:r>
           </a:p>
         </p:txBody>
@@ -15063,7 +15142,7 @@
           <a:lstStyle/>
           <a:p>
             <a:r>
-              <a:t>It already reads every system the team runs; next it acts on what it reads.</a:t>
+              <a:t>The data that helps an account manager act is the data a team lead needs to coach, balance and hand over.</a:t>
             </a:r>
           </a:p>
         </p:txBody>
@@ -15085,7 +15164,7 @@
           <a:p>
             <a:r>
               <a:rPr sz="1880"/>
-              <a:t>Feedback — client voice</a:t>
+              <a:t>Coaching on one screen</a:t>
             </a:r>
           </a:p>
         </p:txBody>
@@ -15106,7 +15185,8 @@
           <a:lstStyle/>
           <a:p>
             <a:r>
-              <a:t>Sentiment from every client email and call feeding the retention radar; a monthly one-page account report emailed automatically; read-only scorecard links a client can open; a pulse question after each review — churn risk as a number weeks before it is a conversation.</a:t>
+              <a:rPr sz="1500"/>
+              <a:t>View-as opens the FCC exactly as a named account manager sees it — their clients, their modules, their alerts — so a one-to-one is a conversation about one screen rather than a described one. The Playbook turns “how is this account doing” into a list of plays that are landing, stalling or absent.</a:t>
             </a:r>
           </a:p>
         </p:txBody>
@@ -15127,7 +15207,8 @@
           <a:lstStyle/>
           <a:p>
             <a:r>
-              <a:t>AM management</a:t>
+              <a:rPr sz="1760"/>
+              <a:t>One standard, everywhere</a:t>
             </a:r>
           </a:p>
         </p:txBody>
@@ -15148,8 +15229,7 @@
           <a:lstStyle/>
           <a:p>
             <a:r>
-              <a:rPr sz="1500"/>
-              <a:t>Workload balanced across the team from the live task book; turnaround and SLA per AM; urgent hours against optimisation hours, tagged and reported; the Playbook as the coaching tool for what each account is missing; onboarding measured rather than asserted — time to first brief, per new starter.</a:t>
+              <a:t>Every brief is scored against the same six checks, every feed against the same rules, every quote built on the same rate card. The distance between the most experienced account manager and the newest narrows because the floor rises, not because anybody is being watched.</a:t>
             </a:r>
           </a:p>
         </p:txBody>
@@ -15170,7 +15250,8 @@
           <a:lstStyle/>
           <a:p>
             <a:r>
-              <a:t>Business engine</a:t>
+              <a:rPr sz="1760"/>
+              <a:t>Handover in an afternoon</a:t>
             </a:r>
           </a:p>
         </p:txBody>
@@ -15191,8 +15272,7 @@
           <a:lstStyle/>
           <a:p>
             <a:r>
-              <a:rPr sz="1500"/>
-              <a:t>Revenue forecast from retainer burn, the quote pipeline and new-product volumes; profitability per account; Tachyon drafting the brief and the client email from the finding; fixes pushed into FeedHero and Merchant Center from the screen; feed changes joined to Ads performance; the whole thing packaged for other teams in the network.</a:t>
+              <a:t>The dossier is the live handover document — plan, briefs in flight, feed scores, hours, calendar moments, per brand and current. An account moves between managers without a handover pack, and holiday cover stops being a gap in the client’s week.</a:t>
             </a:r>
           </a:p>
         </p:txBody>
@@ -15213,7 +15293,7 @@
           <a:lstStyle/>
           <a:p>
             <a:r>
-              <a:t>The dashboard starts making the first move.</a:t>
+              <a:t>The floor rises. The ceiling is still the account manager.</a:t>
             </a:r>
           </a:p>
         </p:txBody>
@@ -15253,7 +15333,7 @@
           <a:p>
             <a:r>
               <a:rPr sz="2620"/>
-              <a:t>Every module that has landed in six weeks does the same thing: it puts the information in front of the account manager at the moment of the decision, so the team's time goes into client work instead of finding out what is going on. The vision is the same idea, one step further — the dashboard starts making the first move.</a:t>
+              <a:t>It shortens the mechanical half of the apprenticeship — where the data lives, what good looks like, what a brief must contain — and not the relational half: reading a client, holding a hard call, knowing when to push. So every figure states its source and every alert opens to its evidence.</a:t>
             </a:r>
           </a:p>
         </p:txBody>
@@ -15274,7 +15354,7 @@
           <a:lstStyle/>
           <a:p>
             <a:r>
-              <a:t>The through-line</a:t>
+              <a:t>What it does not do</a:t>
             </a:r>
           </a:p>
         </p:txBody>
@@ -15304,6 +15384,48 @@
             <a:spLocks noGrp="1"/>
           </p:cNvSpPr>
           <p:nvPr>
+            <p:ph type="body" idx="11"/>
+          </p:nvPr>
+        </p:nvSpPr>
+        <p:spPr/>
+        <p:txBody>
+          <a:bodyPr wrap="square"/>
+          <a:lstStyle/>
+          <a:p>
+            <a:r>
+              <a:t>Chapter five</a:t>
+            </a:r>
+          </a:p>
+        </p:txBody>
+      </p:sp>
+      <p:sp>
+        <p:nvSpPr>
+          <p:cNvPr id="3" name="Title 2"/>
+          <p:cNvSpPr>
+            <a:spLocks noGrp="1"/>
+          </p:cNvSpPr>
+          <p:nvPr>
+            <p:ph type="title"/>
+          </p:nvPr>
+        </p:nvSpPr>
+        <p:spPr/>
+        <p:txBody>
+          <a:bodyPr wrap="square"/>
+          <a:lstStyle/>
+          <a:p>
+            <a:r>
+              <a:t>Going forward</a:t>
+            </a:r>
+          </a:p>
+        </p:txBody>
+      </p:sp>
+      <p:sp>
+        <p:nvSpPr>
+          <p:cNvPr id="4" name="Text Placeholder 3"/>
+          <p:cNvSpPr>
+            <a:spLocks noGrp="1"/>
+          </p:cNvSpPr>
+          <p:nvPr>
             <p:ph type="body" idx="1"/>
           </p:nvPr>
         </p:nvSpPr>
@@ -15313,29 +15435,7 @@
           <a:lstStyle/>
           <a:p>
             <a:r>
-              <a:rPr sz="2620"/>
-              <a:t>Reimburse the two-month Claude Code subscription that built the FCC, and approve the 90-day rollout to the London account-management team with one subscription per builder and Ray as product owner. The return is 2,530 hours a year at a team of five, and the three risks in chapter three stop being invisible.</a:t>
-            </a:r>
-          </a:p>
-        </p:txBody>
-      </p:sp>
-      <p:sp>
-        <p:nvSpPr>
-          <p:cNvPr id="3" name="Text Placeholder 2"/>
-          <p:cNvSpPr>
-            <a:spLocks noGrp="1"/>
-          </p:cNvSpPr>
-          <p:nvPr>
-            <p:ph type="body" idx="11"/>
-          </p:nvPr>
-        </p:nvSpPr>
-        <p:spPr/>
-        <p:txBody>
-          <a:bodyPr wrap="square"/>
-          <a:lstStyle/>
-          <a:p>
-            <a:r>
-              <a:t>The ask</a:t>
+              <a:t>Ninety days to make it the team's way of working, then the platform for feedback, AM management and the business.</a:t>
             </a:r>
           </a:p>
         </p:txBody>
@@ -15374,7 +15474,7 @@
           <a:lstStyle/>
           <a:p>
             <a:r>
-              <a:t>Questions?</a:t>
+              <a:t>Ninety days to the team’s operating system</a:t>
             </a:r>
           </a:p>
         </p:txBody>
@@ -15386,6 +15486,27 @@
             <a:spLocks noGrp="1"/>
           </p:cNvSpPr>
           <p:nvPr>
+            <p:ph type="body" idx="11"/>
+          </p:nvPr>
+        </p:nvSpPr>
+        <p:spPr/>
+        <p:txBody>
+          <a:bodyPr wrap="square"/>
+          <a:lstStyle/>
+          <a:p>
+            <a:r>
+              <a:t>Onboarding is an invite and an hour; the plan measures before and after.</a:t>
+            </a:r>
+          </a:p>
+        </p:txBody>
+      </p:sp>
+      <p:sp>
+        <p:nvSpPr>
+          <p:cNvPr id="4" name="Text Placeholder 3"/>
+          <p:cNvSpPr>
+            <a:spLocks noGrp="1"/>
+          </p:cNvSpPr>
+          <p:nvPr>
             <p:ph type="body" idx="1"/>
           </p:nvPr>
         </p:nvSpPr>
@@ -15395,7 +15516,320 @@
           <a:lstStyle/>
           <a:p>
             <a:r>
-              <a:t>Ray Vũ</a:t>
+              <a:t>1</a:t>
+            </a:r>
+          </a:p>
+        </p:txBody>
+      </p:sp>
+      <p:sp>
+        <p:nvSpPr>
+          <p:cNvPr id="5" name="Text Placeholder 4"/>
+          <p:cNvSpPr>
+            <a:spLocks noGrp="1"/>
+          </p:cNvSpPr>
+          <p:nvPr>
+            <p:ph type="body" idx="2"/>
+          </p:nvPr>
+        </p:nvSpPr>
+        <p:spPr/>
+        <p:txBody>
+          <a:bodyPr wrap="square"/>
+          <a:lstStyle/>
+          <a:p>
+            <a:r>
+              <a:rPr sz="1689"/>
+              <a:t>Everyone in, baseline measured</a:t>
+            </a:r>
+          </a:p>
+        </p:txBody>
+      </p:sp>
+      <p:sp>
+        <p:nvSpPr>
+          <p:cNvPr id="6" name="Text Placeholder 5"/>
+          <p:cNvSpPr>
+            <a:spLocks noGrp="1"/>
+          </p:cNvSpPr>
+          <p:nvPr>
+            <p:ph type="body" idx="3"/>
+          </p:nvPr>
+        </p:nvSpPr>
+        <p:spPr/>
+        <p:txBody>
+          <a:bodyPr wrap="square"/>
+          <a:lstStyle/>
+          <a:p>
+            <a:r>
+              <a:t>Days 0–30</a:t>
+            </a:r>
+          </a:p>
+          <a:p>
+            <a:r>
+              <a:t>Access invites, scoped per AM</a:t>
+            </a:r>
+          </a:p>
+          <a:p>
+            <a:r>
+              <a:t>One-hour walkthrough each</a:t>
+            </a:r>
+          </a:p>
+          <a:p>
+            <a:r>
+              <a:t>Gmail push and plans wired</a:t>
+            </a:r>
+          </a:p>
+          <a:p>
+            <a:r>
+              <a:t>One-week diary — the before figure</a:t>
+            </a:r>
+          </a:p>
+        </p:txBody>
+      </p:sp>
+      <p:sp>
+        <p:nvSpPr>
+          <p:cNvPr id="7" name="Text Placeholder 6"/>
+          <p:cNvSpPr>
+            <a:spLocks noGrp="1"/>
+          </p:cNvSpPr>
+          <p:nvPr>
+            <p:ph type="body" idx="4"/>
+          </p:nvPr>
+        </p:nvSpPr>
+        <p:spPr/>
+        <p:txBody>
+          <a:bodyPr wrap="square"/>
+          <a:lstStyle/>
+          <a:p>
+            <a:r>
+              <a:t>2</a:t>
+            </a:r>
+          </a:p>
+        </p:txBody>
+      </p:sp>
+      <p:sp>
+        <p:nvSpPr>
+          <p:cNvPr id="8" name="Text Placeholder 7"/>
+          <p:cNvSpPr>
+            <a:spLocks noGrp="1"/>
+          </p:cNvSpPr>
+          <p:nvPr>
+            <p:ph type="body" idx="5"/>
+          </p:nvPr>
+        </p:nvSpPr>
+        <p:spPr/>
+        <p:txBody>
+          <a:bodyPr wrap="square"/>
+          <a:lstStyle/>
+          <a:p>
+            <a:r>
+              <a:rPr sz="1580"/>
+              <a:t>The FCC is where the work happens</a:t>
+            </a:r>
+          </a:p>
+        </p:txBody>
+      </p:sp>
+      <p:sp>
+        <p:nvSpPr>
+          <p:cNvPr id="9" name="Text Placeholder 8"/>
+          <p:cNvSpPr>
+            <a:spLocks noGrp="1"/>
+          </p:cNvSpPr>
+          <p:nvPr>
+            <p:ph type="body" idx="6"/>
+          </p:nvPr>
+        </p:nvSpPr>
+        <p:spPr/>
+        <p:txBody>
+          <a:bodyPr wrap="square"/>
+          <a:lstStyle/>
+          <a:p>
+            <a:r>
+              <a:t>Days 30–60</a:t>
+            </a:r>
+          </a:p>
+          <a:p>
+            <a:r>
+              <a:t>Every brief from Workflow</a:t>
+            </a:r>
+          </a:p>
+          <a:p>
+            <a:r>
+              <a:t>Every quote and deck generated</a:t>
+            </a:r>
+          </a:p>
+          <a:p>
+            <a:r>
+              <a:t>Monday call off Leadership</a:t>
+            </a:r>
+          </a:p>
+          <a:p>
+            <a:r>
+              <a:t>Go or skip with the balance in view</a:t>
+            </a:r>
+          </a:p>
+        </p:txBody>
+      </p:sp>
+      <p:sp>
+        <p:nvSpPr>
+          <p:cNvPr id="10" name="Text Placeholder 9"/>
+          <p:cNvSpPr>
+            <a:spLocks noGrp="1"/>
+          </p:cNvSpPr>
+          <p:nvPr>
+            <p:ph type="body" idx="7"/>
+          </p:nvPr>
+        </p:nvSpPr>
+        <p:spPr/>
+        <p:txBody>
+          <a:bodyPr wrap="square"/>
+          <a:lstStyle/>
+          <a:p>
+            <a:r>
+              <a:t>3</a:t>
+            </a:r>
+          </a:p>
+        </p:txBody>
+      </p:sp>
+      <p:sp>
+        <p:nvSpPr>
+          <p:cNvPr id="11" name="Text Placeholder 10"/>
+          <p:cNvSpPr>
+            <a:spLocks noGrp="1"/>
+          </p:cNvSpPr>
+          <p:nvPr>
+            <p:ph type="body" idx="8"/>
+          </p:nvPr>
+        </p:nvSpPr>
+        <p:spPr/>
+        <p:txBody>
+          <a:bodyPr wrap="square"/>
+          <a:lstStyle/>
+          <a:p>
+            <a:r>
+              <a:rPr sz="1580"/>
+              <a:t>Measure, report, decide the next team</a:t>
+            </a:r>
+          </a:p>
+        </p:txBody>
+      </p:sp>
+      <p:sp>
+        <p:nvSpPr>
+          <p:cNvPr id="12" name="Text Placeholder 11"/>
+          <p:cNvSpPr>
+            <a:spLocks noGrp="1"/>
+          </p:cNvSpPr>
+          <p:nvPr>
+            <p:ph type="body" idx="9"/>
+          </p:nvPr>
+        </p:nvSpPr>
+        <p:spPr/>
+        <p:txBody>
+          <a:bodyPr wrap="square"/>
+          <a:lstStyle/>
+          <a:p>
+            <a:r>
+              <a:t>Days 60–90</a:t>
+            </a:r>
+          </a:p>
+          <a:p>
+            <a:r>
+              <a:t>Re-run the diary — the after figure</a:t>
+            </a:r>
+          </a:p>
+          <a:p>
+            <a:r>
+              <a:t>Report alerts, turnaround, overrun</a:t>
+            </a:r>
+          </a:p>
+          <a:p>
+            <a:r>
+              <a:t>Agree the budget line</a:t>
+            </a:r>
+          </a:p>
+          <a:p>
+            <a:r>
+              <a:t>Pick the next team to offer it to</a:t>
+            </a:r>
+          </a:p>
+        </p:txBody>
+      </p:sp>
+      <p:sp>
+        <p:nvSpPr>
+          <p:cNvPr id="13" name="Text Placeholder 12"/>
+          <p:cNvSpPr>
+            <a:spLocks noGrp="1"/>
+          </p:cNvSpPr>
+          <p:nvPr>
+            <p:ph type="body" idx="14"/>
+          </p:nvPr>
+        </p:nvSpPr>
+        <p:spPr/>
+        <p:txBody>
+          <a:bodyPr wrap="square"/>
+          <a:lstStyle/>
+          <a:p>
+            <a:r>
+              <a:rPr sz="1070"/>
+              <a:t>Nothing in the first 30 days needs a developer. The access model, the mobile view and the sync jobs exist; the rollout is invitations, a walkthrough and a diary.</a:t>
+            </a:r>
+          </a:p>
+        </p:txBody>
+      </p:sp>
+    </p:spTree>
+  </p:cSld>
+  <p:clrMapOvr>
+    <a:masterClrMapping/>
+  </p:clrMapOvr>
+</p:sld>
+</file>
+
+<file path=ppt/slides/slide29.xml><?xml version="1.0" encoding="utf-8"?>
+<p:sld xmlns:a="http://schemas.openxmlformats.org/drawingml/2006/main" xmlns:p="http://schemas.openxmlformats.org/presentationml/2006/main" xmlns:r="http://schemas.openxmlformats.org/officeDocument/2006/relationships">
+  <p:cSld>
+    <p:spTree>
+      <p:nvGrpSpPr>
+        <p:cNvPr id="1" name=""/>
+        <p:cNvGrpSpPr/>
+        <p:nvPr/>
+      </p:nvGrpSpPr>
+      <p:grpSpPr/>
+      <p:sp>
+        <p:nvSpPr>
+          <p:cNvPr id="2" name="Title 1"/>
+          <p:cNvSpPr>
+            <a:spLocks noGrp="1"/>
+          </p:cNvSpPr>
+          <p:nvPr>
+            <p:ph type="title"/>
+          </p:nvPr>
+        </p:nvSpPr>
+        <p:spPr/>
+        <p:txBody>
+          <a:bodyPr wrap="square"/>
+          <a:lstStyle/>
+          <a:p>
+            <a:r>
+              <a:t>What the FCC becomes next</a:t>
+            </a:r>
+          </a:p>
+        </p:txBody>
+      </p:sp>
+      <p:sp>
+        <p:nvSpPr>
+          <p:cNvPr id="3" name="Text Placeholder 2"/>
+          <p:cNvSpPr>
+            <a:spLocks noGrp="1"/>
+          </p:cNvSpPr>
+          <p:nvPr>
+            <p:ph type="body" idx="13"/>
+          </p:nvPr>
+        </p:nvSpPr>
+        <p:spPr/>
+        <p:txBody>
+          <a:bodyPr wrap="square"/>
+          <a:lstStyle/>
+          <a:p>
+            <a:r>
+              <a:t>It already reads every system the team runs; next it acts on what it reads.</a:t>
             </a:r>
           </a:p>
         </p:txBody>
@@ -15407,16 +15841,17 @@
             <a:spLocks noGrp="1"/>
           </p:cNvSpPr>
           <p:nvPr>
-            <p:ph type="body" idx="11"/>
-          </p:nvPr>
-        </p:nvSpPr>
-        <p:spPr/>
-        <p:txBody>
-          <a:bodyPr wrap="square"/>
-          <a:lstStyle/>
-          <a:p>
-            <a:r>
-              <a:t>Senior Account Manager · FCC product owner</a:t>
+            <p:ph type="body" idx="1"/>
+          </p:nvPr>
+        </p:nvSpPr>
+        <p:spPr/>
+        <p:txBody>
+          <a:bodyPr wrap="square"/>
+          <a:lstStyle/>
+          <a:p>
+            <a:r>
+              <a:rPr sz="1880"/>
+              <a:t>Feedback — client voice</a:t>
             </a:r>
           </a:p>
         </p:txBody>
@@ -15437,7 +15872,114 @@
           <a:lstStyle/>
           <a:p>
             <a:r>
-              <a:t>ray@feedspark.com</a:t>
+              <a:t>Sentiment from every client email and call feeding the retention radar; a monthly one-page account report emailed automatically; read-only scorecard links a client can open; a pulse question after each review — churn risk as a number weeks before it is a conversation.</a:t>
+            </a:r>
+          </a:p>
+        </p:txBody>
+      </p:sp>
+      <p:sp>
+        <p:nvSpPr>
+          <p:cNvPr id="6" name="Text Placeholder 5"/>
+          <p:cNvSpPr>
+            <a:spLocks noGrp="1"/>
+          </p:cNvSpPr>
+          <p:nvPr>
+            <p:ph type="body" idx="3"/>
+          </p:nvPr>
+        </p:nvSpPr>
+        <p:spPr/>
+        <p:txBody>
+          <a:bodyPr wrap="square"/>
+          <a:lstStyle/>
+          <a:p>
+            <a:r>
+              <a:t>AM management</a:t>
+            </a:r>
+          </a:p>
+        </p:txBody>
+      </p:sp>
+      <p:sp>
+        <p:nvSpPr>
+          <p:cNvPr id="7" name="Text Placeholder 6"/>
+          <p:cNvSpPr>
+            <a:spLocks noGrp="1"/>
+          </p:cNvSpPr>
+          <p:nvPr>
+            <p:ph type="body" idx="4"/>
+          </p:nvPr>
+        </p:nvSpPr>
+        <p:spPr/>
+        <p:txBody>
+          <a:bodyPr wrap="square"/>
+          <a:lstStyle/>
+          <a:p>
+            <a:r>
+              <a:rPr sz="1500"/>
+              <a:t>Workload balanced across the team from the live task book; turnaround and SLA per AM; urgent hours against optimisation hours, tagged and reported; the Playbook as the coaching tool for what each account is missing; onboarding measured rather than asserted — time to first brief, per new starter.</a:t>
+            </a:r>
+          </a:p>
+        </p:txBody>
+      </p:sp>
+      <p:sp>
+        <p:nvSpPr>
+          <p:cNvPr id="8" name="Text Placeholder 7"/>
+          <p:cNvSpPr>
+            <a:spLocks noGrp="1"/>
+          </p:cNvSpPr>
+          <p:nvPr>
+            <p:ph type="body" idx="5"/>
+          </p:nvPr>
+        </p:nvSpPr>
+        <p:spPr/>
+        <p:txBody>
+          <a:bodyPr wrap="square"/>
+          <a:lstStyle/>
+          <a:p>
+            <a:r>
+              <a:t>Business engine</a:t>
+            </a:r>
+          </a:p>
+        </p:txBody>
+      </p:sp>
+      <p:sp>
+        <p:nvSpPr>
+          <p:cNvPr id="9" name="Text Placeholder 8"/>
+          <p:cNvSpPr>
+            <a:spLocks noGrp="1"/>
+          </p:cNvSpPr>
+          <p:nvPr>
+            <p:ph type="body" idx="6"/>
+          </p:nvPr>
+        </p:nvSpPr>
+        <p:spPr/>
+        <p:txBody>
+          <a:bodyPr wrap="square"/>
+          <a:lstStyle/>
+          <a:p>
+            <a:r>
+              <a:rPr sz="1500"/>
+              <a:t>Revenue forecast from retainer burn, the quote pipeline and new-product volumes; profitability per account; Tachyon drafting the brief and the client email from the finding; fixes pushed into FeedHero and Merchant Center from the screen; feed changes joined to Ads performance; the whole thing packaged for other teams in the network.</a:t>
+            </a:r>
+          </a:p>
+        </p:txBody>
+      </p:sp>
+      <p:sp>
+        <p:nvSpPr>
+          <p:cNvPr id="10" name="Text Placeholder 9"/>
+          <p:cNvSpPr>
+            <a:spLocks noGrp="1"/>
+          </p:cNvSpPr>
+          <p:nvPr>
+            <p:ph type="body" idx="14"/>
+          </p:nvPr>
+        </p:nvSpPr>
+        <p:spPr/>
+        <p:txBody>
+          <a:bodyPr wrap="square"/>
+          <a:lstStyle/>
+          <a:p>
+            <a:r>
+              <a:t>The dashboard starts making the first move.</a:t>
             </a:r>
           </a:p>
         </p:txBody>
@@ -15519,6 +16061,230 @@
           <a:p>
             <a:r>
               <a:t>An account manager's week was spent looking for information, not acting on it.</a:t>
+            </a:r>
+          </a:p>
+        </p:txBody>
+      </p:sp>
+    </p:spTree>
+  </p:cSld>
+  <p:clrMapOvr>
+    <a:masterClrMapping/>
+  </p:clrMapOvr>
+</p:sld>
+</file>
+
+<file path=ppt/slides/slide30.xml><?xml version="1.0" encoding="utf-8"?>
+<p:sld xmlns:a="http://schemas.openxmlformats.org/drawingml/2006/main" xmlns:p="http://schemas.openxmlformats.org/presentationml/2006/main" xmlns:r="http://schemas.openxmlformats.org/officeDocument/2006/relationships">
+  <p:cSld>
+    <p:spTree>
+      <p:nvGrpSpPr>
+        <p:cNvPr id="1" name=""/>
+        <p:cNvGrpSpPr/>
+        <p:nvPr/>
+      </p:nvGrpSpPr>
+      <p:grpSpPr/>
+      <p:sp>
+        <p:nvSpPr>
+          <p:cNvPr id="2" name="Text Placeholder 1"/>
+          <p:cNvSpPr>
+            <a:spLocks noGrp="1"/>
+          </p:cNvSpPr>
+          <p:nvPr>
+            <p:ph type="body" idx="1"/>
+          </p:nvPr>
+        </p:nvSpPr>
+        <p:spPr/>
+        <p:txBody>
+          <a:bodyPr wrap="square"/>
+          <a:lstStyle/>
+          <a:p>
+            <a:r>
+              <a:rPr sz="2620"/>
+              <a:t>Every module that has landed in six weeks does the same thing: it puts the information in front of the account manager at the moment of the decision, so the team's time goes into client work instead of finding out what is going on. The vision is the same idea, one step further — the dashboard starts making the first move.</a:t>
+            </a:r>
+          </a:p>
+        </p:txBody>
+      </p:sp>
+      <p:sp>
+        <p:nvSpPr>
+          <p:cNvPr id="3" name="Text Placeholder 2"/>
+          <p:cNvSpPr>
+            <a:spLocks noGrp="1"/>
+          </p:cNvSpPr>
+          <p:nvPr>
+            <p:ph type="body" idx="11"/>
+          </p:nvPr>
+        </p:nvSpPr>
+        <p:spPr/>
+        <p:txBody>
+          <a:bodyPr wrap="square"/>
+          <a:lstStyle/>
+          <a:p>
+            <a:r>
+              <a:t>The through-line</a:t>
+            </a:r>
+          </a:p>
+        </p:txBody>
+      </p:sp>
+    </p:spTree>
+  </p:cSld>
+  <p:clrMapOvr>
+    <a:masterClrMapping/>
+  </p:clrMapOvr>
+</p:sld>
+</file>
+
+<file path=ppt/slides/slide31.xml><?xml version="1.0" encoding="utf-8"?>
+<p:sld xmlns:a="http://schemas.openxmlformats.org/drawingml/2006/main" xmlns:p="http://schemas.openxmlformats.org/presentationml/2006/main" xmlns:r="http://schemas.openxmlformats.org/officeDocument/2006/relationships">
+  <p:cSld>
+    <p:spTree>
+      <p:nvGrpSpPr>
+        <p:cNvPr id="1" name=""/>
+        <p:cNvGrpSpPr/>
+        <p:nvPr/>
+      </p:nvGrpSpPr>
+      <p:grpSpPr/>
+      <p:sp>
+        <p:nvSpPr>
+          <p:cNvPr id="2" name="Text Placeholder 1"/>
+          <p:cNvSpPr>
+            <a:spLocks noGrp="1"/>
+          </p:cNvSpPr>
+          <p:nvPr>
+            <p:ph type="body" idx="1"/>
+          </p:nvPr>
+        </p:nvSpPr>
+        <p:spPr/>
+        <p:txBody>
+          <a:bodyPr wrap="square"/>
+          <a:lstStyle/>
+          <a:p>
+            <a:r>
+              <a:rPr sz="2620"/>
+              <a:t>Reimburse the two-month Claude Code subscription that built the FCC, and approve the 90-day rollout to the London account-management team with one subscription per builder and Ray as product owner. The return is 2,530 hours a year at a team of five, and the three risks in chapter three stop being invisible.</a:t>
+            </a:r>
+          </a:p>
+        </p:txBody>
+      </p:sp>
+      <p:sp>
+        <p:nvSpPr>
+          <p:cNvPr id="3" name="Text Placeholder 2"/>
+          <p:cNvSpPr>
+            <a:spLocks noGrp="1"/>
+          </p:cNvSpPr>
+          <p:nvPr>
+            <p:ph type="body" idx="11"/>
+          </p:nvPr>
+        </p:nvSpPr>
+        <p:spPr/>
+        <p:txBody>
+          <a:bodyPr wrap="square"/>
+          <a:lstStyle/>
+          <a:p>
+            <a:r>
+              <a:t>The ask</a:t>
+            </a:r>
+          </a:p>
+        </p:txBody>
+      </p:sp>
+    </p:spTree>
+  </p:cSld>
+  <p:clrMapOvr>
+    <a:masterClrMapping/>
+  </p:clrMapOvr>
+</p:sld>
+</file>
+
+<file path=ppt/slides/slide32.xml><?xml version="1.0" encoding="utf-8"?>
+<p:sld xmlns:a="http://schemas.openxmlformats.org/drawingml/2006/main" xmlns:p="http://schemas.openxmlformats.org/presentationml/2006/main" xmlns:r="http://schemas.openxmlformats.org/officeDocument/2006/relationships">
+  <p:cSld>
+    <p:spTree>
+      <p:nvGrpSpPr>
+        <p:cNvPr id="1" name=""/>
+        <p:cNvGrpSpPr/>
+        <p:nvPr/>
+      </p:nvGrpSpPr>
+      <p:grpSpPr/>
+      <p:sp>
+        <p:nvSpPr>
+          <p:cNvPr id="2" name="Title 1"/>
+          <p:cNvSpPr>
+            <a:spLocks noGrp="1"/>
+          </p:cNvSpPr>
+          <p:nvPr>
+            <p:ph type="title"/>
+          </p:nvPr>
+        </p:nvSpPr>
+        <p:spPr/>
+        <p:txBody>
+          <a:bodyPr wrap="square"/>
+          <a:lstStyle/>
+          <a:p>
+            <a:r>
+              <a:t>Questions?</a:t>
+            </a:r>
+          </a:p>
+        </p:txBody>
+      </p:sp>
+      <p:sp>
+        <p:nvSpPr>
+          <p:cNvPr id="3" name="Text Placeholder 2"/>
+          <p:cNvSpPr>
+            <a:spLocks noGrp="1"/>
+          </p:cNvSpPr>
+          <p:nvPr>
+            <p:ph type="body" idx="1"/>
+          </p:nvPr>
+        </p:nvSpPr>
+        <p:spPr/>
+        <p:txBody>
+          <a:bodyPr wrap="square"/>
+          <a:lstStyle/>
+          <a:p>
+            <a:r>
+              <a:t>Ray Vũ</a:t>
+            </a:r>
+          </a:p>
+        </p:txBody>
+      </p:sp>
+      <p:sp>
+        <p:nvSpPr>
+          <p:cNvPr id="4" name="Text Placeholder 3"/>
+          <p:cNvSpPr>
+            <a:spLocks noGrp="1"/>
+          </p:cNvSpPr>
+          <p:nvPr>
+            <p:ph type="body" idx="11"/>
+          </p:nvPr>
+        </p:nvSpPr>
+        <p:spPr/>
+        <p:txBody>
+          <a:bodyPr wrap="square"/>
+          <a:lstStyle/>
+          <a:p>
+            <a:r>
+              <a:t>Senior Account Manager · FCC product owner</a:t>
+            </a:r>
+          </a:p>
+        </p:txBody>
+      </p:sp>
+      <p:sp>
+        <p:nvSpPr>
+          <p:cNvPr id="5" name="Text Placeholder 4"/>
+          <p:cNvSpPr>
+            <a:spLocks noGrp="1"/>
+          </p:cNvSpPr>
+          <p:nvPr>
+            <p:ph type="body" idx="2"/>
+          </p:nvPr>
+        </p:nvSpPr>
+        <p:spPr/>
+        <p:txBody>
+          <a:bodyPr wrap="square"/>
+          <a:lstStyle/>
+          <a:p>
+            <a:r>
+              <a:t>ray@feedspark.com</a:t>
             </a:r>
           </a:p>
         </p:txBody>
@@ -16253,7 +17019,7 @@
           <a:lstStyle/>
           <a:p>
             <a:r>
-              <a:t>Three things nobody could see</a:t>
+              <a:t>Five things the week keeps breaking on</a:t>
             </a:r>
           </a:p>
         </p:txBody>
@@ -16265,16 +17031,16 @@
             <a:spLocks noGrp="1"/>
           </p:cNvSpPr>
           <p:nvPr>
-            <p:ph type="body" idx="13"/>
-          </p:nvPr>
-        </p:nvSpPr>
-        <p:spPr/>
-        <p:txBody>
-          <a:bodyPr wrap="square"/>
-          <a:lstStyle/>
-          <a:p>
-            <a:r>
-              <a:t>Not hypotheticals — each was read off the team’s own systems in the first weeks of the FCC being live.</a:t>
+            <p:ph type="body" idx="11"/>
+          </p:nvPr>
+        </p:nvSpPr>
+        <p:spPr/>
+        <p:txBody>
+          <a:bodyPr wrap="square"/>
+          <a:lstStyle/>
+          <a:p>
+            <a:r>
+              <a:t>Named by the account manager running the book, not inferred from the tooling.</a:t>
             </a:r>
           </a:p>
         </p:txBody>
@@ -16286,147 +17052,6 @@
             <a:spLocks noGrp="1"/>
           </p:cNvSpPr>
           <p:nvPr>
-            <p:ph type="body" idx="1"/>
-          </p:nvPr>
-        </p:nvSpPr>
-        <p:spPr/>
-        <p:txBody>
-          <a:bodyPr wrap="square"/>
-          <a:lstStyle/>
-          <a:p>
-            <a:r>
-              <a:t>378 hours in the red</a:t>
-            </a:r>
-          </a:p>
-        </p:txBody>
-      </p:sp>
-      <p:sp>
-        <p:nvSpPr>
-          <p:cNvPr id="5" name="Text Placeholder 4"/>
-          <p:cNvSpPr>
-            <a:spLocks noGrp="1"/>
-          </p:cNvSpPr>
-          <p:nvPr>
-            <p:ph type="body" idx="2"/>
-          </p:nvPr>
-        </p:nvSpPr>
-        <p:spPr/>
-        <p:txBody>
-          <a:bodyPr wrap="square"/>
-          <a:lstStyle/>
-          <a:p>
-            <a:r>
-              <a:t>Across 24 markets, carried forward month after month; ten of the 19 retainer markets are in the red. The AM saying yes to the next task could not see it — the Task Manager showed it one client login at a time.</a:t>
-            </a:r>
-          </a:p>
-          <a:p>
-            <a:r>
-              <a:t>Task Manager, 22 Sep 2026</a:t>
-            </a:r>
-          </a:p>
-        </p:txBody>
-      </p:sp>
-      <p:sp>
-        <p:nvSpPr>
-          <p:cNvPr id="6" name="Text Placeholder 5"/>
-          <p:cNvSpPr>
-            <a:spLocks noGrp="1"/>
-          </p:cNvSpPr>
-          <p:nvPr>
-            <p:ph type="body" idx="3"/>
-          </p:nvPr>
-        </p:nvSpPr>
-        <p:spPr/>
-        <p:txBody>
-          <a:bodyPr wrap="square"/>
-          <a:lstStyle/>
-          <a:p>
-            <a:r>
-              <a:t>60% of weeks skipped</a:t>
-            </a:r>
-          </a:p>
-        </p:txBody>
-      </p:sp>
-      <p:sp>
-        <p:nvSpPr>
-          <p:cNvPr id="7" name="Text Placeholder 6"/>
-          <p:cNvSpPr>
-            <a:spLocks noGrp="1"/>
-          </p:cNvSpPr>
-          <p:nvPr>
-            <p:ph type="body" idx="4"/>
-          </p:nvPr>
-        </p:nvSpPr>
-        <p:spPr/>
-        <p:txBody>
-          <a:bodyPr wrap="square"/>
-          <a:lstStyle/>
-          <a:p>
-            <a:r>
-              <a:t>In twelve months, 838 of 1,398 scheduled weeks of title, keyword and product-type work were skipped — 2,750 hours of optimisation that never landed. 67 tasks sit on a skip streak of two months or more; the longest is 14.</a:t>
-            </a:r>
-          </a:p>
-          <a:p>
-            <a:r>
-              <a:t>Content team schedule, 15 Sep 2026</a:t>
-            </a:r>
-          </a:p>
-        </p:txBody>
-      </p:sp>
-      <p:sp>
-        <p:nvSpPr>
-          <p:cNvPr id="8" name="Text Placeholder 7"/>
-          <p:cNvSpPr>
-            <a:spLocks noGrp="1"/>
-          </p:cNvSpPr>
-          <p:nvPr>
-            <p:ph type="body" idx="5"/>
-          </p:nvPr>
-        </p:nvSpPr>
-        <p:spPr/>
-        <p:txBody>
-          <a:bodyPr wrap="square"/>
-          <a:lstStyle/>
-          <a:p>
-            <a:r>
-              <a:t>Briefed, but invisible</a:t>
-            </a:r>
-          </a:p>
-        </p:txBody>
-      </p:sp>
-      <p:sp>
-        <p:nvSpPr>
-          <p:cNvPr id="9" name="Text Placeholder 8"/>
-          <p:cNvSpPr>
-            <a:spLocks noGrp="1"/>
-          </p:cNvSpPr>
-          <p:nvPr>
-            <p:ph type="body" idx="6"/>
-          </p:nvPr>
-        </p:nvSpPr>
-        <p:spPr/>
-        <p:txBody>
-          <a:bodyPr wrap="square"/>
-          <a:lstStyle/>
-          <a:p>
-            <a:r>
-              <a:t>Two Reiss keyword themes were briefed by a colleague and picked up by ASPL, yet the board read “not briefed” — the save had failed silently and the only record sat on one laptop. The work had started; the team could not see it.</a:t>
-            </a:r>
-          </a:p>
-          <a:p>
-            <a:r>
-              <a:t>Workflow, 16 Sep 2026</a:t>
-            </a:r>
-          </a:p>
-        </p:txBody>
-      </p:sp>
-      <p:sp>
-        <p:nvSpPr>
-          <p:cNvPr id="10" name="Text Placeholder 9"/>
-          <p:cNvSpPr>
-            <a:spLocks noGrp="1"/>
-          </p:cNvSpPr>
-          <p:nvPr>
             <p:ph type="body" idx="14"/>
           </p:nvPr>
         </p:nvSpPr>
@@ -16436,11 +17061,297 @@
           <a:lstStyle/>
           <a:p>
             <a:r>
-              <a:t>The cost was never a dramatic failure.</a:t>
-            </a:r>
-          </a:p>
-        </p:txBody>
-      </p:sp>
+              <a:rPr sz="1140"/>
+              <a:t>None of these is a performance problem. Each one is a job that had no screen — so it was done from memory, or not done, and nobody could see which.</a:t>
+            </a:r>
+          </a:p>
+        </p:txBody>
+      </p:sp>
+      <p:graphicFrame>
+        <p:nvGraphicFramePr>
+          <p:cNvPr id="5" name="Table 4"/>
+          <p:cNvGraphicFramePr>
+            <a:graphicFrameLocks noGrp="1"/>
+          </p:cNvGraphicFramePr>
+          <p:nvPr/>
+        </p:nvGraphicFramePr>
+        <p:xfrm>
+          <a:off x="612648" y="1847088"/>
+          <a:ext cx="10972799" cy="3794758"/>
+        </p:xfrm>
+        <a:graphic>
+          <a:graphicData uri="http://schemas.openxmlformats.org/drawingml/2006/table">
+            <a:tbl>
+              <a:tblPr firstRow="1" bandRow="1">
+                <a:tableStyleId>{5C22544A-7EE6-4342-B048-85BDC9FD1C3A}</a:tableStyleId>
+              </a:tblPr>
+              <a:tblGrid>
+                <a:gridCol w="1656271"/>
+                <a:gridCol w="4658264"/>
+                <a:gridCol w="4658264"/>
+              </a:tblGrid>
+              <a:tr h="384048">
+                <a:tc>
+                  <a:txBody>
+                    <a:bodyPr/>
+                    <a:lstStyle/>
+                    <a:p>
+                      <a:r>
+                        <a:rPr sz="1300" b="1">
+                          <a:solidFill>
+                            <a:srgbClr val="FFFFFF"/>
+                          </a:solidFill>
+                        </a:rPr>
+                        <a:t>The gap</a:t>
+                      </a:r>
+                    </a:p>
+                  </a:txBody>
+                  <a:tcPr/>
+                </a:tc>
+                <a:tc>
+                  <a:txBody>
+                    <a:bodyPr/>
+                    <a:lstStyle/>
+                    <a:p>
+                      <a:r>
+                        <a:rPr sz="1300" b="1">
+                          <a:solidFill>
+                            <a:srgbClr val="FFFFFF"/>
+                          </a:solidFill>
+                        </a:rPr>
+                        <a:t>What it means day to day</a:t>
+                      </a:r>
+                    </a:p>
+                  </a:txBody>
+                  <a:tcPr/>
+                </a:tc>
+                <a:tc>
+                  <a:txBody>
+                    <a:bodyPr/>
+                    <a:lstStyle/>
+                    <a:p>
+                      <a:r>
+                        <a:rPr sz="1300" b="1">
+                          <a:solidFill>
+                            <a:srgbClr val="FFFFFF"/>
+                          </a:solidFill>
+                        </a:rPr>
+                        <a:t>What it costs</a:t>
+                      </a:r>
+                    </a:p>
+                  </a:txBody>
+                  <a:tcPr/>
+                </a:tc>
+              </a:tr>
+              <a:tr h="682142">
+                <a:tc>
+                  <a:txBody>
+                    <a:bodyPr/>
+                    <a:lstStyle/>
+                    <a:p>
+                      <a:r>
+                        <a:rPr sz="1100"/>
+                        <a:t>The same task, keyed three times</a:t>
+                      </a:r>
+                    </a:p>
+                  </a:txBody>
+                  <a:tcPr/>
+                </a:tc>
+                <a:tc>
+                  <a:txBody>
+                    <a:bodyPr/>
+                    <a:lstStyle/>
+                    <a:p>
+                      <a:r>
+                        <a:rPr sz="1100"/>
+                        <a:t>Update the project plan, check it against the brief, then complete the market status — one piece of work, three systems, all by hand</a:t>
+                      </a:r>
+                    </a:p>
+                  </a:txBody>
+                  <a:tcPr/>
+                </a:tc>
+                <a:tc>
+                  <a:txBody>
+                    <a:bodyPr/>
+                    <a:lstStyle/>
+                    <a:p>
+                      <a:r>
+                        <a:rPr sz="1100"/>
+                        <a:t>Nothing looks wrong until one of the three is missed, and then only one of them is right</a:t>
+                      </a:r>
+                    </a:p>
+                  </a:txBody>
+                  <a:tcPr/>
+                </a:tc>
+              </a:tr>
+              <a:tr h="682142">
+                <a:tc>
+                  <a:txBody>
+                    <a:bodyPr/>
+                    <a:lstStyle/>
+                    <a:p>
+                      <a:r>
+                        <a:rPr sz="1100"/>
+                        <a:t>No single view of task volume</a:t>
+                      </a:r>
+                    </a:p>
+                  </a:txBody>
+                  <a:tcPr/>
+                </a:tc>
+                <a:tc>
+                  <a:txBody>
+                    <a:bodyPr/>
+                    <a:lstStyle/>
+                    <a:p>
+                      <a:r>
+                        <a:rPr sz="1100"/>
+                        <a:t>Emails, project plans, scheduled work, call actions and briefs are never summarised in one place, or categorised</a:t>
+                      </a:r>
+                    </a:p>
+                  </a:txBody>
+                  <a:tcPr/>
+                </a:tc>
+                <a:tc>
+                  <a:txBody>
+                    <a:bodyPr/>
+                    <a:lstStyle/>
+                    <a:p>
+                      <a:r>
+                        <a:rPr sz="1100"/>
+                        <a:t>We cannot tell a client what we are carrying for them this month without rebuilding it by hand first</a:t>
+                      </a:r>
+                    </a:p>
+                  </a:txBody>
+                  <a:tcPr/>
+                </a:tc>
+              </a:tr>
+              <a:tr h="682142">
+                <a:tc>
+                  <a:txBody>
+                    <a:bodyPr/>
+                    <a:lstStyle/>
+                    <a:p>
+                      <a:r>
+                        <a:rPr sz="1100"/>
+                        <a:t>Briefs not tracked end to end</a:t>
+                      </a:r>
+                    </a:p>
+                  </a:txBody>
+                  <a:tcPr/>
+                </a:tc>
+                <a:tc>
+                  <a:txBody>
+                    <a:bodyPr/>
+                    <a:lstStyle/>
+                    <a:p>
+                      <a:r>
+                        <a:rPr sz="1100"/>
+                        <a:t>Test and QA optimisation especially: what was briefed, what is running, what ASPL confirmed and what the numbers were</a:t>
+                      </a:r>
+                    </a:p>
+                  </a:txBody>
+                  <a:tcPr/>
+                </a:tc>
+                <a:tc>
+                  <a:txBody>
+                    <a:bodyPr/>
+                    <a:lstStyle/>
+                    <a:p>
+                      <a:r>
+                        <a:rPr sz="1100"/>
+                        <a:t>Work is chased from memory, and a result arrives in a reply that never reaches the plan</a:t>
+                      </a:r>
+                    </a:p>
+                  </a:txBody>
+                  <a:tcPr/>
+                </a:tc>
+              </a:tr>
+              <a:tr h="682142">
+                <a:tc>
+                  <a:txBody>
+                    <a:bodyPr/>
+                    <a:lstStyle/>
+                    <a:p>
+                      <a:r>
+                        <a:rPr sz="1100"/>
+                        <a:t>Feed data not monitored</a:t>
+                      </a:r>
+                    </a:p>
+                  </a:txBody>
+                  <a:tcPr/>
+                </a:tc>
+                <a:tc>
+                  <a:txBody>
+                    <a:bodyPr/>
+                    <a:lstStyle/>
+                    <a:p>
+                      <a:r>
+                        <a:rPr sz="1100"/>
+                        <a:t>Custom labels and product types decide how PMAX splits the catalogue — they were spot-checked one feed at a time</a:t>
+                      </a:r>
+                    </a:p>
+                  </a:txBody>
+                  <a:tcPr/>
+                </a:tc>
+                <a:tc>
+                  <a:txBody>
+                    <a:bodyPr/>
+                    <a:lstStyle/>
+                    <a:p>
+                      <a:r>
+                        <a:rPr sz="1100"/>
+                        <a:t>A value empties and campaigns keep bidding into a structure that no longer matches the feed</a:t>
+                      </a:r>
+                    </a:p>
+                  </a:txBody>
+                  <a:tcPr/>
+                </a:tc>
+              </a:tr>
+              <a:tr h="682142">
+                <a:tc>
+                  <a:txBody>
+                    <a:bodyPr/>
+                    <a:lstStyle/>
+                    <a:p>
+                      <a:r>
+                        <a:rPr sz="1100"/>
+                        <a:t>No new-product tracking</a:t>
+                      </a:r>
+                    </a:p>
+                  </a:txBody>
+                  <a:tcPr/>
+                </a:tc>
+                <a:tc>
+                  <a:txBody>
+                    <a:bodyPr/>
+                    <a:lstStyle/>
+                    <a:p>
+                      <a:r>
+                        <a:rPr sz="1100"/>
+                        <a:t>Nothing said how many products arrived this month, or that a collection had landed and gone straight to live unoptimised</a:t>
+                      </a:r>
+                    </a:p>
+                  </a:txBody>
+                  <a:tcPr/>
+                </a:tc>
+                <a:tc>
+                  <a:txBody>
+                    <a:bodyPr/>
+                    <a:lstStyle/>
+                    <a:p>
+                      <a:r>
+                        <a:rPr sz="1100"/>
+                        <a:t>New products sell on old titles until somebody happens to notice them</a:t>
+                      </a:r>
+                    </a:p>
+                  </a:txBody>
+                  <a:tcPr/>
+                </a:tc>
+              </a:tr>
+            </a:tbl>
+          </a:graphicData>
+        </a:graphic>
+      </p:graphicFrame>
     </p:spTree>
   </p:cSld>
   <p:clrMapOvr>
@@ -16461,7 +17372,28 @@
       <p:grpSpPr/>
       <p:sp>
         <p:nvSpPr>
-          <p:cNvPr id="2" name="Text Placeholder 1"/>
+          <p:cNvPr id="2" name="Title 1"/>
+          <p:cNvSpPr>
+            <a:spLocks noGrp="1"/>
+          </p:cNvSpPr>
+          <p:nvPr>
+            <p:ph type="title"/>
+          </p:nvPr>
+        </p:nvSpPr>
+        <p:spPr/>
+        <p:txBody>
+          <a:bodyPr wrap="square"/>
+          <a:lstStyle/>
+          <a:p>
+            <a:r>
+              <a:t>The same actions, every week, by hand</a:t>
+            </a:r>
+          </a:p>
+        </p:txBody>
+      </p:sp>
+      <p:sp>
+        <p:nvSpPr>
+          <p:cNvPr id="3" name="Text Placeholder 2"/>
           <p:cNvSpPr>
             <a:spLocks noGrp="1"/>
           </p:cNvSpPr>
@@ -16475,28 +17407,8 @@
           <a:lstStyle/>
           <a:p>
             <a:r>
-              <a:t>Chapter two</a:t>
-            </a:r>
-          </a:p>
-        </p:txBody>
-      </p:sp>
-      <p:sp>
-        <p:nvSpPr>
-          <p:cNvPr id="3" name="Title 2"/>
-          <p:cNvSpPr>
-            <a:spLocks noGrp="1"/>
-          </p:cNvSpPr>
-          <p:nvPr>
-            <p:ph type="title"/>
-          </p:nvPr>
-        </p:nvSpPr>
-        <p:spPr/>
-        <p:txBody>
-          <a:bodyPr wrap="square"/>
-          <a:lstStyle/>
-          <a:p>
-            <a:r>
-              <a:t>The solution</a:t>
+              <a:rPr sz="1390"/>
+              <a:t>Every one of these is the same action with different inputs — which is the definition of something a person should not be doing.</a:t>
             </a:r>
           </a:p>
         </p:txBody>
@@ -16508,20 +17420,432 @@
             <a:spLocks noGrp="1"/>
           </p:cNvSpPr>
           <p:nvPr>
-            <p:ph type="body" idx="1"/>
-          </p:nvPr>
-        </p:nvSpPr>
-        <p:spPr/>
-        <p:txBody>
-          <a:bodyPr wrap="square"/>
-          <a:lstStyle/>
-          <a:p>
-            <a:r>
-              <a:t>One command center on top of the tools the team already uses — nothing new to log into, nothing re-keyed.</a:t>
-            </a:r>
-          </a:p>
-        </p:txBody>
-      </p:sp>
+            <p:ph type="body" idx="14"/>
+          </p:nvPr>
+        </p:nvSpPr>
+        <p:spPr/>
+        <p:txBody>
+          <a:bodyPr wrap="square"/>
+          <a:lstStyle/>
+          <a:p>
+            <a:r>
+              <a:t>Eight actions, identical week to week — plus assembling book health every Monday.</a:t>
+            </a:r>
+          </a:p>
+        </p:txBody>
+      </p:sp>
+      <p:graphicFrame>
+        <p:nvGraphicFramePr>
+          <p:cNvPr id="5" name="Table 4"/>
+          <p:cNvGraphicFramePr>
+            <a:graphicFrameLocks noGrp="1"/>
+          </p:cNvGraphicFramePr>
+          <p:nvPr/>
+        </p:nvGraphicFramePr>
+        <p:xfrm>
+          <a:off x="612648" y="1847088"/>
+          <a:ext cx="10972798" cy="3794760"/>
+        </p:xfrm>
+        <a:graphic>
+          <a:graphicData uri="http://schemas.openxmlformats.org/drawingml/2006/table">
+            <a:tbl>
+              <a:tblPr firstRow="1" bandRow="1">
+                <a:tableStyleId>{5C22544A-7EE6-4342-B048-85BDC9FD1C3A}</a:tableStyleId>
+              </a:tblPr>
+              <a:tblGrid>
+                <a:gridCol w="3461218"/>
+                <a:gridCol w="883715"/>
+                <a:gridCol w="6627865"/>
+              </a:tblGrid>
+              <a:tr h="384048">
+                <a:tc>
+                  <a:txBody>
+                    <a:bodyPr/>
+                    <a:lstStyle/>
+                    <a:p>
+                      <a:r>
+                        <a:rPr sz="1300" b="1">
+                          <a:solidFill>
+                            <a:srgbClr val="FFFFFF"/>
+                          </a:solidFill>
+                        </a:rPr>
+                        <a:t>The repeated action</a:t>
+                      </a:r>
+                    </a:p>
+                  </a:txBody>
+                  <a:tcPr/>
+                </a:tc>
+                <a:tc>
+                  <a:txBody>
+                    <a:bodyPr/>
+                    <a:lstStyle/>
+                    <a:p>
+                      <a:r>
+                        <a:rPr sz="1300" b="1">
+                          <a:solidFill>
+                            <a:srgbClr val="FFFFFF"/>
+                          </a:solidFill>
+                        </a:rPr>
+                        <a:t>How often</a:t>
+                      </a:r>
+                    </a:p>
+                  </a:txBody>
+                  <a:tcPr/>
+                </a:tc>
+                <a:tc>
+                  <a:txBody>
+                    <a:bodyPr/>
+                    <a:lstStyle/>
+                    <a:p>
+                      <a:r>
+                        <a:rPr sz="1300" b="1">
+                          <a:solidFill>
+                            <a:srgbClr val="FFFFFF"/>
+                          </a:solidFill>
+                        </a:rPr>
+                        <a:t>Automated now</a:t>
+                      </a:r>
+                    </a:p>
+                  </a:txBody>
+                  <a:tcPr/>
+                </a:tc>
+              </a:tr>
+              <a:tr h="426339">
+                <a:tc>
+                  <a:txBody>
+                    <a:bodyPr/>
+                    <a:lstStyle/>
+                    <a:p>
+                      <a:r>
+                        <a:rPr sz="1100"/>
+                        <a:t>Copy a client email into the plan as a task</a:t>
+                      </a:r>
+                    </a:p>
+                  </a:txBody>
+                  <a:tcPr/>
+                </a:tc>
+                <a:tc>
+                  <a:txBody>
+                    <a:bodyPr/>
+                    <a:lstStyle/>
+                    <a:p>
+                      <a:r>
+                        <a:rPr sz="1100"/>
+                        <a:t>Every day</a:t>
+                      </a:r>
+                    </a:p>
+                  </a:txBody>
+                  <a:tcPr/>
+                </a:tc>
+                <a:tc>
+                  <a:txBody>
+                    <a:bodyPr/>
+                    <a:lstStyle/>
+                    <a:p>
+                      <a:r>
+                        <a:rPr sz="1100"/>
+                        <a:t>Captured, classified by brand and filed to Intake — the plan row is written and confirmed</a:t>
+                      </a:r>
+                    </a:p>
+                  </a:txBody>
+                  <a:tcPr/>
+                </a:tc>
+              </a:tr>
+              <a:tr h="426339">
+                <a:tc>
+                  <a:txBody>
+                    <a:bodyPr/>
+                    <a:lstStyle/>
+                    <a:p>
+                      <a:r>
+                        <a:rPr sz="1100"/>
+                        <a:t>Type call actions into the plan after a meeting</a:t>
+                      </a:r>
+                    </a:p>
+                  </a:txBody>
+                  <a:tcPr/>
+                </a:tc>
+                <a:tc>
+                  <a:txBody>
+                    <a:bodyPr/>
+                    <a:lstStyle/>
+                    <a:p>
+                      <a:r>
+                        <a:rPr sz="1100"/>
+                        <a:t>Every call</a:t>
+                      </a:r>
+                    </a:p>
+                  </a:txBody>
+                  <a:tcPr/>
+                </a:tc>
+                <a:tc>
+                  <a:txBody>
+                    <a:bodyPr/>
+                    <a:lstStyle/>
+                    <a:p>
+                      <a:r>
+                        <a:rPr sz="1100"/>
+                        <a:t>Meeting notes parsed into owners and actions, adopted into the client's plan automatically</a:t>
+                      </a:r>
+                    </a:p>
+                  </a:txBody>
+                  <a:tcPr/>
+                </a:tc>
+              </a:tr>
+              <a:tr h="426339">
+                <a:tc>
+                  <a:txBody>
+                    <a:bodyPr/>
+                    <a:lstStyle/>
+                    <a:p>
+                      <a:r>
+                        <a:rPr sz="1100"/>
+                        <a:t>Write, code, send and chase a brief</a:t>
+                      </a:r>
+                    </a:p>
+                  </a:txBody>
+                  <a:tcPr/>
+                </a:tc>
+                <a:tc>
+                  <a:txBody>
+                    <a:bodyPr/>
+                    <a:lstStyle/>
+                    <a:p>
+                      <a:r>
+                        <a:rPr sz="1100"/>
+                        <a:t>Every brief</a:t>
+                      </a:r>
+                    </a:p>
+                  </a:txBody>
+                  <a:tcPr/>
+                </a:tc>
+                <a:tc>
+                  <a:txBody>
+                    <a:bodyPr/>
+                    <a:lstStyle/>
+                    <a:p>
+                      <a:r>
+                        <a:rPr sz="1100"/>
+                        <a:t>Composed with its own reference, emailed, saved to the pipeline, replies matched on the code</a:t>
+                      </a:r>
+                    </a:p>
+                  </a:txBody>
+                  <a:tcPr/>
+                </a:tc>
+              </a:tr>
+              <a:tr h="426339">
+                <a:tc>
+                  <a:txBody>
+                    <a:bodyPr/>
+                    <a:lstStyle/>
+                    <a:p>
+                      <a:r>
+                        <a:rPr sz="1100"/>
+                        <a:t>Read the result out of a reply and file it</a:t>
+                      </a:r>
+                    </a:p>
+                  </a:txBody>
+                  <a:tcPr/>
+                </a:tc>
+                <a:tc>
+                  <a:txBody>
+                    <a:bodyPr/>
+                    <a:lstStyle/>
+                    <a:p>
+                      <a:r>
+                        <a:rPr sz="1100"/>
+                        <a:t>Every round</a:t>
+                      </a:r>
+                    </a:p>
+                  </a:txBody>
+                  <a:tcPr/>
+                </a:tc>
+                <a:tc>
+                  <a:txBody>
+                    <a:bodyPr/>
+                    <a:lstStyle/>
+                    <a:p>
+                      <a:r>
+                        <a:rPr sz="1100"/>
+                        <a:t>Impressions and clicks parsed off the thread, tied to the optimisation that produced them</a:t>
+                      </a:r>
+                    </a:p>
+                  </a:txBody>
+                  <a:tcPr/>
+                </a:tc>
+              </a:tr>
+              <a:tr h="426339">
+                <a:tc>
+                  <a:txBody>
+                    <a:bodyPr/>
+                    <a:lstStyle/>
+                    <a:p>
+                      <a:r>
+                        <a:rPr sz="1100"/>
+                        <a:t>Check custom labels and product types per feed</a:t>
+                      </a:r>
+                    </a:p>
+                  </a:txBody>
+                  <a:tcPr/>
+                </a:tc>
+                <a:tc>
+                  <a:txBody>
+                    <a:bodyPr/>
+                    <a:lstStyle/>
+                    <a:p>
+                      <a:r>
+                        <a:rPr sz="1100"/>
+                        <a:t>62 feeds</a:t>
+                      </a:r>
+                    </a:p>
+                  </a:txBody>
+                  <a:tcPr/>
+                </a:tc>
+                <a:tc>
+                  <a:txBody>
+                    <a:bodyPr/>
+                    <a:lstStyle/>
+                    <a:p>
+                      <a:r>
+                        <a:rPr sz="1100"/>
+                        <a:t>Every feed read four times a day against a known-good baseline; drops alert with the email drafted</a:t>
+                      </a:r>
+                    </a:p>
+                  </a:txBody>
+                  <a:tcPr/>
+                </a:tc>
+              </a:tr>
+              <a:tr h="426339">
+                <a:tc>
+                  <a:txBody>
+                    <a:bodyPr/>
+                    <a:lstStyle/>
+                    <a:p>
+                      <a:r>
+                        <a:rPr sz="1100"/>
+                        <a:t>Score a market's feed and put it in a deck</a:t>
+                      </a:r>
+                    </a:p>
+                  </a:txBody>
+                  <a:tcPr/>
+                </a:tc>
+                <a:tc>
+                  <a:txBody>
+                    <a:bodyPr/>
+                    <a:lstStyle/>
+                    <a:p>
+                      <a:r>
+                        <a:rPr sz="1100"/>
+                        <a:t>Every review</a:t>
+                      </a:r>
+                    </a:p>
+                  </a:txBody>
+                  <a:tcPr/>
+                </a:tc>
+                <a:tc>
+                  <a:txBody>
+                    <a:bodyPr/>
+                    <a:lstStyle/>
+                    <a:p>
+                      <a:r>
+                        <a:rPr sz="1100"/>
+                        <a:t>Scored against Google's own spec, then exported — the numbers are never re-keyed</a:t>
+                      </a:r>
+                    </a:p>
+                  </a:txBody>
+                  <a:tcPr/>
+                </a:tc>
+              </a:tr>
+              <a:tr h="426339">
+                <a:tc>
+                  <a:txBody>
+                    <a:bodyPr/>
+                    <a:lstStyle/>
+                    <a:p>
+                      <a:r>
+                        <a:rPr sz="1100"/>
+                        <a:t>Count what arrived in the feed this month</a:t>
+                      </a:r>
+                    </a:p>
+                  </a:txBody>
+                  <a:tcPr/>
+                </a:tc>
+                <a:tc>
+                  <a:txBody>
+                    <a:bodyPr/>
+                    <a:lstStyle/>
+                    <a:p>
+                      <a:r>
+                        <a:rPr sz="1100" b="1">
+                          <a:solidFill>
+                            <a:srgbClr val="2E7D32"/>
+                          </a:solidFill>
+                        </a:rPr>
+                        <a:t>Never done</a:t>
+                      </a:r>
+                    </a:p>
+                  </a:txBody>
+                  <a:tcPr/>
+                </a:tc>
+                <a:tc>
+                  <a:txBody>
+                    <a:bodyPr/>
+                    <a:lstStyle/>
+                    <a:p>
+                      <a:r>
+                        <a:rPr sz="1100"/>
+                        <a:t>Read off each product's first-seen date — per month, quarter and year, with a run-rate</a:t>
+                      </a:r>
+                    </a:p>
+                  </a:txBody>
+                  <a:tcPr/>
+                </a:tc>
+              </a:tr>
+              <a:tr h="426339">
+                <a:tc>
+                  <a:txBody>
+                    <a:bodyPr/>
+                    <a:lstStyle/>
+                    <a:p>
+                      <a:r>
+                        <a:rPr sz="1100"/>
+                        <a:t>Check the retainer balance before saying yes</a:t>
+                      </a:r>
+                    </a:p>
+                  </a:txBody>
+                  <a:tcPr/>
+                </a:tc>
+                <a:tc>
+                  <a:txBody>
+                    <a:bodyPr/>
+                    <a:lstStyle/>
+                    <a:p>
+                      <a:r>
+                        <a:rPr sz="1100"/>
+                        <a:t>Every task</a:t>
+                      </a:r>
+                    </a:p>
+                  </a:txBody>
+                  <a:tcPr/>
+                </a:tc>
+                <a:tc>
+                  <a:txBody>
+                    <a:bodyPr/>
+                    <a:lstStyle/>
+                    <a:p>
+                      <a:r>
+                        <a:rPr sz="1100"/>
+                        <a:t>The balance sits on the page at the moment of the decision, on every screen</a:t>
+                      </a:r>
+                    </a:p>
+                  </a:txBody>
+                  <a:tcPr/>
+                </a:tc>
+              </a:tr>
+            </a:tbl>
+          </a:graphicData>
+        </a:graphic>
+      </p:graphicFrame>
     </p:spTree>
   </p:cSld>
   <p:clrMapOvr>
@@ -16556,7 +17880,7 @@
           <a:lstStyle/>
           <a:p>
             <a:r>
-              <a:t>Twenty modules, six weeks, £0 infrastructure</a:t>
+              <a:t>What happens to a fragmented week</a:t>
             </a:r>
           </a:p>
         </p:txBody>
@@ -16568,16 +17892,16 @@
             <a:spLocks noGrp="1"/>
           </p:cNvSpPr>
           <p:nvPr>
-            <p:ph type="body" idx="11"/>
-          </p:nvPr>
-        </p:nvSpPr>
-        <p:spPr/>
-        <p:txBody>
-          <a:bodyPr wrap="square"/>
-          <a:lstStyle/>
-          <a:p>
-            <a:r>
-              <a:t>Built 11 Aug – 22 Sep 2026 with Claude Code: 275 merged builds, 1,452 tripwires, SSO on every screen.</a:t>
+            <p:ph type="body" idx="13"/>
+          </p:nvPr>
+        </p:nvSpPr>
+        <p:spPr/>
+        <p:txBody>
+          <a:bodyPr wrap="square"/>
+          <a:lstStyle/>
+          <a:p>
+            <a:r>
+              <a:t>Published studies of information workers who work like this. None of these numbers are ours.</a:t>
             </a:r>
           </a:p>
         </p:txBody>
@@ -16598,7 +17922,7 @@
           <a:lstStyle/>
           <a:p>
             <a:r>
-              <a:t>6 wks</a:t>
+              <a:t>11 minutes to a switch</a:t>
             </a:r>
           </a:p>
         </p:txBody>
@@ -16619,7 +17943,12 @@
           <a:lstStyle/>
           <a:p>
             <a:r>
-              <a:t>From first commit to 20 live modules</a:t>
+              <a:t>Twenty-four information workers, shadowed for over 700 hours. They held one piece of work for 11 minutes 4 seconds before switching or being interrupted — across 11.7 pieces of work a day, 57% of them interrupted.</a:t>
+            </a:r>
+          </a:p>
+          <a:p>
+            <a:r>
+              <a:t>Mark, González &amp; Harris, CHI 2005</a:t>
             </a:r>
           </a:p>
         </p:txBody>
@@ -16640,7 +17969,7 @@
           <a:lstStyle/>
           <a:p>
             <a:r>
-              <a:t>275</a:t>
+              <a:t>25 minutes to get back</a:t>
             </a:r>
           </a:p>
         </p:txBody>
@@ -16661,7 +17990,12 @@
           <a:lstStyle/>
           <a:p>
             <a:r>
-              <a:t>Merged builds, each gated by automated checks</a:t>
+              <a:t>77% of interrupted work was picked up again the same day — on average 25 minutes 26 seconds later, and only after 2.3 other pieces of work in between. Not a pause: a detour through two other clients.</a:t>
+            </a:r>
+          </a:p>
+          <a:p>
+            <a:r>
+              <a:t>Mark, González &amp; Harris, CHI 2005</a:t>
             </a:r>
           </a:p>
         </p:txBody>
@@ -16682,7 +18016,7 @@
           <a:lstStyle/>
           <a:p>
             <a:r>
-              <a:t>£0</a:t>
+              <a:t>47 seconds on a screen</a:t>
             </a:r>
           </a:p>
         </p:txBody>
@@ -16703,7 +18037,12 @@
           <a:lstStyle/>
           <a:p>
             <a:r>
-              <a:t>Infrastructure — Cloudflare free tier + Access SSO</a:t>
+              <a:t>The same group has measured how long people hold one screen before switching away. In 2004 it was two and a half minutes. By 2012, 75 seconds. It is now 47.</a:t>
+            </a:r>
+          </a:p>
+          <a:p>
+            <a:r>
+              <a:t>Mark, UC Irvine — Attention Span, 2023</a:t>
             </a:r>
           </a:p>
         </p:txBody>
@@ -16724,7 +18063,8 @@
           <a:lstStyle/>
           <a:p>
             <a:r>
-              <a:t>No licences, no vendor, no implementation partner — one AM, Claude Code and six weeks.</a:t>
+              <a:rPr sz="1070"/>
+              <a:t>“People feared that as soon as something went out of sight, it was gone.” Carnegie Mellon’s study of tab overload — which is why eight tools is never eight tabs.</a:t>
             </a:r>
           </a:p>
         </p:txBody>
@@ -16763,7 +18103,7 @@
           <a:lstStyle/>
           <a:p>
             <a:r>
-              <a:t>Monitor, run, sell, lead</a:t>
+              <a:t>It is not lost time, it is errors</a:t>
             </a:r>
           </a:p>
         </p:txBody>
@@ -16784,7 +18124,7 @@
           <a:lstStyle/>
           <a:p>
             <a:r>
-              <a:t>Twenty modules, four jobs — each one reading the systems the team already runs.</a:t>
+              <a:t>Switching does not show up as an AM working slowly. It shows up in what they carry over and what they miss.</a:t>
             </a:r>
           </a:p>
         </p:txBody>
@@ -16805,7 +18145,8 @@
           <a:lstStyle/>
           <a:p>
             <a:r>
-              <a:t>Monitor — the feeds watch themselves</a:t>
+              <a:rPr sz="1880"/>
+              <a:t>Part of you stays behind</a:t>
             </a:r>
           </a:p>
         </p:txBody>
@@ -16826,8 +18167,14 @@
           <a:lstStyle/>
           <a:p>
             <a:r>
-              <a:rPr sz="1320"/>
-              <a:t>Label Guard, Product Type Guard, Golden Record, Product Volume, Overlays and Feed Lab scan all 62 feeds four times a day, alert on drop-offs against a known-good baseline, and draft the client email to confirm a change before anyone acts.</a:t>
+              <a:rPr sz="1500"/>
+              <a:t>Two experiments established attention residue: leave a task unfinished and part of your attention stays on it. You are on the next client; measurably, some of you is still on the last one — and that client’s work suffers.</a:t>
+            </a:r>
+          </a:p>
+          <a:p>
+            <a:r>
+              <a:rPr sz="1500"/>
+              <a:t>Leroy, Organizational Behavior and Human Decision Processes, 2009</a:t>
             </a:r>
           </a:p>
         </p:txBody>
@@ -16848,7 +18195,7 @@
           <a:lstStyle/>
           <a:p>
             <a:r>
-              <a:t>Run — the work moves in one place</a:t>
+              <a:t>Errors double at 2.8s</a:t>
             </a:r>
           </a:p>
         </p:txBody>
@@ -16869,7 +18216,12 @@
           <a:lstStyle/>
           <a:p>
             <a:r>
-              <a:t>Workflow takes every task from the plans, the inbox and call notes into one Intake, briefs ASPL with a coded ticket, moves stages from email replies automatically, and shows the retainer balance beside every decision.</a:t>
+              <a:t>Three hundred participants ran a task where each step had to follow the last. Interruptions averaging 2.8 seconds — one step long — doubled the rate of sequence errors. At 4.4 seconds they tripled. A glance is enough.</a:t>
+            </a:r>
+          </a:p>
+          <a:p>
+            <a:r>
+              <a:t>Altmann, Trafton &amp; Hambrick, JEP: General, 2014</a:t>
             </a:r>
           </a:p>
         </p:txBody>
@@ -16890,7 +18242,7 @@
           <a:lstStyle/>
           <a:p>
             <a:r>
-              <a:t>Sell — quotes and decks, live</a:t>
+              <a:t>Faster, not better</a:t>
             </a:r>
           </a:p>
         </p:txBody>
@@ -16911,8 +18263,14 @@
           <a:lstStyle/>
           <a:p>
             <a:r>
-              <a:rPr sz="1320"/>
-              <a:t>AI Quote prices work per SKU and exports the finance team's own workbook; the Deck Generator builds strategy reviews on the core template; the Keyword Calendar turns a client's marketing plan into briefs and a one-page client PDF.</a:t>
+              <a:rPr sz="1500"/>
+              <a:t>Forty-eight people did the same work with and without interruption. The interrupted group finished faster — people compensate. After twenty minutes they reported significantly higher stress, frustration, time pressure and effort.</a:t>
+            </a:r>
+          </a:p>
+          <a:p>
+            <a:r>
+              <a:rPr sz="1500"/>
+              <a:t>Mark, Gudith &amp; Klocke, CHI 2008</a:t>
             </a:r>
           </a:p>
         </p:txBody>
@@ -16924,49 +18282,6 @@
             <a:spLocks noGrp="1"/>
           </p:cNvSpPr>
           <p:nvPr>
-            <p:ph type="body" idx="7"/>
-          </p:nvPr>
-        </p:nvSpPr>
-        <p:spPr/>
-        <p:txBody>
-          <a:bodyPr wrap="square"/>
-          <a:lstStyle/>
-          <a:p>
-            <a:r>
-              <a:t>Lead — the book at a glance</a:t>
-            </a:r>
-          </a:p>
-        </p:txBody>
-      </p:sp>
-      <p:sp>
-        <p:nvSpPr>
-          <p:cNvPr id="11" name="Text Placeholder 10"/>
-          <p:cNvSpPr>
-            <a:spLocks noGrp="1"/>
-          </p:cNvSpPr>
-          <p:nvPr>
-            <p:ph type="body" idx="8"/>
-          </p:nvPr>
-        </p:nvSpPr>
-        <p:spPr/>
-        <p:txBody>
-          <a:bodyPr wrap="square"/>
-          <a:lstStyle/>
-          <a:p>
-            <a:r>
-              <a:rPr sz="1320"/>
-              <a:t>Leadership reads book health, retainer burn-down and a retention radar per account; the Task Manager module makes the hours database searchable; the Playbook tells each AM what is landing, stalling or missing on every account.</a:t>
-            </a:r>
-          </a:p>
-        </p:txBody>
-      </p:sp>
-      <p:sp>
-        <p:nvSpPr>
-          <p:cNvPr id="12" name="Text Placeholder 11"/>
-          <p:cNvSpPr>
-            <a:spLocks noGrp="1"/>
-          </p:cNvSpPr>
-          <p:nvPr>
             <p:ph type="body" idx="14"/>
           </p:nvPr>
         </p:nvSpPr>
@@ -16976,7 +18291,7 @@
           <a:lstStyle/>
           <a:p>
             <a:r>
-              <a:t>Every module reads the systems the team already runs, and writes back to them.</a:t>
+              <a:t>This is the mechanism behind the next slide.</a:t>
             </a:r>
           </a:p>
         </p:txBody>

--- a/docs/materials/FCC_Business_Case_Sep26.pptx
+++ b/docs/materials/FCC_Business_Case_Sep26.pptx
@@ -17086,9 +17086,9 @@
                 <a:tableStyleId>{5C22544A-7EE6-4342-B048-85BDC9FD1C3A}</a:tableStyleId>
               </a:tblPr>
               <a:tblGrid>
-                <a:gridCol w="1656271"/>
-                <a:gridCol w="4658264"/>
-                <a:gridCol w="4658264"/>
+                <a:gridCol w="1746913"/>
+                <a:gridCol w="4913194"/>
+                <a:gridCol w="4312692"/>
               </a:tblGrid>
               <a:tr h="384048">
                 <a:tc>
@@ -17164,7 +17164,7 @@
                     <a:p>
                       <a:r>
                         <a:rPr sz="1100"/>
-                        <a:t>Update the project plan, check it against the brief, then complete the market status — one piece of work, three systems, all by hand</a:t>
+                        <a:t>Plan, brief, market status — one piece of work, three systems, all keyed by hand</a:t>
                       </a:r>
                     </a:p>
                   </a:txBody>
@@ -17177,7 +17177,7 @@
                     <a:p>
                       <a:r>
                         <a:rPr sz="1100"/>
-                        <a:t>Nothing looks wrong until one of the three is missed, and then only one of them is right</a:t>
+                        <a:t>Nothing looks wrong until one is missed, and then only one of them is right</a:t>
                       </a:r>
                     </a:p>
                   </a:txBody>
@@ -17205,7 +17205,7 @@
                     <a:p>
                       <a:r>
                         <a:rPr sz="1100"/>
-                        <a:t>Emails, project plans, scheduled work, call actions and briefs are never summarised in one place, or categorised</a:t>
+                        <a:t>Emails, plans, scheduled work, calls and briefs, never summarised or categorised together</a:t>
                       </a:r>
                     </a:p>
                   </a:txBody>
@@ -17218,7 +17218,7 @@
                     <a:p>
                       <a:r>
                         <a:rPr sz="1100"/>
-                        <a:t>We cannot tell a client what we are carrying for them this month without rebuilding it by hand first</a:t>
+                        <a:t>We cannot tell a client what we are carrying this month without rebuilding it</a:t>
                       </a:r>
                     </a:p>
                   </a:txBody>
@@ -17246,7 +17246,7 @@
                     <a:p>
                       <a:r>
                         <a:rPr sz="1100"/>
-                        <a:t>Test and QA optimisation especially: what was briefed, what is running, what ASPL confirmed and what the numbers were</a:t>
+                        <a:t>Test and QA especially: what is running, what ASPL confirmed, what the numbers were</a:t>
                       </a:r>
                     </a:p>
                   </a:txBody>
@@ -17259,7 +17259,7 @@
                     <a:p>
                       <a:r>
                         <a:rPr sz="1100"/>
-                        <a:t>Work is chased from memory, and a result arrives in a reply that never reaches the plan</a:t>
+                        <a:t>A result arrives in a reply and never reaches the plan</a:t>
                       </a:r>
                     </a:p>
                   </a:txBody>
@@ -17287,7 +17287,7 @@
                     <a:p>
                       <a:r>
                         <a:rPr sz="1100"/>
-                        <a:t>Custom labels and product types decide how PMAX splits the catalogue — they were spot-checked one feed at a time</a:t>
+                        <a:t>Custom labels and product types decide how PMAX splits the catalogue — checked one feed at a time</a:t>
                       </a:r>
                     </a:p>
                   </a:txBody>
@@ -17300,7 +17300,7 @@
                     <a:p>
                       <a:r>
                         <a:rPr sz="1100"/>
-                        <a:t>A value empties and campaigns keep bidding into a structure that no longer matches the feed</a:t>
+                        <a:t>A value empties; campaigns keep bidding into a structure that no longer matches</a:t>
                       </a:r>
                     </a:p>
                   </a:txBody>
@@ -17328,7 +17328,7 @@
                     <a:p>
                       <a:r>
                         <a:rPr sz="1100"/>
-                        <a:t>Nothing said how many products arrived this month, or that a collection had landed and gone straight to live unoptimised</a:t>
+                        <a:t>Nothing said how many products arrived this month, or that a collection landed unoptimised</a:t>
                       </a:r>
                     </a:p>
                   </a:txBody>
@@ -17341,7 +17341,7 @@
                     <a:p>
                       <a:r>
                         <a:rPr sz="1100"/>
-                        <a:t>New products sell on old titles until somebody happens to notice them</a:t>
+                        <a:t>New products sell on old titles until somebody notices</a:t>
                       </a:r>
                     </a:p>
                   </a:txBody>
@@ -17429,7 +17429,8 @@
           <a:lstStyle/>
           <a:p>
             <a:r>
-              <a:t>Eight actions, identical week to week — plus assembling book health every Monday.</a:t>
+              <a:rPr sz="1220"/>
+              <a:t>Eight actions, identical week to week — none of it the interesting part of the job, and all of it the part a fragmented week gets wrong first.</a:t>
             </a:r>
           </a:p>
         </p:txBody>
@@ -18291,7 +18292,8 @@
           <a:lstStyle/>
           <a:p>
             <a:r>
-              <a:t>This is the mechanism behind the next slide.</a:t>
+              <a:rPr sz="1220"/>
+              <a:t>An AM does not fail dramatically — they work faster and make small errors. The hours in chapter three are our own count, not this research’s.</a:t>
             </a:r>
           </a:p>
         </p:txBody>

--- a/docs/materials/FCC_Business_Case_Sep26.pptx
+++ b/docs/materials/FCC_Business_Case_Sep26.pptx
@@ -33,6 +33,10 @@
     <p:sldId id="281" r:id="rId31"/>
     <p:sldId id="282" r:id="rId32"/>
     <p:sldId id="283" r:id="rId33"/>
+    <p:sldId id="284" r:id="rId34"/>
+    <p:sldId id="285" r:id="rId35"/>
+    <p:sldId id="286" r:id="rId36"/>
+    <p:sldId id="287" r:id="rId37"/>
   </p:sldIdLst>
   <p:sldSz cx="12192000" cy="6858000"/>
   <p:notesSz cx="6858000" cy="9144000"/>
@@ -11118,6 +11122,768 @@
 </file>
 
 <file path=ppt/slides/slide10.xml><?xml version="1.0" encoding="utf-8"?>
+<p:sld xmlns:a="http://schemas.openxmlformats.org/drawingml/2006/main" xmlns:p="http://schemas.openxmlformats.org/presentationml/2006/main" xmlns:r="http://schemas.openxmlformats.org/officeDocument/2006/relationships">
+  <p:cSld>
+    <p:spTree>
+      <p:nvGrpSpPr>
+        <p:cNvPr id="1" name=""/>
+        <p:cNvGrpSpPr/>
+        <p:nvPr/>
+      </p:nvGrpSpPr>
+      <p:grpSpPr/>
+      <p:sp>
+        <p:nvSpPr>
+          <p:cNvPr id="2" name="Title 1"/>
+          <p:cNvSpPr>
+            <a:spLocks noGrp="1"/>
+          </p:cNvSpPr>
+          <p:nvPr>
+            <p:ph type="title"/>
+          </p:nvPr>
+        </p:nvSpPr>
+        <p:spPr/>
+        <p:txBody>
+          <a:bodyPr wrap="square"/>
+          <a:lstStyle/>
+          <a:p>
+            <a:r>
+              <a:t>Three things nobody could see</a:t>
+            </a:r>
+          </a:p>
+        </p:txBody>
+      </p:sp>
+      <p:sp>
+        <p:nvSpPr>
+          <p:cNvPr id="3" name="Text Placeholder 2"/>
+          <p:cNvSpPr>
+            <a:spLocks noGrp="1"/>
+          </p:cNvSpPr>
+          <p:nvPr>
+            <p:ph type="body" idx="13"/>
+          </p:nvPr>
+        </p:nvSpPr>
+        <p:spPr/>
+        <p:txBody>
+          <a:bodyPr wrap="square"/>
+          <a:lstStyle/>
+          <a:p>
+            <a:r>
+              <a:t>Not hypotheticals — each was read off the team’s own systems in the first weeks of the FCC being live.</a:t>
+            </a:r>
+          </a:p>
+        </p:txBody>
+      </p:sp>
+      <p:sp>
+        <p:nvSpPr>
+          <p:cNvPr id="4" name="Text Placeholder 3"/>
+          <p:cNvSpPr>
+            <a:spLocks noGrp="1"/>
+          </p:cNvSpPr>
+          <p:nvPr>
+            <p:ph type="body" idx="1"/>
+          </p:nvPr>
+        </p:nvSpPr>
+        <p:spPr/>
+        <p:txBody>
+          <a:bodyPr wrap="square"/>
+          <a:lstStyle/>
+          <a:p>
+            <a:r>
+              <a:t>378 hours in the red</a:t>
+            </a:r>
+          </a:p>
+        </p:txBody>
+      </p:sp>
+      <p:sp>
+        <p:nvSpPr>
+          <p:cNvPr id="5" name="Text Placeholder 4"/>
+          <p:cNvSpPr>
+            <a:spLocks noGrp="1"/>
+          </p:cNvSpPr>
+          <p:nvPr>
+            <p:ph type="body" idx="2"/>
+          </p:nvPr>
+        </p:nvSpPr>
+        <p:spPr/>
+        <p:txBody>
+          <a:bodyPr wrap="square"/>
+          <a:lstStyle/>
+          <a:p>
+            <a:r>
+              <a:t>Across 24 markets, carried forward month after month; ten of the 19 retainer markets are in the red. The AM saying yes to the next task could not see it — the Task Manager showed it one client login at a time.</a:t>
+            </a:r>
+          </a:p>
+          <a:p>
+            <a:r>
+              <a:t>Task Manager, 22 Sep 2026</a:t>
+            </a:r>
+          </a:p>
+        </p:txBody>
+      </p:sp>
+      <p:sp>
+        <p:nvSpPr>
+          <p:cNvPr id="6" name="Text Placeholder 5"/>
+          <p:cNvSpPr>
+            <a:spLocks noGrp="1"/>
+          </p:cNvSpPr>
+          <p:nvPr>
+            <p:ph type="body" idx="3"/>
+          </p:nvPr>
+        </p:nvSpPr>
+        <p:spPr/>
+        <p:txBody>
+          <a:bodyPr wrap="square"/>
+          <a:lstStyle/>
+          <a:p>
+            <a:r>
+              <a:t>60% of weeks skipped</a:t>
+            </a:r>
+          </a:p>
+        </p:txBody>
+      </p:sp>
+      <p:sp>
+        <p:nvSpPr>
+          <p:cNvPr id="7" name="Text Placeholder 6"/>
+          <p:cNvSpPr>
+            <a:spLocks noGrp="1"/>
+          </p:cNvSpPr>
+          <p:nvPr>
+            <p:ph type="body" idx="4"/>
+          </p:nvPr>
+        </p:nvSpPr>
+        <p:spPr/>
+        <p:txBody>
+          <a:bodyPr wrap="square"/>
+          <a:lstStyle/>
+          <a:p>
+            <a:r>
+              <a:t>In twelve months, 838 of 1,398 scheduled weeks of title, keyword and product-type work were skipped — 2,750 hours of optimisation that never landed. 67 tasks sit on a skip streak of two months or more; the longest is 14.</a:t>
+            </a:r>
+          </a:p>
+          <a:p>
+            <a:r>
+              <a:t>Content team schedule, 15 Sep 2026</a:t>
+            </a:r>
+          </a:p>
+        </p:txBody>
+      </p:sp>
+      <p:sp>
+        <p:nvSpPr>
+          <p:cNvPr id="8" name="Text Placeholder 7"/>
+          <p:cNvSpPr>
+            <a:spLocks noGrp="1"/>
+          </p:cNvSpPr>
+          <p:nvPr>
+            <p:ph type="body" idx="5"/>
+          </p:nvPr>
+        </p:nvSpPr>
+        <p:spPr/>
+        <p:txBody>
+          <a:bodyPr wrap="square"/>
+          <a:lstStyle/>
+          <a:p>
+            <a:r>
+              <a:t>Briefed, but invisible</a:t>
+            </a:r>
+          </a:p>
+        </p:txBody>
+      </p:sp>
+      <p:sp>
+        <p:nvSpPr>
+          <p:cNvPr id="9" name="Text Placeholder 8"/>
+          <p:cNvSpPr>
+            <a:spLocks noGrp="1"/>
+          </p:cNvSpPr>
+          <p:nvPr>
+            <p:ph type="body" idx="6"/>
+          </p:nvPr>
+        </p:nvSpPr>
+        <p:spPr/>
+        <p:txBody>
+          <a:bodyPr wrap="square"/>
+          <a:lstStyle/>
+          <a:p>
+            <a:r>
+              <a:t>Two Reiss keyword themes were briefed by a colleague and picked up by ASPL, yet the board read “not briefed” — the save had failed silently and the only record sat on one laptop. The work had started; the team could not see it.</a:t>
+            </a:r>
+          </a:p>
+          <a:p>
+            <a:r>
+              <a:t>Workflow, 16 Sep 2026</a:t>
+            </a:r>
+          </a:p>
+        </p:txBody>
+      </p:sp>
+      <p:sp>
+        <p:nvSpPr>
+          <p:cNvPr id="10" name="Text Placeholder 9"/>
+          <p:cNvSpPr>
+            <a:spLocks noGrp="1"/>
+          </p:cNvSpPr>
+          <p:nvPr>
+            <p:ph type="body" idx="14"/>
+          </p:nvPr>
+        </p:nvSpPr>
+        <p:spPr/>
+        <p:txBody>
+          <a:bodyPr wrap="square"/>
+          <a:lstStyle/>
+          <a:p>
+            <a:r>
+              <a:t>The cost was never a dramatic failure.</a:t>
+            </a:r>
+          </a:p>
+        </p:txBody>
+      </p:sp>
+    </p:spTree>
+  </p:cSld>
+  <p:clrMapOvr>
+    <a:masterClrMapping/>
+  </p:clrMapOvr>
+</p:sld>
+</file>
+
+<file path=ppt/slides/slide11.xml><?xml version="1.0" encoding="utf-8"?>
+<p:sld xmlns:a="http://schemas.openxmlformats.org/drawingml/2006/main" xmlns:p="http://schemas.openxmlformats.org/presentationml/2006/main" xmlns:r="http://schemas.openxmlformats.org/officeDocument/2006/relationships">
+  <p:cSld>
+    <p:spTree>
+      <p:nvGrpSpPr>
+        <p:cNvPr id="1" name=""/>
+        <p:cNvGrpSpPr/>
+        <p:nvPr/>
+      </p:nvGrpSpPr>
+      <p:grpSpPr/>
+      <p:sp>
+        <p:nvSpPr>
+          <p:cNvPr id="2" name="Text Placeholder 1"/>
+          <p:cNvSpPr>
+            <a:spLocks noGrp="1"/>
+          </p:cNvSpPr>
+          <p:nvPr>
+            <p:ph type="body" idx="11"/>
+          </p:nvPr>
+        </p:nvSpPr>
+        <p:spPr/>
+        <p:txBody>
+          <a:bodyPr wrap="square"/>
+          <a:lstStyle/>
+          <a:p>
+            <a:r>
+              <a:t>Chapter two</a:t>
+            </a:r>
+          </a:p>
+        </p:txBody>
+      </p:sp>
+      <p:sp>
+        <p:nvSpPr>
+          <p:cNvPr id="3" name="Title 2"/>
+          <p:cNvSpPr>
+            <a:spLocks noGrp="1"/>
+          </p:cNvSpPr>
+          <p:nvPr>
+            <p:ph type="title"/>
+          </p:nvPr>
+        </p:nvSpPr>
+        <p:spPr/>
+        <p:txBody>
+          <a:bodyPr wrap="square"/>
+          <a:lstStyle/>
+          <a:p>
+            <a:r>
+              <a:t>The solution</a:t>
+            </a:r>
+          </a:p>
+        </p:txBody>
+      </p:sp>
+      <p:sp>
+        <p:nvSpPr>
+          <p:cNvPr id="4" name="Text Placeholder 3"/>
+          <p:cNvSpPr>
+            <a:spLocks noGrp="1"/>
+          </p:cNvSpPr>
+          <p:nvPr>
+            <p:ph type="body" idx="1"/>
+          </p:nvPr>
+        </p:nvSpPr>
+        <p:spPr/>
+        <p:txBody>
+          <a:bodyPr wrap="square"/>
+          <a:lstStyle/>
+          <a:p>
+            <a:r>
+              <a:t>One command center on top of the tools the team already uses — nothing new to log into, nothing re-keyed.</a:t>
+            </a:r>
+          </a:p>
+        </p:txBody>
+      </p:sp>
+    </p:spTree>
+  </p:cSld>
+  <p:clrMapOvr>
+    <a:masterClrMapping/>
+  </p:clrMapOvr>
+</p:sld>
+</file>
+
+<file path=ppt/slides/slide12.xml><?xml version="1.0" encoding="utf-8"?>
+<p:sld xmlns:a="http://schemas.openxmlformats.org/drawingml/2006/main" xmlns:p="http://schemas.openxmlformats.org/presentationml/2006/main" xmlns:r="http://schemas.openxmlformats.org/officeDocument/2006/relationships">
+  <p:cSld>
+    <p:spTree>
+      <p:nvGrpSpPr>
+        <p:cNvPr id="1" name=""/>
+        <p:cNvGrpSpPr/>
+        <p:nvPr/>
+      </p:nvGrpSpPr>
+      <p:grpSpPr/>
+      <p:sp>
+        <p:nvSpPr>
+          <p:cNvPr id="2" name="Title 1"/>
+          <p:cNvSpPr>
+            <a:spLocks noGrp="1"/>
+          </p:cNvSpPr>
+          <p:nvPr>
+            <p:ph type="title"/>
+          </p:nvPr>
+        </p:nvSpPr>
+        <p:spPr/>
+        <p:txBody>
+          <a:bodyPr wrap="square"/>
+          <a:lstStyle/>
+          <a:p>
+            <a:r>
+              <a:t>Twenty modules, six weeks, £0 infrastructure</a:t>
+            </a:r>
+          </a:p>
+        </p:txBody>
+      </p:sp>
+      <p:sp>
+        <p:nvSpPr>
+          <p:cNvPr id="3" name="Text Placeholder 2"/>
+          <p:cNvSpPr>
+            <a:spLocks noGrp="1"/>
+          </p:cNvSpPr>
+          <p:nvPr>
+            <p:ph type="body" idx="11"/>
+          </p:nvPr>
+        </p:nvSpPr>
+        <p:spPr/>
+        <p:txBody>
+          <a:bodyPr wrap="square"/>
+          <a:lstStyle/>
+          <a:p>
+            <a:r>
+              <a:t>Built 11 Aug – 22 Sep 2026 with Claude Code: 275 merged builds, 1,452 tripwires, SSO on every screen.</a:t>
+            </a:r>
+          </a:p>
+        </p:txBody>
+      </p:sp>
+      <p:sp>
+        <p:nvSpPr>
+          <p:cNvPr id="4" name="Text Placeholder 3"/>
+          <p:cNvSpPr>
+            <a:spLocks noGrp="1"/>
+          </p:cNvSpPr>
+          <p:nvPr>
+            <p:ph type="body" idx="1"/>
+          </p:nvPr>
+        </p:nvSpPr>
+        <p:spPr/>
+        <p:txBody>
+          <a:bodyPr wrap="square"/>
+          <a:lstStyle/>
+          <a:p>
+            <a:r>
+              <a:t>6 wks</a:t>
+            </a:r>
+          </a:p>
+        </p:txBody>
+      </p:sp>
+      <p:sp>
+        <p:nvSpPr>
+          <p:cNvPr id="5" name="Text Placeholder 4"/>
+          <p:cNvSpPr>
+            <a:spLocks noGrp="1"/>
+          </p:cNvSpPr>
+          <p:nvPr>
+            <p:ph type="body" idx="2"/>
+          </p:nvPr>
+        </p:nvSpPr>
+        <p:spPr/>
+        <p:txBody>
+          <a:bodyPr wrap="square"/>
+          <a:lstStyle/>
+          <a:p>
+            <a:r>
+              <a:t>From first commit to 20 live modules</a:t>
+            </a:r>
+          </a:p>
+        </p:txBody>
+      </p:sp>
+      <p:sp>
+        <p:nvSpPr>
+          <p:cNvPr id="6" name="Text Placeholder 5"/>
+          <p:cNvSpPr>
+            <a:spLocks noGrp="1"/>
+          </p:cNvSpPr>
+          <p:nvPr>
+            <p:ph type="body" idx="3"/>
+          </p:nvPr>
+        </p:nvSpPr>
+        <p:spPr/>
+        <p:txBody>
+          <a:bodyPr wrap="square"/>
+          <a:lstStyle/>
+          <a:p>
+            <a:r>
+              <a:t>275</a:t>
+            </a:r>
+          </a:p>
+        </p:txBody>
+      </p:sp>
+      <p:sp>
+        <p:nvSpPr>
+          <p:cNvPr id="7" name="Text Placeholder 6"/>
+          <p:cNvSpPr>
+            <a:spLocks noGrp="1"/>
+          </p:cNvSpPr>
+          <p:nvPr>
+            <p:ph type="body" idx="4"/>
+          </p:nvPr>
+        </p:nvSpPr>
+        <p:spPr/>
+        <p:txBody>
+          <a:bodyPr wrap="square"/>
+          <a:lstStyle/>
+          <a:p>
+            <a:r>
+              <a:t>Merged builds, each gated by automated checks</a:t>
+            </a:r>
+          </a:p>
+        </p:txBody>
+      </p:sp>
+      <p:sp>
+        <p:nvSpPr>
+          <p:cNvPr id="8" name="Text Placeholder 7"/>
+          <p:cNvSpPr>
+            <a:spLocks noGrp="1"/>
+          </p:cNvSpPr>
+          <p:nvPr>
+            <p:ph type="body" idx="5"/>
+          </p:nvPr>
+        </p:nvSpPr>
+        <p:spPr/>
+        <p:txBody>
+          <a:bodyPr wrap="square"/>
+          <a:lstStyle/>
+          <a:p>
+            <a:r>
+              <a:t>£0</a:t>
+            </a:r>
+          </a:p>
+        </p:txBody>
+      </p:sp>
+      <p:sp>
+        <p:nvSpPr>
+          <p:cNvPr id="9" name="Text Placeholder 8"/>
+          <p:cNvSpPr>
+            <a:spLocks noGrp="1"/>
+          </p:cNvSpPr>
+          <p:nvPr>
+            <p:ph type="body" idx="6"/>
+          </p:nvPr>
+        </p:nvSpPr>
+        <p:spPr/>
+        <p:txBody>
+          <a:bodyPr wrap="square"/>
+          <a:lstStyle/>
+          <a:p>
+            <a:r>
+              <a:t>Infrastructure — Cloudflare free tier + Access SSO</a:t>
+            </a:r>
+          </a:p>
+        </p:txBody>
+      </p:sp>
+      <p:sp>
+        <p:nvSpPr>
+          <p:cNvPr id="10" name="Text Placeholder 9"/>
+          <p:cNvSpPr>
+            <a:spLocks noGrp="1"/>
+          </p:cNvSpPr>
+          <p:nvPr>
+            <p:ph type="body" idx="14"/>
+          </p:nvPr>
+        </p:nvSpPr>
+        <p:spPr/>
+        <p:txBody>
+          <a:bodyPr wrap="square"/>
+          <a:lstStyle/>
+          <a:p>
+            <a:r>
+              <a:t>No licences, no vendor, no implementation partner — one AM, Claude Code and six weeks.</a:t>
+            </a:r>
+          </a:p>
+        </p:txBody>
+      </p:sp>
+    </p:spTree>
+  </p:cSld>
+  <p:clrMapOvr>
+    <a:masterClrMapping/>
+  </p:clrMapOvr>
+</p:sld>
+</file>
+
+<file path=ppt/slides/slide13.xml><?xml version="1.0" encoding="utf-8"?>
+<p:sld xmlns:a="http://schemas.openxmlformats.org/drawingml/2006/main" xmlns:p="http://schemas.openxmlformats.org/presentationml/2006/main" xmlns:r="http://schemas.openxmlformats.org/officeDocument/2006/relationships">
+  <p:cSld>
+    <p:spTree>
+      <p:nvGrpSpPr>
+        <p:cNvPr id="1" name=""/>
+        <p:cNvGrpSpPr/>
+        <p:nvPr/>
+      </p:nvGrpSpPr>
+      <p:grpSpPr/>
+      <p:sp>
+        <p:nvSpPr>
+          <p:cNvPr id="2" name="Title 1"/>
+          <p:cNvSpPr>
+            <a:spLocks noGrp="1"/>
+          </p:cNvSpPr>
+          <p:nvPr>
+            <p:ph type="title"/>
+          </p:nvPr>
+        </p:nvSpPr>
+        <p:spPr/>
+        <p:txBody>
+          <a:bodyPr wrap="square"/>
+          <a:lstStyle/>
+          <a:p>
+            <a:r>
+              <a:t>Monitor, run, sell, lead</a:t>
+            </a:r>
+          </a:p>
+        </p:txBody>
+      </p:sp>
+      <p:sp>
+        <p:nvSpPr>
+          <p:cNvPr id="3" name="Text Placeholder 2"/>
+          <p:cNvSpPr>
+            <a:spLocks noGrp="1"/>
+          </p:cNvSpPr>
+          <p:nvPr>
+            <p:ph type="body" idx="13"/>
+          </p:nvPr>
+        </p:nvSpPr>
+        <p:spPr/>
+        <p:txBody>
+          <a:bodyPr wrap="square"/>
+          <a:lstStyle/>
+          <a:p>
+            <a:r>
+              <a:t>Twenty modules, four jobs — each one reading the systems the team already runs.</a:t>
+            </a:r>
+          </a:p>
+        </p:txBody>
+      </p:sp>
+      <p:sp>
+        <p:nvSpPr>
+          <p:cNvPr id="4" name="Text Placeholder 3"/>
+          <p:cNvSpPr>
+            <a:spLocks noGrp="1"/>
+          </p:cNvSpPr>
+          <p:nvPr>
+            <p:ph type="body" idx="1"/>
+          </p:nvPr>
+        </p:nvSpPr>
+        <p:spPr/>
+        <p:txBody>
+          <a:bodyPr wrap="square"/>
+          <a:lstStyle/>
+          <a:p>
+            <a:r>
+              <a:t>Monitor — the feeds watch themselves</a:t>
+            </a:r>
+          </a:p>
+        </p:txBody>
+      </p:sp>
+      <p:sp>
+        <p:nvSpPr>
+          <p:cNvPr id="5" name="Text Placeholder 4"/>
+          <p:cNvSpPr>
+            <a:spLocks noGrp="1"/>
+          </p:cNvSpPr>
+          <p:nvPr>
+            <p:ph type="body" idx="2"/>
+          </p:nvPr>
+        </p:nvSpPr>
+        <p:spPr/>
+        <p:txBody>
+          <a:bodyPr wrap="square"/>
+          <a:lstStyle/>
+          <a:p>
+            <a:r>
+              <a:rPr sz="1320"/>
+              <a:t>Label Guard, Product Type Guard, Golden Record, Product Volume, Overlays and Feed Lab scan all 62 feeds four times a day, alert on drop-offs against a known-good baseline, and draft the client email to confirm a change before anyone acts.</a:t>
+            </a:r>
+          </a:p>
+        </p:txBody>
+      </p:sp>
+      <p:sp>
+        <p:nvSpPr>
+          <p:cNvPr id="6" name="Text Placeholder 5"/>
+          <p:cNvSpPr>
+            <a:spLocks noGrp="1"/>
+          </p:cNvSpPr>
+          <p:nvPr>
+            <p:ph type="body" idx="3"/>
+          </p:nvPr>
+        </p:nvSpPr>
+        <p:spPr/>
+        <p:txBody>
+          <a:bodyPr wrap="square"/>
+          <a:lstStyle/>
+          <a:p>
+            <a:r>
+              <a:t>Run — the work moves in one place</a:t>
+            </a:r>
+          </a:p>
+        </p:txBody>
+      </p:sp>
+      <p:sp>
+        <p:nvSpPr>
+          <p:cNvPr id="7" name="Text Placeholder 6"/>
+          <p:cNvSpPr>
+            <a:spLocks noGrp="1"/>
+          </p:cNvSpPr>
+          <p:nvPr>
+            <p:ph type="body" idx="4"/>
+          </p:nvPr>
+        </p:nvSpPr>
+        <p:spPr/>
+        <p:txBody>
+          <a:bodyPr wrap="square"/>
+          <a:lstStyle/>
+          <a:p>
+            <a:r>
+              <a:t>Workflow takes every task from the plans, the inbox and call notes into one Intake, briefs ASPL with a coded ticket, moves stages from email replies automatically, and shows the retainer balance beside every decision.</a:t>
+            </a:r>
+          </a:p>
+        </p:txBody>
+      </p:sp>
+      <p:sp>
+        <p:nvSpPr>
+          <p:cNvPr id="8" name="Text Placeholder 7"/>
+          <p:cNvSpPr>
+            <a:spLocks noGrp="1"/>
+          </p:cNvSpPr>
+          <p:nvPr>
+            <p:ph type="body" idx="5"/>
+          </p:nvPr>
+        </p:nvSpPr>
+        <p:spPr/>
+        <p:txBody>
+          <a:bodyPr wrap="square"/>
+          <a:lstStyle/>
+          <a:p>
+            <a:r>
+              <a:t>Sell — quotes and decks, live</a:t>
+            </a:r>
+          </a:p>
+        </p:txBody>
+      </p:sp>
+      <p:sp>
+        <p:nvSpPr>
+          <p:cNvPr id="9" name="Text Placeholder 8"/>
+          <p:cNvSpPr>
+            <a:spLocks noGrp="1"/>
+          </p:cNvSpPr>
+          <p:nvPr>
+            <p:ph type="body" idx="6"/>
+          </p:nvPr>
+        </p:nvSpPr>
+        <p:spPr/>
+        <p:txBody>
+          <a:bodyPr wrap="square"/>
+          <a:lstStyle/>
+          <a:p>
+            <a:r>
+              <a:rPr sz="1320"/>
+              <a:t>AI Quote prices work per SKU and exports the finance team's own workbook; the Deck Generator builds strategy reviews on the core template; the Keyword Calendar turns a client's marketing plan into briefs and a one-page client PDF.</a:t>
+            </a:r>
+          </a:p>
+        </p:txBody>
+      </p:sp>
+      <p:sp>
+        <p:nvSpPr>
+          <p:cNvPr id="10" name="Text Placeholder 9"/>
+          <p:cNvSpPr>
+            <a:spLocks noGrp="1"/>
+          </p:cNvSpPr>
+          <p:nvPr>
+            <p:ph type="body" idx="7"/>
+          </p:nvPr>
+        </p:nvSpPr>
+        <p:spPr/>
+        <p:txBody>
+          <a:bodyPr wrap="square"/>
+          <a:lstStyle/>
+          <a:p>
+            <a:r>
+              <a:t>Lead — the book at a glance</a:t>
+            </a:r>
+          </a:p>
+        </p:txBody>
+      </p:sp>
+      <p:sp>
+        <p:nvSpPr>
+          <p:cNvPr id="11" name="Text Placeholder 10"/>
+          <p:cNvSpPr>
+            <a:spLocks noGrp="1"/>
+          </p:cNvSpPr>
+          <p:nvPr>
+            <p:ph type="body" idx="8"/>
+          </p:nvPr>
+        </p:nvSpPr>
+        <p:spPr/>
+        <p:txBody>
+          <a:bodyPr wrap="square"/>
+          <a:lstStyle/>
+          <a:p>
+            <a:r>
+              <a:rPr sz="1320"/>
+              <a:t>Leadership reads book health, retainer burn-down and a retention radar per account; the Task Manager module makes the hours database searchable; the Playbook tells each AM what is landing, stalling or missing on every account.</a:t>
+            </a:r>
+          </a:p>
+        </p:txBody>
+      </p:sp>
+      <p:sp>
+        <p:nvSpPr>
+          <p:cNvPr id="12" name="Text Placeholder 11"/>
+          <p:cNvSpPr>
+            <a:spLocks noGrp="1"/>
+          </p:cNvSpPr>
+          <p:nvPr>
+            <p:ph type="body" idx="14"/>
+          </p:nvPr>
+        </p:nvSpPr>
+        <p:spPr/>
+        <p:txBody>
+          <a:bodyPr wrap="square"/>
+          <a:lstStyle/>
+          <a:p>
+            <a:r>
+              <a:t>Every module reads the systems the team already runs, and writes back to them.</a:t>
+            </a:r>
+          </a:p>
+        </p:txBody>
+      </p:sp>
+    </p:spTree>
+  </p:cSld>
+  <p:clrMapOvr>
+    <a:masterClrMapping/>
+  </p:clrMapOvr>
+</p:sld>
+</file>
+
+<file path=ppt/slides/slide14.xml><?xml version="1.0" encoding="utf-8"?>
 <p:sld xmlns:a="http://schemas.openxmlformats.org/drawingml/2006/main" xmlns:p="http://schemas.openxmlformats.org/presentationml/2006/main" xmlns:r="http://schemas.openxmlformats.org/officeDocument/2006/relationships">
   <p:cSld>
     <p:spTree>
@@ -11606,7 +12372,7 @@
 </p:sld>
 </file>
 
-<file path=ppt/slides/slide11.xml><?xml version="1.0" encoding="utf-8"?>
+<file path=ppt/slides/slide15.xml><?xml version="1.0" encoding="utf-8"?>
 <p:sld xmlns:a="http://schemas.openxmlformats.org/drawingml/2006/main" xmlns:p="http://schemas.openxmlformats.org/presentationml/2006/main" xmlns:r="http://schemas.openxmlformats.org/officeDocument/2006/relationships">
   <p:cSld>
     <p:spTree>
@@ -11771,7 +12537,7 @@
 </p:sld>
 </file>
 
-<file path=ppt/slides/slide12.xml><?xml version="1.0" encoding="utf-8"?>
+<file path=ppt/slides/slide16.xml><?xml version="1.0" encoding="utf-8"?>
 <p:sld xmlns:a="http://schemas.openxmlformats.org/drawingml/2006/main" xmlns:p="http://schemas.openxmlformats.org/presentationml/2006/main" xmlns:r="http://schemas.openxmlformats.org/officeDocument/2006/relationships">
   <p:cSld>
     <p:spTree>
@@ -11852,7 +12618,7 @@
 </p:sld>
 </file>
 
-<file path=ppt/slides/slide13.xml><?xml version="1.0" encoding="utf-8"?>
+<file path=ppt/slides/slide17.xml><?xml version="1.0" encoding="utf-8"?>
 <p:sld xmlns:a="http://schemas.openxmlformats.org/drawingml/2006/main" xmlns:p="http://schemas.openxmlformats.org/presentationml/2006/main" xmlns:r="http://schemas.openxmlformats.org/officeDocument/2006/relationships">
   <p:cSld>
     <p:spTree>
@@ -12518,667 +13284,6 @@
 </p:sld>
 </file>
 
-<file path=ppt/slides/slide14.xml><?xml version="1.0" encoding="utf-8"?>
-<p:sld xmlns:a="http://schemas.openxmlformats.org/drawingml/2006/main" xmlns:p="http://schemas.openxmlformats.org/presentationml/2006/main" xmlns:r="http://schemas.openxmlformats.org/officeDocument/2006/relationships">
-  <p:cSld>
-    <p:spTree>
-      <p:nvGrpSpPr>
-        <p:cNvPr id="1" name=""/>
-        <p:cNvGrpSpPr/>
-        <p:nvPr/>
-      </p:nvGrpSpPr>
-      <p:grpSpPr/>
-      <p:sp>
-        <p:nvSpPr>
-          <p:cNvPr id="2" name="Title 1"/>
-          <p:cNvSpPr>
-            <a:spLocks noGrp="1"/>
-          </p:cNvSpPr>
-          <p:nvPr>
-            <p:ph type="title"/>
-          </p:nvPr>
-        </p:nvSpPr>
-        <p:spPr/>
-        <p:txBody>
-          <a:bodyPr wrap="square"/>
-          <a:lstStyle/>
-          <a:p>
-            <a:r>
-              <a:t>A year without the FCC, and a year with it</a:t>
-            </a:r>
-          </a:p>
-        </p:txBody>
-      </p:sp>
-      <p:sp>
-        <p:nvSpPr>
-          <p:cNvPr id="3" name="Text Placeholder 2"/>
-          <p:cNvSpPr>
-            <a:spLocks noGrp="1"/>
-          </p:cNvSpPr>
-          <p:nvPr>
-            <p:ph type="body" idx="11"/>
-          </p:nvPr>
-        </p:nvSpPr>
-        <p:spPr/>
-        <p:txBody>
-          <a:bodyPr wrap="square"/>
-          <a:lstStyle/>
-          <a:p>
-            <a:r>
-              <a:t>Five London AMs, 46 working weeks; the per-AM hours above, multiplied out.</a:t>
-            </a:r>
-          </a:p>
-        </p:txBody>
-      </p:sp>
-      <p:sp>
-        <p:nvSpPr>
-          <p:cNvPr id="4" name="Text Placeholder 3"/>
-          <p:cNvSpPr>
-            <a:spLocks noGrp="1"/>
-          </p:cNvSpPr>
-          <p:nvPr>
-            <p:ph type="body" idx="1"/>
-          </p:nvPr>
-        </p:nvSpPr>
-        <p:spPr/>
-        <p:txBody>
-          <a:bodyPr wrap="square"/>
-          <a:lstStyle/>
-          <a:p>
-            <a:r>
-              <a:t>3,450 h</a:t>
-            </a:r>
-          </a:p>
-        </p:txBody>
-      </p:sp>
-      <p:sp>
-        <p:nvSpPr>
-          <p:cNvPr id="5" name="Text Placeholder 4"/>
-          <p:cNvSpPr>
-            <a:spLocks noGrp="1"/>
-          </p:cNvSpPr>
-          <p:nvPr>
-            <p:ph type="body" idx="2"/>
-          </p:nvPr>
-        </p:nvSpPr>
-        <p:spPr/>
-        <p:txBody>
-          <a:bodyPr wrap="square"/>
-          <a:lstStyle/>
-          <a:p>
-            <a:r>
-              <a:t>Wasted a year on fetching and re-keying without the FCC</a:t>
-            </a:r>
-          </a:p>
-        </p:txBody>
-      </p:sp>
-      <p:sp>
-        <p:nvSpPr>
-          <p:cNvPr id="6" name="Text Placeholder 5"/>
-          <p:cNvSpPr>
-            <a:spLocks noGrp="1"/>
-          </p:cNvSpPr>
-          <p:nvPr>
-            <p:ph type="body" idx="3"/>
-          </p:nvPr>
-        </p:nvSpPr>
-        <p:spPr/>
-        <p:txBody>
-          <a:bodyPr wrap="square"/>
-          <a:lstStyle/>
-          <a:p>
-            <a:r>
-              <a:t>2,530 h</a:t>
-            </a:r>
-          </a:p>
-        </p:txBody>
-      </p:sp>
-      <p:sp>
-        <p:nvSpPr>
-          <p:cNvPr id="7" name="Text Placeholder 6"/>
-          <p:cNvSpPr>
-            <a:spLocks noGrp="1"/>
-          </p:cNvSpPr>
-          <p:nvPr>
-            <p:ph type="body" idx="4"/>
-          </p:nvPr>
-        </p:nvSpPr>
-        <p:spPr/>
-        <p:txBody>
-          <a:bodyPr wrap="square"/>
-          <a:lstStyle/>
-          <a:p>
-            <a:r>
-              <a:t>Saved a year with it — 316 AM-days back for client work</a:t>
-            </a:r>
-          </a:p>
-        </p:txBody>
-      </p:sp>
-      <p:sp>
-        <p:nvSpPr>
-          <p:cNvPr id="8" name="Text Placeholder 7"/>
-          <p:cNvSpPr>
-            <a:spLocks noGrp="1"/>
-          </p:cNvSpPr>
-          <p:nvPr>
-            <p:ph type="body" idx="5"/>
-          </p:nvPr>
-        </p:nvSpPr>
-        <p:spPr/>
-        <p:txBody>
-          <a:bodyPr wrap="square"/>
-          <a:lstStyle/>
-          <a:p>
-            <a:r>
-              <a:t>£185k</a:t>
-            </a:r>
-          </a:p>
-        </p:txBody>
-      </p:sp>
-      <p:sp>
-        <p:nvSpPr>
-          <p:cNvPr id="9" name="Text Placeholder 8"/>
-          <p:cNvSpPr>
-            <a:spLocks noGrp="1"/>
-          </p:cNvSpPr>
-          <p:nvPr>
-            <p:ph type="body" idx="6"/>
-          </p:nvPr>
-        </p:nvSpPr>
-        <p:spPr/>
-        <p:txBody>
-          <a:bodyPr wrap="square"/>
-          <a:lstStyle/>
-          <a:p>
-            <a:r>
-              <a:t>Billable capacity released at the £73.125 ratecard hour</a:t>
-            </a:r>
-          </a:p>
-        </p:txBody>
-      </p:sp>
-      <p:sp>
-        <p:nvSpPr>
-          <p:cNvPr id="10" name="Text Placeholder 9"/>
-          <p:cNvSpPr>
-            <a:spLocks noGrp="1"/>
-          </p:cNvSpPr>
-          <p:nvPr>
-            <p:ph type="body" idx="14"/>
-          </p:nvPr>
-        </p:nvSpPr>
-        <p:spPr/>
-        <p:txBody>
-          <a:bodyPr wrap="square"/>
-          <a:lstStyle/>
-          <a:p>
-            <a:r>
-              <a:t>At half the estimate the case still returns 1,265 hours and £92k a year.</a:t>
-            </a:r>
-          </a:p>
-        </p:txBody>
-      </p:sp>
-    </p:spTree>
-  </p:cSld>
-  <p:clrMapOvr>
-    <a:masterClrMapping/>
-  </p:clrMapOvr>
-</p:sld>
-</file>
-
-<file path=ppt/slides/slide15.xml><?xml version="1.0" encoding="utf-8"?>
-<p:sld xmlns:a="http://schemas.openxmlformats.org/drawingml/2006/main" xmlns:p="http://schemas.openxmlformats.org/presentationml/2006/main" xmlns:r="http://schemas.openxmlformats.org/officeDocument/2006/relationships">
-  <p:cSld>
-    <p:spTree>
-      <p:nvGrpSpPr>
-        <p:cNvPr id="1" name=""/>
-        <p:cNvGrpSpPr/>
-        <p:nvPr/>
-      </p:nvGrpSpPr>
-      <p:grpSpPr/>
-      <p:sp>
-        <p:nvSpPr>
-          <p:cNvPr id="2" name="Title 1"/>
-          <p:cNvSpPr>
-            <a:spLocks noGrp="1"/>
-          </p:cNvSpPr>
-          <p:nvPr>
-            <p:ph type="title"/>
-          </p:nvPr>
-        </p:nvSpPr>
-        <p:spPr/>
-        <p:txBody>
-          <a:bodyPr wrap="square"/>
-          <a:lstStyle/>
-          <a:p>
-            <a:r>
-              <a:t>What the hours model cannot count</a:t>
-            </a:r>
-          </a:p>
-        </p:txBody>
-      </p:sp>
-      <p:sp>
-        <p:nvSpPr>
-          <p:cNvPr id="3" name="Text Placeholder 2"/>
-          <p:cNvSpPr>
-            <a:spLocks noGrp="1"/>
-          </p:cNvSpPr>
-          <p:nvPr>
-            <p:ph type="body" idx="13"/>
-          </p:nvPr>
-        </p:nvSpPr>
-        <p:spPr/>
-        <p:txBody>
-          <a:bodyPr wrap="square"/>
-          <a:lstStyle/>
-          <a:p>
-            <a:r>
-              <a:t>The saved hours are the smaller half of the case; the larger half is what stops happening.</a:t>
-            </a:r>
-          </a:p>
-        </p:txBody>
-      </p:sp>
-      <p:sp>
-        <p:nvSpPr>
-          <p:cNvPr id="4" name="Text Placeholder 3"/>
-          <p:cNvSpPr>
-            <a:spLocks noGrp="1"/>
-          </p:cNvSpPr>
-          <p:nvPr>
-            <p:ph type="body" idx="1"/>
-          </p:nvPr>
-        </p:nvSpPr>
-        <p:spPr/>
-        <p:txBody>
-          <a:bodyPr wrap="square"/>
-          <a:lstStyle/>
-          <a:p>
-            <a:r>
-              <a:rPr sz="1880"/>
-              <a:t>A break caught in hours</a:t>
-            </a:r>
-          </a:p>
-        </p:txBody>
-      </p:sp>
-      <p:sp>
-        <p:nvSpPr>
-          <p:cNvPr id="5" name="Text Placeholder 4"/>
-          <p:cNvSpPr>
-            <a:spLocks noGrp="1"/>
-          </p:cNvSpPr>
-          <p:nvPr>
-            <p:ph type="body" idx="2"/>
-          </p:nvPr>
-        </p:nvSpPr>
-        <p:spPr/>
-        <p:txBody>
-          <a:bodyPr wrap="square"/>
-          <a:lstStyle/>
-          <a:p>
-            <a:r>
-              <a:t>A custom label or product type that vanishes breaks the Performance Max listing groups built on it. The guards read every feed four times a day against a known-good baseline and draft the client email first.</a:t>
-            </a:r>
-          </a:p>
-        </p:txBody>
-      </p:sp>
-      <p:sp>
-        <p:nvSpPr>
-          <p:cNvPr id="6" name="Text Placeholder 5"/>
-          <p:cNvSpPr>
-            <a:spLocks noGrp="1"/>
-          </p:cNvSpPr>
-          <p:nvPr>
-            <p:ph type="body" idx="3"/>
-          </p:nvPr>
-        </p:nvSpPr>
-        <p:spPr/>
-        <p:txBody>
-          <a:bodyPr wrap="square"/>
-          <a:lstStyle/>
-          <a:p>
-            <a:r>
-              <a:t>Overrun as a decision</a:t>
-            </a:r>
-          </a:p>
-        </p:txBody>
-      </p:sp>
-      <p:sp>
-        <p:nvSpPr>
-          <p:cNvPr id="7" name="Text Placeholder 6"/>
-          <p:cNvSpPr>
-            <a:spLocks noGrp="1"/>
-          </p:cNvSpPr>
-          <p:nvPr>
-            <p:ph type="body" idx="4"/>
-          </p:nvPr>
-        </p:nvSpPr>
-        <p:spPr/>
-        <p:txBody>
-          <a:bodyPr wrap="square"/>
-          <a:lstStyle/>
-          <a:p>
-            <a:r>
-              <a:t>The 378 hours of negative balance now sit on every task and brand, with the team’s own call — carry the account, or hold new work — recorded beside the number. Overrun stops happening by accident.</a:t>
-            </a:r>
-          </a:p>
-        </p:txBody>
-      </p:sp>
-      <p:sp>
-        <p:nvSpPr>
-          <p:cNvPr id="8" name="Text Placeholder 7"/>
-          <p:cNvSpPr>
-            <a:spLocks noGrp="1"/>
-          </p:cNvSpPr>
-          <p:nvPr>
-            <p:ph type="body" idx="5"/>
-          </p:nvPr>
-        </p:nvSpPr>
-        <p:spPr/>
-        <p:txBody>
-          <a:bodyPr wrap="square"/>
-          <a:lstStyle/>
-          <a:p>
-            <a:r>
-              <a:t>Skips seen in time</a:t>
-            </a:r>
-          </a:p>
-        </p:txBody>
-      </p:sp>
-      <p:sp>
-        <p:nvSpPr>
-          <p:cNvPr id="9" name="Text Placeholder 8"/>
-          <p:cNvSpPr>
-            <a:spLocks noGrp="1"/>
-          </p:cNvSpPr>
-          <p:nvPr>
-            <p:ph type="body" idx="6"/>
-          </p:nvPr>
-        </p:nvSpPr>
-        <p:spPr/>
-        <p:txBody>
-          <a:bodyPr wrap="square"/>
-          <a:lstStyle/>
-          <a:p>
-            <a:r>
-              <a:t>2,750 skipped hours went unseen because nobody counted streaks. The Schedule module counts them per task and brand, so a three-month skip becomes a client conversation rather than a churn signal found too late.</a:t>
-            </a:r>
-          </a:p>
-        </p:txBody>
-      </p:sp>
-      <p:sp>
-        <p:nvSpPr>
-          <p:cNvPr id="10" name="Text Placeholder 9"/>
-          <p:cNvSpPr>
-            <a:spLocks noGrp="1"/>
-          </p:cNvSpPr>
-          <p:nvPr>
-            <p:ph type="body" idx="14"/>
-          </p:nvPr>
-        </p:nvSpPr>
-        <p:spPr/>
-        <p:txBody>
-          <a:bodyPr wrap="square"/>
-          <a:lstStyle/>
-          <a:p>
-            <a:r>
-              <a:t>The larger half of the case is what stops happening.</a:t>
-            </a:r>
-          </a:p>
-        </p:txBody>
-      </p:sp>
-    </p:spTree>
-  </p:cSld>
-  <p:clrMapOvr>
-    <a:masterClrMapping/>
-  </p:clrMapOvr>
-</p:sld>
-</file>
-
-<file path=ppt/slides/slide16.xml><?xml version="1.0" encoding="utf-8"?>
-<p:sld xmlns:a="http://schemas.openxmlformats.org/drawingml/2006/main" xmlns:p="http://schemas.openxmlformats.org/presentationml/2006/main" xmlns:r="http://schemas.openxmlformats.org/officeDocument/2006/relationships">
-  <p:cSld>
-    <p:spTree>
-      <p:nvGrpSpPr>
-        <p:cNvPr id="1" name=""/>
-        <p:cNvGrpSpPr/>
-        <p:nvPr/>
-      </p:nvGrpSpPr>
-      <p:grpSpPr/>
-      <p:sp>
-        <p:nvSpPr>
-          <p:cNvPr id="2" name="Title 1"/>
-          <p:cNvSpPr>
-            <a:spLocks noGrp="1"/>
-          </p:cNvSpPr>
-          <p:nvPr>
-            <p:ph type="title"/>
-          </p:nvPr>
-        </p:nvSpPr>
-        <p:spPr/>
-        <p:txBody>
-          <a:bodyPr wrap="square"/>
-          <a:lstStyle/>
-          <a:p>
-            <a:r>
-              <a:t>What it cost, and what it returns</a:t>
-            </a:r>
-          </a:p>
-        </p:txBody>
-      </p:sp>
-      <p:sp>
-        <p:nvSpPr>
-          <p:cNvPr id="3" name="Text Placeholder 2"/>
-          <p:cNvSpPr>
-            <a:spLocks noGrp="1"/>
-          </p:cNvSpPr>
-          <p:nvPr>
-            <p:ph type="body" idx="13"/>
-          </p:nvPr>
-        </p:nvSpPr>
-        <p:spPr/>
-        <p:txBody>
-          <a:bodyPr wrap="square"/>
-          <a:lstStyle/>
-          <a:p>
-            <a:r>
-              <a:t>One subscription and no infrastructure, against a year of reclaimed hours.</a:t>
-            </a:r>
-          </a:p>
-        </p:txBody>
-      </p:sp>
-      <p:sp>
-        <p:nvSpPr>
-          <p:cNvPr id="4" name="Text Placeholder 3"/>
-          <p:cNvSpPr>
-            <a:spLocks noGrp="1"/>
-          </p:cNvSpPr>
-          <p:nvPr>
-            <p:ph type="body" idx="1"/>
-          </p:nvPr>
-        </p:nvSpPr>
-        <p:spPr/>
-        <p:txBody>
-          <a:bodyPr wrap="square"/>
-          <a:lstStyle/>
-          <a:p>
-            <a:r>
-              <a:t>What it cost to build</a:t>
-            </a:r>
-          </a:p>
-        </p:txBody>
-      </p:sp>
-      <p:sp>
-        <p:nvSpPr>
-          <p:cNvPr id="5" name="Text Placeholder 4"/>
-          <p:cNvSpPr>
-            <a:spLocks noGrp="1"/>
-          </p:cNvSpPr>
-          <p:nvPr>
-            <p:ph type="body" idx="2"/>
-          </p:nvPr>
-        </p:nvSpPr>
-        <p:spPr/>
-        <p:txBody>
-          <a:bodyPr wrap="square"/>
-          <a:lstStyle/>
-          <a:p>
-            <a:r>
-              <a:t>Two months of one Claude Code subscription and £0 of infrastructure — Cloudflare Workers, KV and Access on the free tier, GitHub for the code. No licences, no vendor, no implementation partner.</a:t>
-            </a:r>
-          </a:p>
-        </p:txBody>
-      </p:sp>
-      <p:sp>
-        <p:nvSpPr>
-          <p:cNvPr id="6" name="Text Placeholder 5"/>
-          <p:cNvSpPr>
-            <a:spLocks noGrp="1"/>
-          </p:cNvSpPr>
-          <p:nvPr>
-            <p:ph type="body" idx="3"/>
-          </p:nvPr>
-        </p:nvSpPr>
-        <p:spPr/>
-        <p:txBody>
-          <a:bodyPr wrap="square"/>
-          <a:lstStyle/>
-          <a:p>
-            <a:r>
-              <a:t>What it returns</a:t>
-            </a:r>
-          </a:p>
-        </p:txBody>
-      </p:sp>
-      <p:sp>
-        <p:nvSpPr>
-          <p:cNvPr id="7" name="Text Placeholder 6"/>
-          <p:cNvSpPr>
-            <a:spLocks noGrp="1"/>
-          </p:cNvSpPr>
-          <p:nvPr>
-            <p:ph type="body" idx="4"/>
-          </p:nvPr>
-        </p:nvSpPr>
-        <p:spPr/>
-        <p:txBody>
-          <a:bodyPr wrap="square"/>
-          <a:lstStyle/>
-          <a:p>
-            <a:r>
-              <a:t>At the forecast above, the whole build cost less than one month of one AM’s reclaimed hours. The reimbursement is the subscription; the rollout costs each AM an hour of onboarding.</a:t>
-            </a:r>
-          </a:p>
-        </p:txBody>
-      </p:sp>
-      <p:sp>
-        <p:nvSpPr>
-          <p:cNvPr id="8" name="Text Placeholder 7"/>
-          <p:cNvSpPr>
-            <a:spLocks noGrp="1"/>
-          </p:cNvSpPr>
-          <p:nvPr>
-            <p:ph type="body" idx="14"/>
-          </p:nvPr>
-        </p:nvSpPr>
-        <p:spPr/>
-        <p:txBody>
-          <a:bodyPr wrap="square"/>
-          <a:lstStyle/>
-          <a:p>
-            <a:r>
-              <a:t>The build cost less than one month of one AM’s reclaimed hours.</a:t>
-            </a:r>
-          </a:p>
-        </p:txBody>
-      </p:sp>
-    </p:spTree>
-  </p:cSld>
-  <p:clrMapOvr>
-    <a:masterClrMapping/>
-  </p:clrMapOvr>
-</p:sld>
-</file>
-
-<file path=ppt/slides/slide17.xml><?xml version="1.0" encoding="utf-8"?>
-<p:sld xmlns:a="http://schemas.openxmlformats.org/drawingml/2006/main" xmlns:p="http://schemas.openxmlformats.org/presentationml/2006/main" xmlns:r="http://schemas.openxmlformats.org/officeDocument/2006/relationships">
-  <p:cSld>
-    <p:spTree>
-      <p:nvGrpSpPr>
-        <p:cNvPr id="1" name=""/>
-        <p:cNvGrpSpPr/>
-        <p:nvPr/>
-      </p:nvGrpSpPr>
-      <p:grpSpPr/>
-      <p:sp>
-        <p:nvSpPr>
-          <p:cNvPr id="2" name="Text Placeholder 1"/>
-          <p:cNvSpPr>
-            <a:spLocks noGrp="1"/>
-          </p:cNvSpPr>
-          <p:nvPr>
-            <p:ph type="body" idx="11"/>
-          </p:nvPr>
-        </p:nvSpPr>
-        <p:spPr/>
-        <p:txBody>
-          <a:bodyPr wrap="square"/>
-          <a:lstStyle/>
-          <a:p>
-            <a:r>
-              <a:t>Chapter four</a:t>
-            </a:r>
-          </a:p>
-        </p:txBody>
-      </p:sp>
-      <p:sp>
-        <p:nvSpPr>
-          <p:cNvPr id="3" name="Title 2"/>
-          <p:cNvSpPr>
-            <a:spLocks noGrp="1"/>
-          </p:cNvSpPr>
-          <p:nvPr>
-            <p:ph type="title"/>
-          </p:nvPr>
-        </p:nvSpPr>
-        <p:spPr/>
-        <p:txBody>
-          <a:bodyPr wrap="square"/>
-          <a:lstStyle/>
-          <a:p>
-            <a:r>
-              <a:t>What it does for the team</a:t>
-            </a:r>
-          </a:p>
-        </p:txBody>
-      </p:sp>
-      <p:sp>
-        <p:nvSpPr>
-          <p:cNvPr id="4" name="Text Placeholder 3"/>
-          <p:cNvSpPr>
-            <a:spLocks noGrp="1"/>
-          </p:cNvSpPr>
-          <p:nvPr>
-            <p:ph type="body" idx="1"/>
-          </p:nvPr>
-        </p:nvSpPr>
-        <p:spPr/>
-        <p:txBody>
-          <a:bodyPr wrap="square"/>
-          <a:lstStyle/>
-          <a:p>
-            <a:r>
-              <a:t>The screens that give an experienced account manager eleven hours back are the same ones a new account manager is onboarded on.</a:t>
-            </a:r>
-          </a:p>
-        </p:txBody>
-      </p:sp>
-    </p:spTree>
-  </p:cSld>
-  <p:clrMapOvr>
-    <a:masterClrMapping/>
-  </p:clrMapOvr>
-</p:sld>
-</file>
-
 <file path=ppt/slides/slide18.xml><?xml version="1.0" encoding="utf-8"?>
 <p:sld xmlns:a="http://schemas.openxmlformats.org/drawingml/2006/main" xmlns:p="http://schemas.openxmlformats.org/presentationml/2006/main" xmlns:r="http://schemas.openxmlformats.org/officeDocument/2006/relationships">
   <p:cSld>
@@ -13205,7 +13310,7 @@
           <a:lstStyle/>
           <a:p>
             <a:r>
-              <a:t>Three mechanisms, not twenty modules</a:t>
+              <a:t>A year without the FCC, and a year with it</a:t>
             </a:r>
           </a:p>
         </p:txBody>
@@ -13217,16 +13322,16 @@
             <a:spLocks noGrp="1"/>
           </p:cNvSpPr>
           <p:nvPr>
-            <p:ph type="body" idx="13"/>
-          </p:nvPr>
-        </p:nvSpPr>
-        <p:spPr/>
-        <p:txBody>
-          <a:bodyPr wrap="square"/>
-          <a:lstStyle/>
-          <a:p>
-            <a:r>
-              <a:t>Every module does one of three things, and each one takes a judgement out of the account manager’s head.</a:t>
+            <p:ph type="body" idx="11"/>
+          </p:nvPr>
+        </p:nvSpPr>
+        <p:spPr/>
+        <p:txBody>
+          <a:bodyPr wrap="square"/>
+          <a:lstStyle/>
+          <a:p>
+            <a:r>
+              <a:t>Five London AMs, 46 working weeks; the per-AM hours above, multiplied out.</a:t>
             </a:r>
           </a:p>
         </p:txBody>
@@ -13247,8 +13352,7 @@
           <a:lstStyle/>
           <a:p>
             <a:r>
-              <a:rPr sz="1880"/>
-              <a:t>The bar is on the screen</a:t>
+              <a:t>3,450 h</a:t>
             </a:r>
           </a:p>
         </p:txBody>
@@ -13269,8 +13373,7 @@
           <a:lstStyle/>
           <a:p>
             <a:r>
-              <a:rPr sz="1410"/>
-              <a:t>What good looks like used to be learned from whoever had been here longest. The content-quality scorecard runs 46 rules across the eight free-text fields, each quoting that attribute’s own Google specification and marked as a requirement or a best practice. The bar is a number with its source attached, so the same feed reads the same whoever opens it.</a:t>
+              <a:t>Wasted a year on fetching and re-keying without the FCC</a:t>
             </a:r>
           </a:p>
         </p:txBody>
@@ -13291,8 +13394,7 @@
           <a:lstStyle/>
           <a:p>
             <a:r>
-              <a:rPr sz="1880"/>
-              <a:t>The next move is offered</a:t>
+              <a:t>2,530 h</a:t>
             </a:r>
           </a:p>
         </p:txBody>
@@ -13313,8 +13415,7 @@
           <a:lstStyle/>
           <a:p>
             <a:r>
-              <a:rPr sz="1410"/>
-              <a:t>Knowing what to do next used to be experience. Every brand ranks up to five next moves from nine deterministic rules — critical guard alerts first, then overdue tasks, the weakest feed audit, keyword saturation — and each one opens the module already filtered to what it just counted. The Playbook adds the plays peer accounts run that this one carries nothing of.</a:t>
+              <a:t>Saved a year with it — 316 AM-days back for client work</a:t>
             </a:r>
           </a:p>
         </p:txBody>
@@ -13335,7 +13436,7 @@
           <a:lstStyle/>
           <a:p>
             <a:r>
-              <a:t>The format is provided</a:t>
+              <a:t>£185k</a:t>
             </a:r>
           </a:p>
         </p:txBody>
@@ -13356,8 +13457,7 @@
           <a:lstStyle/>
           <a:p>
             <a:r>
-              <a:rPr sz="1500"/>
-              <a:t>A brief used to be as good as the person writing it. The Briefing Studio scores the six things ASPL would otherwise come back and ask — market, cohort, success measure, definition of done, assets, due date — and embeds the tracking tokens itself. Quotes export the finance workbook; decks build on the approved template.</a:t>
+              <a:t>Billable capacity released at the £73.125 ratecard hour</a:t>
             </a:r>
           </a:p>
         </p:txBody>
@@ -13378,7 +13478,7 @@
           <a:lstStyle/>
           <a:p>
             <a:r>
-              <a:t>The account manager supplies the judgement. The system supplies the standard, the next move and the format.</a:t>
+              <a:t>At half the estimate the case still returns 1,265 hours and £92k a year.</a:t>
             </a:r>
           </a:p>
         </p:txBody>
@@ -13392,6 +13492,789 @@
 </file>
 
 <file path=ppt/slides/slide19.xml><?xml version="1.0" encoding="utf-8"?>
+<p:sld xmlns:a="http://schemas.openxmlformats.org/drawingml/2006/main" xmlns:p="http://schemas.openxmlformats.org/presentationml/2006/main" xmlns:r="http://schemas.openxmlformats.org/officeDocument/2006/relationships">
+  <p:cSld>
+    <p:spTree>
+      <p:nvGrpSpPr>
+        <p:cNvPr id="1" name=""/>
+        <p:cNvGrpSpPr/>
+        <p:nvPr/>
+      </p:nvGrpSpPr>
+      <p:grpSpPr/>
+      <p:sp>
+        <p:nvSpPr>
+          <p:cNvPr id="2" name="Title 1"/>
+          <p:cNvSpPr>
+            <a:spLocks noGrp="1"/>
+          </p:cNvSpPr>
+          <p:nvPr>
+            <p:ph type="title"/>
+          </p:nvPr>
+        </p:nvSpPr>
+        <p:spPr/>
+        <p:txBody>
+          <a:bodyPr wrap="square"/>
+          <a:lstStyle/>
+          <a:p>
+            <a:r>
+              <a:t>What the hours model cannot count</a:t>
+            </a:r>
+          </a:p>
+        </p:txBody>
+      </p:sp>
+      <p:sp>
+        <p:nvSpPr>
+          <p:cNvPr id="3" name="Text Placeholder 2"/>
+          <p:cNvSpPr>
+            <a:spLocks noGrp="1"/>
+          </p:cNvSpPr>
+          <p:nvPr>
+            <p:ph type="body" idx="13"/>
+          </p:nvPr>
+        </p:nvSpPr>
+        <p:spPr/>
+        <p:txBody>
+          <a:bodyPr wrap="square"/>
+          <a:lstStyle/>
+          <a:p>
+            <a:r>
+              <a:t>The saved hours are the smaller half of the case; the larger half is what stops happening.</a:t>
+            </a:r>
+          </a:p>
+        </p:txBody>
+      </p:sp>
+      <p:sp>
+        <p:nvSpPr>
+          <p:cNvPr id="4" name="Text Placeholder 3"/>
+          <p:cNvSpPr>
+            <a:spLocks noGrp="1"/>
+          </p:cNvSpPr>
+          <p:nvPr>
+            <p:ph type="body" idx="1"/>
+          </p:nvPr>
+        </p:nvSpPr>
+        <p:spPr/>
+        <p:txBody>
+          <a:bodyPr wrap="square"/>
+          <a:lstStyle/>
+          <a:p>
+            <a:r>
+              <a:rPr sz="1880"/>
+              <a:t>A break caught in hours</a:t>
+            </a:r>
+          </a:p>
+        </p:txBody>
+      </p:sp>
+      <p:sp>
+        <p:nvSpPr>
+          <p:cNvPr id="5" name="Text Placeholder 4"/>
+          <p:cNvSpPr>
+            <a:spLocks noGrp="1"/>
+          </p:cNvSpPr>
+          <p:nvPr>
+            <p:ph type="body" idx="2"/>
+          </p:nvPr>
+        </p:nvSpPr>
+        <p:spPr/>
+        <p:txBody>
+          <a:bodyPr wrap="square"/>
+          <a:lstStyle/>
+          <a:p>
+            <a:r>
+              <a:t>A custom label or product type that vanishes breaks the Performance Max listing groups built on it. The guards read every feed four times a day against a known-good baseline and draft the client email first.</a:t>
+            </a:r>
+          </a:p>
+        </p:txBody>
+      </p:sp>
+      <p:sp>
+        <p:nvSpPr>
+          <p:cNvPr id="6" name="Text Placeholder 5"/>
+          <p:cNvSpPr>
+            <a:spLocks noGrp="1"/>
+          </p:cNvSpPr>
+          <p:nvPr>
+            <p:ph type="body" idx="3"/>
+          </p:nvPr>
+        </p:nvSpPr>
+        <p:spPr/>
+        <p:txBody>
+          <a:bodyPr wrap="square"/>
+          <a:lstStyle/>
+          <a:p>
+            <a:r>
+              <a:t>Overrun as a decision</a:t>
+            </a:r>
+          </a:p>
+        </p:txBody>
+      </p:sp>
+      <p:sp>
+        <p:nvSpPr>
+          <p:cNvPr id="7" name="Text Placeholder 6"/>
+          <p:cNvSpPr>
+            <a:spLocks noGrp="1"/>
+          </p:cNvSpPr>
+          <p:nvPr>
+            <p:ph type="body" idx="4"/>
+          </p:nvPr>
+        </p:nvSpPr>
+        <p:spPr/>
+        <p:txBody>
+          <a:bodyPr wrap="square"/>
+          <a:lstStyle/>
+          <a:p>
+            <a:r>
+              <a:t>The 378 hours of negative balance now sit on every task and brand, with the team’s own call — carry the account, or hold new work — recorded beside the number. Overrun stops happening by accident.</a:t>
+            </a:r>
+          </a:p>
+        </p:txBody>
+      </p:sp>
+      <p:sp>
+        <p:nvSpPr>
+          <p:cNvPr id="8" name="Text Placeholder 7"/>
+          <p:cNvSpPr>
+            <a:spLocks noGrp="1"/>
+          </p:cNvSpPr>
+          <p:nvPr>
+            <p:ph type="body" idx="5"/>
+          </p:nvPr>
+        </p:nvSpPr>
+        <p:spPr/>
+        <p:txBody>
+          <a:bodyPr wrap="square"/>
+          <a:lstStyle/>
+          <a:p>
+            <a:r>
+              <a:t>Skips seen in time</a:t>
+            </a:r>
+          </a:p>
+        </p:txBody>
+      </p:sp>
+      <p:sp>
+        <p:nvSpPr>
+          <p:cNvPr id="9" name="Text Placeholder 8"/>
+          <p:cNvSpPr>
+            <a:spLocks noGrp="1"/>
+          </p:cNvSpPr>
+          <p:nvPr>
+            <p:ph type="body" idx="6"/>
+          </p:nvPr>
+        </p:nvSpPr>
+        <p:spPr/>
+        <p:txBody>
+          <a:bodyPr wrap="square"/>
+          <a:lstStyle/>
+          <a:p>
+            <a:r>
+              <a:t>2,750 skipped hours went unseen because nobody counted streaks. The Schedule module counts them per task and brand, so a three-month skip becomes a client conversation rather than a churn signal found too late.</a:t>
+            </a:r>
+          </a:p>
+        </p:txBody>
+      </p:sp>
+      <p:sp>
+        <p:nvSpPr>
+          <p:cNvPr id="10" name="Text Placeholder 9"/>
+          <p:cNvSpPr>
+            <a:spLocks noGrp="1"/>
+          </p:cNvSpPr>
+          <p:nvPr>
+            <p:ph type="body" idx="14"/>
+          </p:nvPr>
+        </p:nvSpPr>
+        <p:spPr/>
+        <p:txBody>
+          <a:bodyPr wrap="square"/>
+          <a:lstStyle/>
+          <a:p>
+            <a:r>
+              <a:t>The larger half of the case is what stops happening.</a:t>
+            </a:r>
+          </a:p>
+        </p:txBody>
+      </p:sp>
+    </p:spTree>
+  </p:cSld>
+  <p:clrMapOvr>
+    <a:masterClrMapping/>
+  </p:clrMapOvr>
+</p:sld>
+</file>
+
+<file path=ppt/slides/slide2.xml><?xml version="1.0" encoding="utf-8"?>
+<p:sld xmlns:a="http://schemas.openxmlformats.org/drawingml/2006/main" xmlns:p="http://schemas.openxmlformats.org/presentationml/2006/main" xmlns:r="http://schemas.openxmlformats.org/officeDocument/2006/relationships">
+  <p:cSld>
+    <p:spTree>
+      <p:nvGrpSpPr>
+        <p:cNvPr id="1" name=""/>
+        <p:cNvGrpSpPr/>
+        <p:nvPr/>
+      </p:nvGrpSpPr>
+      <p:grpSpPr/>
+      <p:sp>
+        <p:nvSpPr>
+          <p:cNvPr id="2" name="Title 1"/>
+          <p:cNvSpPr>
+            <a:spLocks noGrp="1"/>
+          </p:cNvSpPr>
+          <p:nvPr>
+            <p:ph type="title"/>
+          </p:nvPr>
+        </p:nvSpPr>
+        <p:spPr/>
+        <p:txBody>
+          <a:bodyPr wrap="square"/>
+          <a:lstStyle/>
+          <a:p>
+            <a:r>
+              <a:t>Five questions, one decision</a:t>
+            </a:r>
+          </a:p>
+        </p:txBody>
+      </p:sp>
+      <p:sp>
+        <p:nvSpPr>
+          <p:cNvPr id="3" name="Text Placeholder 2"/>
+          <p:cNvSpPr>
+            <a:spLocks noGrp="1"/>
+          </p:cNvSpPr>
+          <p:nvPr>
+            <p:ph type="body" idx="11"/>
+          </p:nvPr>
+        </p:nvSpPr>
+        <p:spPr/>
+        <p:txBody>
+          <a:bodyPr wrap="square"/>
+          <a:lstStyle/>
+          <a:p>
+            <a:r>
+              <a:t>The struggle, the solution, the value in hours and pounds, what it does for the team, and where it goes next.</a:t>
+            </a:r>
+          </a:p>
+        </p:txBody>
+      </p:sp>
+      <p:sp>
+        <p:nvSpPr>
+          <p:cNvPr id="4" name="Text Placeholder 3"/>
+          <p:cNvSpPr>
+            <a:spLocks noGrp="1"/>
+          </p:cNvSpPr>
+          <p:nvPr>
+            <p:ph type="body" idx="1"/>
+          </p:nvPr>
+        </p:nvSpPr>
+        <p:spPr/>
+        <p:txBody>
+          <a:bodyPr wrap="square"/>
+          <a:lstStyle/>
+          <a:p>
+            <a:r>
+              <a:t>01  The struggle before — 52 markets · 62 feeds · 13 project plans · one inbox — and no single view</a:t>
+            </a:r>
+          </a:p>
+          <a:p>
+            <a:r>
+              <a:t>02  The solution — 20 modules on the tools the team already uses · built in six weeks · £0 infrastructure</a:t>
+            </a:r>
+          </a:p>
+          <a:p>
+            <a:r>
+              <a:t>03  The benefit — Hours wasted without it, hours saved with it · the risks it removes · what it cost</a:t>
+            </a:r>
+          </a:p>
+        </p:txBody>
+      </p:sp>
+      <p:sp>
+        <p:nvSpPr>
+          <p:cNvPr id="5" name="Text Placeholder 4"/>
+          <p:cNvSpPr>
+            <a:spLocks noGrp="1"/>
+          </p:cNvSpPr>
+          <p:nvPr>
+            <p:ph type="body" idx="2"/>
+          </p:nvPr>
+        </p:nvSpPr>
+        <p:spPr/>
+        <p:txBody>
+          <a:bodyPr wrap="square"/>
+          <a:lstStyle/>
+          <a:p>
+            <a:r>
+              <a:t>04  What it does for the team — Why the process gets faster · a new AM productive in a fortnight · what a team lead gets</a:t>
+            </a:r>
+          </a:p>
+          <a:p>
+            <a:r>
+              <a:t>05  Going forward — A 90-day rollout · the vision for feedback, AM management and the business</a:t>
+            </a:r>
+          </a:p>
+        </p:txBody>
+      </p:sp>
+    </p:spTree>
+  </p:cSld>
+  <p:clrMapOvr>
+    <a:masterClrMapping/>
+  </p:clrMapOvr>
+</p:sld>
+</file>
+
+<file path=ppt/slides/slide20.xml><?xml version="1.0" encoding="utf-8"?>
+<p:sld xmlns:a="http://schemas.openxmlformats.org/drawingml/2006/main" xmlns:p="http://schemas.openxmlformats.org/presentationml/2006/main" xmlns:r="http://schemas.openxmlformats.org/officeDocument/2006/relationships">
+  <p:cSld>
+    <p:spTree>
+      <p:nvGrpSpPr>
+        <p:cNvPr id="1" name=""/>
+        <p:cNvGrpSpPr/>
+        <p:nvPr/>
+      </p:nvGrpSpPr>
+      <p:grpSpPr/>
+      <p:sp>
+        <p:nvSpPr>
+          <p:cNvPr id="2" name="Title 1"/>
+          <p:cNvSpPr>
+            <a:spLocks noGrp="1"/>
+          </p:cNvSpPr>
+          <p:nvPr>
+            <p:ph type="title"/>
+          </p:nvPr>
+        </p:nvSpPr>
+        <p:spPr/>
+        <p:txBody>
+          <a:bodyPr wrap="square"/>
+          <a:lstStyle/>
+          <a:p>
+            <a:r>
+              <a:t>What it cost, and what it returns</a:t>
+            </a:r>
+          </a:p>
+        </p:txBody>
+      </p:sp>
+      <p:sp>
+        <p:nvSpPr>
+          <p:cNvPr id="3" name="Text Placeholder 2"/>
+          <p:cNvSpPr>
+            <a:spLocks noGrp="1"/>
+          </p:cNvSpPr>
+          <p:nvPr>
+            <p:ph type="body" idx="13"/>
+          </p:nvPr>
+        </p:nvSpPr>
+        <p:spPr/>
+        <p:txBody>
+          <a:bodyPr wrap="square"/>
+          <a:lstStyle/>
+          <a:p>
+            <a:r>
+              <a:t>One subscription and no infrastructure, against a year of reclaimed hours.</a:t>
+            </a:r>
+          </a:p>
+        </p:txBody>
+      </p:sp>
+      <p:sp>
+        <p:nvSpPr>
+          <p:cNvPr id="4" name="Text Placeholder 3"/>
+          <p:cNvSpPr>
+            <a:spLocks noGrp="1"/>
+          </p:cNvSpPr>
+          <p:nvPr>
+            <p:ph type="body" idx="1"/>
+          </p:nvPr>
+        </p:nvSpPr>
+        <p:spPr/>
+        <p:txBody>
+          <a:bodyPr wrap="square"/>
+          <a:lstStyle/>
+          <a:p>
+            <a:r>
+              <a:t>What it cost to build</a:t>
+            </a:r>
+          </a:p>
+        </p:txBody>
+      </p:sp>
+      <p:sp>
+        <p:nvSpPr>
+          <p:cNvPr id="5" name="Text Placeholder 4"/>
+          <p:cNvSpPr>
+            <a:spLocks noGrp="1"/>
+          </p:cNvSpPr>
+          <p:nvPr>
+            <p:ph type="body" idx="2"/>
+          </p:nvPr>
+        </p:nvSpPr>
+        <p:spPr/>
+        <p:txBody>
+          <a:bodyPr wrap="square"/>
+          <a:lstStyle/>
+          <a:p>
+            <a:r>
+              <a:t>Two months of one Claude Code subscription and £0 of infrastructure — Cloudflare Workers, KV and Access on the free tier, GitHub for the code. No licences, no vendor, no implementation partner.</a:t>
+            </a:r>
+          </a:p>
+        </p:txBody>
+      </p:sp>
+      <p:sp>
+        <p:nvSpPr>
+          <p:cNvPr id="6" name="Text Placeholder 5"/>
+          <p:cNvSpPr>
+            <a:spLocks noGrp="1"/>
+          </p:cNvSpPr>
+          <p:nvPr>
+            <p:ph type="body" idx="3"/>
+          </p:nvPr>
+        </p:nvSpPr>
+        <p:spPr/>
+        <p:txBody>
+          <a:bodyPr wrap="square"/>
+          <a:lstStyle/>
+          <a:p>
+            <a:r>
+              <a:t>What it returns</a:t>
+            </a:r>
+          </a:p>
+        </p:txBody>
+      </p:sp>
+      <p:sp>
+        <p:nvSpPr>
+          <p:cNvPr id="7" name="Text Placeholder 6"/>
+          <p:cNvSpPr>
+            <a:spLocks noGrp="1"/>
+          </p:cNvSpPr>
+          <p:nvPr>
+            <p:ph type="body" idx="4"/>
+          </p:nvPr>
+        </p:nvSpPr>
+        <p:spPr/>
+        <p:txBody>
+          <a:bodyPr wrap="square"/>
+          <a:lstStyle/>
+          <a:p>
+            <a:r>
+              <a:t>At the forecast above, the whole build cost less than one month of one AM’s reclaimed hours. The reimbursement is the subscription; the rollout costs each AM an hour of onboarding.</a:t>
+            </a:r>
+          </a:p>
+        </p:txBody>
+      </p:sp>
+      <p:sp>
+        <p:nvSpPr>
+          <p:cNvPr id="8" name="Text Placeholder 7"/>
+          <p:cNvSpPr>
+            <a:spLocks noGrp="1"/>
+          </p:cNvSpPr>
+          <p:nvPr>
+            <p:ph type="body" idx="14"/>
+          </p:nvPr>
+        </p:nvSpPr>
+        <p:spPr/>
+        <p:txBody>
+          <a:bodyPr wrap="square"/>
+          <a:lstStyle/>
+          <a:p>
+            <a:r>
+              <a:t>The build cost less than one month of one AM’s reclaimed hours.</a:t>
+            </a:r>
+          </a:p>
+        </p:txBody>
+      </p:sp>
+    </p:spTree>
+  </p:cSld>
+  <p:clrMapOvr>
+    <a:masterClrMapping/>
+  </p:clrMapOvr>
+</p:sld>
+</file>
+
+<file path=ppt/slides/slide21.xml><?xml version="1.0" encoding="utf-8"?>
+<p:sld xmlns:a="http://schemas.openxmlformats.org/drawingml/2006/main" xmlns:p="http://schemas.openxmlformats.org/presentationml/2006/main" xmlns:r="http://schemas.openxmlformats.org/officeDocument/2006/relationships">
+  <p:cSld>
+    <p:spTree>
+      <p:nvGrpSpPr>
+        <p:cNvPr id="1" name=""/>
+        <p:cNvGrpSpPr/>
+        <p:nvPr/>
+      </p:nvGrpSpPr>
+      <p:grpSpPr/>
+      <p:sp>
+        <p:nvSpPr>
+          <p:cNvPr id="2" name="Text Placeholder 1"/>
+          <p:cNvSpPr>
+            <a:spLocks noGrp="1"/>
+          </p:cNvSpPr>
+          <p:nvPr>
+            <p:ph type="body" idx="11"/>
+          </p:nvPr>
+        </p:nvSpPr>
+        <p:spPr/>
+        <p:txBody>
+          <a:bodyPr wrap="square"/>
+          <a:lstStyle/>
+          <a:p>
+            <a:r>
+              <a:t>Chapter four</a:t>
+            </a:r>
+          </a:p>
+        </p:txBody>
+      </p:sp>
+      <p:sp>
+        <p:nvSpPr>
+          <p:cNvPr id="3" name="Title 2"/>
+          <p:cNvSpPr>
+            <a:spLocks noGrp="1"/>
+          </p:cNvSpPr>
+          <p:nvPr>
+            <p:ph type="title"/>
+          </p:nvPr>
+        </p:nvSpPr>
+        <p:spPr/>
+        <p:txBody>
+          <a:bodyPr wrap="square"/>
+          <a:lstStyle/>
+          <a:p>
+            <a:r>
+              <a:t>What it does for the team</a:t>
+            </a:r>
+          </a:p>
+        </p:txBody>
+      </p:sp>
+      <p:sp>
+        <p:nvSpPr>
+          <p:cNvPr id="4" name="Text Placeholder 3"/>
+          <p:cNvSpPr>
+            <a:spLocks noGrp="1"/>
+          </p:cNvSpPr>
+          <p:nvPr>
+            <p:ph type="body" idx="1"/>
+          </p:nvPr>
+        </p:nvSpPr>
+        <p:spPr/>
+        <p:txBody>
+          <a:bodyPr wrap="square"/>
+          <a:lstStyle/>
+          <a:p>
+            <a:r>
+              <a:t>The screens that give an experienced account manager eleven hours back are the same ones a new account manager is onboarded on.</a:t>
+            </a:r>
+          </a:p>
+        </p:txBody>
+      </p:sp>
+    </p:spTree>
+  </p:cSld>
+  <p:clrMapOvr>
+    <a:masterClrMapping/>
+  </p:clrMapOvr>
+</p:sld>
+</file>
+
+<file path=ppt/slides/slide22.xml><?xml version="1.0" encoding="utf-8"?>
+<p:sld xmlns:a="http://schemas.openxmlformats.org/drawingml/2006/main" xmlns:p="http://schemas.openxmlformats.org/presentationml/2006/main" xmlns:r="http://schemas.openxmlformats.org/officeDocument/2006/relationships">
+  <p:cSld>
+    <p:spTree>
+      <p:nvGrpSpPr>
+        <p:cNvPr id="1" name=""/>
+        <p:cNvGrpSpPr/>
+        <p:nvPr/>
+      </p:nvGrpSpPr>
+      <p:grpSpPr/>
+      <p:sp>
+        <p:nvSpPr>
+          <p:cNvPr id="2" name="Title 1"/>
+          <p:cNvSpPr>
+            <a:spLocks noGrp="1"/>
+          </p:cNvSpPr>
+          <p:nvPr>
+            <p:ph type="title"/>
+          </p:nvPr>
+        </p:nvSpPr>
+        <p:spPr/>
+        <p:txBody>
+          <a:bodyPr wrap="square"/>
+          <a:lstStyle/>
+          <a:p>
+            <a:r>
+              <a:t>Three mechanisms, not twenty modules</a:t>
+            </a:r>
+          </a:p>
+        </p:txBody>
+      </p:sp>
+      <p:sp>
+        <p:nvSpPr>
+          <p:cNvPr id="3" name="Text Placeholder 2"/>
+          <p:cNvSpPr>
+            <a:spLocks noGrp="1"/>
+          </p:cNvSpPr>
+          <p:nvPr>
+            <p:ph type="body" idx="13"/>
+          </p:nvPr>
+        </p:nvSpPr>
+        <p:spPr/>
+        <p:txBody>
+          <a:bodyPr wrap="square"/>
+          <a:lstStyle/>
+          <a:p>
+            <a:r>
+              <a:t>Every module does one of three things, and each one takes a judgement out of the account manager’s head.</a:t>
+            </a:r>
+          </a:p>
+        </p:txBody>
+      </p:sp>
+      <p:sp>
+        <p:nvSpPr>
+          <p:cNvPr id="4" name="Text Placeholder 3"/>
+          <p:cNvSpPr>
+            <a:spLocks noGrp="1"/>
+          </p:cNvSpPr>
+          <p:nvPr>
+            <p:ph type="body" idx="1"/>
+          </p:nvPr>
+        </p:nvSpPr>
+        <p:spPr/>
+        <p:txBody>
+          <a:bodyPr wrap="square"/>
+          <a:lstStyle/>
+          <a:p>
+            <a:r>
+              <a:rPr sz="1880"/>
+              <a:t>The bar is on the screen</a:t>
+            </a:r>
+          </a:p>
+        </p:txBody>
+      </p:sp>
+      <p:sp>
+        <p:nvSpPr>
+          <p:cNvPr id="5" name="Text Placeholder 4"/>
+          <p:cNvSpPr>
+            <a:spLocks noGrp="1"/>
+          </p:cNvSpPr>
+          <p:nvPr>
+            <p:ph type="body" idx="2"/>
+          </p:nvPr>
+        </p:nvSpPr>
+        <p:spPr/>
+        <p:txBody>
+          <a:bodyPr wrap="square"/>
+          <a:lstStyle/>
+          <a:p>
+            <a:r>
+              <a:rPr sz="1410"/>
+              <a:t>What good looks like used to be learned from whoever had been here longest. The content-quality scorecard runs 46 rules across the eight free-text fields, each quoting that attribute’s own Google specification and marked as a requirement or a best practice. The bar is a number with its source attached, so the same feed reads the same whoever opens it.</a:t>
+            </a:r>
+          </a:p>
+        </p:txBody>
+      </p:sp>
+      <p:sp>
+        <p:nvSpPr>
+          <p:cNvPr id="6" name="Text Placeholder 5"/>
+          <p:cNvSpPr>
+            <a:spLocks noGrp="1"/>
+          </p:cNvSpPr>
+          <p:nvPr>
+            <p:ph type="body" idx="3"/>
+          </p:nvPr>
+        </p:nvSpPr>
+        <p:spPr/>
+        <p:txBody>
+          <a:bodyPr wrap="square"/>
+          <a:lstStyle/>
+          <a:p>
+            <a:r>
+              <a:rPr sz="1880"/>
+              <a:t>The next move is offered</a:t>
+            </a:r>
+          </a:p>
+        </p:txBody>
+      </p:sp>
+      <p:sp>
+        <p:nvSpPr>
+          <p:cNvPr id="7" name="Text Placeholder 6"/>
+          <p:cNvSpPr>
+            <a:spLocks noGrp="1"/>
+          </p:cNvSpPr>
+          <p:nvPr>
+            <p:ph type="body" idx="4"/>
+          </p:nvPr>
+        </p:nvSpPr>
+        <p:spPr/>
+        <p:txBody>
+          <a:bodyPr wrap="square"/>
+          <a:lstStyle/>
+          <a:p>
+            <a:r>
+              <a:rPr sz="1410"/>
+              <a:t>Knowing what to do next used to be experience. Every brand ranks up to five next moves from nine deterministic rules — critical guard alerts first, then overdue tasks, the weakest feed audit, keyword saturation — and each one opens the module already filtered to what it just counted. The Playbook adds the plays peer accounts run that this one carries nothing of.</a:t>
+            </a:r>
+          </a:p>
+        </p:txBody>
+      </p:sp>
+      <p:sp>
+        <p:nvSpPr>
+          <p:cNvPr id="8" name="Text Placeholder 7"/>
+          <p:cNvSpPr>
+            <a:spLocks noGrp="1"/>
+          </p:cNvSpPr>
+          <p:nvPr>
+            <p:ph type="body" idx="5"/>
+          </p:nvPr>
+        </p:nvSpPr>
+        <p:spPr/>
+        <p:txBody>
+          <a:bodyPr wrap="square"/>
+          <a:lstStyle/>
+          <a:p>
+            <a:r>
+              <a:t>The format is provided</a:t>
+            </a:r>
+          </a:p>
+        </p:txBody>
+      </p:sp>
+      <p:sp>
+        <p:nvSpPr>
+          <p:cNvPr id="9" name="Text Placeholder 8"/>
+          <p:cNvSpPr>
+            <a:spLocks noGrp="1"/>
+          </p:cNvSpPr>
+          <p:nvPr>
+            <p:ph type="body" idx="6"/>
+          </p:nvPr>
+        </p:nvSpPr>
+        <p:spPr/>
+        <p:txBody>
+          <a:bodyPr wrap="square"/>
+          <a:lstStyle/>
+          <a:p>
+            <a:r>
+              <a:rPr sz="1500"/>
+              <a:t>A brief used to be as good as the person writing it. The Briefing Studio scores the six things ASPL would otherwise come back and ask — market, cohort, success measure, definition of done, assets, due date — and embeds the tracking tokens itself. Quotes export the finance workbook; decks build on the approved template.</a:t>
+            </a:r>
+          </a:p>
+        </p:txBody>
+      </p:sp>
+      <p:sp>
+        <p:nvSpPr>
+          <p:cNvPr id="10" name="Text Placeholder 9"/>
+          <p:cNvSpPr>
+            <a:spLocks noGrp="1"/>
+          </p:cNvSpPr>
+          <p:nvPr>
+            <p:ph type="body" idx="14"/>
+          </p:nvPr>
+        </p:nvSpPr>
+        <p:spPr/>
+        <p:txBody>
+          <a:bodyPr wrap="square"/>
+          <a:lstStyle/>
+          <a:p>
+            <a:r>
+              <a:t>The account manager supplies the judgement. The system supplies the standard, the next move and the format.</a:t>
+            </a:r>
+          </a:p>
+        </p:txBody>
+      </p:sp>
+    </p:spTree>
+  </p:cSld>
+  <p:clrMapOvr>
+    <a:masterClrMapping/>
+  </p:clrMapOvr>
+</p:sld>
+</file>
+
+<file path=ppt/slides/slide23.xml><?xml version="1.0" encoding="utf-8"?>
 <p:sld xmlns:a="http://schemas.openxmlformats.org/drawingml/2006/main" xmlns:p="http://schemas.openxmlformats.org/presentationml/2006/main" xmlns:r="http://schemas.openxmlformats.org/officeDocument/2006/relationships">
   <p:cSld>
     <p:spTree>
@@ -13880,808 +14763,6 @@
 </p:sld>
 </file>
 
-<file path=ppt/slides/slide2.xml><?xml version="1.0" encoding="utf-8"?>
-<p:sld xmlns:a="http://schemas.openxmlformats.org/drawingml/2006/main" xmlns:p="http://schemas.openxmlformats.org/presentationml/2006/main" xmlns:r="http://schemas.openxmlformats.org/officeDocument/2006/relationships">
-  <p:cSld>
-    <p:spTree>
-      <p:nvGrpSpPr>
-        <p:cNvPr id="1" name=""/>
-        <p:cNvGrpSpPr/>
-        <p:nvPr/>
-      </p:nvGrpSpPr>
-      <p:grpSpPr/>
-      <p:sp>
-        <p:nvSpPr>
-          <p:cNvPr id="2" name="Title 1"/>
-          <p:cNvSpPr>
-            <a:spLocks noGrp="1"/>
-          </p:cNvSpPr>
-          <p:nvPr>
-            <p:ph type="title"/>
-          </p:nvPr>
-        </p:nvSpPr>
-        <p:spPr/>
-        <p:txBody>
-          <a:bodyPr wrap="square"/>
-          <a:lstStyle/>
-          <a:p>
-            <a:r>
-              <a:t>Five questions, one decision</a:t>
-            </a:r>
-          </a:p>
-        </p:txBody>
-      </p:sp>
-      <p:sp>
-        <p:nvSpPr>
-          <p:cNvPr id="3" name="Text Placeholder 2"/>
-          <p:cNvSpPr>
-            <a:spLocks noGrp="1"/>
-          </p:cNvSpPr>
-          <p:nvPr>
-            <p:ph type="body" idx="11"/>
-          </p:nvPr>
-        </p:nvSpPr>
-        <p:spPr/>
-        <p:txBody>
-          <a:bodyPr wrap="square"/>
-          <a:lstStyle/>
-          <a:p>
-            <a:r>
-              <a:t>The struggle, the solution, the value in hours and pounds, what it does for the team, and where it goes next.</a:t>
-            </a:r>
-          </a:p>
-        </p:txBody>
-      </p:sp>
-      <p:sp>
-        <p:nvSpPr>
-          <p:cNvPr id="4" name="Text Placeholder 3"/>
-          <p:cNvSpPr>
-            <a:spLocks noGrp="1"/>
-          </p:cNvSpPr>
-          <p:nvPr>
-            <p:ph type="body" idx="1"/>
-          </p:nvPr>
-        </p:nvSpPr>
-        <p:spPr/>
-        <p:txBody>
-          <a:bodyPr wrap="square"/>
-          <a:lstStyle/>
-          <a:p>
-            <a:r>
-              <a:t>01  The struggle before — 52 markets · 62 feeds · 13 project plans · one inbox — and no single view</a:t>
-            </a:r>
-          </a:p>
-          <a:p>
-            <a:r>
-              <a:t>02  The solution — 20 modules on the tools the team already uses · built in six weeks · £0 infrastructure</a:t>
-            </a:r>
-          </a:p>
-          <a:p>
-            <a:r>
-              <a:t>03  The benefit — Hours wasted without it, hours saved with it · the risks it removes · what it cost</a:t>
-            </a:r>
-          </a:p>
-        </p:txBody>
-      </p:sp>
-      <p:sp>
-        <p:nvSpPr>
-          <p:cNvPr id="5" name="Text Placeholder 4"/>
-          <p:cNvSpPr>
-            <a:spLocks noGrp="1"/>
-          </p:cNvSpPr>
-          <p:nvPr>
-            <p:ph type="body" idx="2"/>
-          </p:nvPr>
-        </p:nvSpPr>
-        <p:spPr/>
-        <p:txBody>
-          <a:bodyPr wrap="square"/>
-          <a:lstStyle/>
-          <a:p>
-            <a:r>
-              <a:t>04  What it does for the team — Why the process gets faster · a new AM productive in a fortnight · what a team lead gets</a:t>
-            </a:r>
-          </a:p>
-          <a:p>
-            <a:r>
-              <a:t>05  Going forward — A 90-day rollout · the vision for feedback, AM management and the business</a:t>
-            </a:r>
-          </a:p>
-        </p:txBody>
-      </p:sp>
-    </p:spTree>
-  </p:cSld>
-  <p:clrMapOvr>
-    <a:masterClrMapping/>
-  </p:clrMapOvr>
-</p:sld>
-</file>
-
-<file path=ppt/slides/slide20.xml><?xml version="1.0" encoding="utf-8"?>
-<p:sld xmlns:a="http://schemas.openxmlformats.org/drawingml/2006/main" xmlns:p="http://schemas.openxmlformats.org/presentationml/2006/main" xmlns:r="http://schemas.openxmlformats.org/officeDocument/2006/relationships">
-  <p:cSld>
-    <p:spTree>
-      <p:nvGrpSpPr>
-        <p:cNvPr id="1" name=""/>
-        <p:cNvGrpSpPr/>
-        <p:nvPr/>
-      </p:nvGrpSpPr>
-      <p:grpSpPr/>
-      <p:sp>
-        <p:nvSpPr>
-          <p:cNvPr id="2" name="Title 1"/>
-          <p:cNvSpPr>
-            <a:spLocks noGrp="1"/>
-          </p:cNvSpPr>
-          <p:nvPr>
-            <p:ph type="title"/>
-          </p:nvPr>
-        </p:nvSpPr>
-        <p:spPr/>
-        <p:txBody>
-          <a:bodyPr wrap="square"/>
-          <a:lstStyle/>
-          <a:p>
-            <a:r>
-              <a:t>From invite to owning the account</a:t>
-            </a:r>
-          </a:p>
-        </p:txBody>
-      </p:sp>
-      <p:sp>
-        <p:nvSpPr>
-          <p:cNvPr id="3" name="Text Placeholder 2"/>
-          <p:cNvSpPr>
-            <a:spLocks noGrp="1"/>
-          </p:cNvSpPr>
-          <p:nvPr>
-            <p:ph type="body" idx="11"/>
-          </p:nvPr>
-        </p:nvSpPr>
-        <p:spPr/>
-        <p:txBody>
-          <a:bodyPr wrap="square"/>
-          <a:lstStyle/>
-          <a:p>
-            <a:r>
-              <a:t>A new account manager is useful before they have met every client, because the account is readable.</a:t>
-            </a:r>
-          </a:p>
-        </p:txBody>
-      </p:sp>
-      <p:sp>
-        <p:nvSpPr>
-          <p:cNvPr id="4" name="Text Placeholder 3"/>
-          <p:cNvSpPr>
-            <a:spLocks noGrp="1"/>
-          </p:cNvSpPr>
-          <p:nvPr>
-            <p:ph type="body" idx="1"/>
-          </p:nvPr>
-        </p:nvSpPr>
-        <p:spPr/>
-        <p:txBody>
-          <a:bodyPr wrap="square"/>
-          <a:lstStyle/>
-          <a:p>
-            <a:r>
-              <a:t>1</a:t>
-            </a:r>
-          </a:p>
-        </p:txBody>
-      </p:sp>
-      <p:sp>
-        <p:nvSpPr>
-          <p:cNvPr id="5" name="Text Placeholder 4"/>
-          <p:cNvSpPr>
-            <a:spLocks noGrp="1"/>
-          </p:cNvSpPr>
-          <p:nvPr>
-            <p:ph type="body" idx="2"/>
-          </p:nvPr>
-        </p:nvSpPr>
-        <p:spPr/>
-        <p:txBody>
-          <a:bodyPr wrap="square"/>
-          <a:lstStyle/>
-          <a:p>
-            <a:r>
-              <a:rPr sz="1689"/>
-              <a:t>The whole book, without asking</a:t>
-            </a:r>
-          </a:p>
-        </p:txBody>
-      </p:sp>
-      <p:sp>
-        <p:nvSpPr>
-          <p:cNvPr id="6" name="Text Placeholder 5"/>
-          <p:cNvSpPr>
-            <a:spLocks noGrp="1"/>
-          </p:cNvSpPr>
-          <p:nvPr>
-            <p:ph type="body" idx="3"/>
-          </p:nvPr>
-        </p:nvSpPr>
-        <p:spPr/>
-        <p:txBody>
-          <a:bodyPr wrap="square"/>
-          <a:lstStyle/>
-          <a:p>
-            <a:r>
-              <a:t>Day one</a:t>
-            </a:r>
-          </a:p>
-          <a:p>
-            <a:r>
-              <a:t>One invite, scoped to their clients</a:t>
-            </a:r>
-          </a:p>
-          <a:p>
-            <a:r>
-              <a:t>The dossier: plan, feeds, hours</a:t>
-            </a:r>
-          </a:p>
-          <a:p>
-            <a:r>
-              <a:t>Feed Chat answers in plain English</a:t>
-            </a:r>
-          </a:p>
-          <a:p>
-            <a:r>
-              <a:t>Nothing to install; reads on a phone</a:t>
-            </a:r>
-          </a:p>
-        </p:txBody>
-      </p:sp>
-      <p:sp>
-        <p:nvSpPr>
-          <p:cNvPr id="7" name="Text Placeholder 6"/>
-          <p:cNvSpPr>
-            <a:spLocks noGrp="1"/>
-          </p:cNvSpPr>
-          <p:nvPr>
-            <p:ph type="body" idx="4"/>
-          </p:nvPr>
-        </p:nvSpPr>
-        <p:spPr/>
-        <p:txBody>
-          <a:bodyPr wrap="square"/>
-          <a:lstStyle/>
-          <a:p>
-            <a:r>
-              <a:t>2</a:t>
-            </a:r>
-          </a:p>
-        </p:txBody>
-      </p:sp>
-      <p:sp>
-        <p:nvSpPr>
-          <p:cNvPr id="8" name="Text Placeholder 7"/>
-          <p:cNvSpPr>
-            <a:spLocks noGrp="1"/>
-          </p:cNvSpPr>
-          <p:nvPr>
-            <p:ph type="body" idx="5"/>
-          </p:nvPr>
-        </p:nvSpPr>
-        <p:spPr/>
-        <p:txBody>
-          <a:bodyPr wrap="square"/>
-          <a:lstStyle/>
-          <a:p>
-            <a:r>
-              <a:t>Real work, with the rails on</a:t>
-            </a:r>
-          </a:p>
-        </p:txBody>
-      </p:sp>
-      <p:sp>
-        <p:nvSpPr>
-          <p:cNvPr id="9" name="Text Placeholder 8"/>
-          <p:cNvSpPr>
-            <a:spLocks noGrp="1"/>
-          </p:cNvSpPr>
-          <p:nvPr>
-            <p:ph type="body" idx="6"/>
-          </p:nvPr>
-        </p:nvSpPr>
-        <p:spPr/>
-        <p:txBody>
-          <a:bodyPr wrap="square"/>
-          <a:lstStyle/>
-          <a:p>
-            <a:r>
-              <a:t>Week one</a:t>
-            </a:r>
-          </a:p>
-          <a:p>
-            <a:r>
-              <a:t>First brief scored before it sends</a:t>
-            </a:r>
-          </a:p>
-          <a:p>
-            <a:r>
-              <a:t>A guard alert, email already drafted</a:t>
-            </a:r>
-          </a:p>
-          <a:p>
-            <a:r>
-              <a:t>Go or skip, with the balance in view</a:t>
-            </a:r>
-          </a:p>
-          <a:p>
-            <a:r>
-              <a:t>Every action logged and reviewable</a:t>
-            </a:r>
-          </a:p>
-        </p:txBody>
-      </p:sp>
-      <p:sp>
-        <p:nvSpPr>
-          <p:cNvPr id="10" name="Text Placeholder 9"/>
-          <p:cNvSpPr>
-            <a:spLocks noGrp="1"/>
-          </p:cNvSpPr>
-          <p:nvPr>
-            <p:ph type="body" idx="7"/>
-          </p:nvPr>
-        </p:nvSpPr>
-        <p:spPr/>
-        <p:txBody>
-          <a:bodyPr wrap="square"/>
-          <a:lstStyle/>
-          <a:p>
-            <a:r>
-              <a:t>3</a:t>
-            </a:r>
-          </a:p>
-        </p:txBody>
-      </p:sp>
-      <p:sp>
-        <p:nvSpPr>
-          <p:cNvPr id="11" name="Text Placeholder 10"/>
-          <p:cNvSpPr>
-            <a:spLocks noGrp="1"/>
-          </p:cNvSpPr>
-          <p:nvPr>
-            <p:ph type="body" idx="8"/>
-          </p:nvPr>
-        </p:nvSpPr>
-        <p:spPr/>
-        <p:txBody>
-          <a:bodyPr wrap="square"/>
-          <a:lstStyle/>
-          <a:p>
-            <a:r>
-              <a:rPr sz="1580"/>
-              <a:t>Running the account, not shadowing it</a:t>
-            </a:r>
-          </a:p>
-        </p:txBody>
-      </p:sp>
-      <p:sp>
-        <p:nvSpPr>
-          <p:cNvPr id="12" name="Text Placeholder 11"/>
-          <p:cNvSpPr>
-            <a:spLocks noGrp="1"/>
-          </p:cNvSpPr>
-          <p:nvPr>
-            <p:ph type="body" idx="9"/>
-          </p:nvPr>
-        </p:nvSpPr>
-        <p:spPr/>
-        <p:txBody>
-          <a:bodyPr wrap="square"/>
-          <a:lstStyle/>
-          <a:p>
-            <a:r>
-              <a:t>Week two</a:t>
-            </a:r>
-          </a:p>
-          <a:p>
-            <a:r>
-              <a:t>Monday call prepared from Leadership</a:t>
-            </a:r>
-          </a:p>
-          <a:p>
-            <a:r>
-              <a:t>A scorecard exported to the client</a:t>
-            </a:r>
-          </a:p>
-          <a:p>
-            <a:r>
-              <a:t>A quote on the shared rate card</a:t>
-            </a:r>
-          </a:p>
-          <a:p>
-            <a:r>
-              <a:t>Keyword moments scheduled</a:t>
-            </a:r>
-          </a:p>
-        </p:txBody>
-      </p:sp>
-      <p:sp>
-        <p:nvSpPr>
-          <p:cNvPr id="13" name="Text Placeholder 12"/>
-          <p:cNvSpPr>
-            <a:spLocks noGrp="1"/>
-          </p:cNvSpPr>
-          <p:nvPr>
-            <p:ph type="body" idx="14"/>
-          </p:nvPr>
-        </p:nvSpPr>
-        <p:spPr/>
-        <p:txBody>
-          <a:bodyPr wrap="square"/>
-          <a:lstStyle/>
-          <a:p>
-            <a:r>
-              <a:t>The mechanical half of the apprenticeship — where things live and what good looks like — is on the screen from day one.</a:t>
-            </a:r>
-          </a:p>
-        </p:txBody>
-      </p:sp>
-    </p:spTree>
-  </p:cSld>
-  <p:clrMapOvr>
-    <a:masterClrMapping/>
-  </p:clrMapOvr>
-</p:sld>
-</file>
-
-<file path=ppt/slides/slide21.xml><?xml version="1.0" encoding="utf-8"?>
-<p:sld xmlns:a="http://schemas.openxmlformats.org/drawingml/2006/main" xmlns:p="http://schemas.openxmlformats.org/presentationml/2006/main" xmlns:r="http://schemas.openxmlformats.org/officeDocument/2006/relationships">
-  <p:cSld>
-    <p:spTree>
-      <p:nvGrpSpPr>
-        <p:cNvPr id="1" name=""/>
-        <p:cNvGrpSpPr/>
-        <p:nvPr/>
-      </p:nvGrpSpPr>
-      <p:grpSpPr/>
-      <p:sp>
-        <p:nvSpPr>
-          <p:cNvPr id="2" name="Title 1"/>
-          <p:cNvSpPr>
-            <a:spLocks noGrp="1"/>
-          </p:cNvSpPr>
-          <p:nvPr>
-            <p:ph type="title"/>
-          </p:nvPr>
-        </p:nvSpPr>
-        <p:spPr/>
-        <p:txBody>
-          <a:bodyPr wrap="square"/>
-          <a:lstStyle/>
-          <a:p>
-            <a:r>
-              <a:t>What it gives whoever runs the team</a:t>
-            </a:r>
-          </a:p>
-        </p:txBody>
-      </p:sp>
-      <p:sp>
-        <p:nvSpPr>
-          <p:cNvPr id="3" name="Text Placeholder 2"/>
-          <p:cNvSpPr>
-            <a:spLocks noGrp="1"/>
-          </p:cNvSpPr>
-          <p:nvPr>
-            <p:ph type="body" idx="13"/>
-          </p:nvPr>
-        </p:nvSpPr>
-        <p:spPr/>
-        <p:txBody>
-          <a:bodyPr wrap="square"/>
-          <a:lstStyle/>
-          <a:p>
-            <a:r>
-              <a:t>The data that helps an account manager act is the data a team lead needs to coach, balance and hand over.</a:t>
-            </a:r>
-          </a:p>
-        </p:txBody>
-      </p:sp>
-      <p:sp>
-        <p:nvSpPr>
-          <p:cNvPr id="4" name="Text Placeholder 3"/>
-          <p:cNvSpPr>
-            <a:spLocks noGrp="1"/>
-          </p:cNvSpPr>
-          <p:nvPr>
-            <p:ph type="body" idx="1"/>
-          </p:nvPr>
-        </p:nvSpPr>
-        <p:spPr/>
-        <p:txBody>
-          <a:bodyPr wrap="square"/>
-          <a:lstStyle/>
-          <a:p>
-            <a:r>
-              <a:rPr sz="1880"/>
-              <a:t>Coaching on one screen</a:t>
-            </a:r>
-          </a:p>
-        </p:txBody>
-      </p:sp>
-      <p:sp>
-        <p:nvSpPr>
-          <p:cNvPr id="5" name="Text Placeholder 4"/>
-          <p:cNvSpPr>
-            <a:spLocks noGrp="1"/>
-          </p:cNvSpPr>
-          <p:nvPr>
-            <p:ph type="body" idx="2"/>
-          </p:nvPr>
-        </p:nvSpPr>
-        <p:spPr/>
-        <p:txBody>
-          <a:bodyPr wrap="square"/>
-          <a:lstStyle/>
-          <a:p>
-            <a:r>
-              <a:rPr sz="1500"/>
-              <a:t>View-as opens the FCC exactly as a named account manager sees it — their clients, their modules, their alerts — so a one-to-one is a conversation about one screen rather than a described one. The Playbook turns “how is this account doing” into a list of plays that are landing, stalling or absent.</a:t>
-            </a:r>
-          </a:p>
-        </p:txBody>
-      </p:sp>
-      <p:sp>
-        <p:nvSpPr>
-          <p:cNvPr id="6" name="Text Placeholder 5"/>
-          <p:cNvSpPr>
-            <a:spLocks noGrp="1"/>
-          </p:cNvSpPr>
-          <p:nvPr>
-            <p:ph type="body" idx="3"/>
-          </p:nvPr>
-        </p:nvSpPr>
-        <p:spPr/>
-        <p:txBody>
-          <a:bodyPr wrap="square"/>
-          <a:lstStyle/>
-          <a:p>
-            <a:r>
-              <a:rPr sz="1760"/>
-              <a:t>One standard, everywhere</a:t>
-            </a:r>
-          </a:p>
-        </p:txBody>
-      </p:sp>
-      <p:sp>
-        <p:nvSpPr>
-          <p:cNvPr id="7" name="Text Placeholder 6"/>
-          <p:cNvSpPr>
-            <a:spLocks noGrp="1"/>
-          </p:cNvSpPr>
-          <p:nvPr>
-            <p:ph type="body" idx="4"/>
-          </p:nvPr>
-        </p:nvSpPr>
-        <p:spPr/>
-        <p:txBody>
-          <a:bodyPr wrap="square"/>
-          <a:lstStyle/>
-          <a:p>
-            <a:r>
-              <a:t>Every brief is scored against the same six checks, every feed against the same rules, every quote built on the same rate card. The distance between the most experienced account manager and the newest narrows because the floor rises, not because anybody is being watched.</a:t>
-            </a:r>
-          </a:p>
-        </p:txBody>
-      </p:sp>
-      <p:sp>
-        <p:nvSpPr>
-          <p:cNvPr id="8" name="Text Placeholder 7"/>
-          <p:cNvSpPr>
-            <a:spLocks noGrp="1"/>
-          </p:cNvSpPr>
-          <p:nvPr>
-            <p:ph type="body" idx="5"/>
-          </p:nvPr>
-        </p:nvSpPr>
-        <p:spPr/>
-        <p:txBody>
-          <a:bodyPr wrap="square"/>
-          <a:lstStyle/>
-          <a:p>
-            <a:r>
-              <a:rPr sz="1760"/>
-              <a:t>Handover in an afternoon</a:t>
-            </a:r>
-          </a:p>
-        </p:txBody>
-      </p:sp>
-      <p:sp>
-        <p:nvSpPr>
-          <p:cNvPr id="9" name="Text Placeholder 8"/>
-          <p:cNvSpPr>
-            <a:spLocks noGrp="1"/>
-          </p:cNvSpPr>
-          <p:nvPr>
-            <p:ph type="body" idx="6"/>
-          </p:nvPr>
-        </p:nvSpPr>
-        <p:spPr/>
-        <p:txBody>
-          <a:bodyPr wrap="square"/>
-          <a:lstStyle/>
-          <a:p>
-            <a:r>
-              <a:t>The dossier is the live handover document — plan, briefs in flight, feed scores, hours, calendar moments, per brand and current. An account moves between managers without a handover pack, and holiday cover stops being a gap in the client’s week.</a:t>
-            </a:r>
-          </a:p>
-        </p:txBody>
-      </p:sp>
-      <p:sp>
-        <p:nvSpPr>
-          <p:cNvPr id="10" name="Text Placeholder 9"/>
-          <p:cNvSpPr>
-            <a:spLocks noGrp="1"/>
-          </p:cNvSpPr>
-          <p:nvPr>
-            <p:ph type="body" idx="14"/>
-          </p:nvPr>
-        </p:nvSpPr>
-        <p:spPr/>
-        <p:txBody>
-          <a:bodyPr wrap="square"/>
-          <a:lstStyle/>
-          <a:p>
-            <a:r>
-              <a:t>The floor rises. The ceiling is still the account manager.</a:t>
-            </a:r>
-          </a:p>
-        </p:txBody>
-      </p:sp>
-    </p:spTree>
-  </p:cSld>
-  <p:clrMapOvr>
-    <a:masterClrMapping/>
-  </p:clrMapOvr>
-</p:sld>
-</file>
-
-<file path=ppt/slides/slide22.xml><?xml version="1.0" encoding="utf-8"?>
-<p:sld xmlns:a="http://schemas.openxmlformats.org/drawingml/2006/main" xmlns:p="http://schemas.openxmlformats.org/presentationml/2006/main" xmlns:r="http://schemas.openxmlformats.org/officeDocument/2006/relationships">
-  <p:cSld>
-    <p:spTree>
-      <p:nvGrpSpPr>
-        <p:cNvPr id="1" name=""/>
-        <p:cNvGrpSpPr/>
-        <p:nvPr/>
-      </p:nvGrpSpPr>
-      <p:grpSpPr/>
-      <p:sp>
-        <p:nvSpPr>
-          <p:cNvPr id="2" name="Text Placeholder 1"/>
-          <p:cNvSpPr>
-            <a:spLocks noGrp="1"/>
-          </p:cNvSpPr>
-          <p:nvPr>
-            <p:ph type="body" idx="1"/>
-          </p:nvPr>
-        </p:nvSpPr>
-        <p:spPr/>
-        <p:txBody>
-          <a:bodyPr wrap="square"/>
-          <a:lstStyle/>
-          <a:p>
-            <a:r>
-              <a:rPr sz="2620"/>
-              <a:t>It shortens the mechanical half of the apprenticeship — where the data lives, what good looks like, what a brief must contain — and not the relational half: reading a client, holding a hard call, knowing when to push. So every figure states its source and every alert opens to its evidence.</a:t>
-            </a:r>
-          </a:p>
-        </p:txBody>
-      </p:sp>
-      <p:sp>
-        <p:nvSpPr>
-          <p:cNvPr id="3" name="Text Placeholder 2"/>
-          <p:cNvSpPr>
-            <a:spLocks noGrp="1"/>
-          </p:cNvSpPr>
-          <p:nvPr>
-            <p:ph type="body" idx="11"/>
-          </p:nvPr>
-        </p:nvSpPr>
-        <p:spPr/>
-        <p:txBody>
-          <a:bodyPr wrap="square"/>
-          <a:lstStyle/>
-          <a:p>
-            <a:r>
-              <a:t>What it does not do</a:t>
-            </a:r>
-          </a:p>
-        </p:txBody>
-      </p:sp>
-    </p:spTree>
-  </p:cSld>
-  <p:clrMapOvr>
-    <a:masterClrMapping/>
-  </p:clrMapOvr>
-</p:sld>
-</file>
-
-<file path=ppt/slides/slide23.xml><?xml version="1.0" encoding="utf-8"?>
-<p:sld xmlns:a="http://schemas.openxmlformats.org/drawingml/2006/main" xmlns:p="http://schemas.openxmlformats.org/presentationml/2006/main" xmlns:r="http://schemas.openxmlformats.org/officeDocument/2006/relationships">
-  <p:cSld>
-    <p:spTree>
-      <p:nvGrpSpPr>
-        <p:cNvPr id="1" name=""/>
-        <p:cNvGrpSpPr/>
-        <p:nvPr/>
-      </p:nvGrpSpPr>
-      <p:grpSpPr/>
-      <p:sp>
-        <p:nvSpPr>
-          <p:cNvPr id="2" name="Text Placeholder 1"/>
-          <p:cNvSpPr>
-            <a:spLocks noGrp="1"/>
-          </p:cNvSpPr>
-          <p:nvPr>
-            <p:ph type="body" idx="11"/>
-          </p:nvPr>
-        </p:nvSpPr>
-        <p:spPr/>
-        <p:txBody>
-          <a:bodyPr wrap="square"/>
-          <a:lstStyle/>
-          <a:p>
-            <a:r>
-              <a:t>Chapter five</a:t>
-            </a:r>
-          </a:p>
-        </p:txBody>
-      </p:sp>
-      <p:sp>
-        <p:nvSpPr>
-          <p:cNvPr id="3" name="Title 2"/>
-          <p:cNvSpPr>
-            <a:spLocks noGrp="1"/>
-          </p:cNvSpPr>
-          <p:nvPr>
-            <p:ph type="title"/>
-          </p:nvPr>
-        </p:nvSpPr>
-        <p:spPr/>
-        <p:txBody>
-          <a:bodyPr wrap="square"/>
-          <a:lstStyle/>
-          <a:p>
-            <a:r>
-              <a:t>Going forward</a:t>
-            </a:r>
-          </a:p>
-        </p:txBody>
-      </p:sp>
-      <p:sp>
-        <p:nvSpPr>
-          <p:cNvPr id="4" name="Text Placeholder 3"/>
-          <p:cNvSpPr>
-            <a:spLocks noGrp="1"/>
-          </p:cNvSpPr>
-          <p:nvPr>
-            <p:ph type="body" idx="1"/>
-          </p:nvPr>
-        </p:nvSpPr>
-        <p:spPr/>
-        <p:txBody>
-          <a:bodyPr wrap="square"/>
-          <a:lstStyle/>
-          <a:p>
-            <a:r>
-              <a:t>Ninety days to make it the team's way of working, then the platform for feedback, AM management and the business.</a:t>
-            </a:r>
-          </a:p>
-        </p:txBody>
-      </p:sp>
-    </p:spTree>
-  </p:cSld>
-  <p:clrMapOvr>
-    <a:masterClrMapping/>
-  </p:clrMapOvr>
-</p:sld>
-</file>
-
 <file path=ppt/slides/slide24.xml><?xml version="1.0" encoding="utf-8"?>
 <p:sld xmlns:a="http://schemas.openxmlformats.org/drawingml/2006/main" xmlns:p="http://schemas.openxmlformats.org/presentationml/2006/main" xmlns:r="http://schemas.openxmlformats.org/officeDocument/2006/relationships">
   <p:cSld>
@@ -14708,7 +14789,7 @@
           <a:lstStyle/>
           <a:p>
             <a:r>
-              <a:t>Ninety days to the team’s operating system</a:t>
+              <a:t>From invite to owning the account</a:t>
             </a:r>
           </a:p>
         </p:txBody>
@@ -14729,7 +14810,7 @@
           <a:lstStyle/>
           <a:p>
             <a:r>
-              <a:t>Onboarding is an invite and an hour; the plan measures before and after.</a:t>
+              <a:t>A new account manager is useful before they have met every client, because the account is readable.</a:t>
             </a:r>
           </a:p>
         </p:txBody>
@@ -14772,7 +14853,7 @@
           <a:p>
             <a:r>
               <a:rPr sz="1689"/>
-              <a:t>Everyone in, baseline measured</a:t>
+              <a:t>The whole book, without asking</a:t>
             </a:r>
           </a:p>
         </p:txBody>
@@ -14793,27 +14874,27 @@
           <a:lstStyle/>
           <a:p>
             <a:r>
-              <a:t>Days 0–30</a:t>
-            </a:r>
-          </a:p>
-          <a:p>
-            <a:r>
-              <a:t>Access invites, scoped per AM</a:t>
-            </a:r>
-          </a:p>
-          <a:p>
-            <a:r>
-              <a:t>One-hour walkthrough each</a:t>
-            </a:r>
-          </a:p>
-          <a:p>
-            <a:r>
-              <a:t>Gmail push and plans wired</a:t>
-            </a:r>
-          </a:p>
-          <a:p>
-            <a:r>
-              <a:t>One-week diary — the before figure</a:t>
+              <a:t>Day one</a:t>
+            </a:r>
+          </a:p>
+          <a:p>
+            <a:r>
+              <a:t>One invite, scoped to their clients</a:t>
+            </a:r>
+          </a:p>
+          <a:p>
+            <a:r>
+              <a:t>The dossier: plan, feeds, hours</a:t>
+            </a:r>
+          </a:p>
+          <a:p>
+            <a:r>
+              <a:t>Feed Chat answers in plain English</a:t>
+            </a:r>
+          </a:p>
+          <a:p>
+            <a:r>
+              <a:t>Nothing to install; reads on a phone</a:t>
             </a:r>
           </a:p>
         </p:txBody>
@@ -14855,92 +14936,91 @@
           <a:lstStyle/>
           <a:p>
             <a:r>
+              <a:t>Real work, with the rails on</a:t>
+            </a:r>
+          </a:p>
+        </p:txBody>
+      </p:sp>
+      <p:sp>
+        <p:nvSpPr>
+          <p:cNvPr id="9" name="Text Placeholder 8"/>
+          <p:cNvSpPr>
+            <a:spLocks noGrp="1"/>
+          </p:cNvSpPr>
+          <p:nvPr>
+            <p:ph type="body" idx="6"/>
+          </p:nvPr>
+        </p:nvSpPr>
+        <p:spPr/>
+        <p:txBody>
+          <a:bodyPr wrap="square"/>
+          <a:lstStyle/>
+          <a:p>
+            <a:r>
+              <a:t>Week one</a:t>
+            </a:r>
+          </a:p>
+          <a:p>
+            <a:r>
+              <a:t>First brief scored before it sends</a:t>
+            </a:r>
+          </a:p>
+          <a:p>
+            <a:r>
+              <a:t>A guard alert, email already drafted</a:t>
+            </a:r>
+          </a:p>
+          <a:p>
+            <a:r>
+              <a:t>Go or skip, with the balance in view</a:t>
+            </a:r>
+          </a:p>
+          <a:p>
+            <a:r>
+              <a:t>Every action logged and reviewable</a:t>
+            </a:r>
+          </a:p>
+        </p:txBody>
+      </p:sp>
+      <p:sp>
+        <p:nvSpPr>
+          <p:cNvPr id="10" name="Text Placeholder 9"/>
+          <p:cNvSpPr>
+            <a:spLocks noGrp="1"/>
+          </p:cNvSpPr>
+          <p:nvPr>
+            <p:ph type="body" idx="7"/>
+          </p:nvPr>
+        </p:nvSpPr>
+        <p:spPr/>
+        <p:txBody>
+          <a:bodyPr wrap="square"/>
+          <a:lstStyle/>
+          <a:p>
+            <a:r>
+              <a:t>3</a:t>
+            </a:r>
+          </a:p>
+        </p:txBody>
+      </p:sp>
+      <p:sp>
+        <p:nvSpPr>
+          <p:cNvPr id="11" name="Text Placeholder 10"/>
+          <p:cNvSpPr>
+            <a:spLocks noGrp="1"/>
+          </p:cNvSpPr>
+          <p:nvPr>
+            <p:ph type="body" idx="8"/>
+          </p:nvPr>
+        </p:nvSpPr>
+        <p:spPr/>
+        <p:txBody>
+          <a:bodyPr wrap="square"/>
+          <a:lstStyle/>
+          <a:p>
+            <a:r>
               <a:rPr sz="1580"/>
-              <a:t>The FCC is where the work happens</a:t>
-            </a:r>
-          </a:p>
-        </p:txBody>
-      </p:sp>
-      <p:sp>
-        <p:nvSpPr>
-          <p:cNvPr id="9" name="Text Placeholder 8"/>
-          <p:cNvSpPr>
-            <a:spLocks noGrp="1"/>
-          </p:cNvSpPr>
-          <p:nvPr>
-            <p:ph type="body" idx="6"/>
-          </p:nvPr>
-        </p:nvSpPr>
-        <p:spPr/>
-        <p:txBody>
-          <a:bodyPr wrap="square"/>
-          <a:lstStyle/>
-          <a:p>
-            <a:r>
-              <a:t>Days 30–60</a:t>
-            </a:r>
-          </a:p>
-          <a:p>
-            <a:r>
-              <a:t>Every brief from Workflow</a:t>
-            </a:r>
-          </a:p>
-          <a:p>
-            <a:r>
-              <a:t>Every quote and deck generated</a:t>
-            </a:r>
-          </a:p>
-          <a:p>
-            <a:r>
-              <a:t>Monday call off Leadership</a:t>
-            </a:r>
-          </a:p>
-          <a:p>
-            <a:r>
-              <a:t>Go or skip with the balance in view</a:t>
-            </a:r>
-          </a:p>
-        </p:txBody>
-      </p:sp>
-      <p:sp>
-        <p:nvSpPr>
-          <p:cNvPr id="10" name="Text Placeholder 9"/>
-          <p:cNvSpPr>
-            <a:spLocks noGrp="1"/>
-          </p:cNvSpPr>
-          <p:nvPr>
-            <p:ph type="body" idx="7"/>
-          </p:nvPr>
-        </p:nvSpPr>
-        <p:spPr/>
-        <p:txBody>
-          <a:bodyPr wrap="square"/>
-          <a:lstStyle/>
-          <a:p>
-            <a:r>
-              <a:t>3</a:t>
-            </a:r>
-          </a:p>
-        </p:txBody>
-      </p:sp>
-      <p:sp>
-        <p:nvSpPr>
-          <p:cNvPr id="11" name="Text Placeholder 10"/>
-          <p:cNvSpPr>
-            <a:spLocks noGrp="1"/>
-          </p:cNvSpPr>
-          <p:nvPr>
-            <p:ph type="body" idx="8"/>
-          </p:nvPr>
-        </p:nvSpPr>
-        <p:spPr/>
-        <p:txBody>
-          <a:bodyPr wrap="square"/>
-          <a:lstStyle/>
-          <a:p>
-            <a:r>
-              <a:rPr sz="1580"/>
-              <a:t>Measure, report, decide the next team</a:t>
+              <a:t>Running the account, not shadowing it</a:t>
             </a:r>
           </a:p>
         </p:txBody>
@@ -14961,27 +15041,27 @@
           <a:lstStyle/>
           <a:p>
             <a:r>
-              <a:t>Days 60–90</a:t>
-            </a:r>
-          </a:p>
-          <a:p>
-            <a:r>
-              <a:t>Re-run the diary — the after figure</a:t>
-            </a:r>
-          </a:p>
-          <a:p>
-            <a:r>
-              <a:t>Report alerts, turnaround, overrun</a:t>
-            </a:r>
-          </a:p>
-          <a:p>
-            <a:r>
-              <a:t>Agree the budget line</a:t>
-            </a:r>
-          </a:p>
-          <a:p>
-            <a:r>
-              <a:t>Pick the next team to offer it to</a:t>
+              <a:t>Week two</a:t>
+            </a:r>
+          </a:p>
+          <a:p>
+            <a:r>
+              <a:t>Monday call prepared from Leadership</a:t>
+            </a:r>
+          </a:p>
+          <a:p>
+            <a:r>
+              <a:t>A scorecard exported to the client</a:t>
+            </a:r>
+          </a:p>
+          <a:p>
+            <a:r>
+              <a:t>A quote on the shared rate card</a:t>
+            </a:r>
+          </a:p>
+          <a:p>
+            <a:r>
+              <a:t>Keyword moments scheduled</a:t>
             </a:r>
           </a:p>
         </p:txBody>
@@ -15002,8 +15082,7 @@
           <a:lstStyle/>
           <a:p>
             <a:r>
-              <a:rPr sz="1070"/>
-              <a:t>Nothing in the first 30 days needs a developer. The access model, the mobile view and the sync jobs exist; the rollout is invitations, a walkthrough and a diary.</a:t>
+              <a:t>The mechanical half of the apprenticeship — where things live and what good looks like — is on the screen from day one.</a:t>
             </a:r>
           </a:p>
         </p:txBody>
@@ -15042,7 +15121,7 @@
           <a:lstStyle/>
           <a:p>
             <a:r>
-              <a:t>What the FCC becomes next</a:t>
+              <a:t>What it gives whoever runs the team</a:t>
             </a:r>
           </a:p>
         </p:txBody>
@@ -15063,7 +15142,7 @@
           <a:lstStyle/>
           <a:p>
             <a:r>
-              <a:t>It already reads every system the team runs; next it acts on what it reads.</a:t>
+              <a:t>The data that helps an account manager act is the data a team lead needs to coach, balance and hand over.</a:t>
             </a:r>
           </a:p>
         </p:txBody>
@@ -15085,7 +15164,7 @@
           <a:p>
             <a:r>
               <a:rPr sz="1880"/>
-              <a:t>Feedback — client voice</a:t>
+              <a:t>Coaching on one screen</a:t>
             </a:r>
           </a:p>
         </p:txBody>
@@ -15106,7 +15185,8 @@
           <a:lstStyle/>
           <a:p>
             <a:r>
-              <a:t>Sentiment from every client email and call feeding the retention radar; a monthly one-page account report emailed automatically; read-only scorecard links a client can open; a pulse question after each review — churn risk as a number weeks before it is a conversation.</a:t>
+              <a:rPr sz="1500"/>
+              <a:t>View-as opens the FCC exactly as a named account manager sees it — their clients, their modules, their alerts — so a one-to-one is a conversation about one screen rather than a described one. The Playbook turns “how is this account doing” into a list of plays that are landing, stalling or absent.</a:t>
             </a:r>
           </a:p>
         </p:txBody>
@@ -15127,7 +15207,8 @@
           <a:lstStyle/>
           <a:p>
             <a:r>
-              <a:t>AM management</a:t>
+              <a:rPr sz="1760"/>
+              <a:t>One standard, everywhere</a:t>
             </a:r>
           </a:p>
         </p:txBody>
@@ -15148,8 +15229,7 @@
           <a:lstStyle/>
           <a:p>
             <a:r>
-              <a:rPr sz="1500"/>
-              <a:t>Workload balanced across the team from the live task book; turnaround and SLA per AM; urgent hours against optimisation hours, tagged and reported; the Playbook as the coaching tool for what each account is missing; onboarding measured rather than asserted — time to first brief, per new starter.</a:t>
+              <a:t>Every brief is scored against the same six checks, every feed against the same rules, every quote built on the same rate card. The distance between the most experienced account manager and the newest narrows because the floor rises, not because anybody is being watched.</a:t>
             </a:r>
           </a:p>
         </p:txBody>
@@ -15170,7 +15250,8 @@
           <a:lstStyle/>
           <a:p>
             <a:r>
-              <a:t>Business engine</a:t>
+              <a:rPr sz="1760"/>
+              <a:t>Handover in an afternoon</a:t>
             </a:r>
           </a:p>
         </p:txBody>
@@ -15191,8 +15272,7 @@
           <a:lstStyle/>
           <a:p>
             <a:r>
-              <a:rPr sz="1500"/>
-              <a:t>Revenue forecast from retainer burn, the quote pipeline and new-product volumes; profitability per account; Tachyon drafting the brief and the client email from the finding; fixes pushed into FeedHero and Merchant Center from the screen; feed changes joined to Ads performance; the whole thing packaged for other teams in the network.</a:t>
+              <a:t>The dossier is the live handover document — plan, briefs in flight, feed scores, hours, calendar moments, per brand and current. An account moves between managers without a handover pack, and holiday cover stops being a gap in the client’s week.</a:t>
             </a:r>
           </a:p>
         </p:txBody>
@@ -15213,7 +15293,7 @@
           <a:lstStyle/>
           <a:p>
             <a:r>
-              <a:t>The dashboard starts making the first move.</a:t>
+              <a:t>The floor rises. The ceiling is still the account manager.</a:t>
             </a:r>
           </a:p>
         </p:txBody>
@@ -15253,7 +15333,7 @@
           <a:p>
             <a:r>
               <a:rPr sz="2620"/>
-              <a:t>Every module that has landed in six weeks does the same thing: it puts the information in front of the account manager at the moment of the decision, so the team's time goes into client work instead of finding out what is going on. The vision is the same idea, one step further — the dashboard starts making the first move.</a:t>
+              <a:t>It shortens the mechanical half of the apprenticeship — where the data lives, what good looks like, what a brief must contain — and not the relational half: reading a client, holding a hard call, knowing when to push. So every figure states its source and every alert opens to its evidence.</a:t>
             </a:r>
           </a:p>
         </p:txBody>
@@ -15274,7 +15354,7 @@
           <a:lstStyle/>
           <a:p>
             <a:r>
-              <a:t>The through-line</a:t>
+              <a:t>What it does not do</a:t>
             </a:r>
           </a:p>
         </p:txBody>
@@ -15304,6 +15384,48 @@
             <a:spLocks noGrp="1"/>
           </p:cNvSpPr>
           <p:nvPr>
+            <p:ph type="body" idx="11"/>
+          </p:nvPr>
+        </p:nvSpPr>
+        <p:spPr/>
+        <p:txBody>
+          <a:bodyPr wrap="square"/>
+          <a:lstStyle/>
+          <a:p>
+            <a:r>
+              <a:t>Chapter five</a:t>
+            </a:r>
+          </a:p>
+        </p:txBody>
+      </p:sp>
+      <p:sp>
+        <p:nvSpPr>
+          <p:cNvPr id="3" name="Title 2"/>
+          <p:cNvSpPr>
+            <a:spLocks noGrp="1"/>
+          </p:cNvSpPr>
+          <p:nvPr>
+            <p:ph type="title"/>
+          </p:nvPr>
+        </p:nvSpPr>
+        <p:spPr/>
+        <p:txBody>
+          <a:bodyPr wrap="square"/>
+          <a:lstStyle/>
+          <a:p>
+            <a:r>
+              <a:t>Going forward</a:t>
+            </a:r>
+          </a:p>
+        </p:txBody>
+      </p:sp>
+      <p:sp>
+        <p:nvSpPr>
+          <p:cNvPr id="4" name="Text Placeholder 3"/>
+          <p:cNvSpPr>
+            <a:spLocks noGrp="1"/>
+          </p:cNvSpPr>
+          <p:nvPr>
             <p:ph type="body" idx="1"/>
           </p:nvPr>
         </p:nvSpPr>
@@ -15313,29 +15435,7 @@
           <a:lstStyle/>
           <a:p>
             <a:r>
-              <a:rPr sz="2620"/>
-              <a:t>Reimburse the two-month Claude Code subscription that built the FCC, and approve the 90-day rollout to the London account-management team with one subscription per builder and Ray as product owner. The return is 2,530 hours a year at a team of five, and the three risks in chapter three stop being invisible.</a:t>
-            </a:r>
-          </a:p>
-        </p:txBody>
-      </p:sp>
-      <p:sp>
-        <p:nvSpPr>
-          <p:cNvPr id="3" name="Text Placeholder 2"/>
-          <p:cNvSpPr>
-            <a:spLocks noGrp="1"/>
-          </p:cNvSpPr>
-          <p:nvPr>
-            <p:ph type="body" idx="11"/>
-          </p:nvPr>
-        </p:nvSpPr>
-        <p:spPr/>
-        <p:txBody>
-          <a:bodyPr wrap="square"/>
-          <a:lstStyle/>
-          <a:p>
-            <a:r>
-              <a:t>The ask</a:t>
+              <a:t>Ninety days to make it the team's way of working, then the platform for feedback, AM management and the business.</a:t>
             </a:r>
           </a:p>
         </p:txBody>
@@ -15374,7 +15474,7 @@
           <a:lstStyle/>
           <a:p>
             <a:r>
-              <a:t>Questions?</a:t>
+              <a:t>Ninety days to the team’s operating system</a:t>
             </a:r>
           </a:p>
         </p:txBody>
@@ -15386,6 +15486,27 @@
             <a:spLocks noGrp="1"/>
           </p:cNvSpPr>
           <p:nvPr>
+            <p:ph type="body" idx="11"/>
+          </p:nvPr>
+        </p:nvSpPr>
+        <p:spPr/>
+        <p:txBody>
+          <a:bodyPr wrap="square"/>
+          <a:lstStyle/>
+          <a:p>
+            <a:r>
+              <a:t>Onboarding is an invite and an hour; the plan measures before and after.</a:t>
+            </a:r>
+          </a:p>
+        </p:txBody>
+      </p:sp>
+      <p:sp>
+        <p:nvSpPr>
+          <p:cNvPr id="4" name="Text Placeholder 3"/>
+          <p:cNvSpPr>
+            <a:spLocks noGrp="1"/>
+          </p:cNvSpPr>
+          <p:nvPr>
             <p:ph type="body" idx="1"/>
           </p:nvPr>
         </p:nvSpPr>
@@ -15395,7 +15516,320 @@
           <a:lstStyle/>
           <a:p>
             <a:r>
-              <a:t>Ray Vũ</a:t>
+              <a:t>1</a:t>
+            </a:r>
+          </a:p>
+        </p:txBody>
+      </p:sp>
+      <p:sp>
+        <p:nvSpPr>
+          <p:cNvPr id="5" name="Text Placeholder 4"/>
+          <p:cNvSpPr>
+            <a:spLocks noGrp="1"/>
+          </p:cNvSpPr>
+          <p:nvPr>
+            <p:ph type="body" idx="2"/>
+          </p:nvPr>
+        </p:nvSpPr>
+        <p:spPr/>
+        <p:txBody>
+          <a:bodyPr wrap="square"/>
+          <a:lstStyle/>
+          <a:p>
+            <a:r>
+              <a:rPr sz="1689"/>
+              <a:t>Everyone in, baseline measured</a:t>
+            </a:r>
+          </a:p>
+        </p:txBody>
+      </p:sp>
+      <p:sp>
+        <p:nvSpPr>
+          <p:cNvPr id="6" name="Text Placeholder 5"/>
+          <p:cNvSpPr>
+            <a:spLocks noGrp="1"/>
+          </p:cNvSpPr>
+          <p:nvPr>
+            <p:ph type="body" idx="3"/>
+          </p:nvPr>
+        </p:nvSpPr>
+        <p:spPr/>
+        <p:txBody>
+          <a:bodyPr wrap="square"/>
+          <a:lstStyle/>
+          <a:p>
+            <a:r>
+              <a:t>Days 0–30</a:t>
+            </a:r>
+          </a:p>
+          <a:p>
+            <a:r>
+              <a:t>Access invites, scoped per AM</a:t>
+            </a:r>
+          </a:p>
+          <a:p>
+            <a:r>
+              <a:t>One-hour walkthrough each</a:t>
+            </a:r>
+          </a:p>
+          <a:p>
+            <a:r>
+              <a:t>Gmail push and plans wired</a:t>
+            </a:r>
+          </a:p>
+          <a:p>
+            <a:r>
+              <a:t>One-week diary — the before figure</a:t>
+            </a:r>
+          </a:p>
+        </p:txBody>
+      </p:sp>
+      <p:sp>
+        <p:nvSpPr>
+          <p:cNvPr id="7" name="Text Placeholder 6"/>
+          <p:cNvSpPr>
+            <a:spLocks noGrp="1"/>
+          </p:cNvSpPr>
+          <p:nvPr>
+            <p:ph type="body" idx="4"/>
+          </p:nvPr>
+        </p:nvSpPr>
+        <p:spPr/>
+        <p:txBody>
+          <a:bodyPr wrap="square"/>
+          <a:lstStyle/>
+          <a:p>
+            <a:r>
+              <a:t>2</a:t>
+            </a:r>
+          </a:p>
+        </p:txBody>
+      </p:sp>
+      <p:sp>
+        <p:nvSpPr>
+          <p:cNvPr id="8" name="Text Placeholder 7"/>
+          <p:cNvSpPr>
+            <a:spLocks noGrp="1"/>
+          </p:cNvSpPr>
+          <p:nvPr>
+            <p:ph type="body" idx="5"/>
+          </p:nvPr>
+        </p:nvSpPr>
+        <p:spPr/>
+        <p:txBody>
+          <a:bodyPr wrap="square"/>
+          <a:lstStyle/>
+          <a:p>
+            <a:r>
+              <a:rPr sz="1580"/>
+              <a:t>The FCC is where the work happens</a:t>
+            </a:r>
+          </a:p>
+        </p:txBody>
+      </p:sp>
+      <p:sp>
+        <p:nvSpPr>
+          <p:cNvPr id="9" name="Text Placeholder 8"/>
+          <p:cNvSpPr>
+            <a:spLocks noGrp="1"/>
+          </p:cNvSpPr>
+          <p:nvPr>
+            <p:ph type="body" idx="6"/>
+          </p:nvPr>
+        </p:nvSpPr>
+        <p:spPr/>
+        <p:txBody>
+          <a:bodyPr wrap="square"/>
+          <a:lstStyle/>
+          <a:p>
+            <a:r>
+              <a:t>Days 30–60</a:t>
+            </a:r>
+          </a:p>
+          <a:p>
+            <a:r>
+              <a:t>Every brief from Workflow</a:t>
+            </a:r>
+          </a:p>
+          <a:p>
+            <a:r>
+              <a:t>Every quote and deck generated</a:t>
+            </a:r>
+          </a:p>
+          <a:p>
+            <a:r>
+              <a:t>Monday call off Leadership</a:t>
+            </a:r>
+          </a:p>
+          <a:p>
+            <a:r>
+              <a:t>Go or skip with the balance in view</a:t>
+            </a:r>
+          </a:p>
+        </p:txBody>
+      </p:sp>
+      <p:sp>
+        <p:nvSpPr>
+          <p:cNvPr id="10" name="Text Placeholder 9"/>
+          <p:cNvSpPr>
+            <a:spLocks noGrp="1"/>
+          </p:cNvSpPr>
+          <p:nvPr>
+            <p:ph type="body" idx="7"/>
+          </p:nvPr>
+        </p:nvSpPr>
+        <p:spPr/>
+        <p:txBody>
+          <a:bodyPr wrap="square"/>
+          <a:lstStyle/>
+          <a:p>
+            <a:r>
+              <a:t>3</a:t>
+            </a:r>
+          </a:p>
+        </p:txBody>
+      </p:sp>
+      <p:sp>
+        <p:nvSpPr>
+          <p:cNvPr id="11" name="Text Placeholder 10"/>
+          <p:cNvSpPr>
+            <a:spLocks noGrp="1"/>
+          </p:cNvSpPr>
+          <p:nvPr>
+            <p:ph type="body" idx="8"/>
+          </p:nvPr>
+        </p:nvSpPr>
+        <p:spPr/>
+        <p:txBody>
+          <a:bodyPr wrap="square"/>
+          <a:lstStyle/>
+          <a:p>
+            <a:r>
+              <a:rPr sz="1580"/>
+              <a:t>Measure, report, decide the next team</a:t>
+            </a:r>
+          </a:p>
+        </p:txBody>
+      </p:sp>
+      <p:sp>
+        <p:nvSpPr>
+          <p:cNvPr id="12" name="Text Placeholder 11"/>
+          <p:cNvSpPr>
+            <a:spLocks noGrp="1"/>
+          </p:cNvSpPr>
+          <p:nvPr>
+            <p:ph type="body" idx="9"/>
+          </p:nvPr>
+        </p:nvSpPr>
+        <p:spPr/>
+        <p:txBody>
+          <a:bodyPr wrap="square"/>
+          <a:lstStyle/>
+          <a:p>
+            <a:r>
+              <a:t>Days 60–90</a:t>
+            </a:r>
+          </a:p>
+          <a:p>
+            <a:r>
+              <a:t>Re-run the diary — the after figure</a:t>
+            </a:r>
+          </a:p>
+          <a:p>
+            <a:r>
+              <a:t>Report alerts, turnaround, overrun</a:t>
+            </a:r>
+          </a:p>
+          <a:p>
+            <a:r>
+              <a:t>Agree the budget line</a:t>
+            </a:r>
+          </a:p>
+          <a:p>
+            <a:r>
+              <a:t>Pick the next team to offer it to</a:t>
+            </a:r>
+          </a:p>
+        </p:txBody>
+      </p:sp>
+      <p:sp>
+        <p:nvSpPr>
+          <p:cNvPr id="13" name="Text Placeholder 12"/>
+          <p:cNvSpPr>
+            <a:spLocks noGrp="1"/>
+          </p:cNvSpPr>
+          <p:nvPr>
+            <p:ph type="body" idx="14"/>
+          </p:nvPr>
+        </p:nvSpPr>
+        <p:spPr/>
+        <p:txBody>
+          <a:bodyPr wrap="square"/>
+          <a:lstStyle/>
+          <a:p>
+            <a:r>
+              <a:rPr sz="1070"/>
+              <a:t>Nothing in the first 30 days needs a developer. The access model, the mobile view and the sync jobs exist; the rollout is invitations, a walkthrough and a diary.</a:t>
+            </a:r>
+          </a:p>
+        </p:txBody>
+      </p:sp>
+    </p:spTree>
+  </p:cSld>
+  <p:clrMapOvr>
+    <a:masterClrMapping/>
+  </p:clrMapOvr>
+</p:sld>
+</file>
+
+<file path=ppt/slides/slide29.xml><?xml version="1.0" encoding="utf-8"?>
+<p:sld xmlns:a="http://schemas.openxmlformats.org/drawingml/2006/main" xmlns:p="http://schemas.openxmlformats.org/presentationml/2006/main" xmlns:r="http://schemas.openxmlformats.org/officeDocument/2006/relationships">
+  <p:cSld>
+    <p:spTree>
+      <p:nvGrpSpPr>
+        <p:cNvPr id="1" name=""/>
+        <p:cNvGrpSpPr/>
+        <p:nvPr/>
+      </p:nvGrpSpPr>
+      <p:grpSpPr/>
+      <p:sp>
+        <p:nvSpPr>
+          <p:cNvPr id="2" name="Title 1"/>
+          <p:cNvSpPr>
+            <a:spLocks noGrp="1"/>
+          </p:cNvSpPr>
+          <p:nvPr>
+            <p:ph type="title"/>
+          </p:nvPr>
+        </p:nvSpPr>
+        <p:spPr/>
+        <p:txBody>
+          <a:bodyPr wrap="square"/>
+          <a:lstStyle/>
+          <a:p>
+            <a:r>
+              <a:t>What the FCC becomes next</a:t>
+            </a:r>
+          </a:p>
+        </p:txBody>
+      </p:sp>
+      <p:sp>
+        <p:nvSpPr>
+          <p:cNvPr id="3" name="Text Placeholder 2"/>
+          <p:cNvSpPr>
+            <a:spLocks noGrp="1"/>
+          </p:cNvSpPr>
+          <p:nvPr>
+            <p:ph type="body" idx="13"/>
+          </p:nvPr>
+        </p:nvSpPr>
+        <p:spPr/>
+        <p:txBody>
+          <a:bodyPr wrap="square"/>
+          <a:lstStyle/>
+          <a:p>
+            <a:r>
+              <a:t>It already reads every system the team runs; next it acts on what it reads.</a:t>
             </a:r>
           </a:p>
         </p:txBody>
@@ -15407,16 +15841,17 @@
             <a:spLocks noGrp="1"/>
           </p:cNvSpPr>
           <p:nvPr>
-            <p:ph type="body" idx="11"/>
-          </p:nvPr>
-        </p:nvSpPr>
-        <p:spPr/>
-        <p:txBody>
-          <a:bodyPr wrap="square"/>
-          <a:lstStyle/>
-          <a:p>
-            <a:r>
-              <a:t>Senior Account Manager · FCC product owner</a:t>
+            <p:ph type="body" idx="1"/>
+          </p:nvPr>
+        </p:nvSpPr>
+        <p:spPr/>
+        <p:txBody>
+          <a:bodyPr wrap="square"/>
+          <a:lstStyle/>
+          <a:p>
+            <a:r>
+              <a:rPr sz="1880"/>
+              <a:t>Feedback — client voice</a:t>
             </a:r>
           </a:p>
         </p:txBody>
@@ -15437,7 +15872,114 @@
           <a:lstStyle/>
           <a:p>
             <a:r>
-              <a:t>ray@feedspark.com</a:t>
+              <a:t>Sentiment from every client email and call feeding the retention radar; a monthly one-page account report emailed automatically; read-only scorecard links a client can open; a pulse question after each review — churn risk as a number weeks before it is a conversation.</a:t>
+            </a:r>
+          </a:p>
+        </p:txBody>
+      </p:sp>
+      <p:sp>
+        <p:nvSpPr>
+          <p:cNvPr id="6" name="Text Placeholder 5"/>
+          <p:cNvSpPr>
+            <a:spLocks noGrp="1"/>
+          </p:cNvSpPr>
+          <p:nvPr>
+            <p:ph type="body" idx="3"/>
+          </p:nvPr>
+        </p:nvSpPr>
+        <p:spPr/>
+        <p:txBody>
+          <a:bodyPr wrap="square"/>
+          <a:lstStyle/>
+          <a:p>
+            <a:r>
+              <a:t>AM management</a:t>
+            </a:r>
+          </a:p>
+        </p:txBody>
+      </p:sp>
+      <p:sp>
+        <p:nvSpPr>
+          <p:cNvPr id="7" name="Text Placeholder 6"/>
+          <p:cNvSpPr>
+            <a:spLocks noGrp="1"/>
+          </p:cNvSpPr>
+          <p:nvPr>
+            <p:ph type="body" idx="4"/>
+          </p:nvPr>
+        </p:nvSpPr>
+        <p:spPr/>
+        <p:txBody>
+          <a:bodyPr wrap="square"/>
+          <a:lstStyle/>
+          <a:p>
+            <a:r>
+              <a:rPr sz="1500"/>
+              <a:t>Workload balanced across the team from the live task book; turnaround and SLA per AM; urgent hours against optimisation hours, tagged and reported; the Playbook as the coaching tool for what each account is missing; onboarding measured rather than asserted — time to first brief, per new starter.</a:t>
+            </a:r>
+          </a:p>
+        </p:txBody>
+      </p:sp>
+      <p:sp>
+        <p:nvSpPr>
+          <p:cNvPr id="8" name="Text Placeholder 7"/>
+          <p:cNvSpPr>
+            <a:spLocks noGrp="1"/>
+          </p:cNvSpPr>
+          <p:nvPr>
+            <p:ph type="body" idx="5"/>
+          </p:nvPr>
+        </p:nvSpPr>
+        <p:spPr/>
+        <p:txBody>
+          <a:bodyPr wrap="square"/>
+          <a:lstStyle/>
+          <a:p>
+            <a:r>
+              <a:t>Business engine</a:t>
+            </a:r>
+          </a:p>
+        </p:txBody>
+      </p:sp>
+      <p:sp>
+        <p:nvSpPr>
+          <p:cNvPr id="9" name="Text Placeholder 8"/>
+          <p:cNvSpPr>
+            <a:spLocks noGrp="1"/>
+          </p:cNvSpPr>
+          <p:nvPr>
+            <p:ph type="body" idx="6"/>
+          </p:nvPr>
+        </p:nvSpPr>
+        <p:spPr/>
+        <p:txBody>
+          <a:bodyPr wrap="square"/>
+          <a:lstStyle/>
+          <a:p>
+            <a:r>
+              <a:rPr sz="1500"/>
+              <a:t>Revenue forecast from retainer burn, the quote pipeline and new-product volumes; profitability per account; Tachyon drafting the brief and the client email from the finding; fixes pushed into FeedHero and Merchant Center from the screen; feed changes joined to Ads performance; the whole thing packaged for other teams in the network.</a:t>
+            </a:r>
+          </a:p>
+        </p:txBody>
+      </p:sp>
+      <p:sp>
+        <p:nvSpPr>
+          <p:cNvPr id="10" name="Text Placeholder 9"/>
+          <p:cNvSpPr>
+            <a:spLocks noGrp="1"/>
+          </p:cNvSpPr>
+          <p:nvPr>
+            <p:ph type="body" idx="14"/>
+          </p:nvPr>
+        </p:nvSpPr>
+        <p:spPr/>
+        <p:txBody>
+          <a:bodyPr wrap="square"/>
+          <a:lstStyle/>
+          <a:p>
+            <a:r>
+              <a:t>The dashboard starts making the first move.</a:t>
             </a:r>
           </a:p>
         </p:txBody>
@@ -15519,6 +16061,230 @@
           <a:p>
             <a:r>
               <a:t>An account manager's week was spent looking for information, not acting on it.</a:t>
+            </a:r>
+          </a:p>
+        </p:txBody>
+      </p:sp>
+    </p:spTree>
+  </p:cSld>
+  <p:clrMapOvr>
+    <a:masterClrMapping/>
+  </p:clrMapOvr>
+</p:sld>
+</file>
+
+<file path=ppt/slides/slide30.xml><?xml version="1.0" encoding="utf-8"?>
+<p:sld xmlns:a="http://schemas.openxmlformats.org/drawingml/2006/main" xmlns:p="http://schemas.openxmlformats.org/presentationml/2006/main" xmlns:r="http://schemas.openxmlformats.org/officeDocument/2006/relationships">
+  <p:cSld>
+    <p:spTree>
+      <p:nvGrpSpPr>
+        <p:cNvPr id="1" name=""/>
+        <p:cNvGrpSpPr/>
+        <p:nvPr/>
+      </p:nvGrpSpPr>
+      <p:grpSpPr/>
+      <p:sp>
+        <p:nvSpPr>
+          <p:cNvPr id="2" name="Text Placeholder 1"/>
+          <p:cNvSpPr>
+            <a:spLocks noGrp="1"/>
+          </p:cNvSpPr>
+          <p:nvPr>
+            <p:ph type="body" idx="1"/>
+          </p:nvPr>
+        </p:nvSpPr>
+        <p:spPr/>
+        <p:txBody>
+          <a:bodyPr wrap="square"/>
+          <a:lstStyle/>
+          <a:p>
+            <a:r>
+              <a:rPr sz="2620"/>
+              <a:t>Every module that has landed in six weeks does the same thing: it puts the information in front of the account manager at the moment of the decision, so the team's time goes into client work instead of finding out what is going on. The vision is the same idea, one step further — the dashboard starts making the first move.</a:t>
+            </a:r>
+          </a:p>
+        </p:txBody>
+      </p:sp>
+      <p:sp>
+        <p:nvSpPr>
+          <p:cNvPr id="3" name="Text Placeholder 2"/>
+          <p:cNvSpPr>
+            <a:spLocks noGrp="1"/>
+          </p:cNvSpPr>
+          <p:nvPr>
+            <p:ph type="body" idx="11"/>
+          </p:nvPr>
+        </p:nvSpPr>
+        <p:spPr/>
+        <p:txBody>
+          <a:bodyPr wrap="square"/>
+          <a:lstStyle/>
+          <a:p>
+            <a:r>
+              <a:t>The through-line</a:t>
+            </a:r>
+          </a:p>
+        </p:txBody>
+      </p:sp>
+    </p:spTree>
+  </p:cSld>
+  <p:clrMapOvr>
+    <a:masterClrMapping/>
+  </p:clrMapOvr>
+</p:sld>
+</file>
+
+<file path=ppt/slides/slide31.xml><?xml version="1.0" encoding="utf-8"?>
+<p:sld xmlns:a="http://schemas.openxmlformats.org/drawingml/2006/main" xmlns:p="http://schemas.openxmlformats.org/presentationml/2006/main" xmlns:r="http://schemas.openxmlformats.org/officeDocument/2006/relationships">
+  <p:cSld>
+    <p:spTree>
+      <p:nvGrpSpPr>
+        <p:cNvPr id="1" name=""/>
+        <p:cNvGrpSpPr/>
+        <p:nvPr/>
+      </p:nvGrpSpPr>
+      <p:grpSpPr/>
+      <p:sp>
+        <p:nvSpPr>
+          <p:cNvPr id="2" name="Text Placeholder 1"/>
+          <p:cNvSpPr>
+            <a:spLocks noGrp="1"/>
+          </p:cNvSpPr>
+          <p:nvPr>
+            <p:ph type="body" idx="1"/>
+          </p:nvPr>
+        </p:nvSpPr>
+        <p:spPr/>
+        <p:txBody>
+          <a:bodyPr wrap="square"/>
+          <a:lstStyle/>
+          <a:p>
+            <a:r>
+              <a:rPr sz="2620"/>
+              <a:t>Reimburse the two-month Claude Code subscription that built the FCC, and approve the 90-day rollout to the London account-management team with one subscription per builder and Ray as product owner. The return is 2,530 hours a year at a team of five, and the three risks in chapter three stop being invisible.</a:t>
+            </a:r>
+          </a:p>
+        </p:txBody>
+      </p:sp>
+      <p:sp>
+        <p:nvSpPr>
+          <p:cNvPr id="3" name="Text Placeholder 2"/>
+          <p:cNvSpPr>
+            <a:spLocks noGrp="1"/>
+          </p:cNvSpPr>
+          <p:nvPr>
+            <p:ph type="body" idx="11"/>
+          </p:nvPr>
+        </p:nvSpPr>
+        <p:spPr/>
+        <p:txBody>
+          <a:bodyPr wrap="square"/>
+          <a:lstStyle/>
+          <a:p>
+            <a:r>
+              <a:t>The ask</a:t>
+            </a:r>
+          </a:p>
+        </p:txBody>
+      </p:sp>
+    </p:spTree>
+  </p:cSld>
+  <p:clrMapOvr>
+    <a:masterClrMapping/>
+  </p:clrMapOvr>
+</p:sld>
+</file>
+
+<file path=ppt/slides/slide32.xml><?xml version="1.0" encoding="utf-8"?>
+<p:sld xmlns:a="http://schemas.openxmlformats.org/drawingml/2006/main" xmlns:p="http://schemas.openxmlformats.org/presentationml/2006/main" xmlns:r="http://schemas.openxmlformats.org/officeDocument/2006/relationships">
+  <p:cSld>
+    <p:spTree>
+      <p:nvGrpSpPr>
+        <p:cNvPr id="1" name=""/>
+        <p:cNvGrpSpPr/>
+        <p:nvPr/>
+      </p:nvGrpSpPr>
+      <p:grpSpPr/>
+      <p:sp>
+        <p:nvSpPr>
+          <p:cNvPr id="2" name="Title 1"/>
+          <p:cNvSpPr>
+            <a:spLocks noGrp="1"/>
+          </p:cNvSpPr>
+          <p:nvPr>
+            <p:ph type="title"/>
+          </p:nvPr>
+        </p:nvSpPr>
+        <p:spPr/>
+        <p:txBody>
+          <a:bodyPr wrap="square"/>
+          <a:lstStyle/>
+          <a:p>
+            <a:r>
+              <a:t>Questions?</a:t>
+            </a:r>
+          </a:p>
+        </p:txBody>
+      </p:sp>
+      <p:sp>
+        <p:nvSpPr>
+          <p:cNvPr id="3" name="Text Placeholder 2"/>
+          <p:cNvSpPr>
+            <a:spLocks noGrp="1"/>
+          </p:cNvSpPr>
+          <p:nvPr>
+            <p:ph type="body" idx="1"/>
+          </p:nvPr>
+        </p:nvSpPr>
+        <p:spPr/>
+        <p:txBody>
+          <a:bodyPr wrap="square"/>
+          <a:lstStyle/>
+          <a:p>
+            <a:r>
+              <a:t>Ray Vũ</a:t>
+            </a:r>
+          </a:p>
+        </p:txBody>
+      </p:sp>
+      <p:sp>
+        <p:nvSpPr>
+          <p:cNvPr id="4" name="Text Placeholder 3"/>
+          <p:cNvSpPr>
+            <a:spLocks noGrp="1"/>
+          </p:cNvSpPr>
+          <p:nvPr>
+            <p:ph type="body" idx="11"/>
+          </p:nvPr>
+        </p:nvSpPr>
+        <p:spPr/>
+        <p:txBody>
+          <a:bodyPr wrap="square"/>
+          <a:lstStyle/>
+          <a:p>
+            <a:r>
+              <a:t>Senior Account Manager · FCC product owner</a:t>
+            </a:r>
+          </a:p>
+        </p:txBody>
+      </p:sp>
+      <p:sp>
+        <p:nvSpPr>
+          <p:cNvPr id="5" name="Text Placeholder 4"/>
+          <p:cNvSpPr>
+            <a:spLocks noGrp="1"/>
+          </p:cNvSpPr>
+          <p:nvPr>
+            <p:ph type="body" idx="2"/>
+          </p:nvPr>
+        </p:nvSpPr>
+        <p:spPr/>
+        <p:txBody>
+          <a:bodyPr wrap="square"/>
+          <a:lstStyle/>
+          <a:p>
+            <a:r>
+              <a:t>ray@feedspark.com</a:t>
             </a:r>
           </a:p>
         </p:txBody>
@@ -16253,7 +17019,7 @@
           <a:lstStyle/>
           <a:p>
             <a:r>
-              <a:t>Three things nobody could see</a:t>
+              <a:t>Five things the week keeps breaking on</a:t>
             </a:r>
           </a:p>
         </p:txBody>
@@ -16265,16 +17031,16 @@
             <a:spLocks noGrp="1"/>
           </p:cNvSpPr>
           <p:nvPr>
-            <p:ph type="body" idx="13"/>
-          </p:nvPr>
-        </p:nvSpPr>
-        <p:spPr/>
-        <p:txBody>
-          <a:bodyPr wrap="square"/>
-          <a:lstStyle/>
-          <a:p>
-            <a:r>
-              <a:t>Not hypotheticals — each was read off the team’s own systems in the first weeks of the FCC being live.</a:t>
+            <p:ph type="body" idx="11"/>
+          </p:nvPr>
+        </p:nvSpPr>
+        <p:spPr/>
+        <p:txBody>
+          <a:bodyPr wrap="square"/>
+          <a:lstStyle/>
+          <a:p>
+            <a:r>
+              <a:t>Named by the account manager running the book, not inferred from the tooling.</a:t>
             </a:r>
           </a:p>
         </p:txBody>
@@ -16286,147 +17052,6 @@
             <a:spLocks noGrp="1"/>
           </p:cNvSpPr>
           <p:nvPr>
-            <p:ph type="body" idx="1"/>
-          </p:nvPr>
-        </p:nvSpPr>
-        <p:spPr/>
-        <p:txBody>
-          <a:bodyPr wrap="square"/>
-          <a:lstStyle/>
-          <a:p>
-            <a:r>
-              <a:t>378 hours in the red</a:t>
-            </a:r>
-          </a:p>
-        </p:txBody>
-      </p:sp>
-      <p:sp>
-        <p:nvSpPr>
-          <p:cNvPr id="5" name="Text Placeholder 4"/>
-          <p:cNvSpPr>
-            <a:spLocks noGrp="1"/>
-          </p:cNvSpPr>
-          <p:nvPr>
-            <p:ph type="body" idx="2"/>
-          </p:nvPr>
-        </p:nvSpPr>
-        <p:spPr/>
-        <p:txBody>
-          <a:bodyPr wrap="square"/>
-          <a:lstStyle/>
-          <a:p>
-            <a:r>
-              <a:t>Across 24 markets, carried forward month after month; ten of the 19 retainer markets are in the red. The AM saying yes to the next task could not see it — the Task Manager showed it one client login at a time.</a:t>
-            </a:r>
-          </a:p>
-          <a:p>
-            <a:r>
-              <a:t>Task Manager, 22 Sep 2026</a:t>
-            </a:r>
-          </a:p>
-        </p:txBody>
-      </p:sp>
-      <p:sp>
-        <p:nvSpPr>
-          <p:cNvPr id="6" name="Text Placeholder 5"/>
-          <p:cNvSpPr>
-            <a:spLocks noGrp="1"/>
-          </p:cNvSpPr>
-          <p:nvPr>
-            <p:ph type="body" idx="3"/>
-          </p:nvPr>
-        </p:nvSpPr>
-        <p:spPr/>
-        <p:txBody>
-          <a:bodyPr wrap="square"/>
-          <a:lstStyle/>
-          <a:p>
-            <a:r>
-              <a:t>60% of weeks skipped</a:t>
-            </a:r>
-          </a:p>
-        </p:txBody>
-      </p:sp>
-      <p:sp>
-        <p:nvSpPr>
-          <p:cNvPr id="7" name="Text Placeholder 6"/>
-          <p:cNvSpPr>
-            <a:spLocks noGrp="1"/>
-          </p:cNvSpPr>
-          <p:nvPr>
-            <p:ph type="body" idx="4"/>
-          </p:nvPr>
-        </p:nvSpPr>
-        <p:spPr/>
-        <p:txBody>
-          <a:bodyPr wrap="square"/>
-          <a:lstStyle/>
-          <a:p>
-            <a:r>
-              <a:t>In twelve months, 838 of 1,398 scheduled weeks of title, keyword and product-type work were skipped — 2,750 hours of optimisation that never landed. 67 tasks sit on a skip streak of two months or more; the longest is 14.</a:t>
-            </a:r>
-          </a:p>
-          <a:p>
-            <a:r>
-              <a:t>Content team schedule, 15 Sep 2026</a:t>
-            </a:r>
-          </a:p>
-        </p:txBody>
-      </p:sp>
-      <p:sp>
-        <p:nvSpPr>
-          <p:cNvPr id="8" name="Text Placeholder 7"/>
-          <p:cNvSpPr>
-            <a:spLocks noGrp="1"/>
-          </p:cNvSpPr>
-          <p:nvPr>
-            <p:ph type="body" idx="5"/>
-          </p:nvPr>
-        </p:nvSpPr>
-        <p:spPr/>
-        <p:txBody>
-          <a:bodyPr wrap="square"/>
-          <a:lstStyle/>
-          <a:p>
-            <a:r>
-              <a:t>Briefed, but invisible</a:t>
-            </a:r>
-          </a:p>
-        </p:txBody>
-      </p:sp>
-      <p:sp>
-        <p:nvSpPr>
-          <p:cNvPr id="9" name="Text Placeholder 8"/>
-          <p:cNvSpPr>
-            <a:spLocks noGrp="1"/>
-          </p:cNvSpPr>
-          <p:nvPr>
-            <p:ph type="body" idx="6"/>
-          </p:nvPr>
-        </p:nvSpPr>
-        <p:spPr/>
-        <p:txBody>
-          <a:bodyPr wrap="square"/>
-          <a:lstStyle/>
-          <a:p>
-            <a:r>
-              <a:t>Two Reiss keyword themes were briefed by a colleague and picked up by ASPL, yet the board read “not briefed” — the save had failed silently and the only record sat on one laptop. The work had started; the team could not see it.</a:t>
-            </a:r>
-          </a:p>
-          <a:p>
-            <a:r>
-              <a:t>Workflow, 16 Sep 2026</a:t>
-            </a:r>
-          </a:p>
-        </p:txBody>
-      </p:sp>
-      <p:sp>
-        <p:nvSpPr>
-          <p:cNvPr id="10" name="Text Placeholder 9"/>
-          <p:cNvSpPr>
-            <a:spLocks noGrp="1"/>
-          </p:cNvSpPr>
-          <p:nvPr>
             <p:ph type="body" idx="14"/>
           </p:nvPr>
         </p:nvSpPr>
@@ -16436,11 +17061,297 @@
           <a:lstStyle/>
           <a:p>
             <a:r>
-              <a:t>The cost was never a dramatic failure.</a:t>
-            </a:r>
-          </a:p>
-        </p:txBody>
-      </p:sp>
+              <a:rPr sz="1140"/>
+              <a:t>None of these is a performance problem. Each one is a job that had no screen — so it was done from memory, or not done, and nobody could see which.</a:t>
+            </a:r>
+          </a:p>
+        </p:txBody>
+      </p:sp>
+      <p:graphicFrame>
+        <p:nvGraphicFramePr>
+          <p:cNvPr id="5" name="Table 4"/>
+          <p:cNvGraphicFramePr>
+            <a:graphicFrameLocks noGrp="1"/>
+          </p:cNvGraphicFramePr>
+          <p:nvPr/>
+        </p:nvGraphicFramePr>
+        <p:xfrm>
+          <a:off x="612648" y="1847088"/>
+          <a:ext cx="10972799" cy="3794758"/>
+        </p:xfrm>
+        <a:graphic>
+          <a:graphicData uri="http://schemas.openxmlformats.org/drawingml/2006/table">
+            <a:tbl>
+              <a:tblPr firstRow="1" bandRow="1">
+                <a:tableStyleId>{5C22544A-7EE6-4342-B048-85BDC9FD1C3A}</a:tableStyleId>
+              </a:tblPr>
+              <a:tblGrid>
+                <a:gridCol w="1746913"/>
+                <a:gridCol w="4913194"/>
+                <a:gridCol w="4312692"/>
+              </a:tblGrid>
+              <a:tr h="384048">
+                <a:tc>
+                  <a:txBody>
+                    <a:bodyPr/>
+                    <a:lstStyle/>
+                    <a:p>
+                      <a:r>
+                        <a:rPr sz="1300" b="1">
+                          <a:solidFill>
+                            <a:srgbClr val="FFFFFF"/>
+                          </a:solidFill>
+                        </a:rPr>
+                        <a:t>The gap</a:t>
+                      </a:r>
+                    </a:p>
+                  </a:txBody>
+                  <a:tcPr/>
+                </a:tc>
+                <a:tc>
+                  <a:txBody>
+                    <a:bodyPr/>
+                    <a:lstStyle/>
+                    <a:p>
+                      <a:r>
+                        <a:rPr sz="1300" b="1">
+                          <a:solidFill>
+                            <a:srgbClr val="FFFFFF"/>
+                          </a:solidFill>
+                        </a:rPr>
+                        <a:t>What it means day to day</a:t>
+                      </a:r>
+                    </a:p>
+                  </a:txBody>
+                  <a:tcPr/>
+                </a:tc>
+                <a:tc>
+                  <a:txBody>
+                    <a:bodyPr/>
+                    <a:lstStyle/>
+                    <a:p>
+                      <a:r>
+                        <a:rPr sz="1300" b="1">
+                          <a:solidFill>
+                            <a:srgbClr val="FFFFFF"/>
+                          </a:solidFill>
+                        </a:rPr>
+                        <a:t>What it costs</a:t>
+                      </a:r>
+                    </a:p>
+                  </a:txBody>
+                  <a:tcPr/>
+                </a:tc>
+              </a:tr>
+              <a:tr h="682142">
+                <a:tc>
+                  <a:txBody>
+                    <a:bodyPr/>
+                    <a:lstStyle/>
+                    <a:p>
+                      <a:r>
+                        <a:rPr sz="1100"/>
+                        <a:t>The same task, keyed three times</a:t>
+                      </a:r>
+                    </a:p>
+                  </a:txBody>
+                  <a:tcPr/>
+                </a:tc>
+                <a:tc>
+                  <a:txBody>
+                    <a:bodyPr/>
+                    <a:lstStyle/>
+                    <a:p>
+                      <a:r>
+                        <a:rPr sz="1100"/>
+                        <a:t>Plan, brief, market status — one piece of work, three systems, all keyed by hand</a:t>
+                      </a:r>
+                    </a:p>
+                  </a:txBody>
+                  <a:tcPr/>
+                </a:tc>
+                <a:tc>
+                  <a:txBody>
+                    <a:bodyPr/>
+                    <a:lstStyle/>
+                    <a:p>
+                      <a:r>
+                        <a:rPr sz="1100"/>
+                        <a:t>Nothing looks wrong until one is missed, and then only one of them is right</a:t>
+                      </a:r>
+                    </a:p>
+                  </a:txBody>
+                  <a:tcPr/>
+                </a:tc>
+              </a:tr>
+              <a:tr h="682142">
+                <a:tc>
+                  <a:txBody>
+                    <a:bodyPr/>
+                    <a:lstStyle/>
+                    <a:p>
+                      <a:r>
+                        <a:rPr sz="1100"/>
+                        <a:t>No single view of task volume</a:t>
+                      </a:r>
+                    </a:p>
+                  </a:txBody>
+                  <a:tcPr/>
+                </a:tc>
+                <a:tc>
+                  <a:txBody>
+                    <a:bodyPr/>
+                    <a:lstStyle/>
+                    <a:p>
+                      <a:r>
+                        <a:rPr sz="1100"/>
+                        <a:t>Emails, plans, scheduled work, calls and briefs, never summarised or categorised together</a:t>
+                      </a:r>
+                    </a:p>
+                  </a:txBody>
+                  <a:tcPr/>
+                </a:tc>
+                <a:tc>
+                  <a:txBody>
+                    <a:bodyPr/>
+                    <a:lstStyle/>
+                    <a:p>
+                      <a:r>
+                        <a:rPr sz="1100"/>
+                        <a:t>We cannot tell a client what we are carrying this month without rebuilding it</a:t>
+                      </a:r>
+                    </a:p>
+                  </a:txBody>
+                  <a:tcPr/>
+                </a:tc>
+              </a:tr>
+              <a:tr h="682142">
+                <a:tc>
+                  <a:txBody>
+                    <a:bodyPr/>
+                    <a:lstStyle/>
+                    <a:p>
+                      <a:r>
+                        <a:rPr sz="1100"/>
+                        <a:t>Briefs not tracked end to end</a:t>
+                      </a:r>
+                    </a:p>
+                  </a:txBody>
+                  <a:tcPr/>
+                </a:tc>
+                <a:tc>
+                  <a:txBody>
+                    <a:bodyPr/>
+                    <a:lstStyle/>
+                    <a:p>
+                      <a:r>
+                        <a:rPr sz="1100"/>
+                        <a:t>Test and QA especially: what is running, what ASPL confirmed, what the numbers were</a:t>
+                      </a:r>
+                    </a:p>
+                  </a:txBody>
+                  <a:tcPr/>
+                </a:tc>
+                <a:tc>
+                  <a:txBody>
+                    <a:bodyPr/>
+                    <a:lstStyle/>
+                    <a:p>
+                      <a:r>
+                        <a:rPr sz="1100"/>
+                        <a:t>A result arrives in a reply and never reaches the plan</a:t>
+                      </a:r>
+                    </a:p>
+                  </a:txBody>
+                  <a:tcPr/>
+                </a:tc>
+              </a:tr>
+              <a:tr h="682142">
+                <a:tc>
+                  <a:txBody>
+                    <a:bodyPr/>
+                    <a:lstStyle/>
+                    <a:p>
+                      <a:r>
+                        <a:rPr sz="1100"/>
+                        <a:t>Feed data not monitored</a:t>
+                      </a:r>
+                    </a:p>
+                  </a:txBody>
+                  <a:tcPr/>
+                </a:tc>
+                <a:tc>
+                  <a:txBody>
+                    <a:bodyPr/>
+                    <a:lstStyle/>
+                    <a:p>
+                      <a:r>
+                        <a:rPr sz="1100"/>
+                        <a:t>Custom labels and product types decide how PMAX splits the catalogue — checked one feed at a time</a:t>
+                      </a:r>
+                    </a:p>
+                  </a:txBody>
+                  <a:tcPr/>
+                </a:tc>
+                <a:tc>
+                  <a:txBody>
+                    <a:bodyPr/>
+                    <a:lstStyle/>
+                    <a:p>
+                      <a:r>
+                        <a:rPr sz="1100"/>
+                        <a:t>A value empties; campaigns keep bidding into a structure that no longer matches</a:t>
+                      </a:r>
+                    </a:p>
+                  </a:txBody>
+                  <a:tcPr/>
+                </a:tc>
+              </a:tr>
+              <a:tr h="682142">
+                <a:tc>
+                  <a:txBody>
+                    <a:bodyPr/>
+                    <a:lstStyle/>
+                    <a:p>
+                      <a:r>
+                        <a:rPr sz="1100"/>
+                        <a:t>No new-product tracking</a:t>
+                      </a:r>
+                    </a:p>
+                  </a:txBody>
+                  <a:tcPr/>
+                </a:tc>
+                <a:tc>
+                  <a:txBody>
+                    <a:bodyPr/>
+                    <a:lstStyle/>
+                    <a:p>
+                      <a:r>
+                        <a:rPr sz="1100"/>
+                        <a:t>Nothing said how many products arrived this month, or that a collection landed unoptimised</a:t>
+                      </a:r>
+                    </a:p>
+                  </a:txBody>
+                  <a:tcPr/>
+                </a:tc>
+                <a:tc>
+                  <a:txBody>
+                    <a:bodyPr/>
+                    <a:lstStyle/>
+                    <a:p>
+                      <a:r>
+                        <a:rPr sz="1100"/>
+                        <a:t>New products sell on old titles until somebody notices</a:t>
+                      </a:r>
+                    </a:p>
+                  </a:txBody>
+                  <a:tcPr/>
+                </a:tc>
+              </a:tr>
+            </a:tbl>
+          </a:graphicData>
+        </a:graphic>
+      </p:graphicFrame>
     </p:spTree>
   </p:cSld>
   <p:clrMapOvr>
@@ -16461,7 +17372,28 @@
       <p:grpSpPr/>
       <p:sp>
         <p:nvSpPr>
-          <p:cNvPr id="2" name="Text Placeholder 1"/>
+          <p:cNvPr id="2" name="Title 1"/>
+          <p:cNvSpPr>
+            <a:spLocks noGrp="1"/>
+          </p:cNvSpPr>
+          <p:nvPr>
+            <p:ph type="title"/>
+          </p:nvPr>
+        </p:nvSpPr>
+        <p:spPr/>
+        <p:txBody>
+          <a:bodyPr wrap="square"/>
+          <a:lstStyle/>
+          <a:p>
+            <a:r>
+              <a:t>The same actions, every week, by hand</a:t>
+            </a:r>
+          </a:p>
+        </p:txBody>
+      </p:sp>
+      <p:sp>
+        <p:nvSpPr>
+          <p:cNvPr id="3" name="Text Placeholder 2"/>
           <p:cNvSpPr>
             <a:spLocks noGrp="1"/>
           </p:cNvSpPr>
@@ -16475,28 +17407,8 @@
           <a:lstStyle/>
           <a:p>
             <a:r>
-              <a:t>Chapter two</a:t>
-            </a:r>
-          </a:p>
-        </p:txBody>
-      </p:sp>
-      <p:sp>
-        <p:nvSpPr>
-          <p:cNvPr id="3" name="Title 2"/>
-          <p:cNvSpPr>
-            <a:spLocks noGrp="1"/>
-          </p:cNvSpPr>
-          <p:nvPr>
-            <p:ph type="title"/>
-          </p:nvPr>
-        </p:nvSpPr>
-        <p:spPr/>
-        <p:txBody>
-          <a:bodyPr wrap="square"/>
-          <a:lstStyle/>
-          <a:p>
-            <a:r>
-              <a:t>The solution</a:t>
+              <a:rPr sz="1390"/>
+              <a:t>Every one of these is the same action with different inputs — which is the definition of something a person should not be doing.</a:t>
             </a:r>
           </a:p>
         </p:txBody>
@@ -16508,20 +17420,433 @@
             <a:spLocks noGrp="1"/>
           </p:cNvSpPr>
           <p:nvPr>
-            <p:ph type="body" idx="1"/>
-          </p:nvPr>
-        </p:nvSpPr>
-        <p:spPr/>
-        <p:txBody>
-          <a:bodyPr wrap="square"/>
-          <a:lstStyle/>
-          <a:p>
-            <a:r>
-              <a:t>One command center on top of the tools the team already uses — nothing new to log into, nothing re-keyed.</a:t>
-            </a:r>
-          </a:p>
-        </p:txBody>
-      </p:sp>
+            <p:ph type="body" idx="14"/>
+          </p:nvPr>
+        </p:nvSpPr>
+        <p:spPr/>
+        <p:txBody>
+          <a:bodyPr wrap="square"/>
+          <a:lstStyle/>
+          <a:p>
+            <a:r>
+              <a:rPr sz="1220"/>
+              <a:t>Eight actions, identical week to week — none of it the interesting part of the job, and all of it the part a fragmented week gets wrong first.</a:t>
+            </a:r>
+          </a:p>
+        </p:txBody>
+      </p:sp>
+      <p:graphicFrame>
+        <p:nvGraphicFramePr>
+          <p:cNvPr id="5" name="Table 4"/>
+          <p:cNvGraphicFramePr>
+            <a:graphicFrameLocks noGrp="1"/>
+          </p:cNvGraphicFramePr>
+          <p:nvPr/>
+        </p:nvGraphicFramePr>
+        <p:xfrm>
+          <a:off x="612648" y="1847088"/>
+          <a:ext cx="10972798" cy="3794760"/>
+        </p:xfrm>
+        <a:graphic>
+          <a:graphicData uri="http://schemas.openxmlformats.org/drawingml/2006/table">
+            <a:tbl>
+              <a:tblPr firstRow="1" bandRow="1">
+                <a:tableStyleId>{5C22544A-7EE6-4342-B048-85BDC9FD1C3A}</a:tableStyleId>
+              </a:tblPr>
+              <a:tblGrid>
+                <a:gridCol w="3461218"/>
+                <a:gridCol w="883715"/>
+                <a:gridCol w="6627865"/>
+              </a:tblGrid>
+              <a:tr h="384048">
+                <a:tc>
+                  <a:txBody>
+                    <a:bodyPr/>
+                    <a:lstStyle/>
+                    <a:p>
+                      <a:r>
+                        <a:rPr sz="1300" b="1">
+                          <a:solidFill>
+                            <a:srgbClr val="FFFFFF"/>
+                          </a:solidFill>
+                        </a:rPr>
+                        <a:t>The repeated action</a:t>
+                      </a:r>
+                    </a:p>
+                  </a:txBody>
+                  <a:tcPr/>
+                </a:tc>
+                <a:tc>
+                  <a:txBody>
+                    <a:bodyPr/>
+                    <a:lstStyle/>
+                    <a:p>
+                      <a:r>
+                        <a:rPr sz="1300" b="1">
+                          <a:solidFill>
+                            <a:srgbClr val="FFFFFF"/>
+                          </a:solidFill>
+                        </a:rPr>
+                        <a:t>How often</a:t>
+                      </a:r>
+                    </a:p>
+                  </a:txBody>
+                  <a:tcPr/>
+                </a:tc>
+                <a:tc>
+                  <a:txBody>
+                    <a:bodyPr/>
+                    <a:lstStyle/>
+                    <a:p>
+                      <a:r>
+                        <a:rPr sz="1300" b="1">
+                          <a:solidFill>
+                            <a:srgbClr val="FFFFFF"/>
+                          </a:solidFill>
+                        </a:rPr>
+                        <a:t>Automated now</a:t>
+                      </a:r>
+                    </a:p>
+                  </a:txBody>
+                  <a:tcPr/>
+                </a:tc>
+              </a:tr>
+              <a:tr h="426339">
+                <a:tc>
+                  <a:txBody>
+                    <a:bodyPr/>
+                    <a:lstStyle/>
+                    <a:p>
+                      <a:r>
+                        <a:rPr sz="1100"/>
+                        <a:t>Copy a client email into the plan as a task</a:t>
+                      </a:r>
+                    </a:p>
+                  </a:txBody>
+                  <a:tcPr/>
+                </a:tc>
+                <a:tc>
+                  <a:txBody>
+                    <a:bodyPr/>
+                    <a:lstStyle/>
+                    <a:p>
+                      <a:r>
+                        <a:rPr sz="1100"/>
+                        <a:t>Every day</a:t>
+                      </a:r>
+                    </a:p>
+                  </a:txBody>
+                  <a:tcPr/>
+                </a:tc>
+                <a:tc>
+                  <a:txBody>
+                    <a:bodyPr/>
+                    <a:lstStyle/>
+                    <a:p>
+                      <a:r>
+                        <a:rPr sz="1100"/>
+                        <a:t>Captured, classified by brand and filed to Intake — the plan row is written and confirmed</a:t>
+                      </a:r>
+                    </a:p>
+                  </a:txBody>
+                  <a:tcPr/>
+                </a:tc>
+              </a:tr>
+              <a:tr h="426339">
+                <a:tc>
+                  <a:txBody>
+                    <a:bodyPr/>
+                    <a:lstStyle/>
+                    <a:p>
+                      <a:r>
+                        <a:rPr sz="1100"/>
+                        <a:t>Type call actions into the plan after a meeting</a:t>
+                      </a:r>
+                    </a:p>
+                  </a:txBody>
+                  <a:tcPr/>
+                </a:tc>
+                <a:tc>
+                  <a:txBody>
+                    <a:bodyPr/>
+                    <a:lstStyle/>
+                    <a:p>
+                      <a:r>
+                        <a:rPr sz="1100"/>
+                        <a:t>Every call</a:t>
+                      </a:r>
+                    </a:p>
+                  </a:txBody>
+                  <a:tcPr/>
+                </a:tc>
+                <a:tc>
+                  <a:txBody>
+                    <a:bodyPr/>
+                    <a:lstStyle/>
+                    <a:p>
+                      <a:r>
+                        <a:rPr sz="1100"/>
+                        <a:t>Meeting notes parsed into owners and actions, adopted into the client's plan automatically</a:t>
+                      </a:r>
+                    </a:p>
+                  </a:txBody>
+                  <a:tcPr/>
+                </a:tc>
+              </a:tr>
+              <a:tr h="426339">
+                <a:tc>
+                  <a:txBody>
+                    <a:bodyPr/>
+                    <a:lstStyle/>
+                    <a:p>
+                      <a:r>
+                        <a:rPr sz="1100"/>
+                        <a:t>Write, code, send and chase a brief</a:t>
+                      </a:r>
+                    </a:p>
+                  </a:txBody>
+                  <a:tcPr/>
+                </a:tc>
+                <a:tc>
+                  <a:txBody>
+                    <a:bodyPr/>
+                    <a:lstStyle/>
+                    <a:p>
+                      <a:r>
+                        <a:rPr sz="1100"/>
+                        <a:t>Every brief</a:t>
+                      </a:r>
+                    </a:p>
+                  </a:txBody>
+                  <a:tcPr/>
+                </a:tc>
+                <a:tc>
+                  <a:txBody>
+                    <a:bodyPr/>
+                    <a:lstStyle/>
+                    <a:p>
+                      <a:r>
+                        <a:rPr sz="1100"/>
+                        <a:t>Composed with its own reference, emailed, saved to the pipeline, replies matched on the code</a:t>
+                      </a:r>
+                    </a:p>
+                  </a:txBody>
+                  <a:tcPr/>
+                </a:tc>
+              </a:tr>
+              <a:tr h="426339">
+                <a:tc>
+                  <a:txBody>
+                    <a:bodyPr/>
+                    <a:lstStyle/>
+                    <a:p>
+                      <a:r>
+                        <a:rPr sz="1100"/>
+                        <a:t>Read the result out of a reply and file it</a:t>
+                      </a:r>
+                    </a:p>
+                  </a:txBody>
+                  <a:tcPr/>
+                </a:tc>
+                <a:tc>
+                  <a:txBody>
+                    <a:bodyPr/>
+                    <a:lstStyle/>
+                    <a:p>
+                      <a:r>
+                        <a:rPr sz="1100"/>
+                        <a:t>Every round</a:t>
+                      </a:r>
+                    </a:p>
+                  </a:txBody>
+                  <a:tcPr/>
+                </a:tc>
+                <a:tc>
+                  <a:txBody>
+                    <a:bodyPr/>
+                    <a:lstStyle/>
+                    <a:p>
+                      <a:r>
+                        <a:rPr sz="1100"/>
+                        <a:t>Impressions and clicks parsed off the thread, tied to the optimisation that produced them</a:t>
+                      </a:r>
+                    </a:p>
+                  </a:txBody>
+                  <a:tcPr/>
+                </a:tc>
+              </a:tr>
+              <a:tr h="426339">
+                <a:tc>
+                  <a:txBody>
+                    <a:bodyPr/>
+                    <a:lstStyle/>
+                    <a:p>
+                      <a:r>
+                        <a:rPr sz="1100"/>
+                        <a:t>Check custom labels and product types per feed</a:t>
+                      </a:r>
+                    </a:p>
+                  </a:txBody>
+                  <a:tcPr/>
+                </a:tc>
+                <a:tc>
+                  <a:txBody>
+                    <a:bodyPr/>
+                    <a:lstStyle/>
+                    <a:p>
+                      <a:r>
+                        <a:rPr sz="1100"/>
+                        <a:t>62 feeds</a:t>
+                      </a:r>
+                    </a:p>
+                  </a:txBody>
+                  <a:tcPr/>
+                </a:tc>
+                <a:tc>
+                  <a:txBody>
+                    <a:bodyPr/>
+                    <a:lstStyle/>
+                    <a:p>
+                      <a:r>
+                        <a:rPr sz="1100"/>
+                        <a:t>Every feed read four times a day against a known-good baseline; drops alert with the email drafted</a:t>
+                      </a:r>
+                    </a:p>
+                  </a:txBody>
+                  <a:tcPr/>
+                </a:tc>
+              </a:tr>
+              <a:tr h="426339">
+                <a:tc>
+                  <a:txBody>
+                    <a:bodyPr/>
+                    <a:lstStyle/>
+                    <a:p>
+                      <a:r>
+                        <a:rPr sz="1100"/>
+                        <a:t>Score a market's feed and put it in a deck</a:t>
+                      </a:r>
+                    </a:p>
+                  </a:txBody>
+                  <a:tcPr/>
+                </a:tc>
+                <a:tc>
+                  <a:txBody>
+                    <a:bodyPr/>
+                    <a:lstStyle/>
+                    <a:p>
+                      <a:r>
+                        <a:rPr sz="1100"/>
+                        <a:t>Every review</a:t>
+                      </a:r>
+                    </a:p>
+                  </a:txBody>
+                  <a:tcPr/>
+                </a:tc>
+                <a:tc>
+                  <a:txBody>
+                    <a:bodyPr/>
+                    <a:lstStyle/>
+                    <a:p>
+                      <a:r>
+                        <a:rPr sz="1100"/>
+                        <a:t>Scored against Google's own spec, then exported — the numbers are never re-keyed</a:t>
+                      </a:r>
+                    </a:p>
+                  </a:txBody>
+                  <a:tcPr/>
+                </a:tc>
+              </a:tr>
+              <a:tr h="426339">
+                <a:tc>
+                  <a:txBody>
+                    <a:bodyPr/>
+                    <a:lstStyle/>
+                    <a:p>
+                      <a:r>
+                        <a:rPr sz="1100"/>
+                        <a:t>Count what arrived in the feed this month</a:t>
+                      </a:r>
+                    </a:p>
+                  </a:txBody>
+                  <a:tcPr/>
+                </a:tc>
+                <a:tc>
+                  <a:txBody>
+                    <a:bodyPr/>
+                    <a:lstStyle/>
+                    <a:p>
+                      <a:r>
+                        <a:rPr sz="1100" b="1">
+                          <a:solidFill>
+                            <a:srgbClr val="2E7D32"/>
+                          </a:solidFill>
+                        </a:rPr>
+                        <a:t>Never done</a:t>
+                      </a:r>
+                    </a:p>
+                  </a:txBody>
+                  <a:tcPr/>
+                </a:tc>
+                <a:tc>
+                  <a:txBody>
+                    <a:bodyPr/>
+                    <a:lstStyle/>
+                    <a:p>
+                      <a:r>
+                        <a:rPr sz="1100"/>
+                        <a:t>Read off each product's first-seen date — per month, quarter and year, with a run-rate</a:t>
+                      </a:r>
+                    </a:p>
+                  </a:txBody>
+                  <a:tcPr/>
+                </a:tc>
+              </a:tr>
+              <a:tr h="426339">
+                <a:tc>
+                  <a:txBody>
+                    <a:bodyPr/>
+                    <a:lstStyle/>
+                    <a:p>
+                      <a:r>
+                        <a:rPr sz="1100"/>
+                        <a:t>Check the retainer balance before saying yes</a:t>
+                      </a:r>
+                    </a:p>
+                  </a:txBody>
+                  <a:tcPr/>
+                </a:tc>
+                <a:tc>
+                  <a:txBody>
+                    <a:bodyPr/>
+                    <a:lstStyle/>
+                    <a:p>
+                      <a:r>
+                        <a:rPr sz="1100"/>
+                        <a:t>Every task</a:t>
+                      </a:r>
+                    </a:p>
+                  </a:txBody>
+                  <a:tcPr/>
+                </a:tc>
+                <a:tc>
+                  <a:txBody>
+                    <a:bodyPr/>
+                    <a:lstStyle/>
+                    <a:p>
+                      <a:r>
+                        <a:rPr sz="1100"/>
+                        <a:t>The balance sits on the page at the moment of the decision, on every screen</a:t>
+                      </a:r>
+                    </a:p>
+                  </a:txBody>
+                  <a:tcPr/>
+                </a:tc>
+              </a:tr>
+            </a:tbl>
+          </a:graphicData>
+        </a:graphic>
+      </p:graphicFrame>
     </p:spTree>
   </p:cSld>
   <p:clrMapOvr>
@@ -16556,7 +17881,7 @@
           <a:lstStyle/>
           <a:p>
             <a:r>
-              <a:t>Twenty modules, six weeks, £0 infrastructure</a:t>
+              <a:t>What happens to a fragmented week</a:t>
             </a:r>
           </a:p>
         </p:txBody>
@@ -16568,16 +17893,16 @@
             <a:spLocks noGrp="1"/>
           </p:cNvSpPr>
           <p:nvPr>
-            <p:ph type="body" idx="11"/>
-          </p:nvPr>
-        </p:nvSpPr>
-        <p:spPr/>
-        <p:txBody>
-          <a:bodyPr wrap="square"/>
-          <a:lstStyle/>
-          <a:p>
-            <a:r>
-              <a:t>Built 11 Aug – 22 Sep 2026 with Claude Code: 275 merged builds, 1,452 tripwires, SSO on every screen.</a:t>
+            <p:ph type="body" idx="13"/>
+          </p:nvPr>
+        </p:nvSpPr>
+        <p:spPr/>
+        <p:txBody>
+          <a:bodyPr wrap="square"/>
+          <a:lstStyle/>
+          <a:p>
+            <a:r>
+              <a:t>Published studies of information workers who work like this. None of these numbers are ours.</a:t>
             </a:r>
           </a:p>
         </p:txBody>
@@ -16598,7 +17923,7 @@
           <a:lstStyle/>
           <a:p>
             <a:r>
-              <a:t>6 wks</a:t>
+              <a:t>11 minutes to a switch</a:t>
             </a:r>
           </a:p>
         </p:txBody>
@@ -16619,7 +17944,12 @@
           <a:lstStyle/>
           <a:p>
             <a:r>
-              <a:t>From first commit to 20 live modules</a:t>
+              <a:t>Twenty-four information workers, shadowed for over 700 hours. They held one piece of work for 11 minutes 4 seconds before switching or being interrupted — across 11.7 pieces of work a day, 57% of them interrupted.</a:t>
+            </a:r>
+          </a:p>
+          <a:p>
+            <a:r>
+              <a:t>Mark, González &amp; Harris, CHI 2005</a:t>
             </a:r>
           </a:p>
         </p:txBody>
@@ -16640,7 +17970,7 @@
           <a:lstStyle/>
           <a:p>
             <a:r>
-              <a:t>275</a:t>
+              <a:t>25 minutes to get back</a:t>
             </a:r>
           </a:p>
         </p:txBody>
@@ -16661,7 +17991,12 @@
           <a:lstStyle/>
           <a:p>
             <a:r>
-              <a:t>Merged builds, each gated by automated checks</a:t>
+              <a:t>77% of interrupted work was picked up again the same day — on average 25 minutes 26 seconds later, and only after 2.3 other pieces of work in between. Not a pause: a detour through two other clients.</a:t>
+            </a:r>
+          </a:p>
+          <a:p>
+            <a:r>
+              <a:t>Mark, González &amp; Harris, CHI 2005</a:t>
             </a:r>
           </a:p>
         </p:txBody>
@@ -16682,7 +18017,7 @@
           <a:lstStyle/>
           <a:p>
             <a:r>
-              <a:t>£0</a:t>
+              <a:t>47 seconds on a screen</a:t>
             </a:r>
           </a:p>
         </p:txBody>
@@ -16703,7 +18038,12 @@
           <a:lstStyle/>
           <a:p>
             <a:r>
-              <a:t>Infrastructure — Cloudflare free tier + Access SSO</a:t>
+              <a:t>The same group has measured how long people hold one screen before switching away. In 2004 it was two and a half minutes. By 2012, 75 seconds. It is now 47.</a:t>
+            </a:r>
+          </a:p>
+          <a:p>
+            <a:r>
+              <a:t>Mark, UC Irvine — Attention Span, 2023</a:t>
             </a:r>
           </a:p>
         </p:txBody>
@@ -16724,7 +18064,8 @@
           <a:lstStyle/>
           <a:p>
             <a:r>
-              <a:t>No licences, no vendor, no implementation partner — one AM, Claude Code and six weeks.</a:t>
+              <a:rPr sz="1070"/>
+              <a:t>“People feared that as soon as something went out of sight, it was gone.” Carnegie Mellon’s study of tab overload — which is why eight tools is never eight tabs.</a:t>
             </a:r>
           </a:p>
         </p:txBody>
@@ -16763,7 +18104,7 @@
           <a:lstStyle/>
           <a:p>
             <a:r>
-              <a:t>Monitor, run, sell, lead</a:t>
+              <a:t>It is not lost time, it is errors</a:t>
             </a:r>
           </a:p>
         </p:txBody>
@@ -16784,7 +18125,7 @@
           <a:lstStyle/>
           <a:p>
             <a:r>
-              <a:t>Twenty modules, four jobs — each one reading the systems the team already runs.</a:t>
+              <a:t>Switching does not show up as an AM working slowly. It shows up in what they carry over and what they miss.</a:t>
             </a:r>
           </a:p>
         </p:txBody>
@@ -16805,7 +18146,8 @@
           <a:lstStyle/>
           <a:p>
             <a:r>
-              <a:t>Monitor — the feeds watch themselves</a:t>
+              <a:rPr sz="1880"/>
+              <a:t>Part of you stays behind</a:t>
             </a:r>
           </a:p>
         </p:txBody>
@@ -16826,8 +18168,14 @@
           <a:lstStyle/>
           <a:p>
             <a:r>
-              <a:rPr sz="1320"/>
-              <a:t>Label Guard, Product Type Guard, Golden Record, Product Volume, Overlays and Feed Lab scan all 62 feeds four times a day, alert on drop-offs against a known-good baseline, and draft the client email to confirm a change before anyone acts.</a:t>
+              <a:rPr sz="1500"/>
+              <a:t>Two experiments established attention residue: leave a task unfinished and part of your attention stays on it. You are on the next client; measurably, some of you is still on the last one — and that client’s work suffers.</a:t>
+            </a:r>
+          </a:p>
+          <a:p>
+            <a:r>
+              <a:rPr sz="1500"/>
+              <a:t>Leroy, Organizational Behavior and Human Decision Processes, 2009</a:t>
             </a:r>
           </a:p>
         </p:txBody>
@@ -16848,7 +18196,7 @@
           <a:lstStyle/>
           <a:p>
             <a:r>
-              <a:t>Run — the work moves in one place</a:t>
+              <a:t>Errors double at 2.8s</a:t>
             </a:r>
           </a:p>
         </p:txBody>
@@ -16869,7 +18217,12 @@
           <a:lstStyle/>
           <a:p>
             <a:r>
-              <a:t>Workflow takes every task from the plans, the inbox and call notes into one Intake, briefs ASPL with a coded ticket, moves stages from email replies automatically, and shows the retainer balance beside every decision.</a:t>
+              <a:t>Three hundred participants ran a task where each step had to follow the last. Interruptions averaging 2.8 seconds — one step long — doubled the rate of sequence errors. At 4.4 seconds they tripled. A glance is enough.</a:t>
+            </a:r>
+          </a:p>
+          <a:p>
+            <a:r>
+              <a:t>Altmann, Trafton &amp; Hambrick, JEP: General, 2014</a:t>
             </a:r>
           </a:p>
         </p:txBody>
@@ -16890,7 +18243,7 @@
           <a:lstStyle/>
           <a:p>
             <a:r>
-              <a:t>Sell — quotes and decks, live</a:t>
+              <a:t>Faster, not better</a:t>
             </a:r>
           </a:p>
         </p:txBody>
@@ -16911,8 +18264,14 @@
           <a:lstStyle/>
           <a:p>
             <a:r>
-              <a:rPr sz="1320"/>
-              <a:t>AI Quote prices work per SKU and exports the finance team's own workbook; the Deck Generator builds strategy reviews on the core template; the Keyword Calendar turns a client's marketing plan into briefs and a one-page client PDF.</a:t>
+              <a:rPr sz="1500"/>
+              <a:t>Forty-eight people did the same work with and without interruption. The interrupted group finished faster — people compensate. After twenty minutes they reported significantly higher stress, frustration, time pressure and effort.</a:t>
+            </a:r>
+          </a:p>
+          <a:p>
+            <a:r>
+              <a:rPr sz="1500"/>
+              <a:t>Mark, Gudith &amp; Klocke, CHI 2008</a:t>
             </a:r>
           </a:p>
         </p:txBody>
@@ -16924,49 +18283,6 @@
             <a:spLocks noGrp="1"/>
           </p:cNvSpPr>
           <p:nvPr>
-            <p:ph type="body" idx="7"/>
-          </p:nvPr>
-        </p:nvSpPr>
-        <p:spPr/>
-        <p:txBody>
-          <a:bodyPr wrap="square"/>
-          <a:lstStyle/>
-          <a:p>
-            <a:r>
-              <a:t>Lead — the book at a glance</a:t>
-            </a:r>
-          </a:p>
-        </p:txBody>
-      </p:sp>
-      <p:sp>
-        <p:nvSpPr>
-          <p:cNvPr id="11" name="Text Placeholder 10"/>
-          <p:cNvSpPr>
-            <a:spLocks noGrp="1"/>
-          </p:cNvSpPr>
-          <p:nvPr>
-            <p:ph type="body" idx="8"/>
-          </p:nvPr>
-        </p:nvSpPr>
-        <p:spPr/>
-        <p:txBody>
-          <a:bodyPr wrap="square"/>
-          <a:lstStyle/>
-          <a:p>
-            <a:r>
-              <a:rPr sz="1320"/>
-              <a:t>Leadership reads book health, retainer burn-down and a retention radar per account; the Task Manager module makes the hours database searchable; the Playbook tells each AM what is landing, stalling or missing on every account.</a:t>
-            </a:r>
-          </a:p>
-        </p:txBody>
-      </p:sp>
-      <p:sp>
-        <p:nvSpPr>
-          <p:cNvPr id="12" name="Text Placeholder 11"/>
-          <p:cNvSpPr>
-            <a:spLocks noGrp="1"/>
-          </p:cNvSpPr>
-          <p:nvPr>
             <p:ph type="body" idx="14"/>
           </p:nvPr>
         </p:nvSpPr>
@@ -16976,7 +18292,8 @@
           <a:lstStyle/>
           <a:p>
             <a:r>
-              <a:t>Every module reads the systems the team already runs, and writes back to them.</a:t>
+              <a:rPr sz="1220"/>
+              <a:t>An AM does not fail dramatically — they work faster and make small errors. The hours in chapter three are our own count, not this research’s.</a:t>
             </a:r>
           </a:p>
         </p:txBody>
